--- a/PPTs/Lxx-Final Review.pptx
+++ b/PPTs/Lxx-Final Review.pptx
@@ -3976,7 +3976,7 @@
               <a:rPr lang="en-US" altLang="zh-CN" sz="1200" dirty="0">
                 <a:ea typeface="宋体" charset="-122"/>
               </a:rPr>
-              <a:t>. Blocking delay is MAX length of critical sections of all lower-priority tasks (vs. SUM for PIP)</a:t>
+              <a:t>Blocking delay is MAX length of critical sections of all lower-priority tasks (vs. SUM for PIP)</a:t>
             </a:r>
           </a:p>
           <a:p>
@@ -4630,7 +4630,7 @@
             </a:pPr>
             <a:r>
               <a:rPr lang="en-GB" dirty="0"/>
-              <a:t>It will reap any terminated child arbitrarily. process (preventing it from becoming a zombie process</a:t>
+              <a:t>It will reap any terminated child arbitrarily (preventing it from becoming a zombie process).</a:t>
             </a:r>
           </a:p>
           <a:p>
@@ -5328,7 +5328,7 @@
           <a:p>
             <a:r>
               <a:rPr lang="en-GB" dirty="0"/>
-              <a:t>text</a:t>
+              <a:t/>
             </a:r>
           </a:p>
           <a:p>
@@ -5340,7 +5340,7 @@
                 <a:effectLst/>
                 <a:latin typeface="inherit"/>
               </a:rPr>
-              <a:t>semaphorerywait</a:t>
+              <a:t>sem_trywait</a:t>
             </a:r>
             <a:r>
               <a:rPr lang="en-GB" dirty="0">
@@ -5363,7 +5363,7 @@
           <a:p>
             <a:r>
               <a:rPr lang="en-GB" dirty="0"/>
-              <a:t>text</a:t>
+              <a:t/>
             </a:r>
           </a:p>
           <a:p>
@@ -5487,7 +5487,7 @@
               <a:rPr lang="en-US" altLang="ko-KR" dirty="0">
                 <a:ea typeface="굴림" panose="020B0600000101010101" pitchFamily="34" charset="-127"/>
               </a:rPr>
-              <a:t>This of this as the signal() operation</a:t>
+              <a:t>Think of this as the signal() operation</a:t>
             </a:r>
           </a:p>
           <a:p>
@@ -5512,13 +5512,13 @@
               <a:rPr lang="en-US" altLang="ko-KR" dirty="0">
                 <a:ea typeface="굴림" panose="020B0600000101010101" pitchFamily="34" charset="-127"/>
               </a:rPr>
-              <a:t>No </a:t>
+              <a:t/>
             </a:r>
             <a:r>
               <a:rPr lang="en-US" altLang="ko-KR" dirty="0" err="1">
                 <a:ea typeface="굴림" panose="020B0600000101010101" pitchFamily="34" charset="-127"/>
               </a:rPr>
-              <a:t>otjhTechnically</a:t>
+              <a:t>Technically,</a:t>
             </a:r>
             <a:r>
               <a:rPr lang="en-US" altLang="ko-KR" dirty="0">
@@ -8585,7 +8585,7 @@
                 <a:latin typeface="Gill Sans" charset="0"/>
                 <a:cs typeface="Gill Sans" charset="0"/>
               </a:rPr>
-              <a:t>Lec</a:t>
+              <a:t/>
             </a:r>
             <a:r>
               <a:rPr lang="en-US" sz="1400" b="0" dirty="0">
@@ -8595,7 +8595,7 @@
                 <a:latin typeface="Gill Sans" charset="0"/>
                 <a:cs typeface="Gill Sans" charset="0"/>
               </a:rPr>
-              <a:t> 16.</a:t>
+              <a:t/>
             </a:r>
             <a:fld id="{8B82DB86-37F9-954E-8F10-00623E1FD261}" type="slidenum">
               <a:rPr lang="en-US" sz="1400" b="0" smtClean="0">
@@ -9189,7 +9189,7 @@
             </a:br>
             <a:r>
               <a:rPr lang="en-GB" sz="3000" dirty="0"/>
-              <a:t>CSC 256: Final Review</a:t>
+              <a:t>CSC 112: Final Review</a:t>
             </a:r>
             <a:endParaRPr lang="en-US" sz="3000" dirty="0"/>
           </a:p>
@@ -9753,7 +9753,7 @@
             </a:pPr>
             <a:r>
               <a:rPr lang="en-US" dirty="0"/>
-              <a:t> Repeat steps 1 and 2 until either all processes are marked as completed (initial state is safe), or no process is left whose resource needs can be met (there is a deadlock, so initial state is unsafe).</a:t>
+              <a:t> Repeat steps 2 and 3 until either all processes are marked as completed (initial state is safe), or no process is left whose resource needs can be met (there is a deadlock, so initial state is unsafe).</a:t>
             </a:r>
           </a:p>
           <a:p>
@@ -9861,7 +9861,7 @@
               <a:rPr lang="en-US" altLang="zh-CN" sz="2400" dirty="0">
                 <a:ea typeface="宋体" charset="-122"/>
               </a:rPr>
-              <a:t>Total resources: [8, 5, 9, 8]</a:t>
+              <a:t>Total resources: [8, 5, 9, 8] (left), [8, 5, 9, 7] (right)</a:t>
             </a:r>
           </a:p>
         </p:txBody>
@@ -17641,7 +17641,7 @@
                         <a:ea typeface="Cambria Math" panose="02040503050406030204" pitchFamily="18" charset="0"/>
                         <a:sym typeface="Symbol" panose="05050102010706020507" pitchFamily="18" charset="2"/>
                       </a:rPr>
-                      <m:t>13.0</m:t>
+                      <m:t>12.9</m:t>
                     </m:r>
                   </m:oMath>
                 </a14:m>
@@ -17880,7 +17880,7 @@
                         <a:ea typeface="Cambria Math" panose="02040503050406030204" pitchFamily="18" charset="0"/>
                         <a:sym typeface="Symbol" panose="05050102010706020507" pitchFamily="18" charset="2"/>
                       </a:rPr>
-                      <m:t>13.0</m:t>
+                      <m:t>12.9</m:t>
                     </m:r>
                     <m:r>
                       <m:rPr>
@@ -22056,7 +22056,7 @@
           <a:p>
             <a:r>
               <a:rPr lang="en-US" altLang="zh-CN" dirty="0"/>
-              <a:t>Fun analogy: imaging you are a process after fork, but you don’t know if you are the child or parent process, as if you are running inside of a Matrix. But you can identify which process you are running, by looking up to the sky and see the ret value from fork() </a:t>
+              <a:t>Fun analogy: imagine you are a process after fork, but you don’t know if you are the child or parent process, as if you are running inside of a Matrix. But you can identify which process you are running, by looking up to the sky and see the ret value from fork() </a:t>
             </a:r>
           </a:p>
           <a:p>
@@ -22180,7 +22180,7 @@
             </a:r>
             <a:r>
               <a:rPr lang="en-US" altLang="zh-CN" dirty="0"/>
-              <a:t>parents</a:t>
+              <a:t>parent</a:t>
             </a:r>
             <a:r>
               <a:rPr lang="zh-CN" altLang="en-US" dirty="0"/>

--- a/PPTs/Lxx-Final Review.pptx
+++ b/PPTs/Lxx-Final Review.pptx
@@ -2191,7 +2191,7 @@
             </a:r>
             <a:r>
               <a:rPr lang="en-US" altLang="ko-KR" baseline="-25000" dirty="0"/>
-              <a:t>n-1</a:t>
+              <a:t>n</a:t>
             </a:r>
             <a:r>
               <a:rPr lang="en-US" altLang="ko-KR" dirty="0"/>
@@ -2199,7 +2199,7 @@
             </a:r>
             <a:r>
               <a:rPr lang="en-US" altLang="ko-KR" baseline="-25000" dirty="0"/>
-              <a:t>n-2</a:t>
+              <a:t>n-1</a:t>
             </a:r>
             <a:r>
               <a:rPr lang="en-US" altLang="ko-KR" dirty="0"/>
@@ -2207,7 +2207,7 @@
             </a:r>
             <a:r>
               <a:rPr lang="en-US" altLang="ko-KR" baseline="-25000" dirty="0"/>
-              <a:t>n-3</a:t>
+              <a:t>n-2</a:t>
             </a:r>
             <a:r>
               <a:rPr lang="en-US" altLang="ko-KR" dirty="0"/>
@@ -2223,7 +2223,7 @@
               <a:rPr lang="en-US" altLang="ko-KR" baseline="-25000" dirty="0">
                 <a:sym typeface="Symbol" panose="05050102010706020507" pitchFamily="18" charset="2"/>
               </a:rPr>
-              <a:t>n</a:t>
+              <a:t>n+1</a:t>
             </a:r>
             <a:r>
               <a:rPr lang="en-US" altLang="ko-KR" dirty="0">
@@ -2237,7 +2237,7 @@
             </a:r>
             <a:r>
               <a:rPr lang="en-US" altLang="ko-KR" baseline="-25000" dirty="0"/>
-              <a:t>n-1</a:t>
+              <a:t>n</a:t>
             </a:r>
             <a:r>
               <a:rPr lang="en-US" altLang="ko-KR" dirty="0"/>
@@ -2245,7 +2245,7 @@
             </a:r>
             <a:r>
               <a:rPr lang="en-US" altLang="ko-KR" baseline="-25000" dirty="0"/>
-              <a:t>n-2</a:t>
+              <a:t>n-1</a:t>
             </a:r>
             <a:r>
               <a:rPr lang="en-US" altLang="ko-KR" dirty="0"/>
@@ -2253,7 +2253,7 @@
             </a:r>
             <a:r>
               <a:rPr lang="en-US" altLang="ko-KR" baseline="-25000" dirty="0"/>
-              <a:t>n-3</a:t>
+              <a:t>n-2</a:t>
             </a:r>
             <a:r>
               <a:rPr lang="en-US" altLang="ko-KR" dirty="0"/>
@@ -2308,7 +2308,7 @@
             </a:r>
             <a:r>
               <a:rPr lang="en-US" altLang="ko-KR" baseline="-25000" dirty="0"/>
-              <a:t>n-1</a:t>
+              <a:t>n</a:t>
             </a:r>
             <a:r>
               <a:rPr lang="en-US" altLang="ko-KR" dirty="0"/>
@@ -2316,7 +2316,7 @@
             </a:r>
             <a:r>
               <a:rPr lang="en-US" altLang="ko-KR" baseline="-25000" dirty="0"/>
-              <a:t>n-2</a:t>
+              <a:t>n-1</a:t>
             </a:r>
             <a:r>
               <a:rPr lang="en-US" altLang="ko-KR" dirty="0"/>
@@ -2324,7 +2324,7 @@
             </a:r>
             <a:r>
               <a:rPr lang="en-US" altLang="ko-KR" baseline="-25000" dirty="0"/>
-              <a:t>n-3</a:t>
+              <a:t>n-2</a:t>
             </a:r>
             <a:r>
               <a:rPr lang="en-US" altLang="ko-KR" dirty="0"/>
@@ -2340,7 +2340,7 @@
               <a:rPr lang="en-US" altLang="ko-KR" baseline="-25000" dirty="0">
                 <a:sym typeface="Symbol" panose="05050102010706020507" pitchFamily="18" charset="2"/>
               </a:rPr>
-              <a:t>n</a:t>
+              <a:t>n+1</a:t>
             </a:r>
             <a:r>
               <a:rPr lang="en-US" altLang="ko-KR" dirty="0">
@@ -2511,6 +2511,24 @@
                 </a:solidFill>
                 <a:sym typeface="Symbol" panose="05050102010706020507" pitchFamily="18" charset="2"/>
               </a:rPr>
+              <a:t>n+1</a:t>
+            </a:r>
+            <a:r>
+              <a:rPr lang="en-US" altLang="ko-KR" sz="1200" dirty="0">
+                <a:solidFill>
+                  <a:srgbClr val="FF0000"/>
+                </a:solidFill>
+                <a:sym typeface="Symbol" panose="05050102010706020507" pitchFamily="18" charset="2"/>
+              </a:rPr>
+              <a:t> = t</a:t>
+            </a:r>
+            <a:r>
+              <a:rPr lang="en-US" altLang="ko-KR" sz="1200" baseline="-25000" dirty="0">
+                <a:solidFill>
+                  <a:srgbClr val="FF0000"/>
+                </a:solidFill>
+                <a:sym typeface="Symbol" panose="05050102010706020507" pitchFamily="18" charset="2"/>
+              </a:rPr>
               <a:t>n</a:t>
             </a:r>
             <a:r>
@@ -2520,7 +2538,7 @@
                 </a:solidFill>
                 <a:sym typeface="Symbol" panose="05050102010706020507" pitchFamily="18" charset="2"/>
               </a:rPr>
-              <a:t> = t</a:t>
+              <a:t>+(1-)</a:t>
             </a:r>
             <a:r>
               <a:rPr lang="en-US" altLang="ko-KR" sz="1200" baseline="-25000" dirty="0">
@@ -2529,25 +2547,7 @@
                 </a:solidFill>
                 <a:sym typeface="Symbol" panose="05050102010706020507" pitchFamily="18" charset="2"/>
               </a:rPr>
-              <a:t>n-1</a:t>
-            </a:r>
-            <a:r>
-              <a:rPr lang="en-US" altLang="ko-KR" sz="1200" dirty="0">
-                <a:solidFill>
-                  <a:srgbClr val="FF0000"/>
-                </a:solidFill>
-                <a:sym typeface="Symbol" panose="05050102010706020507" pitchFamily="18" charset="2"/>
-              </a:rPr>
-              <a:t>+(1-)</a:t>
-            </a:r>
-            <a:r>
-              <a:rPr lang="en-US" altLang="ko-KR" sz="1200" baseline="-25000" dirty="0">
-                <a:solidFill>
-                  <a:srgbClr val="FF0000"/>
-                </a:solidFill>
-                <a:sym typeface="Symbol" panose="05050102010706020507" pitchFamily="18" charset="2"/>
-              </a:rPr>
-              <a:t>n-1</a:t>
+              <a:t>n</a:t>
             </a:r>
             <a:br>
               <a:rPr lang="en-US" altLang="ko-KR" sz="1200" dirty="0">
@@ -2587,7 +2587,7 @@
                 </a:solidFill>
                 <a:sym typeface="Symbol" panose="05050102010706020507" pitchFamily="18" charset="2"/>
               </a:rPr>
-              <a:t>n</a:t>
+              <a:t>n+1</a:t>
             </a:r>
             <a:r>
               <a:rPr lang="en-US" altLang="ko-KR" sz="1200" dirty="0">
@@ -2633,7 +2633,7 @@
                 </a:solidFill>
                 <a:sym typeface="Symbol" panose="05050102010706020507" pitchFamily="18" charset="2"/>
               </a:rPr>
-              <a:t>n</a:t>
+              <a:t>n+1</a:t>
             </a:r>
             <a:r>
               <a:rPr lang="en-US" altLang="ko-KR" sz="1200" dirty="0">
@@ -10055,104 +10055,55 @@
                     <m:sSub>
                       <m:sSubPr>
                         <m:ctrlPr>
-                          <a:rPr lang="ar-AE" i="1">
+                          <a:rPr lang="en-US" i="1">
                             <a:latin typeface="Cambria Math" panose="02040503050406030204" pitchFamily="18" charset="0"/>
                           </a:rPr>
                         </m:ctrlPr>
                       </m:sSubPr>
                       <m:e>
-                        <m:sSub>
-                          <m:sSubPr>
-                            <m:ctrlPr>
-                              <a:rPr lang="ar-AE" i="1">
-                                <a:latin typeface="Cambria Math" panose="02040503050406030204" pitchFamily="18" charset="0"/>
-                              </a:rPr>
-                            </m:ctrlPr>
-                          </m:sSubPr>
-                          <m:e>
-                            <m:r>
-                              <a:rPr lang="en-US" i="1">
-                                <a:latin typeface="Cambria Math" panose="02040503050406030204" pitchFamily="18" charset="0"/>
-                              </a:rPr>
-                              <m:t>𝑡</m:t>
-                            </m:r>
-                          </m:e>
-                          <m:sub>
-                            <m:r>
-                              <a:rPr lang="ar-AE" i="1">
-                                <a:latin typeface="Cambria Math" panose="02040503050406030204" pitchFamily="18" charset="0"/>
-                              </a:rPr>
-                              <m:t>𝑛</m:t>
-                            </m:r>
-                          </m:sub>
-                        </m:sSub>
                         <m:r>
-                          <a:rPr lang="en-US" b="0" i="1" smtClean="0">
+                          <a:rPr lang="en-US" i="1">
                             <a:latin typeface="Cambria Math" panose="02040503050406030204" pitchFamily="18" charset="0"/>
                           </a:rPr>
-                          <m:t>=</m:t>
+                          <m:t>𝜏</m:t>
+                        </m:r>
+                      </m:e>
+                      <m:sub>
+                        <m:r>
+                          <a:rPr lang="en-US" i="1">
+                            <a:latin typeface="Cambria Math" panose="02040503050406030204" pitchFamily="18" charset="0"/>
+                          </a:rPr>
+                          <m:t>𝑛</m:t>
                         </m:r>
                         <m:r>
                           <a:rPr lang="en-US" i="1">
                             <a:latin typeface="Cambria Math" panose="02040503050406030204" pitchFamily="18" charset="0"/>
                           </a:rPr>
-                          <m:t>𝛼</m:t>
+                          <m:t>+1</m:t>
                         </m:r>
-                        <m:sSub>
-                          <m:sSubPr>
-                            <m:ctrlPr>
-                              <a:rPr lang="ar-AE" i="1">
-                                <a:latin typeface="Cambria Math" panose="02040503050406030204" pitchFamily="18" charset="0"/>
-                              </a:rPr>
-                            </m:ctrlPr>
-                          </m:sSubPr>
-                          <m:e>
-                            <m:r>
-                              <a:rPr lang="ar-AE" i="1">
-                                <a:latin typeface="Cambria Math" panose="02040503050406030204" pitchFamily="18" charset="0"/>
-                              </a:rPr>
-                              <m:t>𝑥</m:t>
-                            </m:r>
-                          </m:e>
-                          <m:sub>
-                            <m:r>
-                              <a:rPr lang="ar-AE" i="1">
-                                <a:latin typeface="Cambria Math" panose="02040503050406030204" pitchFamily="18" charset="0"/>
-                              </a:rPr>
-                              <m:t>𝑛</m:t>
-                            </m:r>
-                          </m:sub>
-                        </m:sSub>
-                        <m:r>
-                          <a:rPr lang="en-US" b="0" i="1" smtClean="0">
-                            <a:latin typeface="Cambria Math" panose="02040503050406030204" pitchFamily="18" charset="0"/>
-                          </a:rPr>
-                          <m:t>+(</m:t>
-                        </m:r>
-                        <m:r>
-                          <a:rPr lang="en-US" b="0" i="1" smtClean="0">
-                            <a:latin typeface="Cambria Math" panose="02040503050406030204" pitchFamily="18" charset="0"/>
-                          </a:rPr>
-                          <m:t>1</m:t>
-                        </m:r>
-                        <m:r>
-                          <a:rPr lang="en-US" b="0" i="1" smtClean="0">
-                            <a:latin typeface="Cambria Math" panose="02040503050406030204" pitchFamily="18" charset="0"/>
-                          </a:rPr>
-                          <m:t>−</m:t>
-                        </m:r>
-                        <m:r>
+                      </m:sub>
+                    </m:sSub>
+                    <m:r>
+                      <a:rPr lang="en-US" i="1">
+                        <a:latin typeface="Cambria Math" panose="02040503050406030204" pitchFamily="18" charset="0"/>
+                      </a:rPr>
+                      <m:t>=</m:t>
+                    </m:r>
+                    <m:r>
+                      <a:rPr lang="en-US" i="1">
+                        <a:latin typeface="Cambria Math" panose="02040503050406030204" pitchFamily="18" charset="0"/>
+                      </a:rPr>
+                      <m:t>𝛼</m:t>
+                    </m:r>
+                    <m:sSub>
+                      <m:sSubPr>
+                        <m:ctrlPr>
                           <a:rPr lang="en-US" i="1">
                             <a:latin typeface="Cambria Math" panose="02040503050406030204" pitchFamily="18" charset="0"/>
                           </a:rPr>
-                          <m:t>𝛼</m:t>
-                        </m:r>
-                        <m:r>
-                          <a:rPr lang="en-US" b="0" i="1" smtClean="0">
-                            <a:latin typeface="Cambria Math" panose="02040503050406030204" pitchFamily="18" charset="0"/>
-                          </a:rPr>
-                          <m:t>)</m:t>
-                        </m:r>
+                        </m:ctrlPr>
+                      </m:sSubPr>
+                      <m:e>
                         <m:r>
                           <a:rPr lang="en-US" i="1">
                             <a:latin typeface="Cambria Math" panose="02040503050406030204" pitchFamily="18" charset="0"/>
@@ -10162,22 +10113,53 @@
                       </m:e>
                       <m:sub>
                         <m:r>
-                          <a:rPr lang="ar-AE" i="1">
+                          <a:rPr lang="en-US" i="1">
                             <a:latin typeface="Cambria Math" panose="02040503050406030204" pitchFamily="18" charset="0"/>
                           </a:rPr>
                           <m:t>𝑛</m:t>
                         </m:r>
-                        <m:r>
-                          <a:rPr lang="ar-AE">
+                      </m:sub>
+                    </m:sSub>
+                    <m:r>
+                      <a:rPr lang="en-US" i="1">
+                        <a:latin typeface="Cambria Math" panose="02040503050406030204" pitchFamily="18" charset="0"/>
+                      </a:rPr>
+                      <m:t>+(1−</m:t>
+                    </m:r>
+                    <m:r>
+                      <a:rPr lang="en-US" i="1">
+                        <a:latin typeface="Cambria Math" panose="02040503050406030204" pitchFamily="18" charset="0"/>
+                      </a:rPr>
+                      <m:t>𝛼</m:t>
+                    </m:r>
+                    <m:r>
+                      <a:rPr lang="en-US" i="1">
+                        <a:latin typeface="Cambria Math" panose="02040503050406030204" pitchFamily="18" charset="0"/>
+                      </a:rPr>
+                      <m:t>)</m:t>
+                    </m:r>
+                    <m:sSub>
+                      <m:sSubPr>
+                        <m:ctrlPr>
+                          <a:rPr lang="en-US" i="1">
                             <a:latin typeface="Cambria Math" panose="02040503050406030204" pitchFamily="18" charset="0"/>
                           </a:rPr>
-                          <m:t>−</m:t>
-                        </m:r>
+                        </m:ctrlPr>
+                      </m:sSubPr>
+                      <m:e>
                         <m:r>
-                          <a:rPr lang="ar-AE">
+                          <a:rPr lang="en-US" i="1">
                             <a:latin typeface="Cambria Math" panose="02040503050406030204" pitchFamily="18" charset="0"/>
                           </a:rPr>
-                          <m:t>1</m:t>
+                          <m:t>𝜏</m:t>
+                        </m:r>
+                      </m:e>
+                      <m:sub>
+                        <m:r>
+                          <a:rPr lang="en-US" i="1">
+                            <a:latin typeface="Cambria Math" panose="02040503050406030204" pitchFamily="18" charset="0"/>
+                          </a:rPr>
+                          <m:t>𝑛</m:t>
                         </m:r>
                       </m:sub>
                     </m:sSub>
@@ -10195,22 +10177,22 @@
                     <m:sSub>
                       <m:sSubPr>
                         <m:ctrlPr>
-                          <a:rPr lang="ar-AE" i="1">
+                          <a:rPr lang="en-US" i="1">
                             <a:latin typeface="Cambria Math" panose="02040503050406030204" pitchFamily="18" charset="0"/>
                           </a:rPr>
                         </m:ctrlPr>
                       </m:sSubPr>
                       <m:e>
                         <m:r>
-                          <a:rPr lang="ar-AE" i="1">
+                          <a:rPr lang="en-US" i="1">
                             <a:latin typeface="Cambria Math" panose="02040503050406030204" pitchFamily="18" charset="0"/>
                           </a:rPr>
-                          <m:t>𝑥</m:t>
+                          <m:t>𝑡</m:t>
                         </m:r>
                       </m:e>
                       <m:sub>
                         <m:r>
-                          <a:rPr lang="ar-AE" i="1">
+                          <a:rPr lang="en-US" i="1">
                             <a:latin typeface="Cambria Math" panose="02040503050406030204" pitchFamily="18" charset="0"/>
                           </a:rPr>
                           <m:t>𝑛</m:t>
@@ -10235,37 +10217,25 @@
                     <m:sSub>
                       <m:sSubPr>
                         <m:ctrlPr>
-                          <a:rPr lang="ar-AE" i="1">
+                          <a:rPr lang="en-US" i="1">
                             <a:latin typeface="Cambria Math" panose="02040503050406030204" pitchFamily="18" charset="0"/>
                           </a:rPr>
                         </m:ctrlPr>
                       </m:sSubPr>
                       <m:e>
                         <m:r>
-                          <a:rPr lang="en-US" b="0" i="1" smtClean="0">
+                          <a:rPr lang="en-US" i="1">
                             <a:latin typeface="Cambria Math" panose="02040503050406030204" pitchFamily="18" charset="0"/>
                           </a:rPr>
-                          <m:t>𝑡</m:t>
+                          <m:t>𝜏</m:t>
                         </m:r>
                       </m:e>
                       <m:sub>
                         <m:r>
-                          <a:rPr lang="ar-AE" i="1">
+                          <a:rPr lang="en-US" i="1">
                             <a:latin typeface="Cambria Math" panose="02040503050406030204" pitchFamily="18" charset="0"/>
                           </a:rPr>
                           <m:t>𝑛</m:t>
-                        </m:r>
-                        <m:r>
-                          <a:rPr lang="ar-AE">
-                            <a:latin typeface="Cambria Math" panose="02040503050406030204" pitchFamily="18" charset="0"/>
-                          </a:rPr>
-                          <m:t>−</m:t>
-                        </m:r>
-                        <m:r>
-                          <a:rPr lang="ar-AE">
-                            <a:latin typeface="Cambria Math" panose="02040503050406030204" pitchFamily="18" charset="0"/>
-                          </a:rPr>
-                          <m:t>1</m:t>
                         </m:r>
                       </m:sub>
                     </m:sSub>
@@ -10346,7 +10316,7 @@
                   <a:rPr lang="en-US" altLang="ko-KR" baseline="-25000" dirty="0">
                     <a:sym typeface="Symbol" panose="05050102010706020507" pitchFamily="18" charset="2"/>
                   </a:rPr>
-                  <a:t>n</a:t>
+                  <a:t>n+1</a:t>
                 </a:r>
                 <a:r>
                   <a:rPr lang="en-GB" dirty="0"/>
@@ -10389,7 +10359,44 @@
                     <m:sSub>
                       <m:sSubPr>
                         <m:ctrlPr>
-                          <a:rPr lang="ar-AE" i="1">
+                          <a:rPr lang="en-US" i="1">
+                            <a:latin typeface="Cambria Math" panose="02040503050406030204" pitchFamily="18" charset="0"/>
+                          </a:rPr>
+                        </m:ctrlPr>
+                      </m:sSubPr>
+                      <m:e>
+                        <m:r>
+                          <a:rPr lang="en-US" i="1">
+                            <a:latin typeface="Cambria Math" panose="02040503050406030204" pitchFamily="18" charset="0"/>
+                          </a:rPr>
+                          <m:t>𝜏</m:t>
+                        </m:r>
+                      </m:e>
+                      <m:sub>
+                        <m:r>
+                          <a:rPr lang="en-US" i="1">
+                            <a:latin typeface="Cambria Math" panose="02040503050406030204" pitchFamily="18" charset="0"/>
+                          </a:rPr>
+                          <m:t>𝑛</m:t>
+                        </m:r>
+                        <m:r>
+                          <a:rPr lang="en-US" i="1">
+                            <a:latin typeface="Cambria Math" panose="02040503050406030204" pitchFamily="18" charset="0"/>
+                          </a:rPr>
+                          <m:t>+1</m:t>
+                        </m:r>
+                      </m:sub>
+                    </m:sSub>
+                    <m:r>
+                      <a:rPr lang="en-US" i="1">
+                        <a:latin typeface="Cambria Math" panose="02040503050406030204" pitchFamily="18" charset="0"/>
+                      </a:rPr>
+                      <m:t>=</m:t>
+                    </m:r>
+                    <m:sSub>
+                      <m:sSubPr>
+                        <m:ctrlPr>
+                          <a:rPr lang="en-US" i="1">
                             <a:latin typeface="Cambria Math" panose="02040503050406030204" pitchFamily="18" charset="0"/>
                           </a:rPr>
                         </m:ctrlPr>
@@ -10404,38 +10411,7 @@
                       </m:e>
                       <m:sub>
                         <m:r>
-                          <a:rPr lang="ar-AE" i="1">
-                            <a:latin typeface="Cambria Math" panose="02040503050406030204" pitchFamily="18" charset="0"/>
-                          </a:rPr>
-                          <m:t>𝑛</m:t>
-                        </m:r>
-                      </m:sub>
-                    </m:sSub>
-                    <m:r>
-                      <a:rPr lang="en-US" b="0" i="1" smtClean="0">
-                        <a:latin typeface="Cambria Math" panose="02040503050406030204" pitchFamily="18" charset="0"/>
-                      </a:rPr>
-                      <m:t>=</m:t>
-                    </m:r>
-                    <m:sSub>
-                      <m:sSubPr>
-                        <m:ctrlPr>
-                          <a:rPr lang="en-US" b="0" i="1" smtClean="0">
-                            <a:latin typeface="Cambria Math" panose="02040503050406030204" pitchFamily="18" charset="0"/>
-                          </a:rPr>
-                        </m:ctrlPr>
-                      </m:sSubPr>
-                      <m:e>
-                        <m:r>
-                          <a:rPr lang="en-US" b="0" i="1" smtClean="0">
-                            <a:latin typeface="Cambria Math" panose="02040503050406030204" pitchFamily="18" charset="0"/>
-                          </a:rPr>
-                          <m:t>𝑥</m:t>
-                        </m:r>
-                      </m:e>
-                      <m:sub>
-                        <m:r>
-                          <a:rPr lang="en-US" b="0" i="1" smtClean="0">
+                          <a:rPr lang="en-US" i="1">
                             <a:latin typeface="Cambria Math" panose="02040503050406030204" pitchFamily="18" charset="0"/>
                           </a:rPr>
                           <m:t>𝑛</m:t>
@@ -10485,7 +10461,7 @@
                   <a:rPr lang="en-US" altLang="ko-KR" baseline="-25000" dirty="0">
                     <a:sym typeface="Symbol" panose="05050102010706020507" pitchFamily="18" charset="2"/>
                   </a:rPr>
-                  <a:t>n</a:t>
+                  <a:t>n+1</a:t>
                 </a:r>
                 <a:r>
                   <a:rPr lang="en-GB" dirty="0"/>
@@ -10528,7 +10504,7 @@
                     <m:sSub>
                       <m:sSubPr>
                         <m:ctrlPr>
-                          <a:rPr lang="ar-AE" i="1">
+                          <a:rPr lang="en-US" i="1">
                             <a:latin typeface="Cambria Math" panose="02040503050406030204" pitchFamily="18" charset="0"/>
                           </a:rPr>
                         </m:ctrlPr>
@@ -10538,20 +10514,26 @@
                           <a:rPr lang="en-US" i="1">
                             <a:latin typeface="Cambria Math" panose="02040503050406030204" pitchFamily="18" charset="0"/>
                           </a:rPr>
-                          <m:t>𝑡</m:t>
+                          <m:t>𝜏</m:t>
                         </m:r>
                       </m:e>
                       <m:sub>
                         <m:r>
-                          <a:rPr lang="ar-AE" i="1">
+                          <a:rPr lang="en-US" i="1">
                             <a:latin typeface="Cambria Math" panose="02040503050406030204" pitchFamily="18" charset="0"/>
                           </a:rPr>
                           <m:t>𝑛</m:t>
                         </m:r>
+                        <m:r>
+                          <a:rPr lang="en-US" i="1">
+                            <a:latin typeface="Cambria Math" panose="02040503050406030204" pitchFamily="18" charset="0"/>
+                          </a:rPr>
+                          <m:t>+1</m:t>
+                        </m:r>
                       </m:sub>
                     </m:sSub>
                     <m:r>
-                      <a:rPr lang="en-US" b="0" i="1" smtClean="0">
+                      <a:rPr lang="en-US" i="1">
                         <a:latin typeface="Cambria Math" panose="02040503050406030204" pitchFamily="18" charset="0"/>
                       </a:rPr>
                       <m:t>=</m:t>
@@ -10559,22 +10541,22 @@
                     <m:sSub>
                       <m:sSubPr>
                         <m:ctrlPr>
-                          <a:rPr lang="en-US" b="0" i="1" smtClean="0">
+                          <a:rPr lang="en-US" i="1">
                             <a:latin typeface="Cambria Math" panose="02040503050406030204" pitchFamily="18" charset="0"/>
                           </a:rPr>
                         </m:ctrlPr>
                       </m:sSubPr>
                       <m:e>
                         <m:r>
-                          <a:rPr lang="en-US" b="0" i="1" smtClean="0">
+                          <a:rPr lang="en-US" i="1">
                             <a:latin typeface="Cambria Math" panose="02040503050406030204" pitchFamily="18" charset="0"/>
                           </a:rPr>
-                          <m:t>𝑡</m:t>
+                          <m:t>𝜏</m:t>
                         </m:r>
                       </m:e>
                       <m:sub>
                         <m:r>
-                          <a:rPr lang="en-US" b="0" i="1" smtClean="0">
+                          <a:rPr lang="en-US" i="1">
                             <a:latin typeface="Cambria Math" panose="02040503050406030204" pitchFamily="18" charset="0"/>
                           </a:rPr>
                           <m:t>0</m:t>
@@ -10622,7 +10604,7 @@
                     <m:sSub>
                       <m:sSubPr>
                         <m:ctrlPr>
-                          <a:rPr lang="ar-AE" i="1">
+                          <a:rPr lang="en-US" i="1">
                             <a:latin typeface="Cambria Math" panose="02040503050406030204" pitchFamily="18" charset="0"/>
                           </a:rPr>
                         </m:ctrlPr>
@@ -10632,12 +10614,12 @@
                           <a:rPr lang="en-US" i="1">
                             <a:latin typeface="Cambria Math" panose="02040503050406030204" pitchFamily="18" charset="0"/>
                           </a:rPr>
-                          <m:t>𝑡</m:t>
+                          <m:t>𝜏</m:t>
                         </m:r>
                       </m:e>
                       <m:sub>
                         <m:r>
-                          <a:rPr lang="ar-AE" i="1">
+                          <a:rPr lang="en-US" i="1">
                             <a:latin typeface="Cambria Math" panose="02040503050406030204" pitchFamily="18" charset="0"/>
                           </a:rPr>
                           <m:t>𝑛</m:t>
@@ -11182,104 +11164,55 @@
                     <m:sSub>
                       <m:sSubPr>
                         <m:ctrlPr>
-                          <a:rPr lang="ar-AE" i="1">
+                          <a:rPr lang="en-US" i="1">
                             <a:latin typeface="Cambria Math" panose="02040503050406030204" pitchFamily="18" charset="0"/>
                           </a:rPr>
                         </m:ctrlPr>
                       </m:sSubPr>
                       <m:e>
-                        <m:sSub>
-                          <m:sSubPr>
-                            <m:ctrlPr>
-                              <a:rPr lang="ar-AE" i="1">
-                                <a:latin typeface="Cambria Math" panose="02040503050406030204" pitchFamily="18" charset="0"/>
-                              </a:rPr>
-                            </m:ctrlPr>
-                          </m:sSubPr>
-                          <m:e>
-                            <m:r>
-                              <a:rPr lang="en-US" i="1">
-                                <a:latin typeface="Cambria Math" panose="02040503050406030204" pitchFamily="18" charset="0"/>
-                              </a:rPr>
-                              <m:t>𝑡</m:t>
-                            </m:r>
-                          </m:e>
-                          <m:sub>
-                            <m:r>
-                              <a:rPr lang="ar-AE" i="1">
-                                <a:latin typeface="Cambria Math" panose="02040503050406030204" pitchFamily="18" charset="0"/>
-                              </a:rPr>
-                              <m:t>𝑛</m:t>
-                            </m:r>
-                          </m:sub>
-                        </m:sSub>
                         <m:r>
                           <a:rPr lang="en-US" i="1">
                             <a:latin typeface="Cambria Math" panose="02040503050406030204" pitchFamily="18" charset="0"/>
                           </a:rPr>
-                          <m:t>=</m:t>
+                          <m:t>𝜏</m:t>
+                        </m:r>
+                      </m:e>
+                      <m:sub>
+                        <m:r>
+                          <a:rPr lang="en-US" i="1">
+                            <a:latin typeface="Cambria Math" panose="02040503050406030204" pitchFamily="18" charset="0"/>
+                          </a:rPr>
+                          <m:t>𝑛</m:t>
                         </m:r>
                         <m:r>
                           <a:rPr lang="en-US" i="1">
                             <a:latin typeface="Cambria Math" panose="02040503050406030204" pitchFamily="18" charset="0"/>
                           </a:rPr>
-                          <m:t>𝛼</m:t>
+                          <m:t>+1</m:t>
                         </m:r>
-                        <m:sSub>
-                          <m:sSubPr>
-                            <m:ctrlPr>
-                              <a:rPr lang="ar-AE" i="1">
-                                <a:latin typeface="Cambria Math" panose="02040503050406030204" pitchFamily="18" charset="0"/>
-                              </a:rPr>
-                            </m:ctrlPr>
-                          </m:sSubPr>
-                          <m:e>
-                            <m:r>
-                              <a:rPr lang="ar-AE" i="1">
-                                <a:latin typeface="Cambria Math" panose="02040503050406030204" pitchFamily="18" charset="0"/>
-                              </a:rPr>
-                              <m:t>𝑥</m:t>
-                            </m:r>
-                          </m:e>
-                          <m:sub>
-                            <m:r>
-                              <a:rPr lang="ar-AE" i="1">
-                                <a:latin typeface="Cambria Math" panose="02040503050406030204" pitchFamily="18" charset="0"/>
-                              </a:rPr>
-                              <m:t>𝑛</m:t>
-                            </m:r>
-                          </m:sub>
-                        </m:sSub>
-                        <m:r>
+                      </m:sub>
+                    </m:sSub>
+                    <m:r>
+                      <a:rPr lang="en-US" i="1">
+                        <a:latin typeface="Cambria Math" panose="02040503050406030204" pitchFamily="18" charset="0"/>
+                      </a:rPr>
+                      <m:t>=</m:t>
+                    </m:r>
+                    <m:r>
+                      <a:rPr lang="en-US" i="1">
+                        <a:latin typeface="Cambria Math" panose="02040503050406030204" pitchFamily="18" charset="0"/>
+                      </a:rPr>
+                      <m:t>𝛼</m:t>
+                    </m:r>
+                    <m:sSub>
+                      <m:sSubPr>
+                        <m:ctrlPr>
                           <a:rPr lang="en-US" i="1">
                             <a:latin typeface="Cambria Math" panose="02040503050406030204" pitchFamily="18" charset="0"/>
                           </a:rPr>
-                          <m:t>+(</m:t>
-                        </m:r>
-                        <m:r>
-                          <a:rPr lang="en-US" i="1">
-                            <a:latin typeface="Cambria Math" panose="02040503050406030204" pitchFamily="18" charset="0"/>
-                          </a:rPr>
-                          <m:t>1</m:t>
-                        </m:r>
-                        <m:r>
-                          <a:rPr lang="en-US" i="1">
-                            <a:latin typeface="Cambria Math" panose="02040503050406030204" pitchFamily="18" charset="0"/>
-                          </a:rPr>
-                          <m:t>−</m:t>
-                        </m:r>
-                        <m:r>
-                          <a:rPr lang="en-US" i="1">
-                            <a:latin typeface="Cambria Math" panose="02040503050406030204" pitchFamily="18" charset="0"/>
-                          </a:rPr>
-                          <m:t>𝛼</m:t>
-                        </m:r>
-                        <m:r>
-                          <a:rPr lang="en-US" i="1">
-                            <a:latin typeface="Cambria Math" panose="02040503050406030204" pitchFamily="18" charset="0"/>
-                          </a:rPr>
-                          <m:t>)</m:t>
-                        </m:r>
+                        </m:ctrlPr>
+                      </m:sSubPr>
+                      <m:e>
                         <m:r>
                           <a:rPr lang="en-US" i="1">
                             <a:latin typeface="Cambria Math" panose="02040503050406030204" pitchFamily="18" charset="0"/>
@@ -11289,22 +11222,53 @@
                       </m:e>
                       <m:sub>
                         <m:r>
-                          <a:rPr lang="ar-AE" i="1">
+                          <a:rPr lang="en-US" i="1">
                             <a:latin typeface="Cambria Math" panose="02040503050406030204" pitchFamily="18" charset="0"/>
                           </a:rPr>
                           <m:t>𝑛</m:t>
                         </m:r>
-                        <m:r>
-                          <a:rPr lang="ar-AE">
+                      </m:sub>
+                    </m:sSub>
+                    <m:r>
+                      <a:rPr lang="en-US" i="1">
+                        <a:latin typeface="Cambria Math" panose="02040503050406030204" pitchFamily="18" charset="0"/>
+                      </a:rPr>
+                      <m:t>+(1−</m:t>
+                    </m:r>
+                    <m:r>
+                      <a:rPr lang="en-US" i="1">
+                        <a:latin typeface="Cambria Math" panose="02040503050406030204" pitchFamily="18" charset="0"/>
+                      </a:rPr>
+                      <m:t>𝛼</m:t>
+                    </m:r>
+                    <m:r>
+                      <a:rPr lang="en-US" i="1">
+                        <a:latin typeface="Cambria Math" panose="02040503050406030204" pitchFamily="18" charset="0"/>
+                      </a:rPr>
+                      <m:t>)</m:t>
+                    </m:r>
+                    <m:sSub>
+                      <m:sSubPr>
+                        <m:ctrlPr>
+                          <a:rPr lang="en-US" i="1">
                             <a:latin typeface="Cambria Math" panose="02040503050406030204" pitchFamily="18" charset="0"/>
                           </a:rPr>
-                          <m:t>−</m:t>
-                        </m:r>
+                        </m:ctrlPr>
+                      </m:sSubPr>
+                      <m:e>
                         <m:r>
-                          <a:rPr lang="ar-AE">
+                          <a:rPr lang="en-US" i="1">
                             <a:latin typeface="Cambria Math" panose="02040503050406030204" pitchFamily="18" charset="0"/>
                           </a:rPr>
-                          <m:t>1</m:t>
+                          <m:t>𝜏</m:t>
+                        </m:r>
+                      </m:e>
+                      <m:sub>
+                        <m:r>
+                          <a:rPr lang="en-US" i="1">
+                            <a:latin typeface="Cambria Math" panose="02040503050406030204" pitchFamily="18" charset="0"/>
+                          </a:rPr>
+                          <m:t>𝑛</m:t>
                         </m:r>
                       </m:sub>
                     </m:sSub>
@@ -11335,250 +11299,113 @@
                     <m:sSub>
                       <m:sSubPr>
                         <m:ctrlPr>
-                          <a:rPr lang="ar-AE" sz="2400" i="1">
+                          <a:rPr lang="en-US" i="1">
                             <a:latin typeface="Cambria Math" panose="02040503050406030204" pitchFamily="18" charset="0"/>
-                            <a:ea typeface="Cambria Math" panose="02040503050406030204" pitchFamily="18" charset="0"/>
                           </a:rPr>
                         </m:ctrlPr>
                       </m:sSubPr>
                       <m:e>
-                        <m:sSub>
-                          <m:sSubPr>
-                            <m:ctrlPr>
-                              <a:rPr lang="ar-AE" sz="2400" i="1">
-                                <a:latin typeface="Cambria Math" panose="02040503050406030204" pitchFamily="18" charset="0"/>
-                                <a:ea typeface="Cambria Math" panose="02040503050406030204" pitchFamily="18" charset="0"/>
-                              </a:rPr>
-                            </m:ctrlPr>
-                          </m:sSubPr>
-                          <m:e>
-                            <m:r>
-                              <a:rPr lang="en-US" sz="2400" i="1">
-                                <a:latin typeface="Cambria Math" panose="02040503050406030204" pitchFamily="18" charset="0"/>
-                                <a:ea typeface="Cambria Math" panose="02040503050406030204" pitchFamily="18" charset="0"/>
-                              </a:rPr>
-                              <m:t>𝑡</m:t>
-                            </m:r>
-                          </m:e>
-                          <m:sub>
-                            <m:r>
-                              <a:rPr lang="en-US" sz="2400" b="0" i="1" smtClean="0">
-                                <a:latin typeface="Cambria Math" panose="02040503050406030204" pitchFamily="18" charset="0"/>
-                                <a:ea typeface="Cambria Math" panose="02040503050406030204" pitchFamily="18" charset="0"/>
-                              </a:rPr>
-                              <m:t>1</m:t>
-                            </m:r>
-                          </m:sub>
-                        </m:sSub>
                         <m:r>
-                          <a:rPr lang="en-US" sz="2400" i="1">
+                          <a:rPr lang="en-US" i="1">
                             <a:latin typeface="Cambria Math" panose="02040503050406030204" pitchFamily="18" charset="0"/>
-                            <a:ea typeface="Cambria Math" panose="02040503050406030204" pitchFamily="18" charset="0"/>
                           </a:rPr>
-                          <m:t>=</m:t>
+                          <m:t>𝜏</m:t>
                         </m:r>
+                      </m:e>
+                      <m:sub>
                         <m:r>
-                          <a:rPr lang="en-US" sz="2400" i="1">
+                          <a:rPr lang="en-US" i="1">
                             <a:latin typeface="Cambria Math" panose="02040503050406030204" pitchFamily="18" charset="0"/>
-                            <a:ea typeface="Cambria Math" panose="02040503050406030204" pitchFamily="18" charset="0"/>
-                          </a:rPr>
-                          <m:t>𝛼</m:t>
-                        </m:r>
-                        <m:sSub>
-                          <m:sSubPr>
-                            <m:ctrlPr>
-                              <a:rPr lang="ar-AE" sz="2400" i="1">
-                                <a:latin typeface="Cambria Math" panose="02040503050406030204" pitchFamily="18" charset="0"/>
-                                <a:ea typeface="Cambria Math" panose="02040503050406030204" pitchFamily="18" charset="0"/>
-                              </a:rPr>
-                            </m:ctrlPr>
-                          </m:sSubPr>
-                          <m:e>
-                            <m:r>
-                              <a:rPr lang="ar-AE" sz="2400" i="1">
-                                <a:latin typeface="Cambria Math" panose="02040503050406030204" pitchFamily="18" charset="0"/>
-                                <a:ea typeface="Cambria Math" panose="02040503050406030204" pitchFamily="18" charset="0"/>
-                              </a:rPr>
-                              <m:t>𝑥</m:t>
-                            </m:r>
-                          </m:e>
-                          <m:sub>
-                            <m:r>
-                              <a:rPr lang="en-US" sz="2400" b="0" i="1" smtClean="0">
-                                <a:latin typeface="Cambria Math" panose="02040503050406030204" pitchFamily="18" charset="0"/>
-                                <a:ea typeface="Cambria Math" panose="02040503050406030204" pitchFamily="18" charset="0"/>
-                              </a:rPr>
-                              <m:t>1</m:t>
-                            </m:r>
-                          </m:sub>
-                        </m:sSub>
-                        <m:r>
-                          <a:rPr lang="en-US" sz="2400" i="1">
-                            <a:latin typeface="Cambria Math" panose="02040503050406030204" pitchFamily="18" charset="0"/>
-                            <a:ea typeface="Cambria Math" panose="02040503050406030204" pitchFamily="18" charset="0"/>
-                          </a:rPr>
-                          <m:t>+(</m:t>
-                        </m:r>
-                        <m:r>
-                          <a:rPr lang="en-US" sz="2400" i="1">
-                            <a:latin typeface="Cambria Math" panose="02040503050406030204" pitchFamily="18" charset="0"/>
-                            <a:ea typeface="Cambria Math" panose="02040503050406030204" pitchFamily="18" charset="0"/>
                           </a:rPr>
                           <m:t>1</m:t>
                         </m:r>
+                      </m:sub>
+                    </m:sSub>
+                    <m:r>
+                      <a:rPr lang="en-US" i="1">
+                        <a:latin typeface="Cambria Math" panose="02040503050406030204" pitchFamily="18" charset="0"/>
+                      </a:rPr>
+                      <m:t>=</m:t>
+                    </m:r>
+                    <m:r>
+                      <a:rPr lang="en-US" i="1">
+                        <a:latin typeface="Cambria Math" panose="02040503050406030204" pitchFamily="18" charset="0"/>
+                      </a:rPr>
+                      <m:t>𝛼</m:t>
+                    </m:r>
+                    <m:sSub>
+                      <m:sSubPr>
+                        <m:ctrlPr>
+                          <a:rPr lang="en-US" i="1">
+                            <a:latin typeface="Cambria Math" panose="02040503050406030204" pitchFamily="18" charset="0"/>
+                          </a:rPr>
+                        </m:ctrlPr>
+                      </m:sSubPr>
+                      <m:e>
                         <m:r>
-                          <a:rPr lang="en-US" sz="2400" i="1">
+                          <a:rPr lang="en-US" i="1">
                             <a:latin typeface="Cambria Math" panose="02040503050406030204" pitchFamily="18" charset="0"/>
-                            <a:ea typeface="Cambria Math" panose="02040503050406030204" pitchFamily="18" charset="0"/>
-                          </a:rPr>
-                          <m:t>−</m:t>
-                        </m:r>
-                        <m:r>
-                          <a:rPr lang="en-US" sz="2400" i="1">
-                            <a:latin typeface="Cambria Math" panose="02040503050406030204" pitchFamily="18" charset="0"/>
-                            <a:ea typeface="Cambria Math" panose="02040503050406030204" pitchFamily="18" charset="0"/>
-                          </a:rPr>
-                          <m:t>𝛼</m:t>
-                        </m:r>
-                        <m:r>
-                          <a:rPr lang="en-US" sz="2400" i="1">
-                            <a:latin typeface="Cambria Math" panose="02040503050406030204" pitchFamily="18" charset="0"/>
-                            <a:ea typeface="Cambria Math" panose="02040503050406030204" pitchFamily="18" charset="0"/>
-                          </a:rPr>
-                          <m:t>)</m:t>
-                        </m:r>
-                        <m:r>
-                          <a:rPr lang="en-US" sz="2400" i="1">
-                            <a:latin typeface="Cambria Math" panose="02040503050406030204" pitchFamily="18" charset="0"/>
-                            <a:ea typeface="Cambria Math" panose="02040503050406030204" pitchFamily="18" charset="0"/>
                           </a:rPr>
                           <m:t>𝑡</m:t>
                         </m:r>
                       </m:e>
                       <m:sub>
                         <m:r>
-                          <a:rPr lang="en-US" sz="2400" b="0" i="1" smtClean="0">
+                          <a:rPr lang="en-US" i="1">
                             <a:latin typeface="Cambria Math" panose="02040503050406030204" pitchFamily="18" charset="0"/>
-                            <a:ea typeface="Cambria Math" panose="02040503050406030204" pitchFamily="18" charset="0"/>
                           </a:rPr>
                           <m:t>0</m:t>
                         </m:r>
                       </m:sub>
                     </m:sSub>
                     <m:r>
-                      <a:rPr lang="en-US" sz="2400" b="0" i="1" smtClean="0">
+                      <a:rPr lang="en-US" i="1">
                         <a:latin typeface="Cambria Math" panose="02040503050406030204" pitchFamily="18" charset="0"/>
-                        <a:ea typeface="Cambria Math" panose="02040503050406030204" pitchFamily="18" charset="0"/>
                       </a:rPr>
-                      <m:t>=</m:t>
+                      <m:t>+(1−</m:t>
                     </m:r>
                     <m:r>
-                      <m:rPr>
-                        <m:nor/>
-                      </m:rPr>
-                      <a:rPr lang="en-US" altLang="ko-KR" sz="2400" dirty="0">
+                      <a:rPr lang="en-US" i="1">
                         <a:latin typeface="Cambria Math" panose="02040503050406030204" pitchFamily="18" charset="0"/>
-                        <a:ea typeface="Cambria Math" panose="02040503050406030204" pitchFamily="18" charset="0"/>
-                        <a:cs typeface="Calibri" panose="020F0502020204030204" pitchFamily="34" charset="0"/>
-                        <a:sym typeface="Symbol" panose="05050102010706020507" pitchFamily="18" charset="2"/>
                       </a:rPr>
-                      <m:t>0.5</m:t>
+                      <m:t>𝛼</m:t>
                     </m:r>
                     <m:r>
-                      <m:rPr>
-                        <m:nor/>
-                      </m:rPr>
-                      <a:rPr lang="en-US" altLang="ko-KR" sz="2400" dirty="0">
+                      <a:rPr lang="en-US" i="1">
                         <a:latin typeface="Cambria Math" panose="02040503050406030204" pitchFamily="18" charset="0"/>
-                        <a:ea typeface="Cambria Math" panose="02040503050406030204" pitchFamily="18" charset="0"/>
-                        <a:cs typeface="Calibri" panose="020F0502020204030204" pitchFamily="34" charset="0"/>
-                        <a:sym typeface="Symbol" panose="05050102010706020507" pitchFamily="18" charset="2"/>
                       </a:rPr>
-                      <m:t>∗</m:t>
+                      <m:t>)</m:t>
                     </m:r>
+                    <m:sSub>
+                      <m:sSubPr>
+                        <m:ctrlPr>
+                          <a:rPr lang="en-US" i="1">
+                            <a:latin typeface="Cambria Math" panose="02040503050406030204" pitchFamily="18" charset="0"/>
+                          </a:rPr>
+                        </m:ctrlPr>
+                      </m:sSubPr>
+                      <m:e>
+                        <m:r>
+                          <a:rPr lang="en-US" i="1">
+                            <a:latin typeface="Cambria Math" panose="02040503050406030204" pitchFamily="18" charset="0"/>
+                          </a:rPr>
+                          <m:t>𝜏</m:t>
+                        </m:r>
+                      </m:e>
+                      <m:sub>
+                        <m:r>
+                          <a:rPr lang="en-US" i="1">
+                            <a:latin typeface="Cambria Math" panose="02040503050406030204" pitchFamily="18" charset="0"/>
+                          </a:rPr>
+                          <m:t>0</m:t>
+                        </m:r>
+                      </m:sub>
+                    </m:sSub>
                     <m:r>
-                      <m:rPr>
-                        <m:nor/>
-                      </m:rPr>
-                      <a:rPr lang="en-US" altLang="ko-KR" sz="2400" dirty="0">
+                      <a:rPr lang="en-US" i="1">
                         <a:latin typeface="Cambria Math" panose="02040503050406030204" pitchFamily="18" charset="0"/>
-                        <a:ea typeface="Cambria Math" panose="02040503050406030204" pitchFamily="18" charset="0"/>
-                        <a:cs typeface="Calibri" panose="020F0502020204030204" pitchFamily="34" charset="0"/>
-                        <a:sym typeface="Symbol" panose="05050102010706020507" pitchFamily="18" charset="2"/>
                       </a:rPr>
-                      <m:t>6 </m:t>
-                    </m:r>
-                    <m:r>
-                      <m:rPr>
-                        <m:nor/>
-                      </m:rPr>
-                      <a:rPr lang="en-US" altLang="ko-KR" sz="2400" dirty="0">
-                        <a:latin typeface="Cambria Math" panose="02040503050406030204" pitchFamily="18" charset="0"/>
-                        <a:ea typeface="Cambria Math" panose="02040503050406030204" pitchFamily="18" charset="0"/>
-                        <a:cs typeface="Calibri" panose="020F0502020204030204" pitchFamily="34" charset="0"/>
-                        <a:sym typeface="Symbol" panose="05050102010706020507" pitchFamily="18" charset="2"/>
-                      </a:rPr>
-                      <m:t>+ </m:t>
-                    </m:r>
-                    <m:r>
-                      <m:rPr>
-                        <m:nor/>
-                      </m:rPr>
-                      <a:rPr lang="en-US" altLang="ko-KR" sz="2400" dirty="0">
-                        <a:latin typeface="Cambria Math" panose="02040503050406030204" pitchFamily="18" charset="0"/>
-                        <a:ea typeface="Cambria Math" panose="02040503050406030204" pitchFamily="18" charset="0"/>
-                        <a:cs typeface="Calibri" panose="020F0502020204030204" pitchFamily="34" charset="0"/>
-                        <a:sym typeface="Symbol" panose="05050102010706020507" pitchFamily="18" charset="2"/>
-                      </a:rPr>
-                      <m:t>0.5</m:t>
-                    </m:r>
-                    <m:r>
-                      <m:rPr>
-                        <m:nor/>
-                      </m:rPr>
-                      <a:rPr lang="en-US" altLang="ko-KR" sz="2400" dirty="0">
-                        <a:latin typeface="Cambria Math" panose="02040503050406030204" pitchFamily="18" charset="0"/>
-                        <a:ea typeface="Cambria Math" panose="02040503050406030204" pitchFamily="18" charset="0"/>
-                        <a:cs typeface="Calibri" panose="020F0502020204030204" pitchFamily="34" charset="0"/>
-                        <a:sym typeface="Symbol" panose="05050102010706020507" pitchFamily="18" charset="2"/>
-                      </a:rPr>
-                      <m:t>∗</m:t>
-                    </m:r>
-                    <m:r>
-                      <m:rPr>
-                        <m:nor/>
-                      </m:rPr>
-                      <a:rPr lang="en-US" altLang="ko-KR" sz="2400" dirty="0">
-                        <a:latin typeface="Cambria Math" panose="02040503050406030204" pitchFamily="18" charset="0"/>
-                        <a:ea typeface="Cambria Math" panose="02040503050406030204" pitchFamily="18" charset="0"/>
-                        <a:cs typeface="Calibri" panose="020F0502020204030204" pitchFamily="34" charset="0"/>
-                        <a:sym typeface="Symbol" panose="05050102010706020507" pitchFamily="18" charset="2"/>
-                      </a:rPr>
-                      <m:t>10 </m:t>
-                    </m:r>
-                    <m:r>
-                      <m:rPr>
-                        <m:nor/>
-                      </m:rPr>
-                      <a:rPr lang="en-US" altLang="ko-KR" sz="2400" b="0" i="0" dirty="0" smtClean="0">
-                        <a:latin typeface="Cambria Math" panose="02040503050406030204" pitchFamily="18" charset="0"/>
-                        <a:ea typeface="Cambria Math" panose="02040503050406030204" pitchFamily="18" charset="0"/>
-                        <a:cs typeface="Calibri" panose="020F0502020204030204" pitchFamily="34" charset="0"/>
-                        <a:sym typeface="Symbol" panose="05050102010706020507" pitchFamily="18" charset="2"/>
-                      </a:rPr>
-                      <m:t>= </m:t>
-                    </m:r>
-                    <m:r>
-                      <m:rPr>
-                        <m:nor/>
-                      </m:rPr>
-                      <a:rPr lang="en-US" altLang="ko-KR" sz="2400" b="0" i="0" dirty="0" smtClean="0">
-                        <a:latin typeface="Cambria Math" panose="02040503050406030204" pitchFamily="18" charset="0"/>
-                        <a:ea typeface="Cambria Math" panose="02040503050406030204" pitchFamily="18" charset="0"/>
-                        <a:cs typeface="Calibri" panose="020F0502020204030204" pitchFamily="34" charset="0"/>
-                        <a:sym typeface="Symbol" panose="05050102010706020507" pitchFamily="18" charset="2"/>
-                      </a:rPr>
-                      <m:t>8</m:t>
+                      <m:t>=0.5∗6 + 0.5∗10 = 8</m:t>
                     </m:r>
                   </m:oMath>
                 </a14:m>
@@ -11595,250 +11422,113 @@
                     <m:sSub>
                       <m:sSubPr>
                         <m:ctrlPr>
-                          <a:rPr lang="ar-AE" sz="2400" i="1" smtClean="0">
+                          <a:rPr lang="en-US" i="1">
                             <a:latin typeface="Cambria Math" panose="02040503050406030204" pitchFamily="18" charset="0"/>
-                            <a:ea typeface="Cambria Math" panose="02040503050406030204" pitchFamily="18" charset="0"/>
                           </a:rPr>
                         </m:ctrlPr>
                       </m:sSubPr>
                       <m:e>
-                        <m:sSub>
-                          <m:sSubPr>
-                            <m:ctrlPr>
-                              <a:rPr lang="ar-AE" sz="2400" i="1">
-                                <a:latin typeface="Cambria Math" panose="02040503050406030204" pitchFamily="18" charset="0"/>
-                                <a:ea typeface="Cambria Math" panose="02040503050406030204" pitchFamily="18" charset="0"/>
-                              </a:rPr>
-                            </m:ctrlPr>
-                          </m:sSubPr>
-                          <m:e>
-                            <m:r>
-                              <a:rPr lang="en-US" sz="2400" i="1">
-                                <a:latin typeface="Cambria Math" panose="02040503050406030204" pitchFamily="18" charset="0"/>
-                                <a:ea typeface="Cambria Math" panose="02040503050406030204" pitchFamily="18" charset="0"/>
-                              </a:rPr>
-                              <m:t>𝑡</m:t>
-                            </m:r>
-                          </m:e>
-                          <m:sub>
-                            <m:r>
-                              <a:rPr lang="en-US" sz="2400" b="0" i="1" smtClean="0">
-                                <a:latin typeface="Cambria Math" panose="02040503050406030204" pitchFamily="18" charset="0"/>
-                                <a:ea typeface="Cambria Math" panose="02040503050406030204" pitchFamily="18" charset="0"/>
-                              </a:rPr>
-                              <m:t>2</m:t>
-                            </m:r>
-                          </m:sub>
-                        </m:sSub>
                         <m:r>
-                          <a:rPr lang="en-US" sz="2400" i="1">
+                          <a:rPr lang="en-US" i="1">
                             <a:latin typeface="Cambria Math" panose="02040503050406030204" pitchFamily="18" charset="0"/>
-                            <a:ea typeface="Cambria Math" panose="02040503050406030204" pitchFamily="18" charset="0"/>
                           </a:rPr>
-                          <m:t>=</m:t>
+                          <m:t>𝜏</m:t>
                         </m:r>
+                      </m:e>
+                      <m:sub>
                         <m:r>
-                          <a:rPr lang="en-US" sz="2400" i="1">
+                          <a:rPr lang="en-US" i="1">
                             <a:latin typeface="Cambria Math" panose="02040503050406030204" pitchFamily="18" charset="0"/>
-                            <a:ea typeface="Cambria Math" panose="02040503050406030204" pitchFamily="18" charset="0"/>
                           </a:rPr>
-                          <m:t>𝛼</m:t>
+                          <m:t>2</m:t>
                         </m:r>
-                        <m:sSub>
-                          <m:sSubPr>
-                            <m:ctrlPr>
-                              <a:rPr lang="ar-AE" sz="2400" i="1">
-                                <a:latin typeface="Cambria Math" panose="02040503050406030204" pitchFamily="18" charset="0"/>
-                                <a:ea typeface="Cambria Math" panose="02040503050406030204" pitchFamily="18" charset="0"/>
-                              </a:rPr>
-                            </m:ctrlPr>
-                          </m:sSubPr>
-                          <m:e>
-                            <m:r>
-                              <a:rPr lang="ar-AE" sz="2400" i="1">
-                                <a:latin typeface="Cambria Math" panose="02040503050406030204" pitchFamily="18" charset="0"/>
-                                <a:ea typeface="Cambria Math" panose="02040503050406030204" pitchFamily="18" charset="0"/>
-                              </a:rPr>
-                              <m:t>𝑥</m:t>
-                            </m:r>
-                          </m:e>
-                          <m:sub>
-                            <m:r>
-                              <a:rPr lang="en-US" sz="2400" b="0" i="1" smtClean="0">
-                                <a:latin typeface="Cambria Math" panose="02040503050406030204" pitchFamily="18" charset="0"/>
-                                <a:ea typeface="Cambria Math" panose="02040503050406030204" pitchFamily="18" charset="0"/>
-                              </a:rPr>
-                              <m:t>2</m:t>
-                            </m:r>
-                          </m:sub>
-                        </m:sSub>
+                      </m:sub>
+                    </m:sSub>
+                    <m:r>
+                      <a:rPr lang="en-US" i="1">
+                        <a:latin typeface="Cambria Math" panose="02040503050406030204" pitchFamily="18" charset="0"/>
+                      </a:rPr>
+                      <m:t>=</m:t>
+                    </m:r>
+                    <m:r>
+                      <a:rPr lang="en-US" i="1">
+                        <a:latin typeface="Cambria Math" panose="02040503050406030204" pitchFamily="18" charset="0"/>
+                      </a:rPr>
+                      <m:t>𝛼</m:t>
+                    </m:r>
+                    <m:sSub>
+                      <m:sSubPr>
+                        <m:ctrlPr>
+                          <a:rPr lang="en-US" i="1">
+                            <a:latin typeface="Cambria Math" panose="02040503050406030204" pitchFamily="18" charset="0"/>
+                          </a:rPr>
+                        </m:ctrlPr>
+                      </m:sSubPr>
+                      <m:e>
                         <m:r>
-                          <a:rPr lang="en-US" sz="2400" i="1">
+                          <a:rPr lang="en-US" i="1">
                             <a:latin typeface="Cambria Math" panose="02040503050406030204" pitchFamily="18" charset="0"/>
-                            <a:ea typeface="Cambria Math" panose="02040503050406030204" pitchFamily="18" charset="0"/>
-                          </a:rPr>
-                          <m:t>+(</m:t>
-                        </m:r>
-                        <m:r>
-                          <a:rPr lang="en-US" sz="2400" i="1">
-                            <a:latin typeface="Cambria Math" panose="02040503050406030204" pitchFamily="18" charset="0"/>
-                            <a:ea typeface="Cambria Math" panose="02040503050406030204" pitchFamily="18" charset="0"/>
-                          </a:rPr>
-                          <m:t>1</m:t>
-                        </m:r>
-                        <m:r>
-                          <a:rPr lang="en-US" sz="2400" i="1">
-                            <a:latin typeface="Cambria Math" panose="02040503050406030204" pitchFamily="18" charset="0"/>
-                            <a:ea typeface="Cambria Math" panose="02040503050406030204" pitchFamily="18" charset="0"/>
-                          </a:rPr>
-                          <m:t>−</m:t>
-                        </m:r>
-                        <m:r>
-                          <a:rPr lang="en-US" sz="2400" i="1">
-                            <a:latin typeface="Cambria Math" panose="02040503050406030204" pitchFamily="18" charset="0"/>
-                            <a:ea typeface="Cambria Math" panose="02040503050406030204" pitchFamily="18" charset="0"/>
-                          </a:rPr>
-                          <m:t>𝛼</m:t>
-                        </m:r>
-                        <m:r>
-                          <a:rPr lang="en-US" sz="2400" i="1">
-                            <a:latin typeface="Cambria Math" panose="02040503050406030204" pitchFamily="18" charset="0"/>
-                            <a:ea typeface="Cambria Math" panose="02040503050406030204" pitchFamily="18" charset="0"/>
-                          </a:rPr>
-                          <m:t>)</m:t>
-                        </m:r>
-                        <m:r>
-                          <a:rPr lang="en-US" sz="2400" i="1">
-                            <a:latin typeface="Cambria Math" panose="02040503050406030204" pitchFamily="18" charset="0"/>
-                            <a:ea typeface="Cambria Math" panose="02040503050406030204" pitchFamily="18" charset="0"/>
                           </a:rPr>
                           <m:t>𝑡</m:t>
                         </m:r>
                       </m:e>
                       <m:sub>
                         <m:r>
-                          <a:rPr lang="en-US" sz="2400" b="0" i="1" smtClean="0">
+                          <a:rPr lang="en-US" i="1">
                             <a:latin typeface="Cambria Math" panose="02040503050406030204" pitchFamily="18" charset="0"/>
-                            <a:ea typeface="Cambria Math" panose="02040503050406030204" pitchFamily="18" charset="0"/>
                           </a:rPr>
                           <m:t>1</m:t>
                         </m:r>
                       </m:sub>
                     </m:sSub>
                     <m:r>
-                      <a:rPr lang="en-US" sz="2400" i="1">
+                      <a:rPr lang="en-US" i="1">
                         <a:latin typeface="Cambria Math" panose="02040503050406030204" pitchFamily="18" charset="0"/>
-                        <a:ea typeface="Cambria Math" panose="02040503050406030204" pitchFamily="18" charset="0"/>
                       </a:rPr>
-                      <m:t>=</m:t>
+                      <m:t>+(1−</m:t>
                     </m:r>
                     <m:r>
-                      <m:rPr>
-                        <m:nor/>
-                      </m:rPr>
-                      <a:rPr lang="en-US" altLang="ko-KR" sz="2400" dirty="0">
+                      <a:rPr lang="en-US" i="1">
                         <a:latin typeface="Cambria Math" panose="02040503050406030204" pitchFamily="18" charset="0"/>
-                        <a:ea typeface="Cambria Math" panose="02040503050406030204" pitchFamily="18" charset="0"/>
-                        <a:cs typeface="Calibri" panose="020F0502020204030204" pitchFamily="34" charset="0"/>
-                        <a:sym typeface="Symbol" panose="05050102010706020507" pitchFamily="18" charset="2"/>
                       </a:rPr>
-                      <m:t>0.5</m:t>
+                      <m:t>𝛼</m:t>
                     </m:r>
                     <m:r>
-                      <m:rPr>
-                        <m:nor/>
-                      </m:rPr>
-                      <a:rPr lang="en-US" altLang="ko-KR" sz="2400" dirty="0">
+                      <a:rPr lang="en-US" i="1">
                         <a:latin typeface="Cambria Math" panose="02040503050406030204" pitchFamily="18" charset="0"/>
-                        <a:ea typeface="Cambria Math" panose="02040503050406030204" pitchFamily="18" charset="0"/>
-                        <a:cs typeface="Calibri" panose="020F0502020204030204" pitchFamily="34" charset="0"/>
-                        <a:sym typeface="Symbol" panose="05050102010706020507" pitchFamily="18" charset="2"/>
                       </a:rPr>
-                      <m:t>∗</m:t>
+                      <m:t>)</m:t>
                     </m:r>
+                    <m:sSub>
+                      <m:sSubPr>
+                        <m:ctrlPr>
+                          <a:rPr lang="en-US" i="1">
+                            <a:latin typeface="Cambria Math" panose="02040503050406030204" pitchFamily="18" charset="0"/>
+                          </a:rPr>
+                        </m:ctrlPr>
+                      </m:sSubPr>
+                      <m:e>
+                        <m:r>
+                          <a:rPr lang="en-US" i="1">
+                            <a:latin typeface="Cambria Math" panose="02040503050406030204" pitchFamily="18" charset="0"/>
+                          </a:rPr>
+                          <m:t>𝜏</m:t>
+                        </m:r>
+                      </m:e>
+                      <m:sub>
+                        <m:r>
+                          <a:rPr lang="en-US" i="1">
+                            <a:latin typeface="Cambria Math" panose="02040503050406030204" pitchFamily="18" charset="0"/>
+                          </a:rPr>
+                          <m:t>1</m:t>
+                        </m:r>
+                      </m:sub>
+                    </m:sSub>
                     <m:r>
-                      <m:rPr>
-                        <m:nor/>
-                      </m:rPr>
-                      <a:rPr lang="en-US" altLang="ko-KR" sz="2400" dirty="0">
+                      <a:rPr lang="en-US" i="1">
                         <a:latin typeface="Cambria Math" panose="02040503050406030204" pitchFamily="18" charset="0"/>
-                        <a:ea typeface="Cambria Math" panose="02040503050406030204" pitchFamily="18" charset="0"/>
-                        <a:cs typeface="Calibri" panose="020F0502020204030204" pitchFamily="34" charset="0"/>
-                        <a:sym typeface="Symbol" panose="05050102010706020507" pitchFamily="18" charset="2"/>
                       </a:rPr>
-                      <m:t>4 </m:t>
-                    </m:r>
-                    <m:r>
-                      <m:rPr>
-                        <m:nor/>
-                      </m:rPr>
-                      <a:rPr lang="en-US" altLang="ko-KR" sz="2400" dirty="0">
-                        <a:latin typeface="Cambria Math" panose="02040503050406030204" pitchFamily="18" charset="0"/>
-                        <a:ea typeface="Cambria Math" panose="02040503050406030204" pitchFamily="18" charset="0"/>
-                        <a:cs typeface="Calibri" panose="020F0502020204030204" pitchFamily="34" charset="0"/>
-                        <a:sym typeface="Symbol" panose="05050102010706020507" pitchFamily="18" charset="2"/>
-                      </a:rPr>
-                      <m:t>+ </m:t>
-                    </m:r>
-                    <m:r>
-                      <m:rPr>
-                        <m:nor/>
-                      </m:rPr>
-                      <a:rPr lang="en-US" altLang="ko-KR" sz="2400" dirty="0">
-                        <a:latin typeface="Cambria Math" panose="02040503050406030204" pitchFamily="18" charset="0"/>
-                        <a:ea typeface="Cambria Math" panose="02040503050406030204" pitchFamily="18" charset="0"/>
-                        <a:cs typeface="Calibri" panose="020F0502020204030204" pitchFamily="34" charset="0"/>
-                        <a:sym typeface="Symbol" panose="05050102010706020507" pitchFamily="18" charset="2"/>
-                      </a:rPr>
-                      <m:t>0.5</m:t>
-                    </m:r>
-                    <m:r>
-                      <m:rPr>
-                        <m:nor/>
-                      </m:rPr>
-                      <a:rPr lang="en-US" altLang="ko-KR" sz="2400" dirty="0">
-                        <a:latin typeface="Cambria Math" panose="02040503050406030204" pitchFamily="18" charset="0"/>
-                        <a:ea typeface="Cambria Math" panose="02040503050406030204" pitchFamily="18" charset="0"/>
-                        <a:cs typeface="Calibri" panose="020F0502020204030204" pitchFamily="34" charset="0"/>
-                        <a:sym typeface="Symbol" panose="05050102010706020507" pitchFamily="18" charset="2"/>
-                      </a:rPr>
-                      <m:t>∗</m:t>
-                    </m:r>
-                    <m:r>
-                      <m:rPr>
-                        <m:nor/>
-                      </m:rPr>
-                      <a:rPr lang="en-US" altLang="ko-KR" sz="2400" dirty="0">
-                        <a:latin typeface="Cambria Math" panose="02040503050406030204" pitchFamily="18" charset="0"/>
-                        <a:ea typeface="Cambria Math" panose="02040503050406030204" pitchFamily="18" charset="0"/>
-                        <a:cs typeface="Calibri" panose="020F0502020204030204" pitchFamily="34" charset="0"/>
-                        <a:sym typeface="Symbol" panose="05050102010706020507" pitchFamily="18" charset="2"/>
-                      </a:rPr>
-                      <m:t>8 </m:t>
-                    </m:r>
-                    <m:r>
-                      <m:rPr>
-                        <m:nor/>
-                      </m:rPr>
-                      <a:rPr lang="en-US" altLang="ko-KR" sz="2400" dirty="0">
-                        <a:latin typeface="Cambria Math" panose="02040503050406030204" pitchFamily="18" charset="0"/>
-                        <a:ea typeface="Cambria Math" panose="02040503050406030204" pitchFamily="18" charset="0"/>
-                        <a:cs typeface="Calibri" panose="020F0502020204030204" pitchFamily="34" charset="0"/>
-                        <a:sym typeface="Symbol" panose="05050102010706020507" pitchFamily="18" charset="2"/>
-                      </a:rPr>
-                      <m:t>= </m:t>
-                    </m:r>
-                    <m:r>
-                      <m:rPr>
-                        <m:nor/>
-                      </m:rPr>
-                      <a:rPr lang="en-US" altLang="ko-KR" sz="2400" dirty="0">
-                        <a:latin typeface="Cambria Math" panose="02040503050406030204" pitchFamily="18" charset="0"/>
-                        <a:ea typeface="Cambria Math" panose="02040503050406030204" pitchFamily="18" charset="0"/>
-                        <a:cs typeface="Calibri" panose="020F0502020204030204" pitchFamily="34" charset="0"/>
-                        <a:sym typeface="Symbol" panose="05050102010706020507" pitchFamily="18" charset="2"/>
-                      </a:rPr>
-                      <m:t>6</m:t>
+                      <m:t>=0.5∗4 + 0.5∗8 = 6</m:t>
                     </m:r>
                   </m:oMath>
                 </a14:m>
@@ -11855,250 +11545,113 @@
                     <m:sSub>
                       <m:sSubPr>
                         <m:ctrlPr>
-                          <a:rPr lang="ar-AE" sz="2400" i="1">
+                          <a:rPr lang="en-US" i="1">
                             <a:latin typeface="Cambria Math" panose="02040503050406030204" pitchFamily="18" charset="0"/>
-                            <a:ea typeface="Cambria Math" panose="02040503050406030204" pitchFamily="18" charset="0"/>
                           </a:rPr>
                         </m:ctrlPr>
                       </m:sSubPr>
                       <m:e>
-                        <m:sSub>
-                          <m:sSubPr>
-                            <m:ctrlPr>
-                              <a:rPr lang="ar-AE" sz="2400" i="1">
-                                <a:latin typeface="Cambria Math" panose="02040503050406030204" pitchFamily="18" charset="0"/>
-                                <a:ea typeface="Cambria Math" panose="02040503050406030204" pitchFamily="18" charset="0"/>
-                              </a:rPr>
-                            </m:ctrlPr>
-                          </m:sSubPr>
-                          <m:e>
-                            <m:r>
-                              <a:rPr lang="en-US" sz="2400" i="1">
-                                <a:latin typeface="Cambria Math" panose="02040503050406030204" pitchFamily="18" charset="0"/>
-                                <a:ea typeface="Cambria Math" panose="02040503050406030204" pitchFamily="18" charset="0"/>
-                              </a:rPr>
-                              <m:t>𝑡</m:t>
-                            </m:r>
-                          </m:e>
-                          <m:sub>
-                            <m:r>
-                              <a:rPr lang="en-US" sz="2400" b="0" i="1" smtClean="0">
-                                <a:latin typeface="Cambria Math" panose="02040503050406030204" pitchFamily="18" charset="0"/>
-                                <a:ea typeface="Cambria Math" panose="02040503050406030204" pitchFamily="18" charset="0"/>
-                              </a:rPr>
-                              <m:t>3</m:t>
-                            </m:r>
-                          </m:sub>
-                        </m:sSub>
                         <m:r>
-                          <a:rPr lang="en-US" sz="2400" i="1">
+                          <a:rPr lang="en-US" i="1">
                             <a:latin typeface="Cambria Math" panose="02040503050406030204" pitchFamily="18" charset="0"/>
-                            <a:ea typeface="Cambria Math" panose="02040503050406030204" pitchFamily="18" charset="0"/>
                           </a:rPr>
-                          <m:t>=</m:t>
+                          <m:t>𝜏</m:t>
                         </m:r>
+                      </m:e>
+                      <m:sub>
                         <m:r>
-                          <a:rPr lang="en-US" sz="2400" i="1">
+                          <a:rPr lang="en-US" i="1">
                             <a:latin typeface="Cambria Math" panose="02040503050406030204" pitchFamily="18" charset="0"/>
-                            <a:ea typeface="Cambria Math" panose="02040503050406030204" pitchFamily="18" charset="0"/>
                           </a:rPr>
-                          <m:t>𝛼</m:t>
+                          <m:t>3</m:t>
                         </m:r>
-                        <m:sSub>
-                          <m:sSubPr>
-                            <m:ctrlPr>
-                              <a:rPr lang="ar-AE" sz="2400" i="1">
-                                <a:latin typeface="Cambria Math" panose="02040503050406030204" pitchFamily="18" charset="0"/>
-                                <a:ea typeface="Cambria Math" panose="02040503050406030204" pitchFamily="18" charset="0"/>
-                              </a:rPr>
-                            </m:ctrlPr>
-                          </m:sSubPr>
-                          <m:e>
-                            <m:r>
-                              <a:rPr lang="ar-AE" sz="2400" i="1">
-                                <a:latin typeface="Cambria Math" panose="02040503050406030204" pitchFamily="18" charset="0"/>
-                                <a:ea typeface="Cambria Math" panose="02040503050406030204" pitchFamily="18" charset="0"/>
-                              </a:rPr>
-                              <m:t>𝑥</m:t>
-                            </m:r>
-                          </m:e>
-                          <m:sub>
-                            <m:r>
-                              <a:rPr lang="en-US" sz="2400" b="0" i="1" smtClean="0">
-                                <a:latin typeface="Cambria Math" panose="02040503050406030204" pitchFamily="18" charset="0"/>
-                                <a:ea typeface="Cambria Math" panose="02040503050406030204" pitchFamily="18" charset="0"/>
-                              </a:rPr>
-                              <m:t>3</m:t>
-                            </m:r>
-                          </m:sub>
-                        </m:sSub>
+                      </m:sub>
+                    </m:sSub>
+                    <m:r>
+                      <a:rPr lang="en-US" i="1">
+                        <a:latin typeface="Cambria Math" panose="02040503050406030204" pitchFamily="18" charset="0"/>
+                      </a:rPr>
+                      <m:t>=</m:t>
+                    </m:r>
+                    <m:r>
+                      <a:rPr lang="en-US" i="1">
+                        <a:latin typeface="Cambria Math" panose="02040503050406030204" pitchFamily="18" charset="0"/>
+                      </a:rPr>
+                      <m:t>𝛼</m:t>
+                    </m:r>
+                    <m:sSub>
+                      <m:sSubPr>
+                        <m:ctrlPr>
+                          <a:rPr lang="en-US" i="1">
+                            <a:latin typeface="Cambria Math" panose="02040503050406030204" pitchFamily="18" charset="0"/>
+                          </a:rPr>
+                        </m:ctrlPr>
+                      </m:sSubPr>
+                      <m:e>
                         <m:r>
-                          <a:rPr lang="en-US" sz="2400" i="1">
+                          <a:rPr lang="en-US" i="1">
                             <a:latin typeface="Cambria Math" panose="02040503050406030204" pitchFamily="18" charset="0"/>
-                            <a:ea typeface="Cambria Math" panose="02040503050406030204" pitchFamily="18" charset="0"/>
-                          </a:rPr>
-                          <m:t>+(</m:t>
-                        </m:r>
-                        <m:r>
-                          <a:rPr lang="en-US" sz="2400" i="1">
-                            <a:latin typeface="Cambria Math" panose="02040503050406030204" pitchFamily="18" charset="0"/>
-                            <a:ea typeface="Cambria Math" panose="02040503050406030204" pitchFamily="18" charset="0"/>
-                          </a:rPr>
-                          <m:t>1</m:t>
-                        </m:r>
-                        <m:r>
-                          <a:rPr lang="en-US" sz="2400" i="1">
-                            <a:latin typeface="Cambria Math" panose="02040503050406030204" pitchFamily="18" charset="0"/>
-                            <a:ea typeface="Cambria Math" panose="02040503050406030204" pitchFamily="18" charset="0"/>
-                          </a:rPr>
-                          <m:t>−</m:t>
-                        </m:r>
-                        <m:r>
-                          <a:rPr lang="en-US" sz="2400" i="1">
-                            <a:latin typeface="Cambria Math" panose="02040503050406030204" pitchFamily="18" charset="0"/>
-                            <a:ea typeface="Cambria Math" panose="02040503050406030204" pitchFamily="18" charset="0"/>
-                          </a:rPr>
-                          <m:t>𝛼</m:t>
-                        </m:r>
-                        <m:r>
-                          <a:rPr lang="en-US" sz="2400" i="1">
-                            <a:latin typeface="Cambria Math" panose="02040503050406030204" pitchFamily="18" charset="0"/>
-                            <a:ea typeface="Cambria Math" panose="02040503050406030204" pitchFamily="18" charset="0"/>
-                          </a:rPr>
-                          <m:t>)</m:t>
-                        </m:r>
-                        <m:r>
-                          <a:rPr lang="en-US" sz="2400" i="1">
-                            <a:latin typeface="Cambria Math" panose="02040503050406030204" pitchFamily="18" charset="0"/>
-                            <a:ea typeface="Cambria Math" panose="02040503050406030204" pitchFamily="18" charset="0"/>
                           </a:rPr>
                           <m:t>𝑡</m:t>
                         </m:r>
                       </m:e>
                       <m:sub>
                         <m:r>
-                          <a:rPr lang="en-US" sz="2400" b="0" i="1" smtClean="0">
+                          <a:rPr lang="en-US" i="1">
                             <a:latin typeface="Cambria Math" panose="02040503050406030204" pitchFamily="18" charset="0"/>
-                            <a:ea typeface="Cambria Math" panose="02040503050406030204" pitchFamily="18" charset="0"/>
                           </a:rPr>
                           <m:t>2</m:t>
                         </m:r>
                       </m:sub>
                     </m:sSub>
                     <m:r>
-                      <a:rPr lang="en-US" sz="2400" i="1">
+                      <a:rPr lang="en-US" i="1">
                         <a:latin typeface="Cambria Math" panose="02040503050406030204" pitchFamily="18" charset="0"/>
-                        <a:ea typeface="Cambria Math" panose="02040503050406030204" pitchFamily="18" charset="0"/>
                       </a:rPr>
-                      <m:t>=</m:t>
+                      <m:t>+(1−</m:t>
                     </m:r>
                     <m:r>
-                      <m:rPr>
-                        <m:nor/>
-                      </m:rPr>
-                      <a:rPr lang="en-US" altLang="ko-KR" sz="2400" dirty="0">
+                      <a:rPr lang="en-US" i="1">
                         <a:latin typeface="Cambria Math" panose="02040503050406030204" pitchFamily="18" charset="0"/>
-                        <a:ea typeface="Cambria Math" panose="02040503050406030204" pitchFamily="18" charset="0"/>
-                        <a:cs typeface="Calibri" panose="020F0502020204030204" pitchFamily="34" charset="0"/>
-                        <a:sym typeface="Symbol" panose="05050102010706020507" pitchFamily="18" charset="2"/>
                       </a:rPr>
-                      <m:t>0.5</m:t>
+                      <m:t>𝛼</m:t>
                     </m:r>
                     <m:r>
-                      <m:rPr>
-                        <m:nor/>
-                      </m:rPr>
-                      <a:rPr lang="en-US" altLang="ko-KR" sz="2400" dirty="0">
+                      <a:rPr lang="en-US" i="1">
                         <a:latin typeface="Cambria Math" panose="02040503050406030204" pitchFamily="18" charset="0"/>
-                        <a:ea typeface="Cambria Math" panose="02040503050406030204" pitchFamily="18" charset="0"/>
-                        <a:cs typeface="Calibri" panose="020F0502020204030204" pitchFamily="34" charset="0"/>
-                        <a:sym typeface="Symbol" panose="05050102010706020507" pitchFamily="18" charset="2"/>
                       </a:rPr>
-                      <m:t>∗</m:t>
+                      <m:t>)</m:t>
                     </m:r>
+                    <m:sSub>
+                      <m:sSubPr>
+                        <m:ctrlPr>
+                          <a:rPr lang="en-US" i="1">
+                            <a:latin typeface="Cambria Math" panose="02040503050406030204" pitchFamily="18" charset="0"/>
+                          </a:rPr>
+                        </m:ctrlPr>
+                      </m:sSubPr>
+                      <m:e>
+                        <m:r>
+                          <a:rPr lang="en-US" i="1">
+                            <a:latin typeface="Cambria Math" panose="02040503050406030204" pitchFamily="18" charset="0"/>
+                          </a:rPr>
+                          <m:t>𝜏</m:t>
+                        </m:r>
+                      </m:e>
+                      <m:sub>
+                        <m:r>
+                          <a:rPr lang="en-US" i="1">
+                            <a:latin typeface="Cambria Math" panose="02040503050406030204" pitchFamily="18" charset="0"/>
+                          </a:rPr>
+                          <m:t>2</m:t>
+                        </m:r>
+                      </m:sub>
+                    </m:sSub>
                     <m:r>
-                      <m:rPr>
-                        <m:nor/>
-                      </m:rPr>
-                      <a:rPr lang="en-US" altLang="ko-KR" sz="2400" dirty="0">
+                      <a:rPr lang="en-US" i="1">
                         <a:latin typeface="Cambria Math" panose="02040503050406030204" pitchFamily="18" charset="0"/>
-                        <a:ea typeface="Cambria Math" panose="02040503050406030204" pitchFamily="18" charset="0"/>
-                        <a:cs typeface="Calibri" panose="020F0502020204030204" pitchFamily="34" charset="0"/>
-                        <a:sym typeface="Symbol" panose="05050102010706020507" pitchFamily="18" charset="2"/>
                       </a:rPr>
-                      <m:t>6 </m:t>
-                    </m:r>
-                    <m:r>
-                      <m:rPr>
-                        <m:nor/>
-                      </m:rPr>
-                      <a:rPr lang="en-US" altLang="ko-KR" sz="2400" dirty="0">
-                        <a:latin typeface="Cambria Math" panose="02040503050406030204" pitchFamily="18" charset="0"/>
-                        <a:ea typeface="Cambria Math" panose="02040503050406030204" pitchFamily="18" charset="0"/>
-                        <a:cs typeface="Calibri" panose="020F0502020204030204" pitchFamily="34" charset="0"/>
-                        <a:sym typeface="Symbol" panose="05050102010706020507" pitchFamily="18" charset="2"/>
-                      </a:rPr>
-                      <m:t>+ </m:t>
-                    </m:r>
-                    <m:r>
-                      <m:rPr>
-                        <m:nor/>
-                      </m:rPr>
-                      <a:rPr lang="en-US" altLang="ko-KR" sz="2400" dirty="0">
-                        <a:latin typeface="Cambria Math" panose="02040503050406030204" pitchFamily="18" charset="0"/>
-                        <a:ea typeface="Cambria Math" panose="02040503050406030204" pitchFamily="18" charset="0"/>
-                        <a:cs typeface="Calibri" panose="020F0502020204030204" pitchFamily="34" charset="0"/>
-                        <a:sym typeface="Symbol" panose="05050102010706020507" pitchFamily="18" charset="2"/>
-                      </a:rPr>
-                      <m:t>0.5</m:t>
-                    </m:r>
-                    <m:r>
-                      <m:rPr>
-                        <m:nor/>
-                      </m:rPr>
-                      <a:rPr lang="en-US" altLang="ko-KR" sz="2400" dirty="0">
-                        <a:latin typeface="Cambria Math" panose="02040503050406030204" pitchFamily="18" charset="0"/>
-                        <a:ea typeface="Cambria Math" panose="02040503050406030204" pitchFamily="18" charset="0"/>
-                        <a:cs typeface="Calibri" panose="020F0502020204030204" pitchFamily="34" charset="0"/>
-                        <a:sym typeface="Symbol" panose="05050102010706020507" pitchFamily="18" charset="2"/>
-                      </a:rPr>
-                      <m:t>∗</m:t>
-                    </m:r>
-                    <m:r>
-                      <m:rPr>
-                        <m:nor/>
-                      </m:rPr>
-                      <a:rPr lang="en-US" altLang="ko-KR" sz="2400" dirty="0">
-                        <a:latin typeface="Cambria Math" panose="02040503050406030204" pitchFamily="18" charset="0"/>
-                        <a:ea typeface="Cambria Math" panose="02040503050406030204" pitchFamily="18" charset="0"/>
-                        <a:cs typeface="Calibri" panose="020F0502020204030204" pitchFamily="34" charset="0"/>
-                        <a:sym typeface="Symbol" panose="05050102010706020507" pitchFamily="18" charset="2"/>
-                      </a:rPr>
-                      <m:t>6 </m:t>
-                    </m:r>
-                    <m:r>
-                      <m:rPr>
-                        <m:nor/>
-                      </m:rPr>
-                      <a:rPr lang="en-US" altLang="ko-KR" sz="2400" dirty="0">
-                        <a:latin typeface="Cambria Math" panose="02040503050406030204" pitchFamily="18" charset="0"/>
-                        <a:ea typeface="Cambria Math" panose="02040503050406030204" pitchFamily="18" charset="0"/>
-                        <a:cs typeface="Calibri" panose="020F0502020204030204" pitchFamily="34" charset="0"/>
-                        <a:sym typeface="Symbol" panose="05050102010706020507" pitchFamily="18" charset="2"/>
-                      </a:rPr>
-                      <m:t>= </m:t>
-                    </m:r>
-                    <m:r>
-                      <m:rPr>
-                        <m:nor/>
-                      </m:rPr>
-                      <a:rPr lang="en-US" altLang="ko-KR" sz="2400" dirty="0">
-                        <a:latin typeface="Cambria Math" panose="02040503050406030204" pitchFamily="18" charset="0"/>
-                        <a:ea typeface="Cambria Math" panose="02040503050406030204" pitchFamily="18" charset="0"/>
-                        <a:cs typeface="Calibri" panose="020F0502020204030204" pitchFamily="34" charset="0"/>
-                        <a:sym typeface="Symbol" panose="05050102010706020507" pitchFamily="18" charset="2"/>
-                      </a:rPr>
-                      <m:t>6</m:t>
+                      <m:t>=0.5∗6 + 0.5∗6 = 6</m:t>
                     </m:r>
                   </m:oMath>
                 </a14:m>
@@ -12115,250 +11668,113 @@
                     <m:sSub>
                       <m:sSubPr>
                         <m:ctrlPr>
-                          <a:rPr lang="ar-AE" sz="2400" i="1">
+                          <a:rPr lang="en-US" i="1">
                             <a:latin typeface="Cambria Math" panose="02040503050406030204" pitchFamily="18" charset="0"/>
-                            <a:ea typeface="Cambria Math" panose="02040503050406030204" pitchFamily="18" charset="0"/>
                           </a:rPr>
                         </m:ctrlPr>
                       </m:sSubPr>
                       <m:e>
-                        <m:sSub>
-                          <m:sSubPr>
-                            <m:ctrlPr>
-                              <a:rPr lang="ar-AE" sz="2400" i="1">
-                                <a:latin typeface="Cambria Math" panose="02040503050406030204" pitchFamily="18" charset="0"/>
-                                <a:ea typeface="Cambria Math" panose="02040503050406030204" pitchFamily="18" charset="0"/>
-                              </a:rPr>
-                            </m:ctrlPr>
-                          </m:sSubPr>
-                          <m:e>
-                            <m:r>
-                              <a:rPr lang="en-US" sz="2400" i="1">
-                                <a:latin typeface="Cambria Math" panose="02040503050406030204" pitchFamily="18" charset="0"/>
-                                <a:ea typeface="Cambria Math" panose="02040503050406030204" pitchFamily="18" charset="0"/>
-                              </a:rPr>
-                              <m:t>𝑡</m:t>
-                            </m:r>
-                          </m:e>
-                          <m:sub>
-                            <m:r>
-                              <a:rPr lang="en-US" sz="2400" b="0" i="1" smtClean="0">
-                                <a:latin typeface="Cambria Math" panose="02040503050406030204" pitchFamily="18" charset="0"/>
-                                <a:ea typeface="Cambria Math" panose="02040503050406030204" pitchFamily="18" charset="0"/>
-                              </a:rPr>
-                              <m:t>4</m:t>
-                            </m:r>
-                          </m:sub>
-                        </m:sSub>
                         <m:r>
-                          <a:rPr lang="en-US" sz="2400" i="1">
+                          <a:rPr lang="en-US" i="1">
                             <a:latin typeface="Cambria Math" panose="02040503050406030204" pitchFamily="18" charset="0"/>
-                            <a:ea typeface="Cambria Math" panose="02040503050406030204" pitchFamily="18" charset="0"/>
                           </a:rPr>
-                          <m:t>=</m:t>
+                          <m:t>𝜏</m:t>
                         </m:r>
+                      </m:e>
+                      <m:sub>
                         <m:r>
-                          <a:rPr lang="en-US" sz="2400" i="1">
+                          <a:rPr lang="en-US" i="1">
                             <a:latin typeface="Cambria Math" panose="02040503050406030204" pitchFamily="18" charset="0"/>
-                            <a:ea typeface="Cambria Math" panose="02040503050406030204" pitchFamily="18" charset="0"/>
                           </a:rPr>
-                          <m:t>𝛼</m:t>
+                          <m:t>4</m:t>
                         </m:r>
-                        <m:sSub>
-                          <m:sSubPr>
-                            <m:ctrlPr>
-                              <a:rPr lang="ar-AE" sz="2400" i="1">
-                                <a:latin typeface="Cambria Math" panose="02040503050406030204" pitchFamily="18" charset="0"/>
-                                <a:ea typeface="Cambria Math" panose="02040503050406030204" pitchFamily="18" charset="0"/>
-                              </a:rPr>
-                            </m:ctrlPr>
-                          </m:sSubPr>
-                          <m:e>
-                            <m:r>
-                              <a:rPr lang="ar-AE" sz="2400" i="1">
-                                <a:latin typeface="Cambria Math" panose="02040503050406030204" pitchFamily="18" charset="0"/>
-                                <a:ea typeface="Cambria Math" panose="02040503050406030204" pitchFamily="18" charset="0"/>
-                              </a:rPr>
-                              <m:t>𝑥</m:t>
-                            </m:r>
-                          </m:e>
-                          <m:sub>
-                            <m:r>
-                              <a:rPr lang="en-US" sz="2400" b="0" i="1" smtClean="0">
-                                <a:latin typeface="Cambria Math" panose="02040503050406030204" pitchFamily="18" charset="0"/>
-                                <a:ea typeface="Cambria Math" panose="02040503050406030204" pitchFamily="18" charset="0"/>
-                              </a:rPr>
-                              <m:t>4</m:t>
-                            </m:r>
-                          </m:sub>
-                        </m:sSub>
+                      </m:sub>
+                    </m:sSub>
+                    <m:r>
+                      <a:rPr lang="en-US" i="1">
+                        <a:latin typeface="Cambria Math" panose="02040503050406030204" pitchFamily="18" charset="0"/>
+                      </a:rPr>
+                      <m:t>=</m:t>
+                    </m:r>
+                    <m:r>
+                      <a:rPr lang="en-US" i="1">
+                        <a:latin typeface="Cambria Math" panose="02040503050406030204" pitchFamily="18" charset="0"/>
+                      </a:rPr>
+                      <m:t>𝛼</m:t>
+                    </m:r>
+                    <m:sSub>
+                      <m:sSubPr>
+                        <m:ctrlPr>
+                          <a:rPr lang="en-US" i="1">
+                            <a:latin typeface="Cambria Math" panose="02040503050406030204" pitchFamily="18" charset="0"/>
+                          </a:rPr>
+                        </m:ctrlPr>
+                      </m:sSubPr>
+                      <m:e>
                         <m:r>
-                          <a:rPr lang="en-US" sz="2400" i="1">
+                          <a:rPr lang="en-US" i="1">
                             <a:latin typeface="Cambria Math" panose="02040503050406030204" pitchFamily="18" charset="0"/>
-                            <a:ea typeface="Cambria Math" panose="02040503050406030204" pitchFamily="18" charset="0"/>
-                          </a:rPr>
-                          <m:t>+(</m:t>
-                        </m:r>
-                        <m:r>
-                          <a:rPr lang="en-US" sz="2400" i="1">
-                            <a:latin typeface="Cambria Math" panose="02040503050406030204" pitchFamily="18" charset="0"/>
-                            <a:ea typeface="Cambria Math" panose="02040503050406030204" pitchFamily="18" charset="0"/>
-                          </a:rPr>
-                          <m:t>1</m:t>
-                        </m:r>
-                        <m:r>
-                          <a:rPr lang="en-US" sz="2400" i="1">
-                            <a:latin typeface="Cambria Math" panose="02040503050406030204" pitchFamily="18" charset="0"/>
-                            <a:ea typeface="Cambria Math" panose="02040503050406030204" pitchFamily="18" charset="0"/>
-                          </a:rPr>
-                          <m:t>−</m:t>
-                        </m:r>
-                        <m:r>
-                          <a:rPr lang="en-US" sz="2400" i="1">
-                            <a:latin typeface="Cambria Math" panose="02040503050406030204" pitchFamily="18" charset="0"/>
-                            <a:ea typeface="Cambria Math" panose="02040503050406030204" pitchFamily="18" charset="0"/>
-                          </a:rPr>
-                          <m:t>𝛼</m:t>
-                        </m:r>
-                        <m:r>
-                          <a:rPr lang="en-US" sz="2400" i="1">
-                            <a:latin typeface="Cambria Math" panose="02040503050406030204" pitchFamily="18" charset="0"/>
-                            <a:ea typeface="Cambria Math" panose="02040503050406030204" pitchFamily="18" charset="0"/>
-                          </a:rPr>
-                          <m:t>)</m:t>
-                        </m:r>
-                        <m:r>
-                          <a:rPr lang="en-US" sz="2400" i="1">
-                            <a:latin typeface="Cambria Math" panose="02040503050406030204" pitchFamily="18" charset="0"/>
-                            <a:ea typeface="Cambria Math" panose="02040503050406030204" pitchFamily="18" charset="0"/>
                           </a:rPr>
                           <m:t>𝑡</m:t>
                         </m:r>
                       </m:e>
                       <m:sub>
                         <m:r>
-                          <a:rPr lang="en-US" sz="2400" b="0" i="1" smtClean="0">
+                          <a:rPr lang="en-US" i="1">
                             <a:latin typeface="Cambria Math" panose="02040503050406030204" pitchFamily="18" charset="0"/>
-                            <a:ea typeface="Cambria Math" panose="02040503050406030204" pitchFamily="18" charset="0"/>
                           </a:rPr>
                           <m:t>3</m:t>
                         </m:r>
                       </m:sub>
                     </m:sSub>
                     <m:r>
-                      <a:rPr lang="en-US" sz="2400" i="1">
+                      <a:rPr lang="en-US" i="1">
                         <a:latin typeface="Cambria Math" panose="02040503050406030204" pitchFamily="18" charset="0"/>
-                        <a:ea typeface="Cambria Math" panose="02040503050406030204" pitchFamily="18" charset="0"/>
                       </a:rPr>
-                      <m:t>=</m:t>
+                      <m:t>+(1−</m:t>
                     </m:r>
                     <m:r>
-                      <m:rPr>
-                        <m:nor/>
-                      </m:rPr>
-                      <a:rPr lang="en-US" altLang="ko-KR" sz="2400" dirty="0">
+                      <a:rPr lang="en-US" i="1">
                         <a:latin typeface="Cambria Math" panose="02040503050406030204" pitchFamily="18" charset="0"/>
-                        <a:ea typeface="Cambria Math" panose="02040503050406030204" pitchFamily="18" charset="0"/>
-                        <a:cs typeface="Calibri" panose="020F0502020204030204" pitchFamily="34" charset="0"/>
-                        <a:sym typeface="Symbol" panose="05050102010706020507" pitchFamily="18" charset="2"/>
                       </a:rPr>
-                      <m:t>0.5</m:t>
+                      <m:t>𝛼</m:t>
                     </m:r>
                     <m:r>
-                      <m:rPr>
-                        <m:nor/>
-                      </m:rPr>
-                      <a:rPr lang="en-US" altLang="ko-KR" sz="2400" dirty="0">
+                      <a:rPr lang="en-US" i="1">
                         <a:latin typeface="Cambria Math" panose="02040503050406030204" pitchFamily="18" charset="0"/>
-                        <a:ea typeface="Cambria Math" panose="02040503050406030204" pitchFamily="18" charset="0"/>
-                        <a:cs typeface="Calibri" panose="020F0502020204030204" pitchFamily="34" charset="0"/>
-                        <a:sym typeface="Symbol" panose="05050102010706020507" pitchFamily="18" charset="2"/>
                       </a:rPr>
-                      <m:t>∗</m:t>
+                      <m:t>)</m:t>
                     </m:r>
+                    <m:sSub>
+                      <m:sSubPr>
+                        <m:ctrlPr>
+                          <a:rPr lang="en-US" i="1">
+                            <a:latin typeface="Cambria Math" panose="02040503050406030204" pitchFamily="18" charset="0"/>
+                          </a:rPr>
+                        </m:ctrlPr>
+                      </m:sSubPr>
+                      <m:e>
+                        <m:r>
+                          <a:rPr lang="en-US" i="1">
+                            <a:latin typeface="Cambria Math" panose="02040503050406030204" pitchFamily="18" charset="0"/>
+                          </a:rPr>
+                          <m:t>𝜏</m:t>
+                        </m:r>
+                      </m:e>
+                      <m:sub>
+                        <m:r>
+                          <a:rPr lang="en-US" i="1">
+                            <a:latin typeface="Cambria Math" panose="02040503050406030204" pitchFamily="18" charset="0"/>
+                          </a:rPr>
+                          <m:t>3</m:t>
+                        </m:r>
+                      </m:sub>
+                    </m:sSub>
                     <m:r>
-                      <m:rPr>
-                        <m:nor/>
-                      </m:rPr>
-                      <a:rPr lang="en-US" altLang="ko-KR" sz="2400" dirty="0">
+                      <a:rPr lang="en-US" i="1">
                         <a:latin typeface="Cambria Math" panose="02040503050406030204" pitchFamily="18" charset="0"/>
-                        <a:ea typeface="Cambria Math" panose="02040503050406030204" pitchFamily="18" charset="0"/>
-                        <a:cs typeface="Calibri" panose="020F0502020204030204" pitchFamily="34" charset="0"/>
-                        <a:sym typeface="Symbol" panose="05050102010706020507" pitchFamily="18" charset="2"/>
                       </a:rPr>
-                      <m:t>4 </m:t>
-                    </m:r>
-                    <m:r>
-                      <m:rPr>
-                        <m:nor/>
-                      </m:rPr>
-                      <a:rPr lang="en-US" altLang="ko-KR" sz="2400" dirty="0">
-                        <a:latin typeface="Cambria Math" panose="02040503050406030204" pitchFamily="18" charset="0"/>
-                        <a:ea typeface="Cambria Math" panose="02040503050406030204" pitchFamily="18" charset="0"/>
-                        <a:cs typeface="Calibri" panose="020F0502020204030204" pitchFamily="34" charset="0"/>
-                        <a:sym typeface="Symbol" panose="05050102010706020507" pitchFamily="18" charset="2"/>
-                      </a:rPr>
-                      <m:t>+ </m:t>
-                    </m:r>
-                    <m:r>
-                      <m:rPr>
-                        <m:nor/>
-                      </m:rPr>
-                      <a:rPr lang="en-US" altLang="ko-KR" sz="2400" dirty="0">
-                        <a:latin typeface="Cambria Math" panose="02040503050406030204" pitchFamily="18" charset="0"/>
-                        <a:ea typeface="Cambria Math" panose="02040503050406030204" pitchFamily="18" charset="0"/>
-                        <a:cs typeface="Calibri" panose="020F0502020204030204" pitchFamily="34" charset="0"/>
-                        <a:sym typeface="Symbol" panose="05050102010706020507" pitchFamily="18" charset="2"/>
-                      </a:rPr>
-                      <m:t>0.5</m:t>
-                    </m:r>
-                    <m:r>
-                      <m:rPr>
-                        <m:nor/>
-                      </m:rPr>
-                      <a:rPr lang="en-US" altLang="ko-KR" sz="2400" dirty="0">
-                        <a:latin typeface="Cambria Math" panose="02040503050406030204" pitchFamily="18" charset="0"/>
-                        <a:ea typeface="Cambria Math" panose="02040503050406030204" pitchFamily="18" charset="0"/>
-                        <a:cs typeface="Calibri" panose="020F0502020204030204" pitchFamily="34" charset="0"/>
-                        <a:sym typeface="Symbol" panose="05050102010706020507" pitchFamily="18" charset="2"/>
-                      </a:rPr>
-                      <m:t>∗</m:t>
-                    </m:r>
-                    <m:r>
-                      <m:rPr>
-                        <m:nor/>
-                      </m:rPr>
-                      <a:rPr lang="en-US" altLang="ko-KR" sz="2400" dirty="0">
-                        <a:latin typeface="Cambria Math" panose="02040503050406030204" pitchFamily="18" charset="0"/>
-                        <a:ea typeface="Cambria Math" panose="02040503050406030204" pitchFamily="18" charset="0"/>
-                        <a:cs typeface="Calibri" panose="020F0502020204030204" pitchFamily="34" charset="0"/>
-                        <a:sym typeface="Symbol" panose="05050102010706020507" pitchFamily="18" charset="2"/>
-                      </a:rPr>
-                      <m:t>6 </m:t>
-                    </m:r>
-                    <m:r>
-                      <m:rPr>
-                        <m:nor/>
-                      </m:rPr>
-                      <a:rPr lang="en-US" altLang="ko-KR" sz="2400" dirty="0">
-                        <a:latin typeface="Cambria Math" panose="02040503050406030204" pitchFamily="18" charset="0"/>
-                        <a:ea typeface="Cambria Math" panose="02040503050406030204" pitchFamily="18" charset="0"/>
-                        <a:cs typeface="Calibri" panose="020F0502020204030204" pitchFamily="34" charset="0"/>
-                        <a:sym typeface="Symbol" panose="05050102010706020507" pitchFamily="18" charset="2"/>
-                      </a:rPr>
-                      <m:t>= </m:t>
-                    </m:r>
-                    <m:r>
-                      <m:rPr>
-                        <m:nor/>
-                      </m:rPr>
-                      <a:rPr lang="en-US" altLang="ko-KR" sz="2400" dirty="0">
-                        <a:latin typeface="Cambria Math" panose="02040503050406030204" pitchFamily="18" charset="0"/>
-                        <a:ea typeface="Cambria Math" panose="02040503050406030204" pitchFamily="18" charset="0"/>
-                        <a:cs typeface="Calibri" panose="020F0502020204030204" pitchFamily="34" charset="0"/>
-                        <a:sym typeface="Symbol" panose="05050102010706020507" pitchFamily="18" charset="2"/>
-                      </a:rPr>
-                      <m:t>5</m:t>
+                      <m:t>=0.5∗4 + 0.5∗6 = 5</m:t>
                     </m:r>
                   </m:oMath>
                 </a14:m>
@@ -12375,250 +11791,113 @@
                     <m:sSub>
                       <m:sSubPr>
                         <m:ctrlPr>
-                          <a:rPr lang="ar-AE" sz="2400" i="1">
+                          <a:rPr lang="en-US" i="1">
                             <a:latin typeface="Cambria Math" panose="02040503050406030204" pitchFamily="18" charset="0"/>
-                            <a:ea typeface="Cambria Math" panose="02040503050406030204" pitchFamily="18" charset="0"/>
                           </a:rPr>
                         </m:ctrlPr>
                       </m:sSubPr>
                       <m:e>
-                        <m:sSub>
-                          <m:sSubPr>
-                            <m:ctrlPr>
-                              <a:rPr lang="ar-AE" sz="2400" i="1">
-                                <a:latin typeface="Cambria Math" panose="02040503050406030204" pitchFamily="18" charset="0"/>
-                                <a:ea typeface="Cambria Math" panose="02040503050406030204" pitchFamily="18" charset="0"/>
-                              </a:rPr>
-                            </m:ctrlPr>
-                          </m:sSubPr>
-                          <m:e>
-                            <m:r>
-                              <a:rPr lang="en-US" sz="2400" i="1">
-                                <a:latin typeface="Cambria Math" panose="02040503050406030204" pitchFamily="18" charset="0"/>
-                                <a:ea typeface="Cambria Math" panose="02040503050406030204" pitchFamily="18" charset="0"/>
-                              </a:rPr>
-                              <m:t>𝑡</m:t>
-                            </m:r>
-                          </m:e>
-                          <m:sub>
-                            <m:r>
-                              <a:rPr lang="en-US" sz="2400" b="0" i="1" smtClean="0">
-                                <a:latin typeface="Cambria Math" panose="02040503050406030204" pitchFamily="18" charset="0"/>
-                                <a:ea typeface="Cambria Math" panose="02040503050406030204" pitchFamily="18" charset="0"/>
-                              </a:rPr>
-                              <m:t>5</m:t>
-                            </m:r>
-                          </m:sub>
-                        </m:sSub>
                         <m:r>
-                          <a:rPr lang="en-US" sz="2400" i="1">
+                          <a:rPr lang="en-US" i="1">
                             <a:latin typeface="Cambria Math" panose="02040503050406030204" pitchFamily="18" charset="0"/>
-                            <a:ea typeface="Cambria Math" panose="02040503050406030204" pitchFamily="18" charset="0"/>
                           </a:rPr>
-                          <m:t>=</m:t>
+                          <m:t>𝜏</m:t>
                         </m:r>
+                      </m:e>
+                      <m:sub>
                         <m:r>
-                          <a:rPr lang="en-US" sz="2400" i="1">
+                          <a:rPr lang="en-US" i="1">
                             <a:latin typeface="Cambria Math" panose="02040503050406030204" pitchFamily="18" charset="0"/>
-                            <a:ea typeface="Cambria Math" panose="02040503050406030204" pitchFamily="18" charset="0"/>
                           </a:rPr>
-                          <m:t>𝛼</m:t>
+                          <m:t>5</m:t>
                         </m:r>
-                        <m:sSub>
-                          <m:sSubPr>
-                            <m:ctrlPr>
-                              <a:rPr lang="ar-AE" sz="2400" i="1">
-                                <a:latin typeface="Cambria Math" panose="02040503050406030204" pitchFamily="18" charset="0"/>
-                                <a:ea typeface="Cambria Math" panose="02040503050406030204" pitchFamily="18" charset="0"/>
-                              </a:rPr>
-                            </m:ctrlPr>
-                          </m:sSubPr>
-                          <m:e>
-                            <m:r>
-                              <a:rPr lang="ar-AE" sz="2400" i="1">
-                                <a:latin typeface="Cambria Math" panose="02040503050406030204" pitchFamily="18" charset="0"/>
-                                <a:ea typeface="Cambria Math" panose="02040503050406030204" pitchFamily="18" charset="0"/>
-                              </a:rPr>
-                              <m:t>𝑥</m:t>
-                            </m:r>
-                          </m:e>
-                          <m:sub>
-                            <m:r>
-                              <a:rPr lang="en-US" sz="2400" b="0" i="1" smtClean="0">
-                                <a:latin typeface="Cambria Math" panose="02040503050406030204" pitchFamily="18" charset="0"/>
-                                <a:ea typeface="Cambria Math" panose="02040503050406030204" pitchFamily="18" charset="0"/>
-                              </a:rPr>
-                              <m:t>5</m:t>
-                            </m:r>
-                          </m:sub>
-                        </m:sSub>
+                      </m:sub>
+                    </m:sSub>
+                    <m:r>
+                      <a:rPr lang="en-US" i="1">
+                        <a:latin typeface="Cambria Math" panose="02040503050406030204" pitchFamily="18" charset="0"/>
+                      </a:rPr>
+                      <m:t>=</m:t>
+                    </m:r>
+                    <m:r>
+                      <a:rPr lang="en-US" i="1">
+                        <a:latin typeface="Cambria Math" panose="02040503050406030204" pitchFamily="18" charset="0"/>
+                      </a:rPr>
+                      <m:t>𝛼</m:t>
+                    </m:r>
+                    <m:sSub>
+                      <m:sSubPr>
+                        <m:ctrlPr>
+                          <a:rPr lang="en-US" i="1">
+                            <a:latin typeface="Cambria Math" panose="02040503050406030204" pitchFamily="18" charset="0"/>
+                          </a:rPr>
+                        </m:ctrlPr>
+                      </m:sSubPr>
+                      <m:e>
                         <m:r>
-                          <a:rPr lang="en-US" sz="2400" i="1">
+                          <a:rPr lang="en-US" i="1">
                             <a:latin typeface="Cambria Math" panose="02040503050406030204" pitchFamily="18" charset="0"/>
-                            <a:ea typeface="Cambria Math" panose="02040503050406030204" pitchFamily="18" charset="0"/>
-                          </a:rPr>
-                          <m:t>+(</m:t>
-                        </m:r>
-                        <m:r>
-                          <a:rPr lang="en-US" sz="2400" i="1">
-                            <a:latin typeface="Cambria Math" panose="02040503050406030204" pitchFamily="18" charset="0"/>
-                            <a:ea typeface="Cambria Math" panose="02040503050406030204" pitchFamily="18" charset="0"/>
-                          </a:rPr>
-                          <m:t>1</m:t>
-                        </m:r>
-                        <m:r>
-                          <a:rPr lang="en-US" sz="2400" i="1">
-                            <a:latin typeface="Cambria Math" panose="02040503050406030204" pitchFamily="18" charset="0"/>
-                            <a:ea typeface="Cambria Math" panose="02040503050406030204" pitchFamily="18" charset="0"/>
-                          </a:rPr>
-                          <m:t>−</m:t>
-                        </m:r>
-                        <m:r>
-                          <a:rPr lang="en-US" sz="2400" i="1">
-                            <a:latin typeface="Cambria Math" panose="02040503050406030204" pitchFamily="18" charset="0"/>
-                            <a:ea typeface="Cambria Math" panose="02040503050406030204" pitchFamily="18" charset="0"/>
-                          </a:rPr>
-                          <m:t>𝛼</m:t>
-                        </m:r>
-                        <m:r>
-                          <a:rPr lang="en-US" sz="2400" i="1">
-                            <a:latin typeface="Cambria Math" panose="02040503050406030204" pitchFamily="18" charset="0"/>
-                            <a:ea typeface="Cambria Math" panose="02040503050406030204" pitchFamily="18" charset="0"/>
-                          </a:rPr>
-                          <m:t>)</m:t>
-                        </m:r>
-                        <m:r>
-                          <a:rPr lang="en-US" sz="2400" i="1">
-                            <a:latin typeface="Cambria Math" panose="02040503050406030204" pitchFamily="18" charset="0"/>
-                            <a:ea typeface="Cambria Math" panose="02040503050406030204" pitchFamily="18" charset="0"/>
                           </a:rPr>
                           <m:t>𝑡</m:t>
                         </m:r>
                       </m:e>
                       <m:sub>
                         <m:r>
-                          <a:rPr lang="en-US" sz="2400" b="0" i="1" smtClean="0">
+                          <a:rPr lang="en-US" i="1">
                             <a:latin typeface="Cambria Math" panose="02040503050406030204" pitchFamily="18" charset="0"/>
-                            <a:ea typeface="Cambria Math" panose="02040503050406030204" pitchFamily="18" charset="0"/>
                           </a:rPr>
                           <m:t>4</m:t>
                         </m:r>
                       </m:sub>
                     </m:sSub>
                     <m:r>
-                      <a:rPr lang="en-US" sz="2400" i="1">
+                      <a:rPr lang="en-US" i="1">
                         <a:latin typeface="Cambria Math" panose="02040503050406030204" pitchFamily="18" charset="0"/>
-                        <a:ea typeface="Cambria Math" panose="02040503050406030204" pitchFamily="18" charset="0"/>
                       </a:rPr>
-                      <m:t>=</m:t>
+                      <m:t>+(1−</m:t>
                     </m:r>
                     <m:r>
-                      <m:rPr>
-                        <m:nor/>
-                      </m:rPr>
-                      <a:rPr lang="en-US" altLang="ko-KR" sz="2400" dirty="0">
+                      <a:rPr lang="en-US" i="1">
                         <a:latin typeface="Cambria Math" panose="02040503050406030204" pitchFamily="18" charset="0"/>
-                        <a:ea typeface="Cambria Math" panose="02040503050406030204" pitchFamily="18" charset="0"/>
-                        <a:cs typeface="Calibri" panose="020F0502020204030204" pitchFamily="34" charset="0"/>
-                        <a:sym typeface="Symbol" panose="05050102010706020507" pitchFamily="18" charset="2"/>
                       </a:rPr>
-                      <m:t>0.5</m:t>
+                      <m:t>𝛼</m:t>
                     </m:r>
                     <m:r>
-                      <m:rPr>
-                        <m:nor/>
-                      </m:rPr>
-                      <a:rPr lang="en-US" altLang="ko-KR" sz="2400" dirty="0">
+                      <a:rPr lang="en-US" i="1">
                         <a:latin typeface="Cambria Math" panose="02040503050406030204" pitchFamily="18" charset="0"/>
-                        <a:ea typeface="Cambria Math" panose="02040503050406030204" pitchFamily="18" charset="0"/>
-                        <a:cs typeface="Calibri" panose="020F0502020204030204" pitchFamily="34" charset="0"/>
-                        <a:sym typeface="Symbol" panose="05050102010706020507" pitchFamily="18" charset="2"/>
                       </a:rPr>
-                      <m:t>∗</m:t>
+                      <m:t>)</m:t>
                     </m:r>
+                    <m:sSub>
+                      <m:sSubPr>
+                        <m:ctrlPr>
+                          <a:rPr lang="en-US" i="1">
+                            <a:latin typeface="Cambria Math" panose="02040503050406030204" pitchFamily="18" charset="0"/>
+                          </a:rPr>
+                        </m:ctrlPr>
+                      </m:sSubPr>
+                      <m:e>
+                        <m:r>
+                          <a:rPr lang="en-US" i="1">
+                            <a:latin typeface="Cambria Math" panose="02040503050406030204" pitchFamily="18" charset="0"/>
+                          </a:rPr>
+                          <m:t>𝜏</m:t>
+                        </m:r>
+                      </m:e>
+                      <m:sub>
+                        <m:r>
+                          <a:rPr lang="en-US" i="1">
+                            <a:latin typeface="Cambria Math" panose="02040503050406030204" pitchFamily="18" charset="0"/>
+                          </a:rPr>
+                          <m:t>4</m:t>
+                        </m:r>
+                      </m:sub>
+                    </m:sSub>
                     <m:r>
-                      <m:rPr>
-                        <m:nor/>
-                      </m:rPr>
-                      <a:rPr lang="en-US" altLang="ko-KR" sz="2400" dirty="0">
+                      <a:rPr lang="en-US" i="1">
                         <a:latin typeface="Cambria Math" panose="02040503050406030204" pitchFamily="18" charset="0"/>
-                        <a:ea typeface="Cambria Math" panose="02040503050406030204" pitchFamily="18" charset="0"/>
-                        <a:cs typeface="Calibri" panose="020F0502020204030204" pitchFamily="34" charset="0"/>
-                        <a:sym typeface="Symbol" panose="05050102010706020507" pitchFamily="18" charset="2"/>
                       </a:rPr>
-                      <m:t>13 </m:t>
-                    </m:r>
-                    <m:r>
-                      <m:rPr>
-                        <m:nor/>
-                      </m:rPr>
-                      <a:rPr lang="en-US" altLang="ko-KR" sz="2400" dirty="0">
-                        <a:latin typeface="Cambria Math" panose="02040503050406030204" pitchFamily="18" charset="0"/>
-                        <a:ea typeface="Cambria Math" panose="02040503050406030204" pitchFamily="18" charset="0"/>
-                        <a:cs typeface="Calibri" panose="020F0502020204030204" pitchFamily="34" charset="0"/>
-                        <a:sym typeface="Symbol" panose="05050102010706020507" pitchFamily="18" charset="2"/>
-                      </a:rPr>
-                      <m:t>+ </m:t>
-                    </m:r>
-                    <m:r>
-                      <m:rPr>
-                        <m:nor/>
-                      </m:rPr>
-                      <a:rPr lang="en-US" altLang="ko-KR" sz="2400" dirty="0">
-                        <a:latin typeface="Cambria Math" panose="02040503050406030204" pitchFamily="18" charset="0"/>
-                        <a:ea typeface="Cambria Math" panose="02040503050406030204" pitchFamily="18" charset="0"/>
-                        <a:cs typeface="Calibri" panose="020F0502020204030204" pitchFamily="34" charset="0"/>
-                        <a:sym typeface="Symbol" panose="05050102010706020507" pitchFamily="18" charset="2"/>
-                      </a:rPr>
-                      <m:t>0.5</m:t>
-                    </m:r>
-                    <m:r>
-                      <m:rPr>
-                        <m:nor/>
-                      </m:rPr>
-                      <a:rPr lang="en-US" altLang="ko-KR" sz="2400" dirty="0">
-                        <a:latin typeface="Cambria Math" panose="02040503050406030204" pitchFamily="18" charset="0"/>
-                        <a:ea typeface="Cambria Math" panose="02040503050406030204" pitchFamily="18" charset="0"/>
-                        <a:cs typeface="Calibri" panose="020F0502020204030204" pitchFamily="34" charset="0"/>
-                        <a:sym typeface="Symbol" panose="05050102010706020507" pitchFamily="18" charset="2"/>
-                      </a:rPr>
-                      <m:t>∗</m:t>
-                    </m:r>
-                    <m:r>
-                      <m:rPr>
-                        <m:nor/>
-                      </m:rPr>
-                      <a:rPr lang="en-US" altLang="ko-KR" sz="2400" dirty="0">
-                        <a:latin typeface="Cambria Math" panose="02040503050406030204" pitchFamily="18" charset="0"/>
-                        <a:ea typeface="Cambria Math" panose="02040503050406030204" pitchFamily="18" charset="0"/>
-                        <a:cs typeface="Calibri" panose="020F0502020204030204" pitchFamily="34" charset="0"/>
-                        <a:sym typeface="Symbol" panose="05050102010706020507" pitchFamily="18" charset="2"/>
-                      </a:rPr>
-                      <m:t>5 </m:t>
-                    </m:r>
-                    <m:r>
-                      <m:rPr>
-                        <m:nor/>
-                      </m:rPr>
-                      <a:rPr lang="en-US" altLang="ko-KR" sz="2400" dirty="0">
-                        <a:latin typeface="Cambria Math" panose="02040503050406030204" pitchFamily="18" charset="0"/>
-                        <a:ea typeface="Cambria Math" panose="02040503050406030204" pitchFamily="18" charset="0"/>
-                        <a:cs typeface="Calibri" panose="020F0502020204030204" pitchFamily="34" charset="0"/>
-                        <a:sym typeface="Symbol" panose="05050102010706020507" pitchFamily="18" charset="2"/>
-                      </a:rPr>
-                      <m:t>= </m:t>
-                    </m:r>
-                    <m:r>
-                      <m:rPr>
-                        <m:nor/>
-                      </m:rPr>
-                      <a:rPr lang="en-US" altLang="ko-KR" sz="2400" dirty="0">
-                        <a:latin typeface="Cambria Math" panose="02040503050406030204" pitchFamily="18" charset="0"/>
-                        <a:ea typeface="Cambria Math" panose="02040503050406030204" pitchFamily="18" charset="0"/>
-                        <a:cs typeface="Calibri" panose="020F0502020204030204" pitchFamily="34" charset="0"/>
-                        <a:sym typeface="Symbol" panose="05050102010706020507" pitchFamily="18" charset="2"/>
-                      </a:rPr>
-                      <m:t>9</m:t>
+                      <m:t>=0.5∗13 + 0.5∗5 = 9</m:t>
                     </m:r>
                   </m:oMath>
                 </a14:m>
@@ -12635,250 +11914,113 @@
                     <m:sSub>
                       <m:sSubPr>
                         <m:ctrlPr>
-                          <a:rPr lang="ar-AE" sz="2400" i="1">
+                          <a:rPr lang="en-US" i="1">
                             <a:latin typeface="Cambria Math" panose="02040503050406030204" pitchFamily="18" charset="0"/>
-                            <a:ea typeface="Cambria Math" panose="02040503050406030204" pitchFamily="18" charset="0"/>
                           </a:rPr>
                         </m:ctrlPr>
                       </m:sSubPr>
                       <m:e>
-                        <m:sSub>
-                          <m:sSubPr>
-                            <m:ctrlPr>
-                              <a:rPr lang="ar-AE" sz="2400" i="1">
-                                <a:latin typeface="Cambria Math" panose="02040503050406030204" pitchFamily="18" charset="0"/>
-                                <a:ea typeface="Cambria Math" panose="02040503050406030204" pitchFamily="18" charset="0"/>
-                              </a:rPr>
-                            </m:ctrlPr>
-                          </m:sSubPr>
-                          <m:e>
-                            <m:r>
-                              <a:rPr lang="en-US" sz="2400" i="1">
-                                <a:latin typeface="Cambria Math" panose="02040503050406030204" pitchFamily="18" charset="0"/>
-                                <a:ea typeface="Cambria Math" panose="02040503050406030204" pitchFamily="18" charset="0"/>
-                              </a:rPr>
-                              <m:t>𝑡</m:t>
-                            </m:r>
-                          </m:e>
-                          <m:sub>
-                            <m:r>
-                              <a:rPr lang="en-US" sz="2400" b="0" i="1" smtClean="0">
-                                <a:latin typeface="Cambria Math" panose="02040503050406030204" pitchFamily="18" charset="0"/>
-                                <a:ea typeface="Cambria Math" panose="02040503050406030204" pitchFamily="18" charset="0"/>
-                              </a:rPr>
-                              <m:t>6</m:t>
-                            </m:r>
-                          </m:sub>
-                        </m:sSub>
                         <m:r>
-                          <a:rPr lang="en-US" sz="2400" i="1">
+                          <a:rPr lang="en-US" i="1">
                             <a:latin typeface="Cambria Math" panose="02040503050406030204" pitchFamily="18" charset="0"/>
-                            <a:ea typeface="Cambria Math" panose="02040503050406030204" pitchFamily="18" charset="0"/>
                           </a:rPr>
-                          <m:t>=</m:t>
+                          <m:t>𝜏</m:t>
                         </m:r>
+                      </m:e>
+                      <m:sub>
                         <m:r>
-                          <a:rPr lang="en-US" sz="2400" i="1">
+                          <a:rPr lang="en-US" i="1">
                             <a:latin typeface="Cambria Math" panose="02040503050406030204" pitchFamily="18" charset="0"/>
-                            <a:ea typeface="Cambria Math" panose="02040503050406030204" pitchFamily="18" charset="0"/>
                           </a:rPr>
-                          <m:t>𝛼</m:t>
+                          <m:t>6</m:t>
                         </m:r>
-                        <m:sSub>
-                          <m:sSubPr>
-                            <m:ctrlPr>
-                              <a:rPr lang="ar-AE" sz="2400" i="1">
-                                <a:latin typeface="Cambria Math" panose="02040503050406030204" pitchFamily="18" charset="0"/>
-                                <a:ea typeface="Cambria Math" panose="02040503050406030204" pitchFamily="18" charset="0"/>
-                              </a:rPr>
-                            </m:ctrlPr>
-                          </m:sSubPr>
-                          <m:e>
-                            <m:r>
-                              <a:rPr lang="ar-AE" sz="2400" i="1">
-                                <a:latin typeface="Cambria Math" panose="02040503050406030204" pitchFamily="18" charset="0"/>
-                                <a:ea typeface="Cambria Math" panose="02040503050406030204" pitchFamily="18" charset="0"/>
-                              </a:rPr>
-                              <m:t>𝑥</m:t>
-                            </m:r>
-                          </m:e>
-                          <m:sub>
-                            <m:r>
-                              <a:rPr lang="en-US" sz="2400" b="0" i="1" smtClean="0">
-                                <a:latin typeface="Cambria Math" panose="02040503050406030204" pitchFamily="18" charset="0"/>
-                                <a:ea typeface="Cambria Math" panose="02040503050406030204" pitchFamily="18" charset="0"/>
-                              </a:rPr>
-                              <m:t>6</m:t>
-                            </m:r>
-                          </m:sub>
-                        </m:sSub>
+                      </m:sub>
+                    </m:sSub>
+                    <m:r>
+                      <a:rPr lang="en-US" i="1">
+                        <a:latin typeface="Cambria Math" panose="02040503050406030204" pitchFamily="18" charset="0"/>
+                      </a:rPr>
+                      <m:t>=</m:t>
+                    </m:r>
+                    <m:r>
+                      <a:rPr lang="en-US" i="1">
+                        <a:latin typeface="Cambria Math" panose="02040503050406030204" pitchFamily="18" charset="0"/>
+                      </a:rPr>
+                      <m:t>𝛼</m:t>
+                    </m:r>
+                    <m:sSub>
+                      <m:sSubPr>
+                        <m:ctrlPr>
+                          <a:rPr lang="en-US" i="1">
+                            <a:latin typeface="Cambria Math" panose="02040503050406030204" pitchFamily="18" charset="0"/>
+                          </a:rPr>
+                        </m:ctrlPr>
+                      </m:sSubPr>
+                      <m:e>
                         <m:r>
-                          <a:rPr lang="en-US" sz="2400" i="1">
+                          <a:rPr lang="en-US" i="1">
                             <a:latin typeface="Cambria Math" panose="02040503050406030204" pitchFamily="18" charset="0"/>
-                            <a:ea typeface="Cambria Math" panose="02040503050406030204" pitchFamily="18" charset="0"/>
-                          </a:rPr>
-                          <m:t>+(</m:t>
-                        </m:r>
-                        <m:r>
-                          <a:rPr lang="en-US" sz="2400" i="1">
-                            <a:latin typeface="Cambria Math" panose="02040503050406030204" pitchFamily="18" charset="0"/>
-                            <a:ea typeface="Cambria Math" panose="02040503050406030204" pitchFamily="18" charset="0"/>
-                          </a:rPr>
-                          <m:t>1</m:t>
-                        </m:r>
-                        <m:r>
-                          <a:rPr lang="en-US" sz="2400" i="1">
-                            <a:latin typeface="Cambria Math" panose="02040503050406030204" pitchFamily="18" charset="0"/>
-                            <a:ea typeface="Cambria Math" panose="02040503050406030204" pitchFamily="18" charset="0"/>
-                          </a:rPr>
-                          <m:t>−</m:t>
-                        </m:r>
-                        <m:r>
-                          <a:rPr lang="en-US" sz="2400" i="1">
-                            <a:latin typeface="Cambria Math" panose="02040503050406030204" pitchFamily="18" charset="0"/>
-                            <a:ea typeface="Cambria Math" panose="02040503050406030204" pitchFamily="18" charset="0"/>
-                          </a:rPr>
-                          <m:t>𝛼</m:t>
-                        </m:r>
-                        <m:r>
-                          <a:rPr lang="en-US" sz="2400" i="1">
-                            <a:latin typeface="Cambria Math" panose="02040503050406030204" pitchFamily="18" charset="0"/>
-                            <a:ea typeface="Cambria Math" panose="02040503050406030204" pitchFamily="18" charset="0"/>
-                          </a:rPr>
-                          <m:t>)</m:t>
-                        </m:r>
-                        <m:r>
-                          <a:rPr lang="en-US" sz="2400" i="1">
-                            <a:latin typeface="Cambria Math" panose="02040503050406030204" pitchFamily="18" charset="0"/>
-                            <a:ea typeface="Cambria Math" panose="02040503050406030204" pitchFamily="18" charset="0"/>
                           </a:rPr>
                           <m:t>𝑡</m:t>
                         </m:r>
                       </m:e>
                       <m:sub>
                         <m:r>
-                          <a:rPr lang="en-US" sz="2400" b="0" i="1" smtClean="0">
+                          <a:rPr lang="en-US" i="1">
                             <a:latin typeface="Cambria Math" panose="02040503050406030204" pitchFamily="18" charset="0"/>
-                            <a:ea typeface="Cambria Math" panose="02040503050406030204" pitchFamily="18" charset="0"/>
                           </a:rPr>
                           <m:t>5</m:t>
                         </m:r>
                       </m:sub>
                     </m:sSub>
                     <m:r>
-                      <a:rPr lang="en-US" sz="2400" i="1">
+                      <a:rPr lang="en-US" i="1">
                         <a:latin typeface="Cambria Math" panose="02040503050406030204" pitchFamily="18" charset="0"/>
-                        <a:ea typeface="Cambria Math" panose="02040503050406030204" pitchFamily="18" charset="0"/>
                       </a:rPr>
-                      <m:t>=</m:t>
+                      <m:t>+(1−</m:t>
                     </m:r>
                     <m:r>
-                      <m:rPr>
-                        <m:nor/>
-                      </m:rPr>
-                      <a:rPr lang="en-US" altLang="ko-KR" sz="2400" dirty="0">
+                      <a:rPr lang="en-US" i="1">
                         <a:latin typeface="Cambria Math" panose="02040503050406030204" pitchFamily="18" charset="0"/>
-                        <a:ea typeface="Cambria Math" panose="02040503050406030204" pitchFamily="18" charset="0"/>
-                        <a:cs typeface="Calibri" panose="020F0502020204030204" pitchFamily="34" charset="0"/>
-                        <a:sym typeface="Symbol" panose="05050102010706020507" pitchFamily="18" charset="2"/>
                       </a:rPr>
-                      <m:t>0.5</m:t>
+                      <m:t>𝛼</m:t>
                     </m:r>
                     <m:r>
-                      <m:rPr>
-                        <m:nor/>
-                      </m:rPr>
-                      <a:rPr lang="en-US" altLang="ko-KR" sz="2400" dirty="0">
+                      <a:rPr lang="en-US" i="1">
                         <a:latin typeface="Cambria Math" panose="02040503050406030204" pitchFamily="18" charset="0"/>
-                        <a:ea typeface="Cambria Math" panose="02040503050406030204" pitchFamily="18" charset="0"/>
-                        <a:cs typeface="Calibri" panose="020F0502020204030204" pitchFamily="34" charset="0"/>
-                        <a:sym typeface="Symbol" panose="05050102010706020507" pitchFamily="18" charset="2"/>
                       </a:rPr>
-                      <m:t>∗</m:t>
+                      <m:t>)</m:t>
                     </m:r>
+                    <m:sSub>
+                      <m:sSubPr>
+                        <m:ctrlPr>
+                          <a:rPr lang="en-US" i="1">
+                            <a:latin typeface="Cambria Math" panose="02040503050406030204" pitchFamily="18" charset="0"/>
+                          </a:rPr>
+                        </m:ctrlPr>
+                      </m:sSubPr>
+                      <m:e>
+                        <m:r>
+                          <a:rPr lang="en-US" i="1">
+                            <a:latin typeface="Cambria Math" panose="02040503050406030204" pitchFamily="18" charset="0"/>
+                          </a:rPr>
+                          <m:t>𝜏</m:t>
+                        </m:r>
+                      </m:e>
+                      <m:sub>
+                        <m:r>
+                          <a:rPr lang="en-US" i="1">
+                            <a:latin typeface="Cambria Math" panose="02040503050406030204" pitchFamily="18" charset="0"/>
+                          </a:rPr>
+                          <m:t>5</m:t>
+                        </m:r>
+                      </m:sub>
+                    </m:sSub>
                     <m:r>
-                      <m:rPr>
-                        <m:nor/>
-                      </m:rPr>
-                      <a:rPr lang="en-US" altLang="ko-KR" sz="2400" dirty="0">
+                      <a:rPr lang="en-US" i="1">
                         <a:latin typeface="Cambria Math" panose="02040503050406030204" pitchFamily="18" charset="0"/>
-                        <a:ea typeface="Cambria Math" panose="02040503050406030204" pitchFamily="18" charset="0"/>
-                        <a:cs typeface="Calibri" panose="020F0502020204030204" pitchFamily="34" charset="0"/>
-                        <a:sym typeface="Symbol" panose="05050102010706020507" pitchFamily="18" charset="2"/>
                       </a:rPr>
-                      <m:t>13 </m:t>
-                    </m:r>
-                    <m:r>
-                      <m:rPr>
-                        <m:nor/>
-                      </m:rPr>
-                      <a:rPr lang="en-US" altLang="ko-KR" sz="2400" dirty="0">
-                        <a:latin typeface="Cambria Math" panose="02040503050406030204" pitchFamily="18" charset="0"/>
-                        <a:ea typeface="Cambria Math" panose="02040503050406030204" pitchFamily="18" charset="0"/>
-                        <a:cs typeface="Calibri" panose="020F0502020204030204" pitchFamily="34" charset="0"/>
-                        <a:sym typeface="Symbol" panose="05050102010706020507" pitchFamily="18" charset="2"/>
-                      </a:rPr>
-                      <m:t>+ </m:t>
-                    </m:r>
-                    <m:r>
-                      <m:rPr>
-                        <m:nor/>
-                      </m:rPr>
-                      <a:rPr lang="en-US" altLang="ko-KR" sz="2400" dirty="0">
-                        <a:latin typeface="Cambria Math" panose="02040503050406030204" pitchFamily="18" charset="0"/>
-                        <a:ea typeface="Cambria Math" panose="02040503050406030204" pitchFamily="18" charset="0"/>
-                        <a:cs typeface="Calibri" panose="020F0502020204030204" pitchFamily="34" charset="0"/>
-                        <a:sym typeface="Symbol" panose="05050102010706020507" pitchFamily="18" charset="2"/>
-                      </a:rPr>
-                      <m:t>0.5</m:t>
-                    </m:r>
-                    <m:r>
-                      <m:rPr>
-                        <m:nor/>
-                      </m:rPr>
-                      <a:rPr lang="en-US" altLang="ko-KR" sz="2400" dirty="0">
-                        <a:latin typeface="Cambria Math" panose="02040503050406030204" pitchFamily="18" charset="0"/>
-                        <a:ea typeface="Cambria Math" panose="02040503050406030204" pitchFamily="18" charset="0"/>
-                        <a:cs typeface="Calibri" panose="020F0502020204030204" pitchFamily="34" charset="0"/>
-                        <a:sym typeface="Symbol" panose="05050102010706020507" pitchFamily="18" charset="2"/>
-                      </a:rPr>
-                      <m:t>∗</m:t>
-                    </m:r>
-                    <m:r>
-                      <m:rPr>
-                        <m:nor/>
-                      </m:rPr>
-                      <a:rPr lang="en-US" altLang="ko-KR" sz="2400" dirty="0">
-                        <a:latin typeface="Cambria Math" panose="02040503050406030204" pitchFamily="18" charset="0"/>
-                        <a:ea typeface="Cambria Math" panose="02040503050406030204" pitchFamily="18" charset="0"/>
-                        <a:cs typeface="Calibri" panose="020F0502020204030204" pitchFamily="34" charset="0"/>
-                        <a:sym typeface="Symbol" panose="05050102010706020507" pitchFamily="18" charset="2"/>
-                      </a:rPr>
-                      <m:t>9 </m:t>
-                    </m:r>
-                    <m:r>
-                      <m:rPr>
-                        <m:nor/>
-                      </m:rPr>
-                      <a:rPr lang="en-US" altLang="ko-KR" sz="2400" dirty="0">
-                        <a:latin typeface="Cambria Math" panose="02040503050406030204" pitchFamily="18" charset="0"/>
-                        <a:ea typeface="Cambria Math" panose="02040503050406030204" pitchFamily="18" charset="0"/>
-                        <a:cs typeface="Calibri" panose="020F0502020204030204" pitchFamily="34" charset="0"/>
-                        <a:sym typeface="Symbol" panose="05050102010706020507" pitchFamily="18" charset="2"/>
-                      </a:rPr>
-                      <m:t>= </m:t>
-                    </m:r>
-                    <m:r>
-                      <m:rPr>
-                        <m:nor/>
-                      </m:rPr>
-                      <a:rPr lang="en-US" altLang="ko-KR" sz="2400" dirty="0">
-                        <a:latin typeface="Cambria Math" panose="02040503050406030204" pitchFamily="18" charset="0"/>
-                        <a:ea typeface="Cambria Math" panose="02040503050406030204" pitchFamily="18" charset="0"/>
-                        <a:cs typeface="Calibri" panose="020F0502020204030204" pitchFamily="34" charset="0"/>
-                        <a:sym typeface="Symbol" panose="05050102010706020507" pitchFamily="18" charset="2"/>
-                      </a:rPr>
-                      <m:t>11</m:t>
+                      <m:t>=0.5∗13 + 0.5∗9 = 11</m:t>
                     </m:r>
                   </m:oMath>
                 </a14:m>
@@ -12895,250 +12037,113 @@
                     <m:sSub>
                       <m:sSubPr>
                         <m:ctrlPr>
-                          <a:rPr lang="ar-AE" sz="2400" i="1">
+                          <a:rPr lang="en-US" i="1">
                             <a:latin typeface="Cambria Math" panose="02040503050406030204" pitchFamily="18" charset="0"/>
-                            <a:ea typeface="Cambria Math" panose="02040503050406030204" pitchFamily="18" charset="0"/>
                           </a:rPr>
                         </m:ctrlPr>
                       </m:sSubPr>
                       <m:e>
-                        <m:sSub>
-                          <m:sSubPr>
-                            <m:ctrlPr>
-                              <a:rPr lang="ar-AE" sz="2400" i="1">
-                                <a:latin typeface="Cambria Math" panose="02040503050406030204" pitchFamily="18" charset="0"/>
-                                <a:ea typeface="Cambria Math" panose="02040503050406030204" pitchFamily="18" charset="0"/>
-                              </a:rPr>
-                            </m:ctrlPr>
-                          </m:sSubPr>
-                          <m:e>
-                            <m:r>
-                              <a:rPr lang="en-US" sz="2400" i="1">
-                                <a:latin typeface="Cambria Math" panose="02040503050406030204" pitchFamily="18" charset="0"/>
-                                <a:ea typeface="Cambria Math" panose="02040503050406030204" pitchFamily="18" charset="0"/>
-                              </a:rPr>
-                              <m:t>𝑡</m:t>
-                            </m:r>
-                          </m:e>
-                          <m:sub>
-                            <m:r>
-                              <a:rPr lang="en-US" sz="2400" b="0" i="1" smtClean="0">
-                                <a:latin typeface="Cambria Math" panose="02040503050406030204" pitchFamily="18" charset="0"/>
-                                <a:ea typeface="Cambria Math" panose="02040503050406030204" pitchFamily="18" charset="0"/>
-                              </a:rPr>
-                              <m:t>7</m:t>
-                            </m:r>
-                          </m:sub>
-                        </m:sSub>
                         <m:r>
-                          <a:rPr lang="en-US" sz="2400" i="1">
+                          <a:rPr lang="en-US" i="1">
                             <a:latin typeface="Cambria Math" panose="02040503050406030204" pitchFamily="18" charset="0"/>
-                            <a:ea typeface="Cambria Math" panose="02040503050406030204" pitchFamily="18" charset="0"/>
                           </a:rPr>
-                          <m:t>=</m:t>
+                          <m:t>𝜏</m:t>
                         </m:r>
+                      </m:e>
+                      <m:sub>
                         <m:r>
-                          <a:rPr lang="en-US" sz="2400" i="1">
+                          <a:rPr lang="en-US" i="1">
                             <a:latin typeface="Cambria Math" panose="02040503050406030204" pitchFamily="18" charset="0"/>
-                            <a:ea typeface="Cambria Math" panose="02040503050406030204" pitchFamily="18" charset="0"/>
                           </a:rPr>
-                          <m:t>𝛼</m:t>
+                          <m:t>7</m:t>
                         </m:r>
-                        <m:sSub>
-                          <m:sSubPr>
-                            <m:ctrlPr>
-                              <a:rPr lang="ar-AE" sz="2400" i="1">
-                                <a:latin typeface="Cambria Math" panose="02040503050406030204" pitchFamily="18" charset="0"/>
-                                <a:ea typeface="Cambria Math" panose="02040503050406030204" pitchFamily="18" charset="0"/>
-                              </a:rPr>
-                            </m:ctrlPr>
-                          </m:sSubPr>
-                          <m:e>
-                            <m:r>
-                              <a:rPr lang="ar-AE" sz="2400" i="1">
-                                <a:latin typeface="Cambria Math" panose="02040503050406030204" pitchFamily="18" charset="0"/>
-                                <a:ea typeface="Cambria Math" panose="02040503050406030204" pitchFamily="18" charset="0"/>
-                              </a:rPr>
-                              <m:t>𝑥</m:t>
-                            </m:r>
-                          </m:e>
-                          <m:sub>
-                            <m:r>
-                              <a:rPr lang="en-US" sz="2400" b="0" i="1" smtClean="0">
-                                <a:latin typeface="Cambria Math" panose="02040503050406030204" pitchFamily="18" charset="0"/>
-                                <a:ea typeface="Cambria Math" panose="02040503050406030204" pitchFamily="18" charset="0"/>
-                              </a:rPr>
-                              <m:t>7</m:t>
-                            </m:r>
-                          </m:sub>
-                        </m:sSub>
+                      </m:sub>
+                    </m:sSub>
+                    <m:r>
+                      <a:rPr lang="en-US" i="1">
+                        <a:latin typeface="Cambria Math" panose="02040503050406030204" pitchFamily="18" charset="0"/>
+                      </a:rPr>
+                      <m:t>=</m:t>
+                    </m:r>
+                    <m:r>
+                      <a:rPr lang="en-US" i="1">
+                        <a:latin typeface="Cambria Math" panose="02040503050406030204" pitchFamily="18" charset="0"/>
+                      </a:rPr>
+                      <m:t>𝛼</m:t>
+                    </m:r>
+                    <m:sSub>
+                      <m:sSubPr>
+                        <m:ctrlPr>
+                          <a:rPr lang="en-US" i="1">
+                            <a:latin typeface="Cambria Math" panose="02040503050406030204" pitchFamily="18" charset="0"/>
+                          </a:rPr>
+                        </m:ctrlPr>
+                      </m:sSubPr>
+                      <m:e>
                         <m:r>
-                          <a:rPr lang="en-US" sz="2400" i="1">
+                          <a:rPr lang="en-US" i="1">
                             <a:latin typeface="Cambria Math" panose="02040503050406030204" pitchFamily="18" charset="0"/>
-                            <a:ea typeface="Cambria Math" panose="02040503050406030204" pitchFamily="18" charset="0"/>
-                          </a:rPr>
-                          <m:t>+(</m:t>
-                        </m:r>
-                        <m:r>
-                          <a:rPr lang="en-US" sz="2400" i="1">
-                            <a:latin typeface="Cambria Math" panose="02040503050406030204" pitchFamily="18" charset="0"/>
-                            <a:ea typeface="Cambria Math" panose="02040503050406030204" pitchFamily="18" charset="0"/>
-                          </a:rPr>
-                          <m:t>1</m:t>
-                        </m:r>
-                        <m:r>
-                          <a:rPr lang="en-US" sz="2400" i="1">
-                            <a:latin typeface="Cambria Math" panose="02040503050406030204" pitchFamily="18" charset="0"/>
-                            <a:ea typeface="Cambria Math" panose="02040503050406030204" pitchFamily="18" charset="0"/>
-                          </a:rPr>
-                          <m:t>−</m:t>
-                        </m:r>
-                        <m:r>
-                          <a:rPr lang="en-US" sz="2400" i="1">
-                            <a:latin typeface="Cambria Math" panose="02040503050406030204" pitchFamily="18" charset="0"/>
-                            <a:ea typeface="Cambria Math" panose="02040503050406030204" pitchFamily="18" charset="0"/>
-                          </a:rPr>
-                          <m:t>𝛼</m:t>
-                        </m:r>
-                        <m:r>
-                          <a:rPr lang="en-US" sz="2400" i="1">
-                            <a:latin typeface="Cambria Math" panose="02040503050406030204" pitchFamily="18" charset="0"/>
-                            <a:ea typeface="Cambria Math" panose="02040503050406030204" pitchFamily="18" charset="0"/>
-                          </a:rPr>
-                          <m:t>)</m:t>
-                        </m:r>
-                        <m:r>
-                          <a:rPr lang="en-US" sz="2400" i="1">
-                            <a:latin typeface="Cambria Math" panose="02040503050406030204" pitchFamily="18" charset="0"/>
-                            <a:ea typeface="Cambria Math" panose="02040503050406030204" pitchFamily="18" charset="0"/>
                           </a:rPr>
                           <m:t>𝑡</m:t>
                         </m:r>
                       </m:e>
                       <m:sub>
                         <m:r>
-                          <a:rPr lang="en-US" sz="2400" b="0" i="1" smtClean="0">
+                          <a:rPr lang="en-US" i="1">
                             <a:latin typeface="Cambria Math" panose="02040503050406030204" pitchFamily="18" charset="0"/>
-                            <a:ea typeface="Cambria Math" panose="02040503050406030204" pitchFamily="18" charset="0"/>
                           </a:rPr>
                           <m:t>6</m:t>
                         </m:r>
                       </m:sub>
                     </m:sSub>
                     <m:r>
-                      <a:rPr lang="en-US" sz="2400" i="1">
+                      <a:rPr lang="en-US" i="1">
                         <a:latin typeface="Cambria Math" panose="02040503050406030204" pitchFamily="18" charset="0"/>
-                        <a:ea typeface="Cambria Math" panose="02040503050406030204" pitchFamily="18" charset="0"/>
                       </a:rPr>
-                      <m:t>=</m:t>
+                      <m:t>+(1−</m:t>
                     </m:r>
                     <m:r>
-                      <m:rPr>
-                        <m:nor/>
-                      </m:rPr>
-                      <a:rPr lang="en-US" altLang="ko-KR" sz="2400" dirty="0">
+                      <a:rPr lang="en-US" i="1">
                         <a:latin typeface="Cambria Math" panose="02040503050406030204" pitchFamily="18" charset="0"/>
-                        <a:ea typeface="Cambria Math" panose="02040503050406030204" pitchFamily="18" charset="0"/>
-                        <a:cs typeface="Calibri" panose="020F0502020204030204" pitchFamily="34" charset="0"/>
-                        <a:sym typeface="Symbol" panose="05050102010706020507" pitchFamily="18" charset="2"/>
                       </a:rPr>
-                      <m:t>0.5</m:t>
+                      <m:t>𝛼</m:t>
                     </m:r>
                     <m:r>
-                      <m:rPr>
-                        <m:nor/>
-                      </m:rPr>
-                      <a:rPr lang="en-US" altLang="ko-KR" sz="2400" dirty="0">
+                      <a:rPr lang="en-US" i="1">
                         <a:latin typeface="Cambria Math" panose="02040503050406030204" pitchFamily="18" charset="0"/>
-                        <a:ea typeface="Cambria Math" panose="02040503050406030204" pitchFamily="18" charset="0"/>
-                        <a:cs typeface="Calibri" panose="020F0502020204030204" pitchFamily="34" charset="0"/>
-                        <a:sym typeface="Symbol" panose="05050102010706020507" pitchFamily="18" charset="2"/>
                       </a:rPr>
-                      <m:t>∗</m:t>
+                      <m:t>)</m:t>
                     </m:r>
+                    <m:sSub>
+                      <m:sSubPr>
+                        <m:ctrlPr>
+                          <a:rPr lang="en-US" i="1">
+                            <a:latin typeface="Cambria Math" panose="02040503050406030204" pitchFamily="18" charset="0"/>
+                          </a:rPr>
+                        </m:ctrlPr>
+                      </m:sSubPr>
+                      <m:e>
+                        <m:r>
+                          <a:rPr lang="en-US" i="1">
+                            <a:latin typeface="Cambria Math" panose="02040503050406030204" pitchFamily="18" charset="0"/>
+                          </a:rPr>
+                          <m:t>𝜏</m:t>
+                        </m:r>
+                      </m:e>
+                      <m:sub>
+                        <m:r>
+                          <a:rPr lang="en-US" i="1">
+                            <a:latin typeface="Cambria Math" panose="02040503050406030204" pitchFamily="18" charset="0"/>
+                          </a:rPr>
+                          <m:t>6</m:t>
+                        </m:r>
+                      </m:sub>
+                    </m:sSub>
                     <m:r>
-                      <m:rPr>
-                        <m:nor/>
-                      </m:rPr>
-                      <a:rPr lang="en-US" altLang="ko-KR" sz="2400" dirty="0">
+                      <a:rPr lang="en-US" i="1">
                         <a:latin typeface="Cambria Math" panose="02040503050406030204" pitchFamily="18" charset="0"/>
-                        <a:ea typeface="Cambria Math" panose="02040503050406030204" pitchFamily="18" charset="0"/>
-                        <a:cs typeface="Calibri" panose="020F0502020204030204" pitchFamily="34" charset="0"/>
-                        <a:sym typeface="Symbol" panose="05050102010706020507" pitchFamily="18" charset="2"/>
                       </a:rPr>
-                      <m:t>13 </m:t>
-                    </m:r>
-                    <m:r>
-                      <m:rPr>
-                        <m:nor/>
-                      </m:rPr>
-                      <a:rPr lang="en-US" altLang="ko-KR" sz="2400" dirty="0">
-                        <a:latin typeface="Cambria Math" panose="02040503050406030204" pitchFamily="18" charset="0"/>
-                        <a:ea typeface="Cambria Math" panose="02040503050406030204" pitchFamily="18" charset="0"/>
-                        <a:cs typeface="Calibri" panose="020F0502020204030204" pitchFamily="34" charset="0"/>
-                        <a:sym typeface="Symbol" panose="05050102010706020507" pitchFamily="18" charset="2"/>
-                      </a:rPr>
-                      <m:t>+ </m:t>
-                    </m:r>
-                    <m:r>
-                      <m:rPr>
-                        <m:nor/>
-                      </m:rPr>
-                      <a:rPr lang="en-US" altLang="ko-KR" sz="2400" dirty="0">
-                        <a:latin typeface="Cambria Math" panose="02040503050406030204" pitchFamily="18" charset="0"/>
-                        <a:ea typeface="Cambria Math" panose="02040503050406030204" pitchFamily="18" charset="0"/>
-                        <a:cs typeface="Calibri" panose="020F0502020204030204" pitchFamily="34" charset="0"/>
-                        <a:sym typeface="Symbol" panose="05050102010706020507" pitchFamily="18" charset="2"/>
-                      </a:rPr>
-                      <m:t>0.5</m:t>
-                    </m:r>
-                    <m:r>
-                      <m:rPr>
-                        <m:nor/>
-                      </m:rPr>
-                      <a:rPr lang="en-US" altLang="ko-KR" sz="2400" dirty="0">
-                        <a:latin typeface="Cambria Math" panose="02040503050406030204" pitchFamily="18" charset="0"/>
-                        <a:ea typeface="Cambria Math" panose="02040503050406030204" pitchFamily="18" charset="0"/>
-                        <a:cs typeface="Calibri" panose="020F0502020204030204" pitchFamily="34" charset="0"/>
-                        <a:sym typeface="Symbol" panose="05050102010706020507" pitchFamily="18" charset="2"/>
-                      </a:rPr>
-                      <m:t>∗</m:t>
-                    </m:r>
-                    <m:r>
-                      <m:rPr>
-                        <m:nor/>
-                      </m:rPr>
-                      <a:rPr lang="en-US" altLang="ko-KR" sz="2400" dirty="0">
-                        <a:latin typeface="Cambria Math" panose="02040503050406030204" pitchFamily="18" charset="0"/>
-                        <a:ea typeface="Cambria Math" panose="02040503050406030204" pitchFamily="18" charset="0"/>
-                        <a:cs typeface="Calibri" panose="020F0502020204030204" pitchFamily="34" charset="0"/>
-                        <a:sym typeface="Symbol" panose="05050102010706020507" pitchFamily="18" charset="2"/>
-                      </a:rPr>
-                      <m:t>11 </m:t>
-                    </m:r>
-                    <m:r>
-                      <m:rPr>
-                        <m:nor/>
-                      </m:rPr>
-                      <a:rPr lang="en-US" altLang="ko-KR" sz="2400" dirty="0">
-                        <a:latin typeface="Cambria Math" panose="02040503050406030204" pitchFamily="18" charset="0"/>
-                        <a:ea typeface="Cambria Math" panose="02040503050406030204" pitchFamily="18" charset="0"/>
-                        <a:cs typeface="Calibri" panose="020F0502020204030204" pitchFamily="34" charset="0"/>
-                        <a:sym typeface="Symbol" panose="05050102010706020507" pitchFamily="18" charset="2"/>
-                      </a:rPr>
-                      <m:t>= </m:t>
-                    </m:r>
-                    <m:r>
-                      <m:rPr>
-                        <m:nor/>
-                      </m:rPr>
-                      <a:rPr lang="en-US" altLang="ko-KR" sz="2400" dirty="0">
-                        <a:latin typeface="Cambria Math" panose="02040503050406030204" pitchFamily="18" charset="0"/>
-                        <a:ea typeface="Cambria Math" panose="02040503050406030204" pitchFamily="18" charset="0"/>
-                        <a:cs typeface="Calibri" panose="020F0502020204030204" pitchFamily="34" charset="0"/>
-                        <a:sym typeface="Symbol" panose="05050102010706020507" pitchFamily="18" charset="2"/>
-                      </a:rPr>
-                      <m:t>12</m:t>
+                      <m:t>=0.5∗13 + 0.5∗11 = 12</m:t>
                     </m:r>
                   </m:oMath>
                 </a14:m>
@@ -13570,104 +12575,55 @@
                     <m:sSub>
                       <m:sSubPr>
                         <m:ctrlPr>
-                          <a:rPr lang="ar-AE" i="1">
+                          <a:rPr lang="en-US" i="1">
                             <a:latin typeface="Cambria Math" panose="02040503050406030204" pitchFamily="18" charset="0"/>
                           </a:rPr>
                         </m:ctrlPr>
                       </m:sSubPr>
                       <m:e>
-                        <m:sSub>
-                          <m:sSubPr>
-                            <m:ctrlPr>
-                              <a:rPr lang="ar-AE" i="1">
-                                <a:latin typeface="Cambria Math" panose="02040503050406030204" pitchFamily="18" charset="0"/>
-                              </a:rPr>
-                            </m:ctrlPr>
-                          </m:sSubPr>
-                          <m:e>
-                            <m:r>
-                              <a:rPr lang="en-US" i="1">
-                                <a:latin typeface="Cambria Math" panose="02040503050406030204" pitchFamily="18" charset="0"/>
-                              </a:rPr>
-                              <m:t>𝑡</m:t>
-                            </m:r>
-                          </m:e>
-                          <m:sub>
-                            <m:r>
-                              <a:rPr lang="ar-AE" i="1">
-                                <a:latin typeface="Cambria Math" panose="02040503050406030204" pitchFamily="18" charset="0"/>
-                              </a:rPr>
-                              <m:t>𝑛</m:t>
-                            </m:r>
-                          </m:sub>
-                        </m:sSub>
                         <m:r>
                           <a:rPr lang="en-US" i="1">
                             <a:latin typeface="Cambria Math" panose="02040503050406030204" pitchFamily="18" charset="0"/>
                           </a:rPr>
-                          <m:t>=</m:t>
+                          <m:t>𝜏</m:t>
+                        </m:r>
+                      </m:e>
+                      <m:sub>
+                        <m:r>
+                          <a:rPr lang="en-US" i="1">
+                            <a:latin typeface="Cambria Math" panose="02040503050406030204" pitchFamily="18" charset="0"/>
+                          </a:rPr>
+                          <m:t>𝑛</m:t>
                         </m:r>
                         <m:r>
                           <a:rPr lang="en-US" i="1">
                             <a:latin typeface="Cambria Math" panose="02040503050406030204" pitchFamily="18" charset="0"/>
                           </a:rPr>
-                          <m:t>𝛼</m:t>
+                          <m:t>+1</m:t>
                         </m:r>
-                        <m:sSub>
-                          <m:sSubPr>
-                            <m:ctrlPr>
-                              <a:rPr lang="ar-AE" i="1">
-                                <a:latin typeface="Cambria Math" panose="02040503050406030204" pitchFamily="18" charset="0"/>
-                              </a:rPr>
-                            </m:ctrlPr>
-                          </m:sSubPr>
-                          <m:e>
-                            <m:r>
-                              <a:rPr lang="ar-AE" i="1">
-                                <a:latin typeface="Cambria Math" panose="02040503050406030204" pitchFamily="18" charset="0"/>
-                              </a:rPr>
-                              <m:t>𝑥</m:t>
-                            </m:r>
-                          </m:e>
-                          <m:sub>
-                            <m:r>
-                              <a:rPr lang="ar-AE" i="1">
-                                <a:latin typeface="Cambria Math" panose="02040503050406030204" pitchFamily="18" charset="0"/>
-                              </a:rPr>
-                              <m:t>𝑛</m:t>
-                            </m:r>
-                          </m:sub>
-                        </m:sSub>
-                        <m:r>
+                      </m:sub>
+                    </m:sSub>
+                    <m:r>
+                      <a:rPr lang="en-US" i="1">
+                        <a:latin typeface="Cambria Math" panose="02040503050406030204" pitchFamily="18" charset="0"/>
+                      </a:rPr>
+                      <m:t>=</m:t>
+                    </m:r>
+                    <m:r>
+                      <a:rPr lang="en-US" i="1">
+                        <a:latin typeface="Cambria Math" panose="02040503050406030204" pitchFamily="18" charset="0"/>
+                      </a:rPr>
+                      <m:t>𝛼</m:t>
+                    </m:r>
+                    <m:sSub>
+                      <m:sSubPr>
+                        <m:ctrlPr>
                           <a:rPr lang="en-US" i="1">
                             <a:latin typeface="Cambria Math" panose="02040503050406030204" pitchFamily="18" charset="0"/>
                           </a:rPr>
-                          <m:t>+(</m:t>
-                        </m:r>
-                        <m:r>
-                          <a:rPr lang="en-US" i="1">
-                            <a:latin typeface="Cambria Math" panose="02040503050406030204" pitchFamily="18" charset="0"/>
-                          </a:rPr>
-                          <m:t>1</m:t>
-                        </m:r>
-                        <m:r>
-                          <a:rPr lang="en-US" i="1">
-                            <a:latin typeface="Cambria Math" panose="02040503050406030204" pitchFamily="18" charset="0"/>
-                          </a:rPr>
-                          <m:t>−</m:t>
-                        </m:r>
-                        <m:r>
-                          <a:rPr lang="en-US" i="1">
-                            <a:latin typeface="Cambria Math" panose="02040503050406030204" pitchFamily="18" charset="0"/>
-                          </a:rPr>
-                          <m:t>𝛼</m:t>
-                        </m:r>
-                        <m:r>
-                          <a:rPr lang="en-US" i="1">
-                            <a:latin typeface="Cambria Math" panose="02040503050406030204" pitchFamily="18" charset="0"/>
-                          </a:rPr>
-                          <m:t>)</m:t>
-                        </m:r>
+                        </m:ctrlPr>
+                      </m:sSubPr>
+                      <m:e>
                         <m:r>
                           <a:rPr lang="en-US" i="1">
                             <a:latin typeface="Cambria Math" panose="02040503050406030204" pitchFamily="18" charset="0"/>
@@ -13677,22 +12633,53 @@
                       </m:e>
                       <m:sub>
                         <m:r>
-                          <a:rPr lang="ar-AE" i="1">
+                          <a:rPr lang="en-US" i="1">
                             <a:latin typeface="Cambria Math" panose="02040503050406030204" pitchFamily="18" charset="0"/>
                           </a:rPr>
                           <m:t>𝑛</m:t>
                         </m:r>
-                        <m:r>
-                          <a:rPr lang="ar-AE">
+                      </m:sub>
+                    </m:sSub>
+                    <m:r>
+                      <a:rPr lang="en-US" i="1">
+                        <a:latin typeface="Cambria Math" panose="02040503050406030204" pitchFamily="18" charset="0"/>
+                      </a:rPr>
+                      <m:t>+(1−</m:t>
+                    </m:r>
+                    <m:r>
+                      <a:rPr lang="en-US" i="1">
+                        <a:latin typeface="Cambria Math" panose="02040503050406030204" pitchFamily="18" charset="0"/>
+                      </a:rPr>
+                      <m:t>𝛼</m:t>
+                    </m:r>
+                    <m:r>
+                      <a:rPr lang="en-US" i="1">
+                        <a:latin typeface="Cambria Math" panose="02040503050406030204" pitchFamily="18" charset="0"/>
+                      </a:rPr>
+                      <m:t>)</m:t>
+                    </m:r>
+                    <m:sSub>
+                      <m:sSubPr>
+                        <m:ctrlPr>
+                          <a:rPr lang="en-US" i="1">
                             <a:latin typeface="Cambria Math" panose="02040503050406030204" pitchFamily="18" charset="0"/>
                           </a:rPr>
-                          <m:t>−</m:t>
-                        </m:r>
+                        </m:ctrlPr>
+                      </m:sSubPr>
+                      <m:e>
                         <m:r>
-                          <a:rPr lang="ar-AE">
+                          <a:rPr lang="en-US" i="1">
                             <a:latin typeface="Cambria Math" panose="02040503050406030204" pitchFamily="18" charset="0"/>
                           </a:rPr>
-                          <m:t>1</m:t>
+                          <m:t>𝜏</m:t>
+                        </m:r>
+                      </m:e>
+                      <m:sub>
+                        <m:r>
+                          <a:rPr lang="en-US" i="1">
+                            <a:latin typeface="Cambria Math" panose="02040503050406030204" pitchFamily="18" charset="0"/>
+                          </a:rPr>
+                          <m:t>𝑛</m:t>
                         </m:r>
                       </m:sub>
                     </m:sSub>
@@ -13723,122 +12710,52 @@
                     <m:sSub>
                       <m:sSubPr>
                         <m:ctrlPr>
-                          <a:rPr lang="ar-AE" i="1">
+                          <a:rPr lang="en-US" i="1">
                             <a:latin typeface="Cambria Math" panose="02040503050406030204" pitchFamily="18" charset="0"/>
-                            <a:ea typeface="Cambria Math" panose="02040503050406030204" pitchFamily="18" charset="0"/>
                           </a:rPr>
                         </m:ctrlPr>
                       </m:sSubPr>
                       <m:e>
-                        <m:sSub>
-                          <m:sSubPr>
-                            <m:ctrlPr>
-                              <a:rPr lang="ar-AE" i="1">
-                                <a:latin typeface="Cambria Math" panose="02040503050406030204" pitchFamily="18" charset="0"/>
-                                <a:ea typeface="Cambria Math" panose="02040503050406030204" pitchFamily="18" charset="0"/>
-                              </a:rPr>
-                            </m:ctrlPr>
-                          </m:sSubPr>
-                          <m:e>
-                            <m:r>
-                              <a:rPr lang="en-US" i="1">
-                                <a:latin typeface="Cambria Math" panose="02040503050406030204" pitchFamily="18" charset="0"/>
-                                <a:ea typeface="Cambria Math" panose="02040503050406030204" pitchFamily="18" charset="0"/>
-                              </a:rPr>
-                              <m:t>𝑡</m:t>
-                            </m:r>
-                          </m:e>
-                          <m:sub>
-                            <m:r>
-                              <a:rPr lang="en-US" i="1">
-                                <a:latin typeface="Cambria Math" panose="02040503050406030204" pitchFamily="18" charset="0"/>
-                                <a:ea typeface="Cambria Math" panose="02040503050406030204" pitchFamily="18" charset="0"/>
-                              </a:rPr>
-                              <m:t>1</m:t>
-                            </m:r>
-                          </m:sub>
-                        </m:sSub>
                         <m:r>
                           <a:rPr lang="en-US" i="1">
                             <a:latin typeface="Cambria Math" panose="02040503050406030204" pitchFamily="18" charset="0"/>
-                            <a:ea typeface="Cambria Math" panose="02040503050406030204" pitchFamily="18" charset="0"/>
                           </a:rPr>
-                          <m:t>=</m:t>
+                          <m:t>𝜏</m:t>
                         </m:r>
+                      </m:e>
+                      <m:sub>
                         <m:r>
                           <a:rPr lang="en-US" i="1">
                             <a:latin typeface="Cambria Math" panose="02040503050406030204" pitchFamily="18" charset="0"/>
-                            <a:ea typeface="Cambria Math" panose="02040503050406030204" pitchFamily="18" charset="0"/>
                           </a:rPr>
-                          <m:t>𝛼</m:t>
+                          <m:t>1</m:t>
                         </m:r>
-                        <m:sSub>
-                          <m:sSubPr>
-                            <m:ctrlPr>
-                              <a:rPr lang="ar-AE" i="1">
-                                <a:latin typeface="Cambria Math" panose="02040503050406030204" pitchFamily="18" charset="0"/>
-                                <a:ea typeface="Cambria Math" panose="02040503050406030204" pitchFamily="18" charset="0"/>
-                              </a:rPr>
-                            </m:ctrlPr>
-                          </m:sSubPr>
-                          <m:e>
-                            <m:r>
-                              <a:rPr lang="ar-AE" i="1">
-                                <a:latin typeface="Cambria Math" panose="02040503050406030204" pitchFamily="18" charset="0"/>
-                                <a:ea typeface="Cambria Math" panose="02040503050406030204" pitchFamily="18" charset="0"/>
-                              </a:rPr>
-                              <m:t>𝑥</m:t>
-                            </m:r>
-                          </m:e>
-                          <m:sub>
-                            <m:r>
-                              <a:rPr lang="en-US" i="1">
-                                <a:latin typeface="Cambria Math" panose="02040503050406030204" pitchFamily="18" charset="0"/>
-                                <a:ea typeface="Cambria Math" panose="02040503050406030204" pitchFamily="18" charset="0"/>
-                              </a:rPr>
-                              <m:t>1</m:t>
-                            </m:r>
-                          </m:sub>
-                        </m:sSub>
+                      </m:sub>
+                    </m:sSub>
+                    <m:r>
+                      <a:rPr lang="en-US" i="1">
+                        <a:latin typeface="Cambria Math" panose="02040503050406030204" pitchFamily="18" charset="0"/>
+                      </a:rPr>
+                      <m:t>=</m:t>
+                    </m:r>
+                    <m:r>
+                      <a:rPr lang="en-US" i="1">
+                        <a:latin typeface="Cambria Math" panose="02040503050406030204" pitchFamily="18" charset="0"/>
+                      </a:rPr>
+                      <m:t>𝛼</m:t>
+                    </m:r>
+                    <m:sSub>
+                      <m:sSubPr>
+                        <m:ctrlPr>
+                          <a:rPr lang="en-US" i="1">
+                            <a:latin typeface="Cambria Math" panose="02040503050406030204" pitchFamily="18" charset="0"/>
+                          </a:rPr>
+                        </m:ctrlPr>
+                      </m:sSubPr>
+                      <m:e>
                         <m:r>
                           <a:rPr lang="en-US" i="1">
                             <a:latin typeface="Cambria Math" panose="02040503050406030204" pitchFamily="18" charset="0"/>
-                            <a:ea typeface="Cambria Math" panose="02040503050406030204" pitchFamily="18" charset="0"/>
-                          </a:rPr>
-                          <m:t>+(</m:t>
-                        </m:r>
-                        <m:r>
-                          <a:rPr lang="en-US" i="1">
-                            <a:latin typeface="Cambria Math" panose="02040503050406030204" pitchFamily="18" charset="0"/>
-                            <a:ea typeface="Cambria Math" panose="02040503050406030204" pitchFamily="18" charset="0"/>
-                          </a:rPr>
-                          <m:t>1</m:t>
-                        </m:r>
-                        <m:r>
-                          <a:rPr lang="en-US" i="1">
-                            <a:latin typeface="Cambria Math" panose="02040503050406030204" pitchFamily="18" charset="0"/>
-                            <a:ea typeface="Cambria Math" panose="02040503050406030204" pitchFamily="18" charset="0"/>
-                          </a:rPr>
-                          <m:t>−</m:t>
-                        </m:r>
-                        <m:r>
-                          <a:rPr lang="en-US" i="1">
-                            <a:latin typeface="Cambria Math" panose="02040503050406030204" pitchFamily="18" charset="0"/>
-                            <a:ea typeface="Cambria Math" panose="02040503050406030204" pitchFamily="18" charset="0"/>
-                          </a:rPr>
-                          <m:t>𝛼</m:t>
-                        </m:r>
-                        <m:r>
-                          <a:rPr lang="en-US" i="1">
-                            <a:latin typeface="Cambria Math" panose="02040503050406030204" pitchFamily="18" charset="0"/>
-                            <a:ea typeface="Cambria Math" panose="02040503050406030204" pitchFamily="18" charset="0"/>
-                          </a:rPr>
-                          <m:t>)</m:t>
-                        </m:r>
-                        <m:r>
-                          <a:rPr lang="en-US" i="1">
-                            <a:latin typeface="Cambria Math" panose="02040503050406030204" pitchFamily="18" charset="0"/>
-                            <a:ea typeface="Cambria Math" panose="02040503050406030204" pitchFamily="18" charset="0"/>
                           </a:rPr>
                           <m:t>𝑡</m:t>
                         </m:r>
@@ -13847,128 +12764,59 @@
                         <m:r>
                           <a:rPr lang="en-US" i="1">
                             <a:latin typeface="Cambria Math" panose="02040503050406030204" pitchFamily="18" charset="0"/>
-                            <a:ea typeface="Cambria Math" panose="02040503050406030204" pitchFamily="18" charset="0"/>
                           </a:rPr>
                           <m:t>0</m:t>
                         </m:r>
                       </m:sub>
                     </m:sSub>
                     <m:r>
-                      <a:rPr lang="en-US" b="0" i="1" smtClean="0">
+                      <a:rPr lang="en-US" i="1">
                         <a:latin typeface="Cambria Math" panose="02040503050406030204" pitchFamily="18" charset="0"/>
-                        <a:ea typeface="Cambria Math" panose="02040503050406030204" pitchFamily="18" charset="0"/>
                       </a:rPr>
-                      <m:t>=</m:t>
+                      <m:t>+(1−</m:t>
                     </m:r>
                     <m:r>
-                      <m:rPr>
-                        <m:nor/>
-                      </m:rPr>
-                      <a:rPr lang="en-US" altLang="ko-KR" dirty="0">
+                      <a:rPr lang="en-US" i="1">
                         <a:latin typeface="Cambria Math" panose="02040503050406030204" pitchFamily="18" charset="0"/>
-                        <a:ea typeface="Cambria Math" panose="02040503050406030204" pitchFamily="18" charset="0"/>
-                        <a:sym typeface="Symbol" panose="05050102010706020507" pitchFamily="18" charset="2"/>
                       </a:rPr>
-                      <m:t>0.</m:t>
+                      <m:t>𝛼</m:t>
                     </m:r>
                     <m:r>
-                      <m:rPr>
-                        <m:nor/>
-                      </m:rPr>
-                      <a:rPr lang="en-US" altLang="ko-KR" b="0" i="0" dirty="0" smtClean="0">
+                      <a:rPr lang="en-US" i="1">
                         <a:latin typeface="Cambria Math" panose="02040503050406030204" pitchFamily="18" charset="0"/>
-                        <a:ea typeface="Cambria Math" panose="02040503050406030204" pitchFamily="18" charset="0"/>
-                        <a:sym typeface="Symbol" panose="05050102010706020507" pitchFamily="18" charset="2"/>
                       </a:rPr>
-                      <m:t>1</m:t>
+                      <m:t>)</m:t>
                     </m:r>
+                    <m:sSub>
+                      <m:sSubPr>
+                        <m:ctrlPr>
+                          <a:rPr lang="en-US" i="1">
+                            <a:latin typeface="Cambria Math" panose="02040503050406030204" pitchFamily="18" charset="0"/>
+                          </a:rPr>
+                        </m:ctrlPr>
+                      </m:sSubPr>
+                      <m:e>
+                        <m:r>
+                          <a:rPr lang="en-US" i="1">
+                            <a:latin typeface="Cambria Math" panose="02040503050406030204" pitchFamily="18" charset="0"/>
+                          </a:rPr>
+                          <m:t>𝜏</m:t>
+                        </m:r>
+                      </m:e>
+                      <m:sub>
+                        <m:r>
+                          <a:rPr lang="en-US" i="1">
+                            <a:latin typeface="Cambria Math" panose="02040503050406030204" pitchFamily="18" charset="0"/>
+                          </a:rPr>
+                          <m:t>0</m:t>
+                        </m:r>
+                      </m:sub>
+                    </m:sSub>
                     <m:r>
-                      <m:rPr>
-                        <m:nor/>
-                      </m:rPr>
-                      <a:rPr lang="en-US" altLang="ko-KR" dirty="0">
+                      <a:rPr lang="en-US" i="1">
                         <a:latin typeface="Cambria Math" panose="02040503050406030204" pitchFamily="18" charset="0"/>
-                        <a:ea typeface="Cambria Math" panose="02040503050406030204" pitchFamily="18" charset="0"/>
-                        <a:sym typeface="Symbol" panose="05050102010706020507" pitchFamily="18" charset="2"/>
                       </a:rPr>
-                      <m:t>∗</m:t>
-                    </m:r>
-                    <m:r>
-                      <m:rPr>
-                        <m:nor/>
-                      </m:rPr>
-                      <a:rPr lang="en-US" altLang="ko-KR" dirty="0">
-                        <a:latin typeface="Cambria Math" panose="02040503050406030204" pitchFamily="18" charset="0"/>
-                        <a:ea typeface="Cambria Math" panose="02040503050406030204" pitchFamily="18" charset="0"/>
-                        <a:sym typeface="Symbol" panose="05050102010706020507" pitchFamily="18" charset="2"/>
-                      </a:rPr>
-                      <m:t>6 </m:t>
-                    </m:r>
-                    <m:r>
-                      <m:rPr>
-                        <m:nor/>
-                      </m:rPr>
-                      <a:rPr lang="en-US" altLang="ko-KR" dirty="0">
-                        <a:latin typeface="Cambria Math" panose="02040503050406030204" pitchFamily="18" charset="0"/>
-                        <a:ea typeface="Cambria Math" panose="02040503050406030204" pitchFamily="18" charset="0"/>
-                        <a:sym typeface="Symbol" panose="05050102010706020507" pitchFamily="18" charset="2"/>
-                      </a:rPr>
-                      <m:t>+ </m:t>
-                    </m:r>
-                    <m:r>
-                      <m:rPr>
-                        <m:nor/>
-                      </m:rPr>
-                      <a:rPr lang="en-US" altLang="ko-KR" dirty="0">
-                        <a:latin typeface="Cambria Math" panose="02040503050406030204" pitchFamily="18" charset="0"/>
-                        <a:ea typeface="Cambria Math" panose="02040503050406030204" pitchFamily="18" charset="0"/>
-                        <a:sym typeface="Symbol" panose="05050102010706020507" pitchFamily="18" charset="2"/>
-                      </a:rPr>
-                      <m:t>0.9</m:t>
-                    </m:r>
-                    <m:r>
-                      <m:rPr>
-                        <m:nor/>
-                      </m:rPr>
-                      <a:rPr lang="en-US" altLang="ko-KR" dirty="0">
-                        <a:latin typeface="Cambria Math" panose="02040503050406030204" pitchFamily="18" charset="0"/>
-                        <a:ea typeface="Cambria Math" panose="02040503050406030204" pitchFamily="18" charset="0"/>
-                        <a:sym typeface="Symbol" panose="05050102010706020507" pitchFamily="18" charset="2"/>
-                      </a:rPr>
-                      <m:t>∗</m:t>
-                    </m:r>
-                    <m:r>
-                      <m:rPr>
-                        <m:nor/>
-                      </m:rPr>
-                      <a:rPr lang="en-US" altLang="ko-KR" dirty="0">
-                        <a:latin typeface="Cambria Math" panose="02040503050406030204" pitchFamily="18" charset="0"/>
-                        <a:ea typeface="Cambria Math" panose="02040503050406030204" pitchFamily="18" charset="0"/>
-                        <a:sym typeface="Symbol" panose="05050102010706020507" pitchFamily="18" charset="2"/>
-                      </a:rPr>
-                      <m:t>10 </m:t>
-                    </m:r>
-                    <m:r>
-                      <m:rPr>
-                        <m:nor/>
-                      </m:rPr>
-                      <a:rPr lang="en-US" altLang="ko-KR" b="0" i="0" dirty="0" smtClean="0">
-                        <a:latin typeface="Cambria Math" panose="02040503050406030204" pitchFamily="18" charset="0"/>
-                        <a:ea typeface="Cambria Math" panose="02040503050406030204" pitchFamily="18" charset="0"/>
-                        <a:sym typeface="Symbol" panose="05050102010706020507" pitchFamily="18" charset="2"/>
-                      </a:rPr>
-                      <m:t>= </m:t>
-                    </m:r>
-                    <m:r>
-                      <m:rPr>
-                        <m:nor/>
-                      </m:rPr>
-                      <a:rPr lang="en-US" altLang="ko-KR" b="0" i="0" dirty="0" smtClean="0">
-                        <a:latin typeface="Cambria Math" panose="02040503050406030204" pitchFamily="18" charset="0"/>
-                        <a:ea typeface="Cambria Math" panose="02040503050406030204" pitchFamily="18" charset="0"/>
-                        <a:sym typeface="Symbol" panose="05050102010706020507" pitchFamily="18" charset="2"/>
-                      </a:rPr>
-                      <m:t>9.6</m:t>
+                      <m:t>=0.1∗6 + 0.9∗10 = 9.6</m:t>
                     </m:r>
                   </m:oMath>
                 </a14:m>
@@ -13984,131 +12832,60 @@
                     <m:sSub>
                       <m:sSubPr>
                         <m:ctrlPr>
-                          <a:rPr lang="ar-AE" i="1" smtClean="0">
+                          <a:rPr lang="en-US" i="1">
                             <a:latin typeface="Cambria Math" panose="02040503050406030204" pitchFamily="18" charset="0"/>
-                            <a:ea typeface="Cambria Math" panose="02040503050406030204" pitchFamily="18" charset="0"/>
                           </a:rPr>
                         </m:ctrlPr>
                       </m:sSubPr>
                       <m:e>
-                        <m:sSub>
-                          <m:sSubPr>
-                            <m:ctrlPr>
-                              <a:rPr lang="ar-AE" i="1">
-                                <a:latin typeface="Cambria Math" panose="02040503050406030204" pitchFamily="18" charset="0"/>
-                                <a:ea typeface="Cambria Math" panose="02040503050406030204" pitchFamily="18" charset="0"/>
-                              </a:rPr>
-                            </m:ctrlPr>
-                          </m:sSubPr>
-                          <m:e>
-                            <m:r>
-                              <a:rPr lang="en-US" i="1">
-                                <a:latin typeface="Cambria Math" panose="02040503050406030204" pitchFamily="18" charset="0"/>
-                                <a:ea typeface="Cambria Math" panose="02040503050406030204" pitchFamily="18" charset="0"/>
-                              </a:rPr>
-                              <m:t>𝑡</m:t>
-                            </m:r>
-                          </m:e>
-                          <m:sub>
-                            <m:r>
-                              <a:rPr lang="en-US" b="0" i="1" smtClean="0">
-                                <a:latin typeface="Cambria Math" panose="02040503050406030204" pitchFamily="18" charset="0"/>
-                                <a:ea typeface="Cambria Math" panose="02040503050406030204" pitchFamily="18" charset="0"/>
-                              </a:rPr>
-                              <m:t>2</m:t>
-                            </m:r>
-                          </m:sub>
-                        </m:sSub>
                         <m:r>
                           <a:rPr lang="en-US" i="1">
                             <a:latin typeface="Cambria Math" panose="02040503050406030204" pitchFamily="18" charset="0"/>
-                            <a:ea typeface="Cambria Math" panose="02040503050406030204" pitchFamily="18" charset="0"/>
                           </a:rPr>
-                          <m:t>=</m:t>
+                          <m:t>𝜏</m:t>
                         </m:r>
+                      </m:e>
+                      <m:sub>
                         <m:r>
                           <a:rPr lang="en-US" i="1">
                             <a:latin typeface="Cambria Math" panose="02040503050406030204" pitchFamily="18" charset="0"/>
-                            <a:ea typeface="Cambria Math" panose="02040503050406030204" pitchFamily="18" charset="0"/>
                           </a:rPr>
-                          <m:t>𝛼</m:t>
+                          <m:t>2</m:t>
                         </m:r>
-                        <m:sSub>
-                          <m:sSubPr>
-                            <m:ctrlPr>
-                              <a:rPr lang="ar-AE" i="1">
-                                <a:latin typeface="Cambria Math" panose="02040503050406030204" pitchFamily="18" charset="0"/>
-                                <a:ea typeface="Cambria Math" panose="02040503050406030204" pitchFamily="18" charset="0"/>
-                              </a:rPr>
-                            </m:ctrlPr>
-                          </m:sSubPr>
-                          <m:e>
-                            <m:r>
-                              <a:rPr lang="ar-AE" i="1">
-                                <a:latin typeface="Cambria Math" panose="02040503050406030204" pitchFamily="18" charset="0"/>
-                                <a:ea typeface="Cambria Math" panose="02040503050406030204" pitchFamily="18" charset="0"/>
-                              </a:rPr>
-                              <m:t>𝑥</m:t>
-                            </m:r>
-                          </m:e>
-                          <m:sub>
-                            <m:r>
-                              <a:rPr lang="en-US" b="0" i="1" smtClean="0">
-                                <a:latin typeface="Cambria Math" panose="02040503050406030204" pitchFamily="18" charset="0"/>
-                                <a:ea typeface="Cambria Math" panose="02040503050406030204" pitchFamily="18" charset="0"/>
-                              </a:rPr>
-                              <m:t>2</m:t>
-                            </m:r>
-                          </m:sub>
-                        </m:sSub>
+                      </m:sub>
+                    </m:sSub>
+                    <m:r>
+                      <a:rPr lang="en-US" i="1">
+                        <a:latin typeface="Cambria Math" panose="02040503050406030204" pitchFamily="18" charset="0"/>
+                      </a:rPr>
+                      <m:t>=</m:t>
+                    </m:r>
+                    <m:r>
+                      <a:rPr lang="en-US" i="1">
+                        <a:latin typeface="Cambria Math" panose="02040503050406030204" pitchFamily="18" charset="0"/>
+                      </a:rPr>
+                      <m:t>𝛼</m:t>
+                    </m:r>
+                    <m:sSub>
+                      <m:sSubPr>
+                        <m:ctrlPr>
+                          <a:rPr lang="en-US" i="1">
+                            <a:latin typeface="Cambria Math" panose="02040503050406030204" pitchFamily="18" charset="0"/>
+                          </a:rPr>
+                        </m:ctrlPr>
+                      </m:sSubPr>
+                      <m:e>
                         <m:r>
                           <a:rPr lang="en-US" i="1">
                             <a:latin typeface="Cambria Math" panose="02040503050406030204" pitchFamily="18" charset="0"/>
-                            <a:ea typeface="Cambria Math" panose="02040503050406030204" pitchFamily="18" charset="0"/>
-                          </a:rPr>
-                          <m:t>+(</m:t>
-                        </m:r>
-                        <m:r>
-                          <a:rPr lang="en-US" i="1">
-                            <a:latin typeface="Cambria Math" panose="02040503050406030204" pitchFamily="18" charset="0"/>
-                            <a:ea typeface="Cambria Math" panose="02040503050406030204" pitchFamily="18" charset="0"/>
-                          </a:rPr>
-                          <m:t>1</m:t>
-                        </m:r>
-                        <m:r>
-                          <a:rPr lang="en-US" i="1">
-                            <a:latin typeface="Cambria Math" panose="02040503050406030204" pitchFamily="18" charset="0"/>
-                            <a:ea typeface="Cambria Math" panose="02040503050406030204" pitchFamily="18" charset="0"/>
-                          </a:rPr>
-                          <m:t>−</m:t>
-                        </m:r>
-                        <m:r>
-                          <a:rPr lang="en-US" i="1">
-                            <a:latin typeface="Cambria Math" panose="02040503050406030204" pitchFamily="18" charset="0"/>
-                            <a:ea typeface="Cambria Math" panose="02040503050406030204" pitchFamily="18" charset="0"/>
-                          </a:rPr>
-                          <m:t>𝛼</m:t>
-                        </m:r>
-                        <m:r>
-                          <a:rPr lang="en-US" i="1">
-                            <a:latin typeface="Cambria Math" panose="02040503050406030204" pitchFamily="18" charset="0"/>
-                            <a:ea typeface="Cambria Math" panose="02040503050406030204" pitchFamily="18" charset="0"/>
-                          </a:rPr>
-                          <m:t>)</m:t>
-                        </m:r>
-                        <m:r>
-                          <a:rPr lang="en-US" i="1">
-                            <a:latin typeface="Cambria Math" panose="02040503050406030204" pitchFamily="18" charset="0"/>
-                            <a:ea typeface="Cambria Math" panose="02040503050406030204" pitchFamily="18" charset="0"/>
                           </a:rPr>
                           <m:t>𝑡</m:t>
                         </m:r>
                       </m:e>
                       <m:sub>
                         <m:r>
-                          <a:rPr lang="en-US" b="0" i="1" smtClean="0">
+                          <a:rPr lang="en-US" i="1">
                             <a:latin typeface="Cambria Math" panose="02040503050406030204" pitchFamily="18" charset="0"/>
-                            <a:ea typeface="Cambria Math" panose="02040503050406030204" pitchFamily="18" charset="0"/>
                           </a:rPr>
                           <m:t>1</m:t>
                         </m:r>
@@ -14117,130 +12894,51 @@
                     <m:r>
                       <a:rPr lang="en-US" i="1">
                         <a:latin typeface="Cambria Math" panose="02040503050406030204" pitchFamily="18" charset="0"/>
-                        <a:ea typeface="Cambria Math" panose="02040503050406030204" pitchFamily="18" charset="0"/>
                       </a:rPr>
-                      <m:t>=</m:t>
+                      <m:t>+(1−</m:t>
                     </m:r>
                     <m:r>
-                      <m:rPr>
-                        <m:nor/>
-                      </m:rPr>
-                      <a:rPr lang="en-US" altLang="ko-KR" dirty="0">
+                      <a:rPr lang="en-US" i="1">
                         <a:latin typeface="Cambria Math" panose="02040503050406030204" pitchFamily="18" charset="0"/>
-                        <a:ea typeface="Cambria Math" panose="02040503050406030204" pitchFamily="18" charset="0"/>
-                        <a:sym typeface="Symbol" panose="05050102010706020507" pitchFamily="18" charset="2"/>
                       </a:rPr>
-                      <m:t>0.</m:t>
+                      <m:t>𝛼</m:t>
                     </m:r>
                     <m:r>
-                      <m:rPr>
-                        <m:nor/>
-                      </m:rPr>
-                      <a:rPr lang="en-US" altLang="ko-KR" b="0" i="0" dirty="0" smtClean="0">
+                      <a:rPr lang="en-US" i="1">
                         <a:latin typeface="Cambria Math" panose="02040503050406030204" pitchFamily="18" charset="0"/>
-                        <a:ea typeface="Cambria Math" panose="02040503050406030204" pitchFamily="18" charset="0"/>
-                        <a:sym typeface="Symbol" panose="05050102010706020507" pitchFamily="18" charset="2"/>
                       </a:rPr>
-                      <m:t>1</m:t>
+                      <m:t>)</m:t>
                     </m:r>
+                    <m:sSub>
+                      <m:sSubPr>
+                        <m:ctrlPr>
+                          <a:rPr lang="en-US" i="1">
+                            <a:latin typeface="Cambria Math" panose="02040503050406030204" pitchFamily="18" charset="0"/>
+                          </a:rPr>
+                        </m:ctrlPr>
+                      </m:sSubPr>
+                      <m:e>
+                        <m:r>
+                          <a:rPr lang="en-US" i="1">
+                            <a:latin typeface="Cambria Math" panose="02040503050406030204" pitchFamily="18" charset="0"/>
+                          </a:rPr>
+                          <m:t>𝜏</m:t>
+                        </m:r>
+                      </m:e>
+                      <m:sub>
+                        <m:r>
+                          <a:rPr lang="en-US" i="1">
+                            <a:latin typeface="Cambria Math" panose="02040503050406030204" pitchFamily="18" charset="0"/>
+                          </a:rPr>
+                          <m:t>1</m:t>
+                        </m:r>
+                      </m:sub>
+                    </m:sSub>
                     <m:r>
-                      <m:rPr>
-                        <m:nor/>
-                      </m:rPr>
-                      <a:rPr lang="en-US" altLang="ko-KR" dirty="0">
+                      <a:rPr lang="en-US" i="1">
                         <a:latin typeface="Cambria Math" panose="02040503050406030204" pitchFamily="18" charset="0"/>
-                        <a:ea typeface="Cambria Math" panose="02040503050406030204" pitchFamily="18" charset="0"/>
-                        <a:sym typeface="Symbol" panose="05050102010706020507" pitchFamily="18" charset="2"/>
                       </a:rPr>
-                      <m:t>∗</m:t>
-                    </m:r>
-                    <m:r>
-                      <m:rPr>
-                        <m:nor/>
-                      </m:rPr>
-                      <a:rPr lang="en-US" altLang="ko-KR" dirty="0">
-                        <a:latin typeface="Cambria Math" panose="02040503050406030204" pitchFamily="18" charset="0"/>
-                        <a:ea typeface="Cambria Math" panose="02040503050406030204" pitchFamily="18" charset="0"/>
-                        <a:sym typeface="Symbol" panose="05050102010706020507" pitchFamily="18" charset="2"/>
-                      </a:rPr>
-                      <m:t>4 </m:t>
-                    </m:r>
-                    <m:r>
-                      <m:rPr>
-                        <m:nor/>
-                      </m:rPr>
-                      <a:rPr lang="en-US" altLang="ko-KR" dirty="0">
-                        <a:latin typeface="Cambria Math" panose="02040503050406030204" pitchFamily="18" charset="0"/>
-                        <a:ea typeface="Cambria Math" panose="02040503050406030204" pitchFamily="18" charset="0"/>
-                        <a:sym typeface="Symbol" panose="05050102010706020507" pitchFamily="18" charset="2"/>
-                      </a:rPr>
-                      <m:t>+ </m:t>
-                    </m:r>
-                    <m:r>
-                      <m:rPr>
-                        <m:nor/>
-                      </m:rPr>
-                      <a:rPr lang="en-US" altLang="ko-KR" dirty="0">
-                        <a:latin typeface="Cambria Math" panose="02040503050406030204" pitchFamily="18" charset="0"/>
-                        <a:ea typeface="Cambria Math" panose="02040503050406030204" pitchFamily="18" charset="0"/>
-                        <a:sym typeface="Symbol" panose="05050102010706020507" pitchFamily="18" charset="2"/>
-                      </a:rPr>
-                      <m:t>0.9</m:t>
-                    </m:r>
-                    <m:r>
-                      <m:rPr>
-                        <m:nor/>
-                      </m:rPr>
-                      <a:rPr lang="en-US" altLang="ko-KR" dirty="0">
-                        <a:latin typeface="Cambria Math" panose="02040503050406030204" pitchFamily="18" charset="0"/>
-                        <a:ea typeface="Cambria Math" panose="02040503050406030204" pitchFamily="18" charset="0"/>
-                        <a:sym typeface="Symbol" panose="05050102010706020507" pitchFamily="18" charset="2"/>
-                      </a:rPr>
-                      <m:t>∗</m:t>
-                    </m:r>
-                    <m:r>
-                      <m:rPr>
-                        <m:nor/>
-                      </m:rPr>
-                      <a:rPr lang="en-US" altLang="ko-KR" b="0" i="0" dirty="0" smtClean="0">
-                        <a:latin typeface="Cambria Math" panose="02040503050406030204" pitchFamily="18" charset="0"/>
-                        <a:ea typeface="Cambria Math" panose="02040503050406030204" pitchFamily="18" charset="0"/>
-                        <a:sym typeface="Symbol" panose="05050102010706020507" pitchFamily="18" charset="2"/>
-                      </a:rPr>
-                      <m:t>9.6</m:t>
-                    </m:r>
-                    <m:r>
-                      <m:rPr>
-                        <m:nor/>
-                      </m:rPr>
-                      <a:rPr lang="en-US" altLang="ko-KR" dirty="0">
-                        <a:latin typeface="Cambria Math" panose="02040503050406030204" pitchFamily="18" charset="0"/>
-                        <a:ea typeface="Cambria Math" panose="02040503050406030204" pitchFamily="18" charset="0"/>
-                        <a:sym typeface="Symbol" panose="05050102010706020507" pitchFamily="18" charset="2"/>
-                      </a:rPr>
-                      <m:t> </m:t>
-                    </m:r>
-                    <m:r>
-                      <m:rPr>
-                        <m:nor/>
-                      </m:rPr>
-                      <a:rPr lang="en-US" altLang="ko-KR" dirty="0">
-                        <a:latin typeface="Cambria Math" panose="02040503050406030204" pitchFamily="18" charset="0"/>
-                        <a:ea typeface="Cambria Math" panose="02040503050406030204" pitchFamily="18" charset="0"/>
-                        <a:sym typeface="Symbol" panose="05050102010706020507" pitchFamily="18" charset="2"/>
-                      </a:rPr>
-                      <m:t>= </m:t>
-                    </m:r>
-                    <m:r>
-                      <m:rPr>
-                        <m:nor/>
-                      </m:rPr>
-                      <a:rPr lang="en-US" altLang="ko-KR" b="0" i="0" dirty="0" smtClean="0">
-                        <a:latin typeface="Cambria Math" panose="02040503050406030204" pitchFamily="18" charset="0"/>
-                        <a:ea typeface="Cambria Math" panose="02040503050406030204" pitchFamily="18" charset="0"/>
-                        <a:sym typeface="Symbol" panose="05050102010706020507" pitchFamily="18" charset="2"/>
-                      </a:rPr>
-                      <m:t>9.0</m:t>
+                      <m:t>=0.1∗4 + 0.9∗9.6 = 9.0</m:t>
                     </m:r>
                   </m:oMath>
                 </a14:m>
@@ -14256,131 +12954,60 @@
                     <m:sSub>
                       <m:sSubPr>
                         <m:ctrlPr>
-                          <a:rPr lang="ar-AE" i="1">
+                          <a:rPr lang="en-US" i="1">
                             <a:latin typeface="Cambria Math" panose="02040503050406030204" pitchFamily="18" charset="0"/>
-                            <a:ea typeface="Cambria Math" panose="02040503050406030204" pitchFamily="18" charset="0"/>
                           </a:rPr>
                         </m:ctrlPr>
                       </m:sSubPr>
                       <m:e>
-                        <m:sSub>
-                          <m:sSubPr>
-                            <m:ctrlPr>
-                              <a:rPr lang="ar-AE" i="1">
-                                <a:latin typeface="Cambria Math" panose="02040503050406030204" pitchFamily="18" charset="0"/>
-                                <a:ea typeface="Cambria Math" panose="02040503050406030204" pitchFamily="18" charset="0"/>
-                              </a:rPr>
-                            </m:ctrlPr>
-                          </m:sSubPr>
-                          <m:e>
-                            <m:r>
-                              <a:rPr lang="en-US" i="1">
-                                <a:latin typeface="Cambria Math" panose="02040503050406030204" pitchFamily="18" charset="0"/>
-                                <a:ea typeface="Cambria Math" panose="02040503050406030204" pitchFamily="18" charset="0"/>
-                              </a:rPr>
-                              <m:t>𝑡</m:t>
-                            </m:r>
-                          </m:e>
-                          <m:sub>
-                            <m:r>
-                              <a:rPr lang="en-US" b="0" i="1" smtClean="0">
-                                <a:latin typeface="Cambria Math" panose="02040503050406030204" pitchFamily="18" charset="0"/>
-                                <a:ea typeface="Cambria Math" panose="02040503050406030204" pitchFamily="18" charset="0"/>
-                              </a:rPr>
-                              <m:t>3</m:t>
-                            </m:r>
-                          </m:sub>
-                        </m:sSub>
                         <m:r>
                           <a:rPr lang="en-US" i="1">
                             <a:latin typeface="Cambria Math" panose="02040503050406030204" pitchFamily="18" charset="0"/>
-                            <a:ea typeface="Cambria Math" panose="02040503050406030204" pitchFamily="18" charset="0"/>
                           </a:rPr>
-                          <m:t>=</m:t>
+                          <m:t>𝜏</m:t>
                         </m:r>
+                      </m:e>
+                      <m:sub>
                         <m:r>
                           <a:rPr lang="en-US" i="1">
                             <a:latin typeface="Cambria Math" panose="02040503050406030204" pitchFamily="18" charset="0"/>
-                            <a:ea typeface="Cambria Math" panose="02040503050406030204" pitchFamily="18" charset="0"/>
                           </a:rPr>
-                          <m:t>𝛼</m:t>
+                          <m:t>3</m:t>
                         </m:r>
-                        <m:sSub>
-                          <m:sSubPr>
-                            <m:ctrlPr>
-                              <a:rPr lang="ar-AE" i="1">
-                                <a:latin typeface="Cambria Math" panose="02040503050406030204" pitchFamily="18" charset="0"/>
-                                <a:ea typeface="Cambria Math" panose="02040503050406030204" pitchFamily="18" charset="0"/>
-                              </a:rPr>
-                            </m:ctrlPr>
-                          </m:sSubPr>
-                          <m:e>
-                            <m:r>
-                              <a:rPr lang="ar-AE" i="1">
-                                <a:latin typeface="Cambria Math" panose="02040503050406030204" pitchFamily="18" charset="0"/>
-                                <a:ea typeface="Cambria Math" panose="02040503050406030204" pitchFamily="18" charset="0"/>
-                              </a:rPr>
-                              <m:t>𝑥</m:t>
-                            </m:r>
-                          </m:e>
-                          <m:sub>
-                            <m:r>
-                              <a:rPr lang="en-US" b="0" i="1" smtClean="0">
-                                <a:latin typeface="Cambria Math" panose="02040503050406030204" pitchFamily="18" charset="0"/>
-                                <a:ea typeface="Cambria Math" panose="02040503050406030204" pitchFamily="18" charset="0"/>
-                              </a:rPr>
-                              <m:t>3</m:t>
-                            </m:r>
-                          </m:sub>
-                        </m:sSub>
+                      </m:sub>
+                    </m:sSub>
+                    <m:r>
+                      <a:rPr lang="en-US" i="1">
+                        <a:latin typeface="Cambria Math" panose="02040503050406030204" pitchFamily="18" charset="0"/>
+                      </a:rPr>
+                      <m:t>=</m:t>
+                    </m:r>
+                    <m:r>
+                      <a:rPr lang="en-US" i="1">
+                        <a:latin typeface="Cambria Math" panose="02040503050406030204" pitchFamily="18" charset="0"/>
+                      </a:rPr>
+                      <m:t>𝛼</m:t>
+                    </m:r>
+                    <m:sSub>
+                      <m:sSubPr>
+                        <m:ctrlPr>
+                          <a:rPr lang="en-US" i="1">
+                            <a:latin typeface="Cambria Math" panose="02040503050406030204" pitchFamily="18" charset="0"/>
+                          </a:rPr>
+                        </m:ctrlPr>
+                      </m:sSubPr>
+                      <m:e>
                         <m:r>
                           <a:rPr lang="en-US" i="1">
                             <a:latin typeface="Cambria Math" panose="02040503050406030204" pitchFamily="18" charset="0"/>
-                            <a:ea typeface="Cambria Math" panose="02040503050406030204" pitchFamily="18" charset="0"/>
-                          </a:rPr>
-                          <m:t>+(</m:t>
-                        </m:r>
-                        <m:r>
-                          <a:rPr lang="en-US" i="1">
-                            <a:latin typeface="Cambria Math" panose="02040503050406030204" pitchFamily="18" charset="0"/>
-                            <a:ea typeface="Cambria Math" panose="02040503050406030204" pitchFamily="18" charset="0"/>
-                          </a:rPr>
-                          <m:t>1</m:t>
-                        </m:r>
-                        <m:r>
-                          <a:rPr lang="en-US" i="1">
-                            <a:latin typeface="Cambria Math" panose="02040503050406030204" pitchFamily="18" charset="0"/>
-                            <a:ea typeface="Cambria Math" panose="02040503050406030204" pitchFamily="18" charset="0"/>
-                          </a:rPr>
-                          <m:t>−</m:t>
-                        </m:r>
-                        <m:r>
-                          <a:rPr lang="en-US" i="1">
-                            <a:latin typeface="Cambria Math" panose="02040503050406030204" pitchFamily="18" charset="0"/>
-                            <a:ea typeface="Cambria Math" panose="02040503050406030204" pitchFamily="18" charset="0"/>
-                          </a:rPr>
-                          <m:t>𝛼</m:t>
-                        </m:r>
-                        <m:r>
-                          <a:rPr lang="en-US" i="1">
-                            <a:latin typeface="Cambria Math" panose="02040503050406030204" pitchFamily="18" charset="0"/>
-                            <a:ea typeface="Cambria Math" panose="02040503050406030204" pitchFamily="18" charset="0"/>
-                          </a:rPr>
-                          <m:t>)</m:t>
-                        </m:r>
-                        <m:r>
-                          <a:rPr lang="en-US" i="1">
-                            <a:latin typeface="Cambria Math" panose="02040503050406030204" pitchFamily="18" charset="0"/>
-                            <a:ea typeface="Cambria Math" panose="02040503050406030204" pitchFamily="18" charset="0"/>
                           </a:rPr>
                           <m:t>𝑡</m:t>
                         </m:r>
                       </m:e>
                       <m:sub>
                         <m:r>
-                          <a:rPr lang="en-US" b="0" i="1" smtClean="0">
+                          <a:rPr lang="en-US" i="1">
                             <a:latin typeface="Cambria Math" panose="02040503050406030204" pitchFamily="18" charset="0"/>
-                            <a:ea typeface="Cambria Math" panose="02040503050406030204" pitchFamily="18" charset="0"/>
                           </a:rPr>
                           <m:t>2</m:t>
                         </m:r>
@@ -14389,119 +13016,51 @@
                     <m:r>
                       <a:rPr lang="en-US" i="1">
                         <a:latin typeface="Cambria Math" panose="02040503050406030204" pitchFamily="18" charset="0"/>
-                        <a:ea typeface="Cambria Math" panose="02040503050406030204" pitchFamily="18" charset="0"/>
                       </a:rPr>
-                      <m:t>=</m:t>
+                      <m:t>+(1−</m:t>
                     </m:r>
                     <m:r>
-                      <m:rPr>
-                        <m:nor/>
-                      </m:rPr>
-                      <a:rPr lang="en-US" altLang="ko-KR" dirty="0">
+                      <a:rPr lang="en-US" i="1">
                         <a:latin typeface="Cambria Math" panose="02040503050406030204" pitchFamily="18" charset="0"/>
-                        <a:ea typeface="Cambria Math" panose="02040503050406030204" pitchFamily="18" charset="0"/>
-                        <a:sym typeface="Symbol" panose="05050102010706020507" pitchFamily="18" charset="2"/>
                       </a:rPr>
-                      <m:t>0.</m:t>
+                      <m:t>𝛼</m:t>
                     </m:r>
                     <m:r>
-                      <m:rPr>
-                        <m:nor/>
-                      </m:rPr>
-                      <a:rPr lang="en-US" altLang="ko-KR" b="0" i="0" dirty="0" smtClean="0">
+                      <a:rPr lang="en-US" i="1">
                         <a:latin typeface="Cambria Math" panose="02040503050406030204" pitchFamily="18" charset="0"/>
-                        <a:ea typeface="Cambria Math" panose="02040503050406030204" pitchFamily="18" charset="0"/>
-                        <a:sym typeface="Symbol" panose="05050102010706020507" pitchFamily="18" charset="2"/>
                       </a:rPr>
-                      <m:t>1</m:t>
+                      <m:t>)</m:t>
                     </m:r>
+                    <m:sSub>
+                      <m:sSubPr>
+                        <m:ctrlPr>
+                          <a:rPr lang="en-US" i="1">
+                            <a:latin typeface="Cambria Math" panose="02040503050406030204" pitchFamily="18" charset="0"/>
+                          </a:rPr>
+                        </m:ctrlPr>
+                      </m:sSubPr>
+                      <m:e>
+                        <m:r>
+                          <a:rPr lang="en-US" i="1">
+                            <a:latin typeface="Cambria Math" panose="02040503050406030204" pitchFamily="18" charset="0"/>
+                          </a:rPr>
+                          <m:t>𝜏</m:t>
+                        </m:r>
+                      </m:e>
+                      <m:sub>
+                        <m:r>
+                          <a:rPr lang="en-US" i="1">
+                            <a:latin typeface="Cambria Math" panose="02040503050406030204" pitchFamily="18" charset="0"/>
+                          </a:rPr>
+                          <m:t>2</m:t>
+                        </m:r>
+                      </m:sub>
+                    </m:sSub>
                     <m:r>
-                      <m:rPr>
-                        <m:nor/>
-                      </m:rPr>
-                      <a:rPr lang="en-US" altLang="ko-KR" dirty="0">
+                      <a:rPr lang="en-US" i="1">
                         <a:latin typeface="Cambria Math" panose="02040503050406030204" pitchFamily="18" charset="0"/>
-                        <a:ea typeface="Cambria Math" panose="02040503050406030204" pitchFamily="18" charset="0"/>
-                        <a:sym typeface="Symbol" panose="05050102010706020507" pitchFamily="18" charset="2"/>
                       </a:rPr>
-                      <m:t>∗</m:t>
-                    </m:r>
-                    <m:r>
-                      <m:rPr>
-                        <m:nor/>
-                      </m:rPr>
-                      <a:rPr lang="en-US" altLang="ko-KR" dirty="0">
-                        <a:latin typeface="Cambria Math" panose="02040503050406030204" pitchFamily="18" charset="0"/>
-                        <a:ea typeface="Cambria Math" panose="02040503050406030204" pitchFamily="18" charset="0"/>
-                        <a:sym typeface="Symbol" panose="05050102010706020507" pitchFamily="18" charset="2"/>
-                      </a:rPr>
-                      <m:t>6 </m:t>
-                    </m:r>
-                    <m:r>
-                      <m:rPr>
-                        <m:nor/>
-                      </m:rPr>
-                      <a:rPr lang="en-US" altLang="ko-KR" dirty="0">
-                        <a:latin typeface="Cambria Math" panose="02040503050406030204" pitchFamily="18" charset="0"/>
-                        <a:ea typeface="Cambria Math" panose="02040503050406030204" pitchFamily="18" charset="0"/>
-                        <a:sym typeface="Symbol" panose="05050102010706020507" pitchFamily="18" charset="2"/>
-                      </a:rPr>
-                      <m:t>+ </m:t>
-                    </m:r>
-                    <m:r>
-                      <m:rPr>
-                        <m:nor/>
-                      </m:rPr>
-                      <a:rPr lang="en-US" altLang="ko-KR" dirty="0">
-                        <a:latin typeface="Cambria Math" panose="02040503050406030204" pitchFamily="18" charset="0"/>
-                        <a:ea typeface="Cambria Math" panose="02040503050406030204" pitchFamily="18" charset="0"/>
-                        <a:sym typeface="Symbol" panose="05050102010706020507" pitchFamily="18" charset="2"/>
-                      </a:rPr>
-                      <m:t>0.9</m:t>
-                    </m:r>
-                    <m:r>
-                      <m:rPr>
-                        <m:nor/>
-                      </m:rPr>
-                      <a:rPr lang="en-US" altLang="ko-KR" dirty="0">
-                        <a:latin typeface="Cambria Math" panose="02040503050406030204" pitchFamily="18" charset="0"/>
-                        <a:ea typeface="Cambria Math" panose="02040503050406030204" pitchFamily="18" charset="0"/>
-                        <a:sym typeface="Symbol" panose="05050102010706020507" pitchFamily="18" charset="2"/>
-                      </a:rPr>
-                      <m:t>∗</m:t>
-                    </m:r>
-                    <m:r>
-                      <m:rPr>
-                        <m:nor/>
-                      </m:rPr>
-                      <a:rPr lang="en-US" altLang="ko-KR" b="0" i="0" dirty="0" smtClean="0">
-                        <a:latin typeface="Cambria Math" panose="02040503050406030204" pitchFamily="18" charset="0"/>
-                        <a:ea typeface="Cambria Math" panose="02040503050406030204" pitchFamily="18" charset="0"/>
-                        <a:sym typeface="Symbol" panose="05050102010706020507" pitchFamily="18" charset="2"/>
-                      </a:rPr>
-                      <m:t>9.0 </m:t>
-                    </m:r>
-                    <m:r>
-                      <m:rPr>
-                        <m:nor/>
-                      </m:rPr>
-                      <a:rPr lang="en-US" altLang="ko-KR" dirty="0">
-                        <a:latin typeface="Cambria Math" panose="02040503050406030204" pitchFamily="18" charset="0"/>
-                        <a:ea typeface="Cambria Math" panose="02040503050406030204" pitchFamily="18" charset="0"/>
-                        <a:sym typeface="Symbol" panose="05050102010706020507" pitchFamily="18" charset="2"/>
-                      </a:rPr>
-                      <m:t>= </m:t>
-                    </m:r>
-                    <m:r>
-                      <m:rPr>
-                        <m:nor/>
-                      </m:rPr>
-                      <a:rPr lang="en-US" altLang="ko-KR" b="0" i="0" dirty="0" smtClean="0">
-                        <a:latin typeface="Cambria Math" panose="02040503050406030204" pitchFamily="18" charset="0"/>
-                        <a:ea typeface="Cambria Math" panose="02040503050406030204" pitchFamily="18" charset="0"/>
-                        <a:sym typeface="Symbol" panose="05050102010706020507" pitchFamily="18" charset="2"/>
-                      </a:rPr>
-                      <m:t>8.7</m:t>
+                      <m:t>=0.1∗6 + 0.9∗9.0 = 8.7</m:t>
                     </m:r>
                   </m:oMath>
                 </a14:m>
@@ -14517,131 +13076,60 @@
                     <m:sSub>
                       <m:sSubPr>
                         <m:ctrlPr>
-                          <a:rPr lang="ar-AE" i="1">
+                          <a:rPr lang="en-US" i="1">
                             <a:latin typeface="Cambria Math" panose="02040503050406030204" pitchFamily="18" charset="0"/>
-                            <a:ea typeface="Cambria Math" panose="02040503050406030204" pitchFamily="18" charset="0"/>
                           </a:rPr>
                         </m:ctrlPr>
                       </m:sSubPr>
                       <m:e>
-                        <m:sSub>
-                          <m:sSubPr>
-                            <m:ctrlPr>
-                              <a:rPr lang="ar-AE" i="1">
-                                <a:latin typeface="Cambria Math" panose="02040503050406030204" pitchFamily="18" charset="0"/>
-                                <a:ea typeface="Cambria Math" panose="02040503050406030204" pitchFamily="18" charset="0"/>
-                              </a:rPr>
-                            </m:ctrlPr>
-                          </m:sSubPr>
-                          <m:e>
-                            <m:r>
-                              <a:rPr lang="en-US" i="1">
-                                <a:latin typeface="Cambria Math" panose="02040503050406030204" pitchFamily="18" charset="0"/>
-                                <a:ea typeface="Cambria Math" panose="02040503050406030204" pitchFamily="18" charset="0"/>
-                              </a:rPr>
-                              <m:t>𝑡</m:t>
-                            </m:r>
-                          </m:e>
-                          <m:sub>
-                            <m:r>
-                              <a:rPr lang="en-US" b="0" i="1" smtClean="0">
-                                <a:latin typeface="Cambria Math" panose="02040503050406030204" pitchFamily="18" charset="0"/>
-                                <a:ea typeface="Cambria Math" panose="02040503050406030204" pitchFamily="18" charset="0"/>
-                              </a:rPr>
-                              <m:t>4</m:t>
-                            </m:r>
-                          </m:sub>
-                        </m:sSub>
                         <m:r>
                           <a:rPr lang="en-US" i="1">
                             <a:latin typeface="Cambria Math" panose="02040503050406030204" pitchFamily="18" charset="0"/>
-                            <a:ea typeface="Cambria Math" panose="02040503050406030204" pitchFamily="18" charset="0"/>
                           </a:rPr>
-                          <m:t>=</m:t>
+                          <m:t>𝜏</m:t>
                         </m:r>
+                      </m:e>
+                      <m:sub>
                         <m:r>
                           <a:rPr lang="en-US" i="1">
                             <a:latin typeface="Cambria Math" panose="02040503050406030204" pitchFamily="18" charset="0"/>
-                            <a:ea typeface="Cambria Math" panose="02040503050406030204" pitchFamily="18" charset="0"/>
                           </a:rPr>
-                          <m:t>𝛼</m:t>
+                          <m:t>4</m:t>
                         </m:r>
-                        <m:sSub>
-                          <m:sSubPr>
-                            <m:ctrlPr>
-                              <a:rPr lang="ar-AE" i="1">
-                                <a:latin typeface="Cambria Math" panose="02040503050406030204" pitchFamily="18" charset="0"/>
-                                <a:ea typeface="Cambria Math" panose="02040503050406030204" pitchFamily="18" charset="0"/>
-                              </a:rPr>
-                            </m:ctrlPr>
-                          </m:sSubPr>
-                          <m:e>
-                            <m:r>
-                              <a:rPr lang="ar-AE" i="1">
-                                <a:latin typeface="Cambria Math" panose="02040503050406030204" pitchFamily="18" charset="0"/>
-                                <a:ea typeface="Cambria Math" panose="02040503050406030204" pitchFamily="18" charset="0"/>
-                              </a:rPr>
-                              <m:t>𝑥</m:t>
-                            </m:r>
-                          </m:e>
-                          <m:sub>
-                            <m:r>
-                              <a:rPr lang="en-US" b="0" i="1" smtClean="0">
-                                <a:latin typeface="Cambria Math" panose="02040503050406030204" pitchFamily="18" charset="0"/>
-                                <a:ea typeface="Cambria Math" panose="02040503050406030204" pitchFamily="18" charset="0"/>
-                              </a:rPr>
-                              <m:t>4</m:t>
-                            </m:r>
-                          </m:sub>
-                        </m:sSub>
+                      </m:sub>
+                    </m:sSub>
+                    <m:r>
+                      <a:rPr lang="en-US" i="1">
+                        <a:latin typeface="Cambria Math" panose="02040503050406030204" pitchFamily="18" charset="0"/>
+                      </a:rPr>
+                      <m:t>=</m:t>
+                    </m:r>
+                    <m:r>
+                      <a:rPr lang="en-US" i="1">
+                        <a:latin typeface="Cambria Math" panose="02040503050406030204" pitchFamily="18" charset="0"/>
+                      </a:rPr>
+                      <m:t>𝛼</m:t>
+                    </m:r>
+                    <m:sSub>
+                      <m:sSubPr>
+                        <m:ctrlPr>
+                          <a:rPr lang="en-US" i="1">
+                            <a:latin typeface="Cambria Math" panose="02040503050406030204" pitchFamily="18" charset="0"/>
+                          </a:rPr>
+                        </m:ctrlPr>
+                      </m:sSubPr>
+                      <m:e>
                         <m:r>
                           <a:rPr lang="en-US" i="1">
                             <a:latin typeface="Cambria Math" panose="02040503050406030204" pitchFamily="18" charset="0"/>
-                            <a:ea typeface="Cambria Math" panose="02040503050406030204" pitchFamily="18" charset="0"/>
-                          </a:rPr>
-                          <m:t>+(</m:t>
-                        </m:r>
-                        <m:r>
-                          <a:rPr lang="en-US" i="1">
-                            <a:latin typeface="Cambria Math" panose="02040503050406030204" pitchFamily="18" charset="0"/>
-                            <a:ea typeface="Cambria Math" panose="02040503050406030204" pitchFamily="18" charset="0"/>
-                          </a:rPr>
-                          <m:t>1</m:t>
-                        </m:r>
-                        <m:r>
-                          <a:rPr lang="en-US" i="1">
-                            <a:latin typeface="Cambria Math" panose="02040503050406030204" pitchFamily="18" charset="0"/>
-                            <a:ea typeface="Cambria Math" panose="02040503050406030204" pitchFamily="18" charset="0"/>
-                          </a:rPr>
-                          <m:t>−</m:t>
-                        </m:r>
-                        <m:r>
-                          <a:rPr lang="en-US" i="1">
-                            <a:latin typeface="Cambria Math" panose="02040503050406030204" pitchFamily="18" charset="0"/>
-                            <a:ea typeface="Cambria Math" panose="02040503050406030204" pitchFamily="18" charset="0"/>
-                          </a:rPr>
-                          <m:t>𝛼</m:t>
-                        </m:r>
-                        <m:r>
-                          <a:rPr lang="en-US" i="1">
-                            <a:latin typeface="Cambria Math" panose="02040503050406030204" pitchFamily="18" charset="0"/>
-                            <a:ea typeface="Cambria Math" panose="02040503050406030204" pitchFamily="18" charset="0"/>
-                          </a:rPr>
-                          <m:t>)</m:t>
-                        </m:r>
-                        <m:r>
-                          <a:rPr lang="en-US" i="1">
-                            <a:latin typeface="Cambria Math" panose="02040503050406030204" pitchFamily="18" charset="0"/>
-                            <a:ea typeface="Cambria Math" panose="02040503050406030204" pitchFamily="18" charset="0"/>
                           </a:rPr>
                           <m:t>𝑡</m:t>
                         </m:r>
                       </m:e>
                       <m:sub>
                         <m:r>
-                          <a:rPr lang="en-US" b="0" i="1" smtClean="0">
+                          <a:rPr lang="en-US" i="1">
                             <a:latin typeface="Cambria Math" panose="02040503050406030204" pitchFamily="18" charset="0"/>
-                            <a:ea typeface="Cambria Math" panose="02040503050406030204" pitchFamily="18" charset="0"/>
                           </a:rPr>
                           <m:t>3</m:t>
                         </m:r>
@@ -14650,141 +13138,51 @@
                     <m:r>
                       <a:rPr lang="en-US" i="1">
                         <a:latin typeface="Cambria Math" panose="02040503050406030204" pitchFamily="18" charset="0"/>
-                        <a:ea typeface="Cambria Math" panose="02040503050406030204" pitchFamily="18" charset="0"/>
                       </a:rPr>
-                      <m:t>=</m:t>
+                      <m:t>+(1−</m:t>
                     </m:r>
                     <m:r>
-                      <m:rPr>
-                        <m:nor/>
-                      </m:rPr>
-                      <a:rPr lang="en-US" altLang="ko-KR" dirty="0">
+                      <a:rPr lang="en-US" i="1">
                         <a:latin typeface="Cambria Math" panose="02040503050406030204" pitchFamily="18" charset="0"/>
-                        <a:ea typeface="Cambria Math" panose="02040503050406030204" pitchFamily="18" charset="0"/>
-                        <a:sym typeface="Symbol" panose="05050102010706020507" pitchFamily="18" charset="2"/>
                       </a:rPr>
-                      <m:t>0</m:t>
+                      <m:t>𝛼</m:t>
                     </m:r>
                     <m:r>
-                      <m:rPr>
-                        <m:nor/>
-                      </m:rPr>
-                      <a:rPr lang="en-US" altLang="ko-KR" dirty="0" smtClean="0">
+                      <a:rPr lang="en-US" i="1">
                         <a:latin typeface="Cambria Math" panose="02040503050406030204" pitchFamily="18" charset="0"/>
-                        <a:ea typeface="Cambria Math" panose="02040503050406030204" pitchFamily="18" charset="0"/>
-                        <a:sym typeface="Symbol" panose="05050102010706020507" pitchFamily="18" charset="2"/>
                       </a:rPr>
-                      <m:t>.</m:t>
+                      <m:t>)</m:t>
                     </m:r>
+                    <m:sSub>
+                      <m:sSubPr>
+                        <m:ctrlPr>
+                          <a:rPr lang="en-US" i="1">
+                            <a:latin typeface="Cambria Math" panose="02040503050406030204" pitchFamily="18" charset="0"/>
+                          </a:rPr>
+                        </m:ctrlPr>
+                      </m:sSubPr>
+                      <m:e>
+                        <m:r>
+                          <a:rPr lang="en-US" i="1">
+                            <a:latin typeface="Cambria Math" panose="02040503050406030204" pitchFamily="18" charset="0"/>
+                          </a:rPr>
+                          <m:t>𝜏</m:t>
+                        </m:r>
+                      </m:e>
+                      <m:sub>
+                        <m:r>
+                          <a:rPr lang="en-US" i="1">
+                            <a:latin typeface="Cambria Math" panose="02040503050406030204" pitchFamily="18" charset="0"/>
+                          </a:rPr>
+                          <m:t>3</m:t>
+                        </m:r>
+                      </m:sub>
+                    </m:sSub>
                     <m:r>
-                      <m:rPr>
-                        <m:nor/>
-                      </m:rPr>
-                      <a:rPr lang="en-US" altLang="ko-KR" b="0" i="0" dirty="0" smtClean="0">
+                      <a:rPr lang="en-US" i="1">
                         <a:latin typeface="Cambria Math" panose="02040503050406030204" pitchFamily="18" charset="0"/>
-                        <a:ea typeface="Cambria Math" panose="02040503050406030204" pitchFamily="18" charset="0"/>
-                        <a:sym typeface="Symbol" panose="05050102010706020507" pitchFamily="18" charset="2"/>
                       </a:rPr>
-                      <m:t>1</m:t>
-                    </m:r>
-                    <m:r>
-                      <m:rPr>
-                        <m:nor/>
-                      </m:rPr>
-                      <a:rPr lang="en-US" altLang="ko-KR" dirty="0">
-                        <a:latin typeface="Cambria Math" panose="02040503050406030204" pitchFamily="18" charset="0"/>
-                        <a:ea typeface="Cambria Math" panose="02040503050406030204" pitchFamily="18" charset="0"/>
-                        <a:sym typeface="Symbol" panose="05050102010706020507" pitchFamily="18" charset="2"/>
-                      </a:rPr>
-                      <m:t>∗</m:t>
-                    </m:r>
-                    <m:r>
-                      <m:rPr>
-                        <m:nor/>
-                      </m:rPr>
-                      <a:rPr lang="en-US" altLang="ko-KR" dirty="0">
-                        <a:latin typeface="Cambria Math" panose="02040503050406030204" pitchFamily="18" charset="0"/>
-                        <a:ea typeface="Cambria Math" panose="02040503050406030204" pitchFamily="18" charset="0"/>
-                        <a:sym typeface="Symbol" panose="05050102010706020507" pitchFamily="18" charset="2"/>
-                      </a:rPr>
-                      <m:t>4 </m:t>
-                    </m:r>
-                    <m:r>
-                      <m:rPr>
-                        <m:nor/>
-                      </m:rPr>
-                      <a:rPr lang="en-US" altLang="ko-KR" dirty="0">
-                        <a:latin typeface="Cambria Math" panose="02040503050406030204" pitchFamily="18" charset="0"/>
-                        <a:ea typeface="Cambria Math" panose="02040503050406030204" pitchFamily="18" charset="0"/>
-                        <a:sym typeface="Symbol" panose="05050102010706020507" pitchFamily="18" charset="2"/>
-                      </a:rPr>
-                      <m:t>+ </m:t>
-                    </m:r>
-                    <m:r>
-                      <m:rPr>
-                        <m:nor/>
-                      </m:rPr>
-                      <a:rPr lang="en-US" altLang="ko-KR" dirty="0">
-                        <a:latin typeface="Cambria Math" panose="02040503050406030204" pitchFamily="18" charset="0"/>
-                        <a:ea typeface="Cambria Math" panose="02040503050406030204" pitchFamily="18" charset="0"/>
-                        <a:sym typeface="Symbol" panose="05050102010706020507" pitchFamily="18" charset="2"/>
-                      </a:rPr>
-                      <m:t>0.9</m:t>
-                    </m:r>
-                    <m:r>
-                      <m:rPr>
-                        <m:nor/>
-                      </m:rPr>
-                      <a:rPr lang="en-US" altLang="ko-KR" dirty="0">
-                        <a:latin typeface="Cambria Math" panose="02040503050406030204" pitchFamily="18" charset="0"/>
-                        <a:ea typeface="Cambria Math" panose="02040503050406030204" pitchFamily="18" charset="0"/>
-                        <a:sym typeface="Symbol" panose="05050102010706020507" pitchFamily="18" charset="2"/>
-                      </a:rPr>
-                      <m:t>∗</m:t>
-                    </m:r>
-                    <m:r>
-                      <m:rPr>
-                        <m:nor/>
-                      </m:rPr>
-                      <a:rPr lang="en-US" altLang="ko-KR" b="0" i="0" dirty="0" smtClean="0">
-                        <a:latin typeface="Cambria Math" panose="02040503050406030204" pitchFamily="18" charset="0"/>
-                        <a:ea typeface="Cambria Math" panose="02040503050406030204" pitchFamily="18" charset="0"/>
-                        <a:sym typeface="Symbol" panose="05050102010706020507" pitchFamily="18" charset="2"/>
-                      </a:rPr>
-                      <m:t>8.7</m:t>
-                    </m:r>
-                    <m:r>
-                      <m:rPr>
-                        <m:nor/>
-                      </m:rPr>
-                      <a:rPr lang="en-US" altLang="ko-KR" dirty="0">
-                        <a:latin typeface="Cambria Math" panose="02040503050406030204" pitchFamily="18" charset="0"/>
-                        <a:ea typeface="Cambria Math" panose="02040503050406030204" pitchFamily="18" charset="0"/>
-                        <a:sym typeface="Symbol" panose="05050102010706020507" pitchFamily="18" charset="2"/>
-                      </a:rPr>
-                      <m:t> </m:t>
-                    </m:r>
-                    <m:r>
-                      <m:rPr>
-                        <m:nor/>
-                      </m:rPr>
-                      <a:rPr lang="en-US" altLang="ko-KR" dirty="0">
-                        <a:latin typeface="Cambria Math" panose="02040503050406030204" pitchFamily="18" charset="0"/>
-                        <a:ea typeface="Cambria Math" panose="02040503050406030204" pitchFamily="18" charset="0"/>
-                        <a:sym typeface="Symbol" panose="05050102010706020507" pitchFamily="18" charset="2"/>
-                      </a:rPr>
-                      <m:t>= </m:t>
-                    </m:r>
-                    <m:r>
-                      <m:rPr>
-                        <m:nor/>
-                      </m:rPr>
-                      <a:rPr lang="en-US" altLang="ko-KR" b="0" i="0" dirty="0" smtClean="0">
-                        <a:latin typeface="Cambria Math" panose="02040503050406030204" pitchFamily="18" charset="0"/>
-                        <a:ea typeface="Cambria Math" panose="02040503050406030204" pitchFamily="18" charset="0"/>
-                        <a:sym typeface="Symbol" panose="05050102010706020507" pitchFamily="18" charset="2"/>
-                      </a:rPr>
-                      <m:t>8.3</m:t>
+                      <m:t>=0.1∗4 + 0.9∗8.7 = 8.3</m:t>
                     </m:r>
                   </m:oMath>
                 </a14:m>
@@ -14800,131 +13198,60 @@
                     <m:sSub>
                       <m:sSubPr>
                         <m:ctrlPr>
-                          <a:rPr lang="ar-AE" i="1">
+                          <a:rPr lang="en-US" i="1">
                             <a:latin typeface="Cambria Math" panose="02040503050406030204" pitchFamily="18" charset="0"/>
-                            <a:ea typeface="Cambria Math" panose="02040503050406030204" pitchFamily="18" charset="0"/>
                           </a:rPr>
                         </m:ctrlPr>
                       </m:sSubPr>
                       <m:e>
-                        <m:sSub>
-                          <m:sSubPr>
-                            <m:ctrlPr>
-                              <a:rPr lang="ar-AE" i="1">
-                                <a:latin typeface="Cambria Math" panose="02040503050406030204" pitchFamily="18" charset="0"/>
-                                <a:ea typeface="Cambria Math" panose="02040503050406030204" pitchFamily="18" charset="0"/>
-                              </a:rPr>
-                            </m:ctrlPr>
-                          </m:sSubPr>
-                          <m:e>
-                            <m:r>
-                              <a:rPr lang="en-US" i="1">
-                                <a:latin typeface="Cambria Math" panose="02040503050406030204" pitchFamily="18" charset="0"/>
-                                <a:ea typeface="Cambria Math" panose="02040503050406030204" pitchFamily="18" charset="0"/>
-                              </a:rPr>
-                              <m:t>𝑡</m:t>
-                            </m:r>
-                          </m:e>
-                          <m:sub>
-                            <m:r>
-                              <a:rPr lang="en-US" b="0" i="1" smtClean="0">
-                                <a:latin typeface="Cambria Math" panose="02040503050406030204" pitchFamily="18" charset="0"/>
-                                <a:ea typeface="Cambria Math" panose="02040503050406030204" pitchFamily="18" charset="0"/>
-                              </a:rPr>
-                              <m:t>5</m:t>
-                            </m:r>
-                          </m:sub>
-                        </m:sSub>
                         <m:r>
                           <a:rPr lang="en-US" i="1">
                             <a:latin typeface="Cambria Math" panose="02040503050406030204" pitchFamily="18" charset="0"/>
-                            <a:ea typeface="Cambria Math" panose="02040503050406030204" pitchFamily="18" charset="0"/>
                           </a:rPr>
-                          <m:t>=</m:t>
+                          <m:t>𝜏</m:t>
                         </m:r>
+                      </m:e>
+                      <m:sub>
                         <m:r>
                           <a:rPr lang="en-US" i="1">
                             <a:latin typeface="Cambria Math" panose="02040503050406030204" pitchFamily="18" charset="0"/>
-                            <a:ea typeface="Cambria Math" panose="02040503050406030204" pitchFamily="18" charset="0"/>
                           </a:rPr>
-                          <m:t>𝛼</m:t>
+                          <m:t>5</m:t>
                         </m:r>
-                        <m:sSub>
-                          <m:sSubPr>
-                            <m:ctrlPr>
-                              <a:rPr lang="ar-AE" i="1">
-                                <a:latin typeface="Cambria Math" panose="02040503050406030204" pitchFamily="18" charset="0"/>
-                                <a:ea typeface="Cambria Math" panose="02040503050406030204" pitchFamily="18" charset="0"/>
-                              </a:rPr>
-                            </m:ctrlPr>
-                          </m:sSubPr>
-                          <m:e>
-                            <m:r>
-                              <a:rPr lang="ar-AE" i="1">
-                                <a:latin typeface="Cambria Math" panose="02040503050406030204" pitchFamily="18" charset="0"/>
-                                <a:ea typeface="Cambria Math" panose="02040503050406030204" pitchFamily="18" charset="0"/>
-                              </a:rPr>
-                              <m:t>𝑥</m:t>
-                            </m:r>
-                          </m:e>
-                          <m:sub>
-                            <m:r>
-                              <a:rPr lang="en-US" b="0" i="1" smtClean="0">
-                                <a:latin typeface="Cambria Math" panose="02040503050406030204" pitchFamily="18" charset="0"/>
-                                <a:ea typeface="Cambria Math" panose="02040503050406030204" pitchFamily="18" charset="0"/>
-                              </a:rPr>
-                              <m:t>5</m:t>
-                            </m:r>
-                          </m:sub>
-                        </m:sSub>
+                      </m:sub>
+                    </m:sSub>
+                    <m:r>
+                      <a:rPr lang="en-US" i="1">
+                        <a:latin typeface="Cambria Math" panose="02040503050406030204" pitchFamily="18" charset="0"/>
+                      </a:rPr>
+                      <m:t>=</m:t>
+                    </m:r>
+                    <m:r>
+                      <a:rPr lang="en-US" i="1">
+                        <a:latin typeface="Cambria Math" panose="02040503050406030204" pitchFamily="18" charset="0"/>
+                      </a:rPr>
+                      <m:t>𝛼</m:t>
+                    </m:r>
+                    <m:sSub>
+                      <m:sSubPr>
+                        <m:ctrlPr>
+                          <a:rPr lang="en-US" i="1">
+                            <a:latin typeface="Cambria Math" panose="02040503050406030204" pitchFamily="18" charset="0"/>
+                          </a:rPr>
+                        </m:ctrlPr>
+                      </m:sSubPr>
+                      <m:e>
                         <m:r>
                           <a:rPr lang="en-US" i="1">
                             <a:latin typeface="Cambria Math" panose="02040503050406030204" pitchFamily="18" charset="0"/>
-                            <a:ea typeface="Cambria Math" panose="02040503050406030204" pitchFamily="18" charset="0"/>
-                          </a:rPr>
-                          <m:t>+(</m:t>
-                        </m:r>
-                        <m:r>
-                          <a:rPr lang="en-US" i="1">
-                            <a:latin typeface="Cambria Math" panose="02040503050406030204" pitchFamily="18" charset="0"/>
-                            <a:ea typeface="Cambria Math" panose="02040503050406030204" pitchFamily="18" charset="0"/>
-                          </a:rPr>
-                          <m:t>1</m:t>
-                        </m:r>
-                        <m:r>
-                          <a:rPr lang="en-US" i="1">
-                            <a:latin typeface="Cambria Math" panose="02040503050406030204" pitchFamily="18" charset="0"/>
-                            <a:ea typeface="Cambria Math" panose="02040503050406030204" pitchFamily="18" charset="0"/>
-                          </a:rPr>
-                          <m:t>−</m:t>
-                        </m:r>
-                        <m:r>
-                          <a:rPr lang="en-US" i="1">
-                            <a:latin typeface="Cambria Math" panose="02040503050406030204" pitchFamily="18" charset="0"/>
-                            <a:ea typeface="Cambria Math" panose="02040503050406030204" pitchFamily="18" charset="0"/>
-                          </a:rPr>
-                          <m:t>𝛼</m:t>
-                        </m:r>
-                        <m:r>
-                          <a:rPr lang="en-US" i="1">
-                            <a:latin typeface="Cambria Math" panose="02040503050406030204" pitchFamily="18" charset="0"/>
-                            <a:ea typeface="Cambria Math" panose="02040503050406030204" pitchFamily="18" charset="0"/>
-                          </a:rPr>
-                          <m:t>)</m:t>
-                        </m:r>
-                        <m:r>
-                          <a:rPr lang="en-US" i="1">
-                            <a:latin typeface="Cambria Math" panose="02040503050406030204" pitchFamily="18" charset="0"/>
-                            <a:ea typeface="Cambria Math" panose="02040503050406030204" pitchFamily="18" charset="0"/>
                           </a:rPr>
                           <m:t>𝑡</m:t>
                         </m:r>
                       </m:e>
                       <m:sub>
                         <m:r>
-                          <a:rPr lang="en-US" b="0" i="1" smtClean="0">
+                          <a:rPr lang="en-US" i="1">
                             <a:latin typeface="Cambria Math" panose="02040503050406030204" pitchFamily="18" charset="0"/>
-                            <a:ea typeface="Cambria Math" panose="02040503050406030204" pitchFamily="18" charset="0"/>
                           </a:rPr>
                           <m:t>4</m:t>
                         </m:r>
@@ -14933,119 +13260,51 @@
                     <m:r>
                       <a:rPr lang="en-US" i="1">
                         <a:latin typeface="Cambria Math" panose="02040503050406030204" pitchFamily="18" charset="0"/>
-                        <a:ea typeface="Cambria Math" panose="02040503050406030204" pitchFamily="18" charset="0"/>
                       </a:rPr>
-                      <m:t>=</m:t>
+                      <m:t>+(1−</m:t>
                     </m:r>
                     <m:r>
-                      <m:rPr>
-                        <m:nor/>
-                      </m:rPr>
-                      <a:rPr lang="en-US" altLang="ko-KR" dirty="0">
+                      <a:rPr lang="en-US" i="1">
                         <a:latin typeface="Cambria Math" panose="02040503050406030204" pitchFamily="18" charset="0"/>
-                        <a:ea typeface="Cambria Math" panose="02040503050406030204" pitchFamily="18" charset="0"/>
-                        <a:sym typeface="Symbol" panose="05050102010706020507" pitchFamily="18" charset="2"/>
                       </a:rPr>
-                      <m:t>0.</m:t>
+                      <m:t>𝛼</m:t>
                     </m:r>
                     <m:r>
-                      <m:rPr>
-                        <m:nor/>
-                      </m:rPr>
-                      <a:rPr lang="en-US" altLang="ko-KR" b="0" i="0" dirty="0" smtClean="0">
+                      <a:rPr lang="en-US" i="1">
                         <a:latin typeface="Cambria Math" panose="02040503050406030204" pitchFamily="18" charset="0"/>
-                        <a:ea typeface="Cambria Math" panose="02040503050406030204" pitchFamily="18" charset="0"/>
-                        <a:sym typeface="Symbol" panose="05050102010706020507" pitchFamily="18" charset="2"/>
                       </a:rPr>
-                      <m:t>1</m:t>
+                      <m:t>)</m:t>
                     </m:r>
+                    <m:sSub>
+                      <m:sSubPr>
+                        <m:ctrlPr>
+                          <a:rPr lang="en-US" i="1">
+                            <a:latin typeface="Cambria Math" panose="02040503050406030204" pitchFamily="18" charset="0"/>
+                          </a:rPr>
+                        </m:ctrlPr>
+                      </m:sSubPr>
+                      <m:e>
+                        <m:r>
+                          <a:rPr lang="en-US" i="1">
+                            <a:latin typeface="Cambria Math" panose="02040503050406030204" pitchFamily="18" charset="0"/>
+                          </a:rPr>
+                          <m:t>𝜏</m:t>
+                        </m:r>
+                      </m:e>
+                      <m:sub>
+                        <m:r>
+                          <a:rPr lang="en-US" i="1">
+                            <a:latin typeface="Cambria Math" panose="02040503050406030204" pitchFamily="18" charset="0"/>
+                          </a:rPr>
+                          <m:t>4</m:t>
+                        </m:r>
+                      </m:sub>
+                    </m:sSub>
                     <m:r>
-                      <m:rPr>
-                        <m:nor/>
-                      </m:rPr>
-                      <a:rPr lang="en-US" altLang="ko-KR" dirty="0">
+                      <a:rPr lang="en-US" i="1">
                         <a:latin typeface="Cambria Math" panose="02040503050406030204" pitchFamily="18" charset="0"/>
-                        <a:ea typeface="Cambria Math" panose="02040503050406030204" pitchFamily="18" charset="0"/>
-                        <a:sym typeface="Symbol" panose="05050102010706020507" pitchFamily="18" charset="2"/>
                       </a:rPr>
-                      <m:t>∗</m:t>
-                    </m:r>
-                    <m:r>
-                      <m:rPr>
-                        <m:nor/>
-                      </m:rPr>
-                      <a:rPr lang="en-US" altLang="ko-KR" dirty="0">
-                        <a:latin typeface="Cambria Math" panose="02040503050406030204" pitchFamily="18" charset="0"/>
-                        <a:ea typeface="Cambria Math" panose="02040503050406030204" pitchFamily="18" charset="0"/>
-                        <a:sym typeface="Symbol" panose="05050102010706020507" pitchFamily="18" charset="2"/>
-                      </a:rPr>
-                      <m:t>13 </m:t>
-                    </m:r>
-                    <m:r>
-                      <m:rPr>
-                        <m:nor/>
-                      </m:rPr>
-                      <a:rPr lang="en-US" altLang="ko-KR" dirty="0">
-                        <a:latin typeface="Cambria Math" panose="02040503050406030204" pitchFamily="18" charset="0"/>
-                        <a:ea typeface="Cambria Math" panose="02040503050406030204" pitchFamily="18" charset="0"/>
-                        <a:sym typeface="Symbol" panose="05050102010706020507" pitchFamily="18" charset="2"/>
-                      </a:rPr>
-                      <m:t>+ </m:t>
-                    </m:r>
-                    <m:r>
-                      <m:rPr>
-                        <m:nor/>
-                      </m:rPr>
-                      <a:rPr lang="en-US" altLang="ko-KR" dirty="0">
-                        <a:latin typeface="Cambria Math" panose="02040503050406030204" pitchFamily="18" charset="0"/>
-                        <a:ea typeface="Cambria Math" panose="02040503050406030204" pitchFamily="18" charset="0"/>
-                        <a:sym typeface="Symbol" panose="05050102010706020507" pitchFamily="18" charset="2"/>
-                      </a:rPr>
-                      <m:t>0.9</m:t>
-                    </m:r>
-                    <m:r>
-                      <m:rPr>
-                        <m:nor/>
-                      </m:rPr>
-                      <a:rPr lang="en-US" altLang="ko-KR" dirty="0">
-                        <a:latin typeface="Cambria Math" panose="02040503050406030204" pitchFamily="18" charset="0"/>
-                        <a:ea typeface="Cambria Math" panose="02040503050406030204" pitchFamily="18" charset="0"/>
-                        <a:sym typeface="Symbol" panose="05050102010706020507" pitchFamily="18" charset="2"/>
-                      </a:rPr>
-                      <m:t>∗</m:t>
-                    </m:r>
-                    <m:r>
-                      <m:rPr>
-                        <m:nor/>
-                      </m:rPr>
-                      <a:rPr lang="en-US" altLang="ko-KR" dirty="0">
-                        <a:latin typeface="Cambria Math" panose="02040503050406030204" pitchFamily="18" charset="0"/>
-                        <a:ea typeface="Cambria Math" panose="02040503050406030204" pitchFamily="18" charset="0"/>
-                        <a:sym typeface="Symbol" panose="05050102010706020507" pitchFamily="18" charset="2"/>
-                      </a:rPr>
-                      <m:t>8.3</m:t>
-                    </m:r>
-                    <m:r>
-                      <m:rPr>
-                        <m:nor/>
-                      </m:rPr>
-                      <a:rPr lang="en-US" altLang="ko-KR" dirty="0">
-                        <a:latin typeface="Cambria Math" panose="02040503050406030204" pitchFamily="18" charset="0"/>
-                        <a:ea typeface="Cambria Math" panose="02040503050406030204" pitchFamily="18" charset="0"/>
-                        <a:sym typeface="Symbol" panose="05050102010706020507" pitchFamily="18" charset="2"/>
-                      </a:rPr>
-                      <m:t>= </m:t>
-                    </m:r>
-                    <m:r>
-                      <m:rPr>
-                        <m:nor/>
-                      </m:rPr>
-                      <a:rPr lang="en-US" altLang="ko-KR" b="0" i="0" dirty="0" smtClean="0">
-                        <a:latin typeface="Cambria Math" panose="02040503050406030204" pitchFamily="18" charset="0"/>
-                        <a:ea typeface="Cambria Math" panose="02040503050406030204" pitchFamily="18" charset="0"/>
-                        <a:sym typeface="Symbol" panose="05050102010706020507" pitchFamily="18" charset="2"/>
-                      </a:rPr>
-                      <m:t>8.7</m:t>
+                      <m:t>=0.1∗13 + 0.9∗8.3= 8.7</m:t>
                     </m:r>
                   </m:oMath>
                 </a14:m>
@@ -15061,131 +13320,60 @@
                     <m:sSub>
                       <m:sSubPr>
                         <m:ctrlPr>
-                          <a:rPr lang="ar-AE" i="1">
+                          <a:rPr lang="en-US" i="1">
                             <a:latin typeface="Cambria Math" panose="02040503050406030204" pitchFamily="18" charset="0"/>
-                            <a:ea typeface="Cambria Math" panose="02040503050406030204" pitchFamily="18" charset="0"/>
                           </a:rPr>
                         </m:ctrlPr>
                       </m:sSubPr>
                       <m:e>
-                        <m:sSub>
-                          <m:sSubPr>
-                            <m:ctrlPr>
-                              <a:rPr lang="ar-AE" i="1">
-                                <a:latin typeface="Cambria Math" panose="02040503050406030204" pitchFamily="18" charset="0"/>
-                                <a:ea typeface="Cambria Math" panose="02040503050406030204" pitchFamily="18" charset="0"/>
-                              </a:rPr>
-                            </m:ctrlPr>
-                          </m:sSubPr>
-                          <m:e>
-                            <m:r>
-                              <a:rPr lang="en-US" i="1">
-                                <a:latin typeface="Cambria Math" panose="02040503050406030204" pitchFamily="18" charset="0"/>
-                                <a:ea typeface="Cambria Math" panose="02040503050406030204" pitchFamily="18" charset="0"/>
-                              </a:rPr>
-                              <m:t>𝑡</m:t>
-                            </m:r>
-                          </m:e>
-                          <m:sub>
-                            <m:r>
-                              <a:rPr lang="en-US" b="0" i="1" smtClean="0">
-                                <a:latin typeface="Cambria Math" panose="02040503050406030204" pitchFamily="18" charset="0"/>
-                                <a:ea typeface="Cambria Math" panose="02040503050406030204" pitchFamily="18" charset="0"/>
-                              </a:rPr>
-                              <m:t>6</m:t>
-                            </m:r>
-                          </m:sub>
-                        </m:sSub>
                         <m:r>
                           <a:rPr lang="en-US" i="1">
                             <a:latin typeface="Cambria Math" panose="02040503050406030204" pitchFamily="18" charset="0"/>
-                            <a:ea typeface="Cambria Math" panose="02040503050406030204" pitchFamily="18" charset="0"/>
                           </a:rPr>
-                          <m:t>=</m:t>
+                          <m:t>𝜏</m:t>
                         </m:r>
+                      </m:e>
+                      <m:sub>
                         <m:r>
                           <a:rPr lang="en-US" i="1">
                             <a:latin typeface="Cambria Math" panose="02040503050406030204" pitchFamily="18" charset="0"/>
-                            <a:ea typeface="Cambria Math" panose="02040503050406030204" pitchFamily="18" charset="0"/>
                           </a:rPr>
-                          <m:t>𝛼</m:t>
+                          <m:t>6</m:t>
                         </m:r>
-                        <m:sSub>
-                          <m:sSubPr>
-                            <m:ctrlPr>
-                              <a:rPr lang="ar-AE" i="1">
-                                <a:latin typeface="Cambria Math" panose="02040503050406030204" pitchFamily="18" charset="0"/>
-                                <a:ea typeface="Cambria Math" panose="02040503050406030204" pitchFamily="18" charset="0"/>
-                              </a:rPr>
-                            </m:ctrlPr>
-                          </m:sSubPr>
-                          <m:e>
-                            <m:r>
-                              <a:rPr lang="ar-AE" i="1">
-                                <a:latin typeface="Cambria Math" panose="02040503050406030204" pitchFamily="18" charset="0"/>
-                                <a:ea typeface="Cambria Math" panose="02040503050406030204" pitchFamily="18" charset="0"/>
-                              </a:rPr>
-                              <m:t>𝑥</m:t>
-                            </m:r>
-                          </m:e>
-                          <m:sub>
-                            <m:r>
-                              <a:rPr lang="en-US" b="0" i="1" smtClean="0">
-                                <a:latin typeface="Cambria Math" panose="02040503050406030204" pitchFamily="18" charset="0"/>
-                                <a:ea typeface="Cambria Math" panose="02040503050406030204" pitchFamily="18" charset="0"/>
-                              </a:rPr>
-                              <m:t>6</m:t>
-                            </m:r>
-                          </m:sub>
-                        </m:sSub>
+                      </m:sub>
+                    </m:sSub>
+                    <m:r>
+                      <a:rPr lang="en-US" i="1">
+                        <a:latin typeface="Cambria Math" panose="02040503050406030204" pitchFamily="18" charset="0"/>
+                      </a:rPr>
+                      <m:t>=</m:t>
+                    </m:r>
+                    <m:r>
+                      <a:rPr lang="en-US" i="1">
+                        <a:latin typeface="Cambria Math" panose="02040503050406030204" pitchFamily="18" charset="0"/>
+                      </a:rPr>
+                      <m:t>𝛼</m:t>
+                    </m:r>
+                    <m:sSub>
+                      <m:sSubPr>
+                        <m:ctrlPr>
+                          <a:rPr lang="en-US" i="1">
+                            <a:latin typeface="Cambria Math" panose="02040503050406030204" pitchFamily="18" charset="0"/>
+                          </a:rPr>
+                        </m:ctrlPr>
+                      </m:sSubPr>
+                      <m:e>
                         <m:r>
                           <a:rPr lang="en-US" i="1">
                             <a:latin typeface="Cambria Math" panose="02040503050406030204" pitchFamily="18" charset="0"/>
-                            <a:ea typeface="Cambria Math" panose="02040503050406030204" pitchFamily="18" charset="0"/>
-                          </a:rPr>
-                          <m:t>+(</m:t>
-                        </m:r>
-                        <m:r>
-                          <a:rPr lang="en-US" i="1">
-                            <a:latin typeface="Cambria Math" panose="02040503050406030204" pitchFamily="18" charset="0"/>
-                            <a:ea typeface="Cambria Math" panose="02040503050406030204" pitchFamily="18" charset="0"/>
-                          </a:rPr>
-                          <m:t>1</m:t>
-                        </m:r>
-                        <m:r>
-                          <a:rPr lang="en-US" i="1">
-                            <a:latin typeface="Cambria Math" panose="02040503050406030204" pitchFamily="18" charset="0"/>
-                            <a:ea typeface="Cambria Math" panose="02040503050406030204" pitchFamily="18" charset="0"/>
-                          </a:rPr>
-                          <m:t>−</m:t>
-                        </m:r>
-                        <m:r>
-                          <a:rPr lang="en-US" i="1">
-                            <a:latin typeface="Cambria Math" panose="02040503050406030204" pitchFamily="18" charset="0"/>
-                            <a:ea typeface="Cambria Math" panose="02040503050406030204" pitchFamily="18" charset="0"/>
-                          </a:rPr>
-                          <m:t>𝛼</m:t>
-                        </m:r>
-                        <m:r>
-                          <a:rPr lang="en-US" i="1">
-                            <a:latin typeface="Cambria Math" panose="02040503050406030204" pitchFamily="18" charset="0"/>
-                            <a:ea typeface="Cambria Math" panose="02040503050406030204" pitchFamily="18" charset="0"/>
-                          </a:rPr>
-                          <m:t>)</m:t>
-                        </m:r>
-                        <m:r>
-                          <a:rPr lang="en-US" i="1">
-                            <a:latin typeface="Cambria Math" panose="02040503050406030204" pitchFamily="18" charset="0"/>
-                            <a:ea typeface="Cambria Math" panose="02040503050406030204" pitchFamily="18" charset="0"/>
                           </a:rPr>
                           <m:t>𝑡</m:t>
                         </m:r>
                       </m:e>
                       <m:sub>
                         <m:r>
-                          <a:rPr lang="en-US" b="0" i="1" smtClean="0">
+                          <a:rPr lang="en-US" i="1">
                             <a:latin typeface="Cambria Math" panose="02040503050406030204" pitchFamily="18" charset="0"/>
-                            <a:ea typeface="Cambria Math" panose="02040503050406030204" pitchFamily="18" charset="0"/>
                           </a:rPr>
                           <m:t>5</m:t>
                         </m:r>
@@ -15194,119 +13382,51 @@
                     <m:r>
                       <a:rPr lang="en-US" i="1">
                         <a:latin typeface="Cambria Math" panose="02040503050406030204" pitchFamily="18" charset="0"/>
-                        <a:ea typeface="Cambria Math" panose="02040503050406030204" pitchFamily="18" charset="0"/>
                       </a:rPr>
-                      <m:t>=</m:t>
+                      <m:t>+(1−</m:t>
                     </m:r>
                     <m:r>
-                      <m:rPr>
-                        <m:nor/>
-                      </m:rPr>
-                      <a:rPr lang="en-US" altLang="ko-KR" dirty="0">
+                      <a:rPr lang="en-US" i="1">
                         <a:latin typeface="Cambria Math" panose="02040503050406030204" pitchFamily="18" charset="0"/>
-                        <a:ea typeface="Cambria Math" panose="02040503050406030204" pitchFamily="18" charset="0"/>
-                        <a:sym typeface="Symbol" panose="05050102010706020507" pitchFamily="18" charset="2"/>
                       </a:rPr>
-                      <m:t>0.</m:t>
+                      <m:t>𝛼</m:t>
                     </m:r>
                     <m:r>
-                      <m:rPr>
-                        <m:nor/>
-                      </m:rPr>
-                      <a:rPr lang="en-US" altLang="ko-KR" b="0" i="0" dirty="0" smtClean="0">
+                      <a:rPr lang="en-US" i="1">
                         <a:latin typeface="Cambria Math" panose="02040503050406030204" pitchFamily="18" charset="0"/>
-                        <a:ea typeface="Cambria Math" panose="02040503050406030204" pitchFamily="18" charset="0"/>
-                        <a:sym typeface="Symbol" panose="05050102010706020507" pitchFamily="18" charset="2"/>
                       </a:rPr>
-                      <m:t>1</m:t>
+                      <m:t>)</m:t>
                     </m:r>
+                    <m:sSub>
+                      <m:sSubPr>
+                        <m:ctrlPr>
+                          <a:rPr lang="en-US" i="1">
+                            <a:latin typeface="Cambria Math" panose="02040503050406030204" pitchFamily="18" charset="0"/>
+                          </a:rPr>
+                        </m:ctrlPr>
+                      </m:sSubPr>
+                      <m:e>
+                        <m:r>
+                          <a:rPr lang="en-US" i="1">
+                            <a:latin typeface="Cambria Math" panose="02040503050406030204" pitchFamily="18" charset="0"/>
+                          </a:rPr>
+                          <m:t>𝜏</m:t>
+                        </m:r>
+                      </m:e>
+                      <m:sub>
+                        <m:r>
+                          <a:rPr lang="en-US" i="1">
+                            <a:latin typeface="Cambria Math" panose="02040503050406030204" pitchFamily="18" charset="0"/>
+                          </a:rPr>
+                          <m:t>5</m:t>
+                        </m:r>
+                      </m:sub>
+                    </m:sSub>
                     <m:r>
-                      <m:rPr>
-                        <m:nor/>
-                      </m:rPr>
-                      <a:rPr lang="en-US" altLang="ko-KR" dirty="0">
+                      <a:rPr lang="en-US" i="1">
                         <a:latin typeface="Cambria Math" panose="02040503050406030204" pitchFamily="18" charset="0"/>
-                        <a:ea typeface="Cambria Math" panose="02040503050406030204" pitchFamily="18" charset="0"/>
-                        <a:sym typeface="Symbol" panose="05050102010706020507" pitchFamily="18" charset="2"/>
                       </a:rPr>
-                      <m:t>∗</m:t>
-                    </m:r>
-                    <m:r>
-                      <m:rPr>
-                        <m:nor/>
-                      </m:rPr>
-                      <a:rPr lang="en-US" altLang="ko-KR" dirty="0">
-                        <a:latin typeface="Cambria Math" panose="02040503050406030204" pitchFamily="18" charset="0"/>
-                        <a:ea typeface="Cambria Math" panose="02040503050406030204" pitchFamily="18" charset="0"/>
-                        <a:sym typeface="Symbol" panose="05050102010706020507" pitchFamily="18" charset="2"/>
-                      </a:rPr>
-                      <m:t>13 </m:t>
-                    </m:r>
-                    <m:r>
-                      <m:rPr>
-                        <m:nor/>
-                      </m:rPr>
-                      <a:rPr lang="en-US" altLang="ko-KR" dirty="0">
-                        <a:latin typeface="Cambria Math" panose="02040503050406030204" pitchFamily="18" charset="0"/>
-                        <a:ea typeface="Cambria Math" panose="02040503050406030204" pitchFamily="18" charset="0"/>
-                        <a:sym typeface="Symbol" panose="05050102010706020507" pitchFamily="18" charset="2"/>
-                      </a:rPr>
-                      <m:t>+ </m:t>
-                    </m:r>
-                    <m:r>
-                      <m:rPr>
-                        <m:nor/>
-                      </m:rPr>
-                      <a:rPr lang="en-US" altLang="ko-KR" dirty="0">
-                        <a:latin typeface="Cambria Math" panose="02040503050406030204" pitchFamily="18" charset="0"/>
-                        <a:ea typeface="Cambria Math" panose="02040503050406030204" pitchFamily="18" charset="0"/>
-                        <a:sym typeface="Symbol" panose="05050102010706020507" pitchFamily="18" charset="2"/>
-                      </a:rPr>
-                      <m:t>0.9</m:t>
-                    </m:r>
-                    <m:r>
-                      <m:rPr>
-                        <m:nor/>
-                      </m:rPr>
-                      <a:rPr lang="en-US" altLang="ko-KR" dirty="0">
-                        <a:latin typeface="Cambria Math" panose="02040503050406030204" pitchFamily="18" charset="0"/>
-                        <a:ea typeface="Cambria Math" panose="02040503050406030204" pitchFamily="18" charset="0"/>
-                        <a:sym typeface="Symbol" panose="05050102010706020507" pitchFamily="18" charset="2"/>
-                      </a:rPr>
-                      <m:t>∗</m:t>
-                    </m:r>
-                    <m:r>
-                      <m:rPr>
-                        <m:nor/>
-                      </m:rPr>
-                      <a:rPr lang="en-US" altLang="ko-KR" dirty="0">
-                        <a:latin typeface="Cambria Math" panose="02040503050406030204" pitchFamily="18" charset="0"/>
-                        <a:ea typeface="Cambria Math" panose="02040503050406030204" pitchFamily="18" charset="0"/>
-                        <a:sym typeface="Symbol" panose="05050102010706020507" pitchFamily="18" charset="2"/>
-                      </a:rPr>
-                      <m:t>8.7</m:t>
-                    </m:r>
-                    <m:r>
-                      <m:rPr>
-                        <m:nor/>
-                      </m:rPr>
-                      <a:rPr lang="en-US" altLang="ko-KR" dirty="0">
-                        <a:latin typeface="Cambria Math" panose="02040503050406030204" pitchFamily="18" charset="0"/>
-                        <a:ea typeface="Cambria Math" panose="02040503050406030204" pitchFamily="18" charset="0"/>
-                        <a:sym typeface="Symbol" panose="05050102010706020507" pitchFamily="18" charset="2"/>
-                      </a:rPr>
-                      <m:t>= </m:t>
-                    </m:r>
-                    <m:r>
-                      <m:rPr>
-                        <m:nor/>
-                      </m:rPr>
-                      <a:rPr lang="en-US" altLang="ko-KR" b="0" i="0" dirty="0" smtClean="0">
-                        <a:latin typeface="Cambria Math" panose="02040503050406030204" pitchFamily="18" charset="0"/>
-                        <a:ea typeface="Cambria Math" panose="02040503050406030204" pitchFamily="18" charset="0"/>
-                        <a:sym typeface="Symbol" panose="05050102010706020507" pitchFamily="18" charset="2"/>
-                      </a:rPr>
-                      <m:t>9.2</m:t>
+                      <m:t>=0.1∗13 + 0.9∗8.7= 9.2</m:t>
                     </m:r>
                   </m:oMath>
                 </a14:m>
@@ -15322,131 +13442,60 @@
                     <m:sSub>
                       <m:sSubPr>
                         <m:ctrlPr>
-                          <a:rPr lang="ar-AE" i="1">
+                          <a:rPr lang="en-US" i="1">
                             <a:latin typeface="Cambria Math" panose="02040503050406030204" pitchFamily="18" charset="0"/>
-                            <a:ea typeface="Cambria Math" panose="02040503050406030204" pitchFamily="18" charset="0"/>
                           </a:rPr>
                         </m:ctrlPr>
                       </m:sSubPr>
                       <m:e>
-                        <m:sSub>
-                          <m:sSubPr>
-                            <m:ctrlPr>
-                              <a:rPr lang="ar-AE" i="1">
-                                <a:latin typeface="Cambria Math" panose="02040503050406030204" pitchFamily="18" charset="0"/>
-                                <a:ea typeface="Cambria Math" panose="02040503050406030204" pitchFamily="18" charset="0"/>
-                              </a:rPr>
-                            </m:ctrlPr>
-                          </m:sSubPr>
-                          <m:e>
-                            <m:r>
-                              <a:rPr lang="en-US" i="1">
-                                <a:latin typeface="Cambria Math" panose="02040503050406030204" pitchFamily="18" charset="0"/>
-                                <a:ea typeface="Cambria Math" panose="02040503050406030204" pitchFamily="18" charset="0"/>
-                              </a:rPr>
-                              <m:t>𝑡</m:t>
-                            </m:r>
-                          </m:e>
-                          <m:sub>
-                            <m:r>
-                              <a:rPr lang="en-US" b="0" i="1" smtClean="0">
-                                <a:latin typeface="Cambria Math" panose="02040503050406030204" pitchFamily="18" charset="0"/>
-                                <a:ea typeface="Cambria Math" panose="02040503050406030204" pitchFamily="18" charset="0"/>
-                              </a:rPr>
-                              <m:t>7</m:t>
-                            </m:r>
-                          </m:sub>
-                        </m:sSub>
                         <m:r>
                           <a:rPr lang="en-US" i="1">
                             <a:latin typeface="Cambria Math" panose="02040503050406030204" pitchFamily="18" charset="0"/>
-                            <a:ea typeface="Cambria Math" panose="02040503050406030204" pitchFamily="18" charset="0"/>
                           </a:rPr>
-                          <m:t>=</m:t>
+                          <m:t>𝜏</m:t>
                         </m:r>
+                      </m:e>
+                      <m:sub>
                         <m:r>
                           <a:rPr lang="en-US" i="1">
                             <a:latin typeface="Cambria Math" panose="02040503050406030204" pitchFamily="18" charset="0"/>
-                            <a:ea typeface="Cambria Math" panose="02040503050406030204" pitchFamily="18" charset="0"/>
                           </a:rPr>
-                          <m:t>𝛼</m:t>
+                          <m:t>7</m:t>
                         </m:r>
-                        <m:sSub>
-                          <m:sSubPr>
-                            <m:ctrlPr>
-                              <a:rPr lang="ar-AE" i="1">
-                                <a:latin typeface="Cambria Math" panose="02040503050406030204" pitchFamily="18" charset="0"/>
-                                <a:ea typeface="Cambria Math" panose="02040503050406030204" pitchFamily="18" charset="0"/>
-                              </a:rPr>
-                            </m:ctrlPr>
-                          </m:sSubPr>
-                          <m:e>
-                            <m:r>
-                              <a:rPr lang="ar-AE" i="1">
-                                <a:latin typeface="Cambria Math" panose="02040503050406030204" pitchFamily="18" charset="0"/>
-                                <a:ea typeface="Cambria Math" panose="02040503050406030204" pitchFamily="18" charset="0"/>
-                              </a:rPr>
-                              <m:t>𝑥</m:t>
-                            </m:r>
-                          </m:e>
-                          <m:sub>
-                            <m:r>
-                              <a:rPr lang="en-US" b="0" i="1" smtClean="0">
-                                <a:latin typeface="Cambria Math" panose="02040503050406030204" pitchFamily="18" charset="0"/>
-                                <a:ea typeface="Cambria Math" panose="02040503050406030204" pitchFamily="18" charset="0"/>
-                              </a:rPr>
-                              <m:t>7</m:t>
-                            </m:r>
-                          </m:sub>
-                        </m:sSub>
+                      </m:sub>
+                    </m:sSub>
+                    <m:r>
+                      <a:rPr lang="en-US" i="1">
+                        <a:latin typeface="Cambria Math" panose="02040503050406030204" pitchFamily="18" charset="0"/>
+                      </a:rPr>
+                      <m:t>=</m:t>
+                    </m:r>
+                    <m:r>
+                      <a:rPr lang="en-US" i="1">
+                        <a:latin typeface="Cambria Math" panose="02040503050406030204" pitchFamily="18" charset="0"/>
+                      </a:rPr>
+                      <m:t>𝛼</m:t>
+                    </m:r>
+                    <m:sSub>
+                      <m:sSubPr>
+                        <m:ctrlPr>
+                          <a:rPr lang="en-US" i="1">
+                            <a:latin typeface="Cambria Math" panose="02040503050406030204" pitchFamily="18" charset="0"/>
+                          </a:rPr>
+                        </m:ctrlPr>
+                      </m:sSubPr>
+                      <m:e>
                         <m:r>
                           <a:rPr lang="en-US" i="1">
                             <a:latin typeface="Cambria Math" panose="02040503050406030204" pitchFamily="18" charset="0"/>
-                            <a:ea typeface="Cambria Math" panose="02040503050406030204" pitchFamily="18" charset="0"/>
-                          </a:rPr>
-                          <m:t>+(</m:t>
-                        </m:r>
-                        <m:r>
-                          <a:rPr lang="en-US" i="1">
-                            <a:latin typeface="Cambria Math" panose="02040503050406030204" pitchFamily="18" charset="0"/>
-                            <a:ea typeface="Cambria Math" panose="02040503050406030204" pitchFamily="18" charset="0"/>
-                          </a:rPr>
-                          <m:t>1</m:t>
-                        </m:r>
-                        <m:r>
-                          <a:rPr lang="en-US" i="1">
-                            <a:latin typeface="Cambria Math" panose="02040503050406030204" pitchFamily="18" charset="0"/>
-                            <a:ea typeface="Cambria Math" panose="02040503050406030204" pitchFamily="18" charset="0"/>
-                          </a:rPr>
-                          <m:t>−</m:t>
-                        </m:r>
-                        <m:r>
-                          <a:rPr lang="en-US" i="1">
-                            <a:latin typeface="Cambria Math" panose="02040503050406030204" pitchFamily="18" charset="0"/>
-                            <a:ea typeface="Cambria Math" panose="02040503050406030204" pitchFamily="18" charset="0"/>
-                          </a:rPr>
-                          <m:t>𝛼</m:t>
-                        </m:r>
-                        <m:r>
-                          <a:rPr lang="en-US" i="1">
-                            <a:latin typeface="Cambria Math" panose="02040503050406030204" pitchFamily="18" charset="0"/>
-                            <a:ea typeface="Cambria Math" panose="02040503050406030204" pitchFamily="18" charset="0"/>
-                          </a:rPr>
-                          <m:t>)</m:t>
-                        </m:r>
-                        <m:r>
-                          <a:rPr lang="en-US" i="1">
-                            <a:latin typeface="Cambria Math" panose="02040503050406030204" pitchFamily="18" charset="0"/>
-                            <a:ea typeface="Cambria Math" panose="02040503050406030204" pitchFamily="18" charset="0"/>
                           </a:rPr>
                           <m:t>𝑡</m:t>
                         </m:r>
                       </m:e>
                       <m:sub>
                         <m:r>
-                          <a:rPr lang="en-US" b="0" i="1" smtClean="0">
+                          <a:rPr lang="en-US" i="1">
                             <a:latin typeface="Cambria Math" panose="02040503050406030204" pitchFamily="18" charset="0"/>
-                            <a:ea typeface="Cambria Math" panose="02040503050406030204" pitchFamily="18" charset="0"/>
                           </a:rPr>
                           <m:t>6</m:t>
                         </m:r>
@@ -15455,119 +13504,51 @@
                     <m:r>
                       <a:rPr lang="en-US" i="1">
                         <a:latin typeface="Cambria Math" panose="02040503050406030204" pitchFamily="18" charset="0"/>
-                        <a:ea typeface="Cambria Math" panose="02040503050406030204" pitchFamily="18" charset="0"/>
                       </a:rPr>
-                      <m:t>=</m:t>
+                      <m:t>+(1−</m:t>
                     </m:r>
                     <m:r>
-                      <m:rPr>
-                        <m:nor/>
-                      </m:rPr>
-                      <a:rPr lang="en-US" altLang="ko-KR" dirty="0">
+                      <a:rPr lang="en-US" i="1">
                         <a:latin typeface="Cambria Math" panose="02040503050406030204" pitchFamily="18" charset="0"/>
-                        <a:ea typeface="Cambria Math" panose="02040503050406030204" pitchFamily="18" charset="0"/>
-                        <a:sym typeface="Symbol" panose="05050102010706020507" pitchFamily="18" charset="2"/>
                       </a:rPr>
-                      <m:t>0.</m:t>
+                      <m:t>𝛼</m:t>
                     </m:r>
                     <m:r>
-                      <m:rPr>
-                        <m:nor/>
-                      </m:rPr>
-                      <a:rPr lang="en-US" altLang="ko-KR" b="0" i="0" dirty="0" smtClean="0">
+                      <a:rPr lang="en-US" i="1">
                         <a:latin typeface="Cambria Math" panose="02040503050406030204" pitchFamily="18" charset="0"/>
-                        <a:ea typeface="Cambria Math" panose="02040503050406030204" pitchFamily="18" charset="0"/>
-                        <a:sym typeface="Symbol" panose="05050102010706020507" pitchFamily="18" charset="2"/>
                       </a:rPr>
-                      <m:t>1</m:t>
+                      <m:t>)</m:t>
                     </m:r>
+                    <m:sSub>
+                      <m:sSubPr>
+                        <m:ctrlPr>
+                          <a:rPr lang="en-US" i="1">
+                            <a:latin typeface="Cambria Math" panose="02040503050406030204" pitchFamily="18" charset="0"/>
+                          </a:rPr>
+                        </m:ctrlPr>
+                      </m:sSubPr>
+                      <m:e>
+                        <m:r>
+                          <a:rPr lang="en-US" i="1">
+                            <a:latin typeface="Cambria Math" panose="02040503050406030204" pitchFamily="18" charset="0"/>
+                          </a:rPr>
+                          <m:t>𝜏</m:t>
+                        </m:r>
+                      </m:e>
+                      <m:sub>
+                        <m:r>
+                          <a:rPr lang="en-US" i="1">
+                            <a:latin typeface="Cambria Math" panose="02040503050406030204" pitchFamily="18" charset="0"/>
+                          </a:rPr>
+                          <m:t>6</m:t>
+                        </m:r>
+                      </m:sub>
+                    </m:sSub>
                     <m:r>
-                      <m:rPr>
-                        <m:nor/>
-                      </m:rPr>
-                      <a:rPr lang="en-US" altLang="ko-KR" dirty="0">
+                      <a:rPr lang="en-US" i="1">
                         <a:latin typeface="Cambria Math" panose="02040503050406030204" pitchFamily="18" charset="0"/>
-                        <a:ea typeface="Cambria Math" panose="02040503050406030204" pitchFamily="18" charset="0"/>
-                        <a:sym typeface="Symbol" panose="05050102010706020507" pitchFamily="18" charset="2"/>
                       </a:rPr>
-                      <m:t>∗</m:t>
-                    </m:r>
-                    <m:r>
-                      <m:rPr>
-                        <m:nor/>
-                      </m:rPr>
-                      <a:rPr lang="en-US" altLang="ko-KR" dirty="0">
-                        <a:latin typeface="Cambria Math" panose="02040503050406030204" pitchFamily="18" charset="0"/>
-                        <a:ea typeface="Cambria Math" panose="02040503050406030204" pitchFamily="18" charset="0"/>
-                        <a:sym typeface="Symbol" panose="05050102010706020507" pitchFamily="18" charset="2"/>
-                      </a:rPr>
-                      <m:t>13 </m:t>
-                    </m:r>
-                    <m:r>
-                      <m:rPr>
-                        <m:nor/>
-                      </m:rPr>
-                      <a:rPr lang="en-US" altLang="ko-KR" dirty="0">
-                        <a:latin typeface="Cambria Math" panose="02040503050406030204" pitchFamily="18" charset="0"/>
-                        <a:ea typeface="Cambria Math" panose="02040503050406030204" pitchFamily="18" charset="0"/>
-                        <a:sym typeface="Symbol" panose="05050102010706020507" pitchFamily="18" charset="2"/>
-                      </a:rPr>
-                      <m:t>+ </m:t>
-                    </m:r>
-                    <m:r>
-                      <m:rPr>
-                        <m:nor/>
-                      </m:rPr>
-                      <a:rPr lang="en-US" altLang="ko-KR" dirty="0">
-                        <a:latin typeface="Cambria Math" panose="02040503050406030204" pitchFamily="18" charset="0"/>
-                        <a:ea typeface="Cambria Math" panose="02040503050406030204" pitchFamily="18" charset="0"/>
-                        <a:sym typeface="Symbol" panose="05050102010706020507" pitchFamily="18" charset="2"/>
-                      </a:rPr>
-                      <m:t>0.9</m:t>
-                    </m:r>
-                    <m:r>
-                      <m:rPr>
-                        <m:nor/>
-                      </m:rPr>
-                      <a:rPr lang="en-US" altLang="ko-KR" dirty="0">
-                        <a:latin typeface="Cambria Math" panose="02040503050406030204" pitchFamily="18" charset="0"/>
-                        <a:ea typeface="Cambria Math" panose="02040503050406030204" pitchFamily="18" charset="0"/>
-                        <a:sym typeface="Symbol" panose="05050102010706020507" pitchFamily="18" charset="2"/>
-                      </a:rPr>
-                      <m:t>∗</m:t>
-                    </m:r>
-                    <m:r>
-                      <m:rPr>
-                        <m:nor/>
-                      </m:rPr>
-                      <a:rPr lang="en-US" altLang="ko-KR" dirty="0">
-                        <a:latin typeface="Cambria Math" panose="02040503050406030204" pitchFamily="18" charset="0"/>
-                        <a:ea typeface="Cambria Math" panose="02040503050406030204" pitchFamily="18" charset="0"/>
-                        <a:sym typeface="Symbol" panose="05050102010706020507" pitchFamily="18" charset="2"/>
-                      </a:rPr>
-                      <m:t>9.2</m:t>
-                    </m:r>
-                    <m:r>
-                      <m:rPr>
-                        <m:nor/>
-                      </m:rPr>
-                      <a:rPr lang="en-US" altLang="ko-KR" dirty="0">
-                        <a:latin typeface="Cambria Math" panose="02040503050406030204" pitchFamily="18" charset="0"/>
-                        <a:ea typeface="Cambria Math" panose="02040503050406030204" pitchFamily="18" charset="0"/>
-                        <a:sym typeface="Symbol" panose="05050102010706020507" pitchFamily="18" charset="2"/>
-                      </a:rPr>
-                      <m:t>= </m:t>
-                    </m:r>
-                    <m:r>
-                      <m:rPr>
-                        <m:nor/>
-                      </m:rPr>
-                      <a:rPr lang="en-US" altLang="ko-KR" b="0" i="0" dirty="0" smtClean="0">
-                        <a:latin typeface="Cambria Math" panose="02040503050406030204" pitchFamily="18" charset="0"/>
-                        <a:ea typeface="Cambria Math" panose="02040503050406030204" pitchFamily="18" charset="0"/>
-                        <a:sym typeface="Symbol" panose="05050102010706020507" pitchFamily="18" charset="2"/>
-                      </a:rPr>
-                      <m:t>9.5</m:t>
+                      <m:t>=0.1∗13 + 0.9∗9.2= 9.5</m:t>
                     </m:r>
                   </m:oMath>
                 </a14:m>
@@ -15894,106 +13875,57 @@
                     <m:sSub>
                       <m:sSubPr>
                         <m:ctrlPr>
-                          <a:rPr lang="ar-AE" i="1" kern="0">
+                          <a:rPr lang="en-US" i="1">
                             <a:latin typeface="Cambria Math" panose="02040503050406030204" pitchFamily="18" charset="0"/>
                           </a:rPr>
                         </m:ctrlPr>
                       </m:sSubPr>
                       <m:e>
-                        <m:sSub>
-                          <m:sSubPr>
-                            <m:ctrlPr>
-                              <a:rPr lang="ar-AE" i="1" kern="0">
-                                <a:latin typeface="Cambria Math" panose="02040503050406030204" pitchFamily="18" charset="0"/>
-                              </a:rPr>
-                            </m:ctrlPr>
-                          </m:sSubPr>
-                          <m:e>
-                            <m:r>
-                              <a:rPr lang="en-US" i="1" kern="0">
-                                <a:latin typeface="Cambria Math" panose="02040503050406030204" pitchFamily="18" charset="0"/>
-                              </a:rPr>
-                              <m:t>𝑡</m:t>
-                            </m:r>
-                          </m:e>
-                          <m:sub>
-                            <m:r>
-                              <a:rPr lang="ar-AE" i="1" kern="0">
-                                <a:latin typeface="Cambria Math" panose="02040503050406030204" pitchFamily="18" charset="0"/>
-                              </a:rPr>
-                              <m:t>𝑛</m:t>
-                            </m:r>
-                          </m:sub>
-                        </m:sSub>
                         <m:r>
-                          <a:rPr lang="en-US" i="1" kern="0">
+                          <a:rPr lang="en-US" i="1">
                             <a:latin typeface="Cambria Math" panose="02040503050406030204" pitchFamily="18" charset="0"/>
                           </a:rPr>
-                          <m:t>=</m:t>
+                          <m:t>𝜏</m:t>
+                        </m:r>
+                      </m:e>
+                      <m:sub>
+                        <m:r>
+                          <a:rPr lang="en-US" i="1">
+                            <a:latin typeface="Cambria Math" panose="02040503050406030204" pitchFamily="18" charset="0"/>
+                          </a:rPr>
+                          <m:t>𝑛</m:t>
                         </m:r>
                         <m:r>
-                          <a:rPr lang="en-US" i="1" kern="0">
+                          <a:rPr lang="en-US" i="1">
                             <a:latin typeface="Cambria Math" panose="02040503050406030204" pitchFamily="18" charset="0"/>
                           </a:rPr>
-                          <m:t>𝛼</m:t>
+                          <m:t>+1</m:t>
                         </m:r>
-                        <m:sSub>
-                          <m:sSubPr>
-                            <m:ctrlPr>
-                              <a:rPr lang="ar-AE" i="1" kern="0">
-                                <a:latin typeface="Cambria Math" panose="02040503050406030204" pitchFamily="18" charset="0"/>
-                              </a:rPr>
-                            </m:ctrlPr>
-                          </m:sSubPr>
-                          <m:e>
-                            <m:r>
-                              <a:rPr lang="ar-AE" i="1" kern="0">
-                                <a:latin typeface="Cambria Math" panose="02040503050406030204" pitchFamily="18" charset="0"/>
-                              </a:rPr>
-                              <m:t>𝑥</m:t>
-                            </m:r>
-                          </m:e>
-                          <m:sub>
-                            <m:r>
-                              <a:rPr lang="ar-AE" i="1" kern="0">
-                                <a:latin typeface="Cambria Math" panose="02040503050406030204" pitchFamily="18" charset="0"/>
-                              </a:rPr>
-                              <m:t>𝑛</m:t>
-                            </m:r>
-                          </m:sub>
-                        </m:sSub>
-                        <m:r>
-                          <a:rPr lang="en-US" i="1" kern="0">
+                      </m:sub>
+                    </m:sSub>
+                    <m:r>
+                      <a:rPr lang="en-US" i="1">
+                        <a:latin typeface="Cambria Math" panose="02040503050406030204" pitchFamily="18" charset="0"/>
+                      </a:rPr>
+                      <m:t>=</m:t>
+                    </m:r>
+                    <m:r>
+                      <a:rPr lang="en-US" i="1">
+                        <a:latin typeface="Cambria Math" panose="02040503050406030204" pitchFamily="18" charset="0"/>
+                      </a:rPr>
+                      <m:t>𝛼</m:t>
+                    </m:r>
+                    <m:sSub>
+                      <m:sSubPr>
+                        <m:ctrlPr>
+                          <a:rPr lang="en-US" i="1">
                             <a:latin typeface="Cambria Math" panose="02040503050406030204" pitchFamily="18" charset="0"/>
                           </a:rPr>
-                          <m:t>+(</m:t>
-                        </m:r>
+                        </m:ctrlPr>
+                      </m:sSubPr>
+                      <m:e>
                         <m:r>
-                          <a:rPr lang="en-US" i="1" kern="0">
-                            <a:latin typeface="Cambria Math" panose="02040503050406030204" pitchFamily="18" charset="0"/>
-                          </a:rPr>
-                          <m:t>1</m:t>
-                        </m:r>
-                        <m:r>
-                          <a:rPr lang="en-US" i="1" kern="0">
-                            <a:latin typeface="Cambria Math" panose="02040503050406030204" pitchFamily="18" charset="0"/>
-                          </a:rPr>
-                          <m:t>−</m:t>
-                        </m:r>
-                        <m:r>
-                          <a:rPr lang="en-US" i="1" kern="0">
-                            <a:latin typeface="Cambria Math" panose="02040503050406030204" pitchFamily="18" charset="0"/>
-                          </a:rPr>
-                          <m:t>𝛼</m:t>
-                        </m:r>
-                        <m:r>
-                          <a:rPr lang="en-US" i="1" kern="0">
-                            <a:latin typeface="Cambria Math" panose="02040503050406030204" pitchFamily="18" charset="0"/>
-                          </a:rPr>
-                          <m:t>)</m:t>
-                        </m:r>
-                        <m:r>
-                          <a:rPr lang="en-US" i="1" kern="0">
+                          <a:rPr lang="en-US" i="1">
                             <a:latin typeface="Cambria Math" panose="02040503050406030204" pitchFamily="18" charset="0"/>
                           </a:rPr>
                           <m:t>𝑡</m:t>
@@ -16001,22 +13933,53 @@
                       </m:e>
                       <m:sub>
                         <m:r>
-                          <a:rPr lang="ar-AE" i="1" kern="0">
+                          <a:rPr lang="en-US" i="1">
                             <a:latin typeface="Cambria Math" panose="02040503050406030204" pitchFamily="18" charset="0"/>
                           </a:rPr>
                           <m:t>𝑛</m:t>
                         </m:r>
-                        <m:r>
-                          <a:rPr lang="ar-AE" kern="0">
+                      </m:sub>
+                    </m:sSub>
+                    <m:r>
+                      <a:rPr lang="en-US" i="1">
+                        <a:latin typeface="Cambria Math" panose="02040503050406030204" pitchFamily="18" charset="0"/>
+                      </a:rPr>
+                      <m:t>+(1−</m:t>
+                    </m:r>
+                    <m:r>
+                      <a:rPr lang="en-US" i="1">
+                        <a:latin typeface="Cambria Math" panose="02040503050406030204" pitchFamily="18" charset="0"/>
+                      </a:rPr>
+                      <m:t>𝛼</m:t>
+                    </m:r>
+                    <m:r>
+                      <a:rPr lang="en-US" i="1">
+                        <a:latin typeface="Cambria Math" panose="02040503050406030204" pitchFamily="18" charset="0"/>
+                      </a:rPr>
+                      <m:t>)</m:t>
+                    </m:r>
+                    <m:sSub>
+                      <m:sSubPr>
+                        <m:ctrlPr>
+                          <a:rPr lang="en-US" i="1">
                             <a:latin typeface="Cambria Math" panose="02040503050406030204" pitchFamily="18" charset="0"/>
                           </a:rPr>
-                          <m:t>−</m:t>
-                        </m:r>
+                        </m:ctrlPr>
+                      </m:sSubPr>
+                      <m:e>
                         <m:r>
-                          <a:rPr lang="ar-AE" kern="0">
+                          <a:rPr lang="en-US" i="1">
                             <a:latin typeface="Cambria Math" panose="02040503050406030204" pitchFamily="18" charset="0"/>
                           </a:rPr>
-                          <m:t>1</m:t>
+                          <m:t>𝜏</m:t>
+                        </m:r>
+                      </m:e>
+                      <m:sub>
+                        <m:r>
+                          <a:rPr lang="en-US" i="1">
+                            <a:latin typeface="Cambria Math" panose="02040503050406030204" pitchFamily="18" charset="0"/>
+                          </a:rPr>
+                          <m:t>𝑛</m:t>
                         </m:r>
                       </m:sub>
                     </m:sSub>
@@ -16047,263 +14010,113 @@
                     <m:sSub>
                       <m:sSubPr>
                         <m:ctrlPr>
-                          <a:rPr lang="ar-AE" i="1" kern="0">
+                          <a:rPr lang="en-US" i="1">
                             <a:latin typeface="Cambria Math" panose="02040503050406030204" pitchFamily="18" charset="0"/>
-                            <a:ea typeface="Cambria Math" panose="02040503050406030204" pitchFamily="18" charset="0"/>
                           </a:rPr>
                         </m:ctrlPr>
                       </m:sSubPr>
                       <m:e>
-                        <m:sSub>
-                          <m:sSubPr>
-                            <m:ctrlPr>
-                              <a:rPr lang="ar-AE" i="1" kern="0">
-                                <a:latin typeface="Cambria Math" panose="02040503050406030204" pitchFamily="18" charset="0"/>
-                                <a:ea typeface="Cambria Math" panose="02040503050406030204" pitchFamily="18" charset="0"/>
-                              </a:rPr>
-                            </m:ctrlPr>
-                          </m:sSubPr>
-                          <m:e>
-                            <m:r>
-                              <a:rPr lang="en-US" i="1" kern="0">
-                                <a:latin typeface="Cambria Math" panose="02040503050406030204" pitchFamily="18" charset="0"/>
-                                <a:ea typeface="Cambria Math" panose="02040503050406030204" pitchFamily="18" charset="0"/>
-                              </a:rPr>
-                              <m:t>𝑡</m:t>
-                            </m:r>
-                          </m:e>
-                          <m:sub>
-                            <m:r>
-                              <a:rPr lang="en-US" i="1" kern="0" smtClean="0">
-                                <a:latin typeface="Cambria Math" panose="02040503050406030204" pitchFamily="18" charset="0"/>
-                                <a:ea typeface="Cambria Math" panose="02040503050406030204" pitchFamily="18" charset="0"/>
-                              </a:rPr>
-                              <m:t>1</m:t>
-                            </m:r>
-                          </m:sub>
-                        </m:sSub>
                         <m:r>
-                          <a:rPr lang="en-US" i="1" kern="0">
+                          <a:rPr lang="en-US" i="1">
                             <a:latin typeface="Cambria Math" panose="02040503050406030204" pitchFamily="18" charset="0"/>
-                            <a:ea typeface="Cambria Math" panose="02040503050406030204" pitchFamily="18" charset="0"/>
                           </a:rPr>
-                          <m:t>=</m:t>
+                          <m:t>𝜏</m:t>
                         </m:r>
+                      </m:e>
+                      <m:sub>
                         <m:r>
-                          <a:rPr lang="en-US" i="1" kern="0">
+                          <a:rPr lang="en-US" i="1">
                             <a:latin typeface="Cambria Math" panose="02040503050406030204" pitchFamily="18" charset="0"/>
-                            <a:ea typeface="Cambria Math" panose="02040503050406030204" pitchFamily="18" charset="0"/>
-                          </a:rPr>
-                          <m:t>𝛼</m:t>
-                        </m:r>
-                        <m:sSub>
-                          <m:sSubPr>
-                            <m:ctrlPr>
-                              <a:rPr lang="ar-AE" i="1" kern="0">
-                                <a:latin typeface="Cambria Math" panose="02040503050406030204" pitchFamily="18" charset="0"/>
-                                <a:ea typeface="Cambria Math" panose="02040503050406030204" pitchFamily="18" charset="0"/>
-                              </a:rPr>
-                            </m:ctrlPr>
-                          </m:sSubPr>
-                          <m:e>
-                            <m:r>
-                              <a:rPr lang="ar-AE" i="1" kern="0">
-                                <a:latin typeface="Cambria Math" panose="02040503050406030204" pitchFamily="18" charset="0"/>
-                                <a:ea typeface="Cambria Math" panose="02040503050406030204" pitchFamily="18" charset="0"/>
-                              </a:rPr>
-                              <m:t>𝑥</m:t>
-                            </m:r>
-                          </m:e>
-                          <m:sub>
-                            <m:r>
-                              <a:rPr lang="en-US" i="1" kern="0" smtClean="0">
-                                <a:latin typeface="Cambria Math" panose="02040503050406030204" pitchFamily="18" charset="0"/>
-                                <a:ea typeface="Cambria Math" panose="02040503050406030204" pitchFamily="18" charset="0"/>
-                              </a:rPr>
-                              <m:t>1</m:t>
-                            </m:r>
-                          </m:sub>
-                        </m:sSub>
-                        <m:r>
-                          <a:rPr lang="en-US" i="1" kern="0">
-                            <a:latin typeface="Cambria Math" panose="02040503050406030204" pitchFamily="18" charset="0"/>
-                            <a:ea typeface="Cambria Math" panose="02040503050406030204" pitchFamily="18" charset="0"/>
-                          </a:rPr>
-                          <m:t>+(</m:t>
-                        </m:r>
-                        <m:r>
-                          <a:rPr lang="en-US" i="1" kern="0">
-                            <a:latin typeface="Cambria Math" panose="02040503050406030204" pitchFamily="18" charset="0"/>
-                            <a:ea typeface="Cambria Math" panose="02040503050406030204" pitchFamily="18" charset="0"/>
                           </a:rPr>
                           <m:t>1</m:t>
                         </m:r>
+                      </m:sub>
+                    </m:sSub>
+                    <m:r>
+                      <a:rPr lang="en-US" i="1">
+                        <a:latin typeface="Cambria Math" panose="02040503050406030204" pitchFamily="18" charset="0"/>
+                      </a:rPr>
+                      <m:t>=</m:t>
+                    </m:r>
+                    <m:r>
+                      <a:rPr lang="en-US" i="1">
+                        <a:latin typeface="Cambria Math" panose="02040503050406030204" pitchFamily="18" charset="0"/>
+                      </a:rPr>
+                      <m:t>𝛼</m:t>
+                    </m:r>
+                    <m:sSub>
+                      <m:sSubPr>
+                        <m:ctrlPr>
+                          <a:rPr lang="en-US" i="1">
+                            <a:latin typeface="Cambria Math" panose="02040503050406030204" pitchFamily="18" charset="0"/>
+                          </a:rPr>
+                        </m:ctrlPr>
+                      </m:sSubPr>
+                      <m:e>
                         <m:r>
-                          <a:rPr lang="en-US" i="1" kern="0">
+                          <a:rPr lang="en-US" i="1">
                             <a:latin typeface="Cambria Math" panose="02040503050406030204" pitchFamily="18" charset="0"/>
-                            <a:ea typeface="Cambria Math" panose="02040503050406030204" pitchFamily="18" charset="0"/>
-                          </a:rPr>
-                          <m:t>−</m:t>
-                        </m:r>
-                        <m:r>
-                          <a:rPr lang="en-US" i="1" kern="0">
-                            <a:latin typeface="Cambria Math" panose="02040503050406030204" pitchFamily="18" charset="0"/>
-                            <a:ea typeface="Cambria Math" panose="02040503050406030204" pitchFamily="18" charset="0"/>
-                          </a:rPr>
-                          <m:t>𝛼</m:t>
-                        </m:r>
-                        <m:r>
-                          <a:rPr lang="en-US" i="1" kern="0">
-                            <a:latin typeface="Cambria Math" panose="02040503050406030204" pitchFamily="18" charset="0"/>
-                            <a:ea typeface="Cambria Math" panose="02040503050406030204" pitchFamily="18" charset="0"/>
-                          </a:rPr>
-                          <m:t>)</m:t>
-                        </m:r>
-                        <m:r>
-                          <a:rPr lang="en-US" i="1" kern="0">
-                            <a:latin typeface="Cambria Math" panose="02040503050406030204" pitchFamily="18" charset="0"/>
-                            <a:ea typeface="Cambria Math" panose="02040503050406030204" pitchFamily="18" charset="0"/>
                           </a:rPr>
                           <m:t>𝑡</m:t>
                         </m:r>
                       </m:e>
                       <m:sub>
                         <m:r>
-                          <a:rPr lang="en-US" i="1" kern="0" smtClean="0">
+                          <a:rPr lang="en-US" i="1">
                             <a:latin typeface="Cambria Math" panose="02040503050406030204" pitchFamily="18" charset="0"/>
-                            <a:ea typeface="Cambria Math" panose="02040503050406030204" pitchFamily="18" charset="0"/>
                           </a:rPr>
                           <m:t>0</m:t>
                         </m:r>
                       </m:sub>
                     </m:sSub>
                     <m:r>
-                      <a:rPr lang="en-US" i="1" kern="0" smtClean="0">
+                      <a:rPr lang="en-US" i="1">
                         <a:latin typeface="Cambria Math" panose="02040503050406030204" pitchFamily="18" charset="0"/>
-                        <a:ea typeface="Cambria Math" panose="02040503050406030204" pitchFamily="18" charset="0"/>
                       </a:rPr>
-                      <m:t>=</m:t>
+                      <m:t>+(1−</m:t>
                     </m:r>
                     <m:r>
-                      <m:rPr>
-                        <m:nor/>
-                      </m:rPr>
-                      <a:rPr lang="en-US" altLang="ko-KR" kern="0" dirty="0">
+                      <a:rPr lang="en-US" i="1">
                         <a:latin typeface="Cambria Math" panose="02040503050406030204" pitchFamily="18" charset="0"/>
-                        <a:ea typeface="Cambria Math" panose="02040503050406030204" pitchFamily="18" charset="0"/>
-                        <a:sym typeface="Symbol" panose="05050102010706020507" pitchFamily="18" charset="2"/>
                       </a:rPr>
-                      <m:t>0.</m:t>
+                      <m:t>𝛼</m:t>
                     </m:r>
                     <m:r>
-                      <m:rPr>
-                        <m:nor/>
-                      </m:rPr>
-                      <a:rPr lang="en-US" altLang="ko-KR" b="0" i="0" kern="0" dirty="0" smtClean="0">
+                      <a:rPr lang="en-US" i="1">
                         <a:latin typeface="Cambria Math" panose="02040503050406030204" pitchFamily="18" charset="0"/>
-                        <a:ea typeface="Cambria Math" panose="02040503050406030204" pitchFamily="18" charset="0"/>
-                        <a:sym typeface="Symbol" panose="05050102010706020507" pitchFamily="18" charset="2"/>
                       </a:rPr>
-                      <m:t>9</m:t>
+                      <m:t>)</m:t>
                     </m:r>
+                    <m:sSub>
+                      <m:sSubPr>
+                        <m:ctrlPr>
+                          <a:rPr lang="en-US" i="1">
+                            <a:latin typeface="Cambria Math" panose="02040503050406030204" pitchFamily="18" charset="0"/>
+                          </a:rPr>
+                        </m:ctrlPr>
+                      </m:sSubPr>
+                      <m:e>
+                        <m:r>
+                          <a:rPr lang="en-US" i="1">
+                            <a:latin typeface="Cambria Math" panose="02040503050406030204" pitchFamily="18" charset="0"/>
+                          </a:rPr>
+                          <m:t>𝜏</m:t>
+                        </m:r>
+                      </m:e>
+                      <m:sub>
+                        <m:r>
+                          <a:rPr lang="en-US" i="1">
+                            <a:latin typeface="Cambria Math" panose="02040503050406030204" pitchFamily="18" charset="0"/>
+                          </a:rPr>
+                          <m:t>0</m:t>
+                        </m:r>
+                      </m:sub>
+                    </m:sSub>
                     <m:r>
-                      <m:rPr>
-                        <m:nor/>
-                      </m:rPr>
-                      <a:rPr lang="en-US" altLang="ko-KR" kern="0" dirty="0">
+                      <a:rPr lang="en-US" i="1">
                         <a:latin typeface="Cambria Math" panose="02040503050406030204" pitchFamily="18" charset="0"/>
-                        <a:ea typeface="Cambria Math" panose="02040503050406030204" pitchFamily="18" charset="0"/>
-                        <a:sym typeface="Symbol" panose="05050102010706020507" pitchFamily="18" charset="2"/>
                       </a:rPr>
-                      <m:t>∗</m:t>
-                    </m:r>
-                    <m:r>
-                      <m:rPr>
-                        <m:nor/>
-                      </m:rPr>
-                      <a:rPr lang="en-US" altLang="ko-KR" kern="0" dirty="0">
-                        <a:latin typeface="Cambria Math" panose="02040503050406030204" pitchFamily="18" charset="0"/>
-                        <a:ea typeface="Cambria Math" panose="02040503050406030204" pitchFamily="18" charset="0"/>
-                        <a:sym typeface="Symbol" panose="05050102010706020507" pitchFamily="18" charset="2"/>
-                      </a:rPr>
-                      <m:t>6 </m:t>
-                    </m:r>
-                    <m:r>
-                      <m:rPr>
-                        <m:nor/>
-                      </m:rPr>
-                      <a:rPr lang="en-US" altLang="ko-KR" kern="0" dirty="0">
-                        <a:latin typeface="Cambria Math" panose="02040503050406030204" pitchFamily="18" charset="0"/>
-                        <a:ea typeface="Cambria Math" panose="02040503050406030204" pitchFamily="18" charset="0"/>
-                        <a:sym typeface="Symbol" panose="05050102010706020507" pitchFamily="18" charset="2"/>
-                      </a:rPr>
-                      <m:t>+ </m:t>
-                    </m:r>
-                    <m:r>
-                      <m:rPr>
-                        <m:nor/>
-                      </m:rPr>
-                      <a:rPr lang="en-US" altLang="ko-KR" kern="0" dirty="0">
-                        <a:latin typeface="Cambria Math" panose="02040503050406030204" pitchFamily="18" charset="0"/>
-                        <a:ea typeface="Cambria Math" panose="02040503050406030204" pitchFamily="18" charset="0"/>
-                        <a:sym typeface="Symbol" panose="05050102010706020507" pitchFamily="18" charset="2"/>
-                      </a:rPr>
-                      <m:t>0.1</m:t>
-                    </m:r>
-                    <m:r>
-                      <m:rPr>
-                        <m:nor/>
-                      </m:rPr>
-                      <a:rPr lang="en-US" altLang="ko-KR" kern="0" dirty="0">
-                        <a:latin typeface="Cambria Math" panose="02040503050406030204" pitchFamily="18" charset="0"/>
-                        <a:ea typeface="Cambria Math" panose="02040503050406030204" pitchFamily="18" charset="0"/>
-                        <a:sym typeface="Symbol" panose="05050102010706020507" pitchFamily="18" charset="2"/>
-                      </a:rPr>
-                      <m:t>∗</m:t>
-                    </m:r>
-                    <m:r>
-                      <m:rPr>
-                        <m:nor/>
-                      </m:rPr>
-                      <a:rPr lang="en-US" altLang="ko-KR" kern="0" dirty="0">
-                        <a:latin typeface="Cambria Math" panose="02040503050406030204" pitchFamily="18" charset="0"/>
-                        <a:ea typeface="Cambria Math" panose="02040503050406030204" pitchFamily="18" charset="0"/>
-                        <a:sym typeface="Symbol" panose="05050102010706020507" pitchFamily="18" charset="2"/>
-                      </a:rPr>
-                      <m:t>10 </m:t>
-                    </m:r>
-                    <m:r>
-                      <m:rPr>
-                        <m:nor/>
-                      </m:rPr>
-                      <a:rPr lang="en-US" altLang="ko-KR" kern="0" dirty="0" smtClean="0">
-                        <a:latin typeface="Cambria Math" panose="02040503050406030204" pitchFamily="18" charset="0"/>
-                        <a:ea typeface="Cambria Math" panose="02040503050406030204" pitchFamily="18" charset="0"/>
-                        <a:sym typeface="Symbol" panose="05050102010706020507" pitchFamily="18" charset="2"/>
-                      </a:rPr>
-                      <m:t>=</m:t>
-                    </m:r>
-                    <m:r>
-                      <m:rPr>
-                        <m:nor/>
-                      </m:rPr>
-                      <a:rPr lang="en-US" altLang="ko-KR" b="0" i="0" kern="0" dirty="0" smtClean="0">
-                        <a:latin typeface="Cambria Math" panose="02040503050406030204" pitchFamily="18" charset="0"/>
-                        <a:ea typeface="Cambria Math" panose="02040503050406030204" pitchFamily="18" charset="0"/>
-                        <a:sym typeface="Symbol" panose="05050102010706020507" pitchFamily="18" charset="2"/>
-                      </a:rPr>
-                      <m:t> </m:t>
-                    </m:r>
-                    <m:r>
-                      <m:rPr>
-                        <m:nor/>
-                      </m:rPr>
-                      <a:rPr lang="en-US" altLang="ko-KR" b="0" i="0" kern="0" dirty="0" smtClean="0">
-                        <a:latin typeface="Cambria Math" panose="02040503050406030204" pitchFamily="18" charset="0"/>
-                        <a:ea typeface="Cambria Math" panose="02040503050406030204" pitchFamily="18" charset="0"/>
-                        <a:sym typeface="Symbol" panose="05050102010706020507" pitchFamily="18" charset="2"/>
-                      </a:rPr>
-                      <m:t>6.4</m:t>
+                      <m:t>=0.9∗6 + 0.1∗10 = 6.4</m:t>
                     </m:r>
                   </m:oMath>
                 </a14:m>
@@ -16319,263 +14132,113 @@
                     <m:sSub>
                       <m:sSubPr>
                         <m:ctrlPr>
-                          <a:rPr lang="ar-AE" i="1" kern="0" smtClean="0">
+                          <a:rPr lang="en-US" i="1">
                             <a:latin typeface="Cambria Math" panose="02040503050406030204" pitchFamily="18" charset="0"/>
-                            <a:ea typeface="Cambria Math" panose="02040503050406030204" pitchFamily="18" charset="0"/>
                           </a:rPr>
                         </m:ctrlPr>
                       </m:sSubPr>
                       <m:e>
-                        <m:sSub>
-                          <m:sSubPr>
-                            <m:ctrlPr>
-                              <a:rPr lang="ar-AE" i="1" kern="0">
-                                <a:latin typeface="Cambria Math" panose="02040503050406030204" pitchFamily="18" charset="0"/>
-                                <a:ea typeface="Cambria Math" panose="02040503050406030204" pitchFamily="18" charset="0"/>
-                              </a:rPr>
-                            </m:ctrlPr>
-                          </m:sSubPr>
-                          <m:e>
-                            <m:r>
-                              <a:rPr lang="en-US" i="1" kern="0">
-                                <a:latin typeface="Cambria Math" panose="02040503050406030204" pitchFamily="18" charset="0"/>
-                                <a:ea typeface="Cambria Math" panose="02040503050406030204" pitchFamily="18" charset="0"/>
-                              </a:rPr>
-                              <m:t>𝑡</m:t>
-                            </m:r>
-                          </m:e>
-                          <m:sub>
-                            <m:r>
-                              <a:rPr lang="en-US" i="1" kern="0" smtClean="0">
-                                <a:latin typeface="Cambria Math" panose="02040503050406030204" pitchFamily="18" charset="0"/>
-                                <a:ea typeface="Cambria Math" panose="02040503050406030204" pitchFamily="18" charset="0"/>
-                              </a:rPr>
-                              <m:t>2</m:t>
-                            </m:r>
-                          </m:sub>
-                        </m:sSub>
                         <m:r>
-                          <a:rPr lang="en-US" i="1" kern="0">
+                          <a:rPr lang="en-US" i="1">
                             <a:latin typeface="Cambria Math" panose="02040503050406030204" pitchFamily="18" charset="0"/>
-                            <a:ea typeface="Cambria Math" panose="02040503050406030204" pitchFamily="18" charset="0"/>
                           </a:rPr>
-                          <m:t>=</m:t>
+                          <m:t>𝜏</m:t>
                         </m:r>
+                      </m:e>
+                      <m:sub>
                         <m:r>
-                          <a:rPr lang="en-US" i="1" kern="0">
+                          <a:rPr lang="en-US" i="1">
                             <a:latin typeface="Cambria Math" panose="02040503050406030204" pitchFamily="18" charset="0"/>
-                            <a:ea typeface="Cambria Math" panose="02040503050406030204" pitchFamily="18" charset="0"/>
                           </a:rPr>
-                          <m:t>𝛼</m:t>
+                          <m:t>2</m:t>
                         </m:r>
-                        <m:sSub>
-                          <m:sSubPr>
-                            <m:ctrlPr>
-                              <a:rPr lang="ar-AE" i="1" kern="0">
-                                <a:latin typeface="Cambria Math" panose="02040503050406030204" pitchFamily="18" charset="0"/>
-                                <a:ea typeface="Cambria Math" panose="02040503050406030204" pitchFamily="18" charset="0"/>
-                              </a:rPr>
-                            </m:ctrlPr>
-                          </m:sSubPr>
-                          <m:e>
-                            <m:r>
-                              <a:rPr lang="ar-AE" i="1" kern="0">
-                                <a:latin typeface="Cambria Math" panose="02040503050406030204" pitchFamily="18" charset="0"/>
-                                <a:ea typeface="Cambria Math" panose="02040503050406030204" pitchFamily="18" charset="0"/>
-                              </a:rPr>
-                              <m:t>𝑥</m:t>
-                            </m:r>
-                          </m:e>
-                          <m:sub>
-                            <m:r>
-                              <a:rPr lang="en-US" i="1" kern="0" smtClean="0">
-                                <a:latin typeface="Cambria Math" panose="02040503050406030204" pitchFamily="18" charset="0"/>
-                                <a:ea typeface="Cambria Math" panose="02040503050406030204" pitchFamily="18" charset="0"/>
-                              </a:rPr>
-                              <m:t>2</m:t>
-                            </m:r>
-                          </m:sub>
-                        </m:sSub>
+                      </m:sub>
+                    </m:sSub>
+                    <m:r>
+                      <a:rPr lang="en-US" i="1">
+                        <a:latin typeface="Cambria Math" panose="02040503050406030204" pitchFamily="18" charset="0"/>
+                      </a:rPr>
+                      <m:t>=</m:t>
+                    </m:r>
+                    <m:r>
+                      <a:rPr lang="en-US" i="1">
+                        <a:latin typeface="Cambria Math" panose="02040503050406030204" pitchFamily="18" charset="0"/>
+                      </a:rPr>
+                      <m:t>𝛼</m:t>
+                    </m:r>
+                    <m:sSub>
+                      <m:sSubPr>
+                        <m:ctrlPr>
+                          <a:rPr lang="en-US" i="1">
+                            <a:latin typeface="Cambria Math" panose="02040503050406030204" pitchFamily="18" charset="0"/>
+                          </a:rPr>
+                        </m:ctrlPr>
+                      </m:sSubPr>
+                      <m:e>
                         <m:r>
-                          <a:rPr lang="en-US" i="1" kern="0">
+                          <a:rPr lang="en-US" i="1">
                             <a:latin typeface="Cambria Math" panose="02040503050406030204" pitchFamily="18" charset="0"/>
-                            <a:ea typeface="Cambria Math" panose="02040503050406030204" pitchFamily="18" charset="0"/>
-                          </a:rPr>
-                          <m:t>+(</m:t>
-                        </m:r>
-                        <m:r>
-                          <a:rPr lang="en-US" i="1" kern="0">
-                            <a:latin typeface="Cambria Math" panose="02040503050406030204" pitchFamily="18" charset="0"/>
-                            <a:ea typeface="Cambria Math" panose="02040503050406030204" pitchFamily="18" charset="0"/>
-                          </a:rPr>
-                          <m:t>1</m:t>
-                        </m:r>
-                        <m:r>
-                          <a:rPr lang="en-US" i="1" kern="0">
-                            <a:latin typeface="Cambria Math" panose="02040503050406030204" pitchFamily="18" charset="0"/>
-                            <a:ea typeface="Cambria Math" panose="02040503050406030204" pitchFamily="18" charset="0"/>
-                          </a:rPr>
-                          <m:t>−</m:t>
-                        </m:r>
-                        <m:r>
-                          <a:rPr lang="en-US" i="1" kern="0">
-                            <a:latin typeface="Cambria Math" panose="02040503050406030204" pitchFamily="18" charset="0"/>
-                            <a:ea typeface="Cambria Math" panose="02040503050406030204" pitchFamily="18" charset="0"/>
-                          </a:rPr>
-                          <m:t>𝛼</m:t>
-                        </m:r>
-                        <m:r>
-                          <a:rPr lang="en-US" i="1" kern="0">
-                            <a:latin typeface="Cambria Math" panose="02040503050406030204" pitchFamily="18" charset="0"/>
-                            <a:ea typeface="Cambria Math" panose="02040503050406030204" pitchFamily="18" charset="0"/>
-                          </a:rPr>
-                          <m:t>)</m:t>
-                        </m:r>
-                        <m:r>
-                          <a:rPr lang="en-US" i="1" kern="0">
-                            <a:latin typeface="Cambria Math" panose="02040503050406030204" pitchFamily="18" charset="0"/>
-                            <a:ea typeface="Cambria Math" panose="02040503050406030204" pitchFamily="18" charset="0"/>
                           </a:rPr>
                           <m:t>𝑡</m:t>
                         </m:r>
                       </m:e>
                       <m:sub>
                         <m:r>
-                          <a:rPr lang="en-US" i="1" kern="0" smtClean="0">
+                          <a:rPr lang="en-US" i="1">
                             <a:latin typeface="Cambria Math" panose="02040503050406030204" pitchFamily="18" charset="0"/>
-                            <a:ea typeface="Cambria Math" panose="02040503050406030204" pitchFamily="18" charset="0"/>
                           </a:rPr>
                           <m:t>1</m:t>
                         </m:r>
                       </m:sub>
                     </m:sSub>
                     <m:r>
-                      <a:rPr lang="en-US" i="1" kern="0">
+                      <a:rPr lang="en-US" i="1">
                         <a:latin typeface="Cambria Math" panose="02040503050406030204" pitchFamily="18" charset="0"/>
-                        <a:ea typeface="Cambria Math" panose="02040503050406030204" pitchFamily="18" charset="0"/>
                       </a:rPr>
-                      <m:t>=</m:t>
+                      <m:t>+(1−</m:t>
                     </m:r>
                     <m:r>
-                      <m:rPr>
-                        <m:nor/>
-                      </m:rPr>
-                      <a:rPr lang="en-US" altLang="ko-KR" kern="0" dirty="0">
+                      <a:rPr lang="en-US" i="1">
                         <a:latin typeface="Cambria Math" panose="02040503050406030204" pitchFamily="18" charset="0"/>
-                        <a:ea typeface="Cambria Math" panose="02040503050406030204" pitchFamily="18" charset="0"/>
-                        <a:sym typeface="Symbol" panose="05050102010706020507" pitchFamily="18" charset="2"/>
                       </a:rPr>
-                      <m:t>0.</m:t>
+                      <m:t>𝛼</m:t>
                     </m:r>
                     <m:r>
-                      <m:rPr>
-                        <m:nor/>
-                      </m:rPr>
-                      <a:rPr lang="en-US" altLang="ko-KR" b="0" i="0" kern="0" dirty="0" smtClean="0">
+                      <a:rPr lang="en-US" i="1">
                         <a:latin typeface="Cambria Math" panose="02040503050406030204" pitchFamily="18" charset="0"/>
-                        <a:ea typeface="Cambria Math" panose="02040503050406030204" pitchFamily="18" charset="0"/>
-                        <a:sym typeface="Symbol" panose="05050102010706020507" pitchFamily="18" charset="2"/>
                       </a:rPr>
-                      <m:t>9</m:t>
+                      <m:t>)</m:t>
                     </m:r>
+                    <m:sSub>
+                      <m:sSubPr>
+                        <m:ctrlPr>
+                          <a:rPr lang="en-US" i="1">
+                            <a:latin typeface="Cambria Math" panose="02040503050406030204" pitchFamily="18" charset="0"/>
+                          </a:rPr>
+                        </m:ctrlPr>
+                      </m:sSubPr>
+                      <m:e>
+                        <m:r>
+                          <a:rPr lang="en-US" i="1">
+                            <a:latin typeface="Cambria Math" panose="02040503050406030204" pitchFamily="18" charset="0"/>
+                          </a:rPr>
+                          <m:t>𝜏</m:t>
+                        </m:r>
+                      </m:e>
+                      <m:sub>
+                        <m:r>
+                          <a:rPr lang="en-US" i="1">
+                            <a:latin typeface="Cambria Math" panose="02040503050406030204" pitchFamily="18" charset="0"/>
+                          </a:rPr>
+                          <m:t>1</m:t>
+                        </m:r>
+                      </m:sub>
+                    </m:sSub>
                     <m:r>
-                      <m:rPr>
-                        <m:nor/>
-                      </m:rPr>
-                      <a:rPr lang="en-US" altLang="ko-KR" kern="0" dirty="0">
+                      <a:rPr lang="en-US" i="1">
                         <a:latin typeface="Cambria Math" panose="02040503050406030204" pitchFamily="18" charset="0"/>
-                        <a:ea typeface="Cambria Math" panose="02040503050406030204" pitchFamily="18" charset="0"/>
-                        <a:sym typeface="Symbol" panose="05050102010706020507" pitchFamily="18" charset="2"/>
                       </a:rPr>
-                      <m:t>∗</m:t>
-                    </m:r>
-                    <m:r>
-                      <m:rPr>
-                        <m:nor/>
-                      </m:rPr>
-                      <a:rPr lang="en-US" altLang="ko-KR" kern="0" dirty="0">
-                        <a:latin typeface="Cambria Math" panose="02040503050406030204" pitchFamily="18" charset="0"/>
-                        <a:ea typeface="Cambria Math" panose="02040503050406030204" pitchFamily="18" charset="0"/>
-                        <a:sym typeface="Symbol" panose="05050102010706020507" pitchFamily="18" charset="2"/>
-                      </a:rPr>
-                      <m:t>4 </m:t>
-                    </m:r>
-                    <m:r>
-                      <m:rPr>
-                        <m:nor/>
-                      </m:rPr>
-                      <a:rPr lang="en-US" altLang="ko-KR" kern="0" dirty="0">
-                        <a:latin typeface="Cambria Math" panose="02040503050406030204" pitchFamily="18" charset="0"/>
-                        <a:ea typeface="Cambria Math" panose="02040503050406030204" pitchFamily="18" charset="0"/>
-                        <a:sym typeface="Symbol" panose="05050102010706020507" pitchFamily="18" charset="2"/>
-                      </a:rPr>
-                      <m:t>+ </m:t>
-                    </m:r>
-                    <m:r>
-                      <m:rPr>
-                        <m:nor/>
-                      </m:rPr>
-                      <a:rPr lang="en-US" altLang="ko-KR" kern="0" dirty="0">
-                        <a:latin typeface="Cambria Math" panose="02040503050406030204" pitchFamily="18" charset="0"/>
-                        <a:ea typeface="Cambria Math" panose="02040503050406030204" pitchFamily="18" charset="0"/>
-                        <a:sym typeface="Symbol" panose="05050102010706020507" pitchFamily="18" charset="2"/>
-                      </a:rPr>
-                      <m:t>0.1</m:t>
-                    </m:r>
-                    <m:r>
-                      <m:rPr>
-                        <m:nor/>
-                      </m:rPr>
-                      <a:rPr lang="en-US" altLang="ko-KR" kern="0" dirty="0">
-                        <a:latin typeface="Cambria Math" panose="02040503050406030204" pitchFamily="18" charset="0"/>
-                        <a:ea typeface="Cambria Math" panose="02040503050406030204" pitchFamily="18" charset="0"/>
-                        <a:sym typeface="Symbol" panose="05050102010706020507" pitchFamily="18" charset="2"/>
-                      </a:rPr>
-                      <m:t>∗</m:t>
-                    </m:r>
-                    <m:r>
-                      <m:rPr>
-                        <m:nor/>
-                      </m:rPr>
-                      <a:rPr lang="en-US" altLang="ko-KR" b="0" i="0" kern="0" dirty="0" smtClean="0">
-                        <a:latin typeface="Cambria Math" panose="02040503050406030204" pitchFamily="18" charset="0"/>
-                        <a:ea typeface="Cambria Math" panose="02040503050406030204" pitchFamily="18" charset="0"/>
-                        <a:sym typeface="Symbol" panose="05050102010706020507" pitchFamily="18" charset="2"/>
-                      </a:rPr>
-                      <m:t>6.4</m:t>
-                    </m:r>
-                    <m:r>
-                      <m:rPr>
-                        <m:nor/>
-                      </m:rPr>
-                      <a:rPr lang="en-US" altLang="ko-KR" kern="0" dirty="0">
-                        <a:latin typeface="Cambria Math" panose="02040503050406030204" pitchFamily="18" charset="0"/>
-                        <a:ea typeface="Cambria Math" panose="02040503050406030204" pitchFamily="18" charset="0"/>
-                        <a:sym typeface="Symbol" panose="05050102010706020507" pitchFamily="18" charset="2"/>
-                      </a:rPr>
-                      <m:t> </m:t>
-                    </m:r>
-                    <m:r>
-                      <m:rPr>
-                        <m:nor/>
-                      </m:rPr>
-                      <a:rPr lang="en-US" altLang="ko-KR" kern="0" dirty="0">
-                        <a:latin typeface="Cambria Math" panose="02040503050406030204" pitchFamily="18" charset="0"/>
-                        <a:ea typeface="Cambria Math" panose="02040503050406030204" pitchFamily="18" charset="0"/>
-                        <a:sym typeface="Symbol" panose="05050102010706020507" pitchFamily="18" charset="2"/>
-                      </a:rPr>
-                      <m:t>= </m:t>
-                    </m:r>
-                    <m:r>
-                      <m:rPr>
-                        <m:nor/>
-                      </m:rPr>
-                      <a:rPr lang="en-US" altLang="ko-KR" b="0" i="0" kern="0" dirty="0" smtClean="0">
-                        <a:latin typeface="Cambria Math" panose="02040503050406030204" pitchFamily="18" charset="0"/>
-                        <a:ea typeface="Cambria Math" panose="02040503050406030204" pitchFamily="18" charset="0"/>
-                        <a:sym typeface="Symbol" panose="05050102010706020507" pitchFamily="18" charset="2"/>
-                      </a:rPr>
-                      <m:t>4.2</m:t>
+                      <m:t>=0.9∗4 + 0.1∗6.4 = 4.2</m:t>
                     </m:r>
                   </m:oMath>
                 </a14:m>
@@ -16591,252 +14254,113 @@
                     <m:sSub>
                       <m:sSubPr>
                         <m:ctrlPr>
-                          <a:rPr lang="ar-AE" i="1" kern="0">
+                          <a:rPr lang="en-US" i="1">
                             <a:latin typeface="Cambria Math" panose="02040503050406030204" pitchFamily="18" charset="0"/>
-                            <a:ea typeface="Cambria Math" panose="02040503050406030204" pitchFamily="18" charset="0"/>
                           </a:rPr>
                         </m:ctrlPr>
                       </m:sSubPr>
                       <m:e>
-                        <m:sSub>
-                          <m:sSubPr>
-                            <m:ctrlPr>
-                              <a:rPr lang="ar-AE" i="1" kern="0">
-                                <a:latin typeface="Cambria Math" panose="02040503050406030204" pitchFamily="18" charset="0"/>
-                                <a:ea typeface="Cambria Math" panose="02040503050406030204" pitchFamily="18" charset="0"/>
-                              </a:rPr>
-                            </m:ctrlPr>
-                          </m:sSubPr>
-                          <m:e>
-                            <m:r>
-                              <a:rPr lang="en-US" i="1" kern="0">
-                                <a:latin typeface="Cambria Math" panose="02040503050406030204" pitchFamily="18" charset="0"/>
-                                <a:ea typeface="Cambria Math" panose="02040503050406030204" pitchFamily="18" charset="0"/>
-                              </a:rPr>
-                              <m:t>𝑡</m:t>
-                            </m:r>
-                          </m:e>
-                          <m:sub>
-                            <m:r>
-                              <a:rPr lang="en-US" i="1" kern="0" smtClean="0">
-                                <a:latin typeface="Cambria Math" panose="02040503050406030204" pitchFamily="18" charset="0"/>
-                                <a:ea typeface="Cambria Math" panose="02040503050406030204" pitchFamily="18" charset="0"/>
-                              </a:rPr>
-                              <m:t>3</m:t>
-                            </m:r>
-                          </m:sub>
-                        </m:sSub>
                         <m:r>
-                          <a:rPr lang="en-US" i="1" kern="0">
+                          <a:rPr lang="en-US" i="1">
                             <a:latin typeface="Cambria Math" panose="02040503050406030204" pitchFamily="18" charset="0"/>
-                            <a:ea typeface="Cambria Math" panose="02040503050406030204" pitchFamily="18" charset="0"/>
                           </a:rPr>
-                          <m:t>=</m:t>
+                          <m:t>𝜏</m:t>
                         </m:r>
+                      </m:e>
+                      <m:sub>
                         <m:r>
-                          <a:rPr lang="en-US" i="1" kern="0">
+                          <a:rPr lang="en-US" i="1">
                             <a:latin typeface="Cambria Math" panose="02040503050406030204" pitchFamily="18" charset="0"/>
-                            <a:ea typeface="Cambria Math" panose="02040503050406030204" pitchFamily="18" charset="0"/>
                           </a:rPr>
-                          <m:t>𝛼</m:t>
+                          <m:t>3</m:t>
                         </m:r>
-                        <m:sSub>
-                          <m:sSubPr>
-                            <m:ctrlPr>
-                              <a:rPr lang="ar-AE" i="1" kern="0">
-                                <a:latin typeface="Cambria Math" panose="02040503050406030204" pitchFamily="18" charset="0"/>
-                                <a:ea typeface="Cambria Math" panose="02040503050406030204" pitchFamily="18" charset="0"/>
-                              </a:rPr>
-                            </m:ctrlPr>
-                          </m:sSubPr>
-                          <m:e>
-                            <m:r>
-                              <a:rPr lang="ar-AE" i="1" kern="0">
-                                <a:latin typeface="Cambria Math" panose="02040503050406030204" pitchFamily="18" charset="0"/>
-                                <a:ea typeface="Cambria Math" panose="02040503050406030204" pitchFamily="18" charset="0"/>
-                              </a:rPr>
-                              <m:t>𝑥</m:t>
-                            </m:r>
-                          </m:e>
-                          <m:sub>
-                            <m:r>
-                              <a:rPr lang="en-US" i="1" kern="0" smtClean="0">
-                                <a:latin typeface="Cambria Math" panose="02040503050406030204" pitchFamily="18" charset="0"/>
-                                <a:ea typeface="Cambria Math" panose="02040503050406030204" pitchFamily="18" charset="0"/>
-                              </a:rPr>
-                              <m:t>3</m:t>
-                            </m:r>
-                          </m:sub>
-                        </m:sSub>
+                      </m:sub>
+                    </m:sSub>
+                    <m:r>
+                      <a:rPr lang="en-US" i="1">
+                        <a:latin typeface="Cambria Math" panose="02040503050406030204" pitchFamily="18" charset="0"/>
+                      </a:rPr>
+                      <m:t>=</m:t>
+                    </m:r>
+                    <m:r>
+                      <a:rPr lang="en-US" i="1">
+                        <a:latin typeface="Cambria Math" panose="02040503050406030204" pitchFamily="18" charset="0"/>
+                      </a:rPr>
+                      <m:t>𝛼</m:t>
+                    </m:r>
+                    <m:sSub>
+                      <m:sSubPr>
+                        <m:ctrlPr>
+                          <a:rPr lang="en-US" i="1">
+                            <a:latin typeface="Cambria Math" panose="02040503050406030204" pitchFamily="18" charset="0"/>
+                          </a:rPr>
+                        </m:ctrlPr>
+                      </m:sSubPr>
+                      <m:e>
                         <m:r>
-                          <a:rPr lang="en-US" i="1" kern="0">
+                          <a:rPr lang="en-US" i="1">
                             <a:latin typeface="Cambria Math" panose="02040503050406030204" pitchFamily="18" charset="0"/>
-                            <a:ea typeface="Cambria Math" panose="02040503050406030204" pitchFamily="18" charset="0"/>
-                          </a:rPr>
-                          <m:t>+(</m:t>
-                        </m:r>
-                        <m:r>
-                          <a:rPr lang="en-US" i="1" kern="0">
-                            <a:latin typeface="Cambria Math" panose="02040503050406030204" pitchFamily="18" charset="0"/>
-                            <a:ea typeface="Cambria Math" panose="02040503050406030204" pitchFamily="18" charset="0"/>
-                          </a:rPr>
-                          <m:t>1</m:t>
-                        </m:r>
-                        <m:r>
-                          <a:rPr lang="en-US" i="1" kern="0">
-                            <a:latin typeface="Cambria Math" panose="02040503050406030204" pitchFamily="18" charset="0"/>
-                            <a:ea typeface="Cambria Math" panose="02040503050406030204" pitchFamily="18" charset="0"/>
-                          </a:rPr>
-                          <m:t>−</m:t>
-                        </m:r>
-                        <m:r>
-                          <a:rPr lang="en-US" i="1" kern="0">
-                            <a:latin typeface="Cambria Math" panose="02040503050406030204" pitchFamily="18" charset="0"/>
-                            <a:ea typeface="Cambria Math" panose="02040503050406030204" pitchFamily="18" charset="0"/>
-                          </a:rPr>
-                          <m:t>𝛼</m:t>
-                        </m:r>
-                        <m:r>
-                          <a:rPr lang="en-US" i="1" kern="0">
-                            <a:latin typeface="Cambria Math" panose="02040503050406030204" pitchFamily="18" charset="0"/>
-                            <a:ea typeface="Cambria Math" panose="02040503050406030204" pitchFamily="18" charset="0"/>
-                          </a:rPr>
-                          <m:t>)</m:t>
-                        </m:r>
-                        <m:r>
-                          <a:rPr lang="en-US" i="1" kern="0">
-                            <a:latin typeface="Cambria Math" panose="02040503050406030204" pitchFamily="18" charset="0"/>
-                            <a:ea typeface="Cambria Math" panose="02040503050406030204" pitchFamily="18" charset="0"/>
                           </a:rPr>
                           <m:t>𝑡</m:t>
                         </m:r>
                       </m:e>
                       <m:sub>
                         <m:r>
-                          <a:rPr lang="en-US" i="1" kern="0" smtClean="0">
+                          <a:rPr lang="en-US" i="1">
                             <a:latin typeface="Cambria Math" panose="02040503050406030204" pitchFamily="18" charset="0"/>
-                            <a:ea typeface="Cambria Math" panose="02040503050406030204" pitchFamily="18" charset="0"/>
                           </a:rPr>
                           <m:t>2</m:t>
                         </m:r>
                       </m:sub>
                     </m:sSub>
                     <m:r>
-                      <a:rPr lang="en-US" i="1" kern="0">
+                      <a:rPr lang="en-US" i="1">
                         <a:latin typeface="Cambria Math" panose="02040503050406030204" pitchFamily="18" charset="0"/>
-                        <a:ea typeface="Cambria Math" panose="02040503050406030204" pitchFamily="18" charset="0"/>
                       </a:rPr>
-                      <m:t>=</m:t>
+                      <m:t>+(1−</m:t>
                     </m:r>
                     <m:r>
-                      <m:rPr>
-                        <m:nor/>
-                      </m:rPr>
-                      <a:rPr lang="en-US" altLang="ko-KR" kern="0" dirty="0">
+                      <a:rPr lang="en-US" i="1">
                         <a:latin typeface="Cambria Math" panose="02040503050406030204" pitchFamily="18" charset="0"/>
-                        <a:ea typeface="Cambria Math" panose="02040503050406030204" pitchFamily="18" charset="0"/>
-                        <a:sym typeface="Symbol" panose="05050102010706020507" pitchFamily="18" charset="2"/>
                       </a:rPr>
-                      <m:t>0.</m:t>
+                      <m:t>𝛼</m:t>
                     </m:r>
                     <m:r>
-                      <m:rPr>
-                        <m:nor/>
-                      </m:rPr>
-                      <a:rPr lang="en-US" altLang="ko-KR" b="0" i="0" kern="0" dirty="0" smtClean="0">
+                      <a:rPr lang="en-US" i="1">
                         <a:latin typeface="Cambria Math" panose="02040503050406030204" pitchFamily="18" charset="0"/>
-                        <a:ea typeface="Cambria Math" panose="02040503050406030204" pitchFamily="18" charset="0"/>
-                        <a:sym typeface="Symbol" panose="05050102010706020507" pitchFamily="18" charset="2"/>
                       </a:rPr>
-                      <m:t>9</m:t>
+                      <m:t>)</m:t>
                     </m:r>
+                    <m:sSub>
+                      <m:sSubPr>
+                        <m:ctrlPr>
+                          <a:rPr lang="en-US" i="1">
+                            <a:latin typeface="Cambria Math" panose="02040503050406030204" pitchFamily="18" charset="0"/>
+                          </a:rPr>
+                        </m:ctrlPr>
+                      </m:sSubPr>
+                      <m:e>
+                        <m:r>
+                          <a:rPr lang="en-US" i="1">
+                            <a:latin typeface="Cambria Math" panose="02040503050406030204" pitchFamily="18" charset="0"/>
+                          </a:rPr>
+                          <m:t>𝜏</m:t>
+                        </m:r>
+                      </m:e>
+                      <m:sub>
+                        <m:r>
+                          <a:rPr lang="en-US" i="1">
+                            <a:latin typeface="Cambria Math" panose="02040503050406030204" pitchFamily="18" charset="0"/>
+                          </a:rPr>
+                          <m:t>2</m:t>
+                        </m:r>
+                      </m:sub>
+                    </m:sSub>
                     <m:r>
-                      <m:rPr>
-                        <m:nor/>
-                      </m:rPr>
-                      <a:rPr lang="en-US" altLang="ko-KR" kern="0" dirty="0">
+                      <a:rPr lang="en-US" i="1">
                         <a:latin typeface="Cambria Math" panose="02040503050406030204" pitchFamily="18" charset="0"/>
-                        <a:ea typeface="Cambria Math" panose="02040503050406030204" pitchFamily="18" charset="0"/>
-                        <a:sym typeface="Symbol" panose="05050102010706020507" pitchFamily="18" charset="2"/>
                       </a:rPr>
-                      <m:t>∗</m:t>
-                    </m:r>
-                    <m:r>
-                      <m:rPr>
-                        <m:nor/>
-                      </m:rPr>
-                      <a:rPr lang="en-US" altLang="ko-KR" kern="0" dirty="0">
-                        <a:latin typeface="Cambria Math" panose="02040503050406030204" pitchFamily="18" charset="0"/>
-                        <a:ea typeface="Cambria Math" panose="02040503050406030204" pitchFamily="18" charset="0"/>
-                        <a:sym typeface="Symbol" panose="05050102010706020507" pitchFamily="18" charset="2"/>
-                      </a:rPr>
-                      <m:t>6 </m:t>
-                    </m:r>
-                    <m:r>
-                      <m:rPr>
-                        <m:nor/>
-                      </m:rPr>
-                      <a:rPr lang="en-US" altLang="ko-KR" kern="0" dirty="0">
-                        <a:latin typeface="Cambria Math" panose="02040503050406030204" pitchFamily="18" charset="0"/>
-                        <a:ea typeface="Cambria Math" panose="02040503050406030204" pitchFamily="18" charset="0"/>
-                        <a:sym typeface="Symbol" panose="05050102010706020507" pitchFamily="18" charset="2"/>
-                      </a:rPr>
-                      <m:t>+ </m:t>
-                    </m:r>
-                    <m:r>
-                      <m:rPr>
-                        <m:nor/>
-                      </m:rPr>
-                      <a:rPr lang="en-US" altLang="ko-KR" kern="0" dirty="0">
-                        <a:latin typeface="Cambria Math" panose="02040503050406030204" pitchFamily="18" charset="0"/>
-                        <a:ea typeface="Cambria Math" panose="02040503050406030204" pitchFamily="18" charset="0"/>
-                        <a:sym typeface="Symbol" panose="05050102010706020507" pitchFamily="18" charset="2"/>
-                      </a:rPr>
-                      <m:t>0.1</m:t>
-                    </m:r>
-                    <m:r>
-                      <m:rPr>
-                        <m:nor/>
-                      </m:rPr>
-                      <a:rPr lang="en-US" altLang="ko-KR" kern="0" dirty="0">
-                        <a:latin typeface="Cambria Math" panose="02040503050406030204" pitchFamily="18" charset="0"/>
-                        <a:ea typeface="Cambria Math" panose="02040503050406030204" pitchFamily="18" charset="0"/>
-                        <a:sym typeface="Symbol" panose="05050102010706020507" pitchFamily="18" charset="2"/>
-                      </a:rPr>
-                      <m:t>∗</m:t>
-                    </m:r>
-                    <m:r>
-                      <m:rPr>
-                        <m:nor/>
-                      </m:rPr>
-                      <a:rPr lang="en-US" altLang="ko-KR" kern="0" dirty="0">
-                        <a:latin typeface="Cambria Math" panose="02040503050406030204" pitchFamily="18" charset="0"/>
-                        <a:ea typeface="Cambria Math" panose="02040503050406030204" pitchFamily="18" charset="0"/>
-                        <a:sym typeface="Symbol" panose="05050102010706020507" pitchFamily="18" charset="2"/>
-                      </a:rPr>
-                      <m:t>4.2 </m:t>
-                    </m:r>
-                    <m:r>
-                      <m:rPr>
-                        <m:nor/>
-                      </m:rPr>
-                      <a:rPr lang="en-US" altLang="ko-KR" kern="0" dirty="0">
-                        <a:latin typeface="Cambria Math" panose="02040503050406030204" pitchFamily="18" charset="0"/>
-                        <a:ea typeface="Cambria Math" panose="02040503050406030204" pitchFamily="18" charset="0"/>
-                        <a:sym typeface="Symbol" panose="05050102010706020507" pitchFamily="18" charset="2"/>
-                      </a:rPr>
-                      <m:t>= </m:t>
-                    </m:r>
-                    <m:r>
-                      <m:rPr>
-                        <m:nor/>
-                      </m:rPr>
-                      <a:rPr lang="en-US" altLang="ko-KR" b="0" i="0" kern="0" dirty="0" smtClean="0">
-                        <a:latin typeface="Cambria Math" panose="02040503050406030204" pitchFamily="18" charset="0"/>
-                        <a:ea typeface="Cambria Math" panose="02040503050406030204" pitchFamily="18" charset="0"/>
-                        <a:sym typeface="Symbol" panose="05050102010706020507" pitchFamily="18" charset="2"/>
-                      </a:rPr>
-                      <m:t>5.8</m:t>
+                      <m:t>=0.9∗6 + 0.1∗4.2 = 5.8</m:t>
                     </m:r>
                   </m:oMath>
                 </a14:m>
@@ -16852,252 +14376,113 @@
                     <m:sSub>
                       <m:sSubPr>
                         <m:ctrlPr>
-                          <a:rPr lang="ar-AE" i="1" kern="0">
+                          <a:rPr lang="en-US" i="1">
                             <a:latin typeface="Cambria Math" panose="02040503050406030204" pitchFamily="18" charset="0"/>
-                            <a:ea typeface="Cambria Math" panose="02040503050406030204" pitchFamily="18" charset="0"/>
                           </a:rPr>
                         </m:ctrlPr>
                       </m:sSubPr>
                       <m:e>
-                        <m:sSub>
-                          <m:sSubPr>
-                            <m:ctrlPr>
-                              <a:rPr lang="ar-AE" i="1" kern="0">
-                                <a:latin typeface="Cambria Math" panose="02040503050406030204" pitchFamily="18" charset="0"/>
-                                <a:ea typeface="Cambria Math" panose="02040503050406030204" pitchFamily="18" charset="0"/>
-                              </a:rPr>
-                            </m:ctrlPr>
-                          </m:sSubPr>
-                          <m:e>
-                            <m:r>
-                              <a:rPr lang="en-US" i="1" kern="0">
-                                <a:latin typeface="Cambria Math" panose="02040503050406030204" pitchFamily="18" charset="0"/>
-                                <a:ea typeface="Cambria Math" panose="02040503050406030204" pitchFamily="18" charset="0"/>
-                              </a:rPr>
-                              <m:t>𝑡</m:t>
-                            </m:r>
-                          </m:e>
-                          <m:sub>
-                            <m:r>
-                              <a:rPr lang="en-US" i="1" kern="0" smtClean="0">
-                                <a:latin typeface="Cambria Math" panose="02040503050406030204" pitchFamily="18" charset="0"/>
-                                <a:ea typeface="Cambria Math" panose="02040503050406030204" pitchFamily="18" charset="0"/>
-                              </a:rPr>
-                              <m:t>4</m:t>
-                            </m:r>
-                          </m:sub>
-                        </m:sSub>
                         <m:r>
-                          <a:rPr lang="en-US" i="1" kern="0">
+                          <a:rPr lang="en-US" i="1">
                             <a:latin typeface="Cambria Math" panose="02040503050406030204" pitchFamily="18" charset="0"/>
-                            <a:ea typeface="Cambria Math" panose="02040503050406030204" pitchFamily="18" charset="0"/>
                           </a:rPr>
-                          <m:t>=</m:t>
+                          <m:t>𝜏</m:t>
                         </m:r>
+                      </m:e>
+                      <m:sub>
                         <m:r>
-                          <a:rPr lang="en-US" i="1" kern="0">
+                          <a:rPr lang="en-US" i="1">
                             <a:latin typeface="Cambria Math" panose="02040503050406030204" pitchFamily="18" charset="0"/>
-                            <a:ea typeface="Cambria Math" panose="02040503050406030204" pitchFamily="18" charset="0"/>
                           </a:rPr>
-                          <m:t>𝛼</m:t>
+                          <m:t>4</m:t>
                         </m:r>
-                        <m:sSub>
-                          <m:sSubPr>
-                            <m:ctrlPr>
-                              <a:rPr lang="ar-AE" i="1" kern="0">
-                                <a:latin typeface="Cambria Math" panose="02040503050406030204" pitchFamily="18" charset="0"/>
-                                <a:ea typeface="Cambria Math" panose="02040503050406030204" pitchFamily="18" charset="0"/>
-                              </a:rPr>
-                            </m:ctrlPr>
-                          </m:sSubPr>
-                          <m:e>
-                            <m:r>
-                              <a:rPr lang="ar-AE" i="1" kern="0">
-                                <a:latin typeface="Cambria Math" panose="02040503050406030204" pitchFamily="18" charset="0"/>
-                                <a:ea typeface="Cambria Math" panose="02040503050406030204" pitchFamily="18" charset="0"/>
-                              </a:rPr>
-                              <m:t>𝑥</m:t>
-                            </m:r>
-                          </m:e>
-                          <m:sub>
-                            <m:r>
-                              <a:rPr lang="en-US" i="1" kern="0" smtClean="0">
-                                <a:latin typeface="Cambria Math" panose="02040503050406030204" pitchFamily="18" charset="0"/>
-                                <a:ea typeface="Cambria Math" panose="02040503050406030204" pitchFamily="18" charset="0"/>
-                              </a:rPr>
-                              <m:t>4</m:t>
-                            </m:r>
-                          </m:sub>
-                        </m:sSub>
+                      </m:sub>
+                    </m:sSub>
+                    <m:r>
+                      <a:rPr lang="en-US" i="1">
+                        <a:latin typeface="Cambria Math" panose="02040503050406030204" pitchFamily="18" charset="0"/>
+                      </a:rPr>
+                      <m:t>=</m:t>
+                    </m:r>
+                    <m:r>
+                      <a:rPr lang="en-US" i="1">
+                        <a:latin typeface="Cambria Math" panose="02040503050406030204" pitchFamily="18" charset="0"/>
+                      </a:rPr>
+                      <m:t>𝛼</m:t>
+                    </m:r>
+                    <m:sSub>
+                      <m:sSubPr>
+                        <m:ctrlPr>
+                          <a:rPr lang="en-US" i="1">
+                            <a:latin typeface="Cambria Math" panose="02040503050406030204" pitchFamily="18" charset="0"/>
+                          </a:rPr>
+                        </m:ctrlPr>
+                      </m:sSubPr>
+                      <m:e>
                         <m:r>
-                          <a:rPr lang="en-US" i="1" kern="0">
+                          <a:rPr lang="en-US" i="1">
                             <a:latin typeface="Cambria Math" panose="02040503050406030204" pitchFamily="18" charset="0"/>
-                            <a:ea typeface="Cambria Math" panose="02040503050406030204" pitchFamily="18" charset="0"/>
-                          </a:rPr>
-                          <m:t>+(</m:t>
-                        </m:r>
-                        <m:r>
-                          <a:rPr lang="en-US" i="1" kern="0">
-                            <a:latin typeface="Cambria Math" panose="02040503050406030204" pitchFamily="18" charset="0"/>
-                            <a:ea typeface="Cambria Math" panose="02040503050406030204" pitchFamily="18" charset="0"/>
-                          </a:rPr>
-                          <m:t>1</m:t>
-                        </m:r>
-                        <m:r>
-                          <a:rPr lang="en-US" i="1" kern="0">
-                            <a:latin typeface="Cambria Math" panose="02040503050406030204" pitchFamily="18" charset="0"/>
-                            <a:ea typeface="Cambria Math" panose="02040503050406030204" pitchFamily="18" charset="0"/>
-                          </a:rPr>
-                          <m:t>−</m:t>
-                        </m:r>
-                        <m:r>
-                          <a:rPr lang="en-US" i="1" kern="0">
-                            <a:latin typeface="Cambria Math" panose="02040503050406030204" pitchFamily="18" charset="0"/>
-                            <a:ea typeface="Cambria Math" panose="02040503050406030204" pitchFamily="18" charset="0"/>
-                          </a:rPr>
-                          <m:t>𝛼</m:t>
-                        </m:r>
-                        <m:r>
-                          <a:rPr lang="en-US" i="1" kern="0">
-                            <a:latin typeface="Cambria Math" panose="02040503050406030204" pitchFamily="18" charset="0"/>
-                            <a:ea typeface="Cambria Math" panose="02040503050406030204" pitchFamily="18" charset="0"/>
-                          </a:rPr>
-                          <m:t>)</m:t>
-                        </m:r>
-                        <m:r>
-                          <a:rPr lang="en-US" i="1" kern="0">
-                            <a:latin typeface="Cambria Math" panose="02040503050406030204" pitchFamily="18" charset="0"/>
-                            <a:ea typeface="Cambria Math" panose="02040503050406030204" pitchFamily="18" charset="0"/>
                           </a:rPr>
                           <m:t>𝑡</m:t>
                         </m:r>
                       </m:e>
                       <m:sub>
                         <m:r>
-                          <a:rPr lang="en-US" i="1" kern="0" smtClean="0">
+                          <a:rPr lang="en-US" i="1">
                             <a:latin typeface="Cambria Math" panose="02040503050406030204" pitchFamily="18" charset="0"/>
-                            <a:ea typeface="Cambria Math" panose="02040503050406030204" pitchFamily="18" charset="0"/>
                           </a:rPr>
                           <m:t>3</m:t>
                         </m:r>
                       </m:sub>
                     </m:sSub>
                     <m:r>
-                      <a:rPr lang="en-US" i="1" kern="0">
+                      <a:rPr lang="en-US" i="1">
                         <a:latin typeface="Cambria Math" panose="02040503050406030204" pitchFamily="18" charset="0"/>
-                        <a:ea typeface="Cambria Math" panose="02040503050406030204" pitchFamily="18" charset="0"/>
                       </a:rPr>
-                      <m:t>=</m:t>
+                      <m:t>+(1−</m:t>
                     </m:r>
                     <m:r>
-                      <m:rPr>
-                        <m:nor/>
-                      </m:rPr>
-                      <a:rPr lang="en-US" altLang="ko-KR" kern="0" dirty="0">
+                      <a:rPr lang="en-US" i="1">
                         <a:latin typeface="Cambria Math" panose="02040503050406030204" pitchFamily="18" charset="0"/>
-                        <a:ea typeface="Cambria Math" panose="02040503050406030204" pitchFamily="18" charset="0"/>
-                        <a:sym typeface="Symbol" panose="05050102010706020507" pitchFamily="18" charset="2"/>
                       </a:rPr>
-                      <m:t>0.</m:t>
+                      <m:t>𝛼</m:t>
                     </m:r>
                     <m:r>
-                      <m:rPr>
-                        <m:nor/>
-                      </m:rPr>
-                      <a:rPr lang="en-US" altLang="ko-KR" b="0" i="0" kern="0" dirty="0" smtClean="0">
+                      <a:rPr lang="en-US" i="1">
                         <a:latin typeface="Cambria Math" panose="02040503050406030204" pitchFamily="18" charset="0"/>
-                        <a:ea typeface="Cambria Math" panose="02040503050406030204" pitchFamily="18" charset="0"/>
-                        <a:sym typeface="Symbol" panose="05050102010706020507" pitchFamily="18" charset="2"/>
                       </a:rPr>
-                      <m:t>9</m:t>
+                      <m:t>)</m:t>
                     </m:r>
+                    <m:sSub>
+                      <m:sSubPr>
+                        <m:ctrlPr>
+                          <a:rPr lang="en-US" i="1">
+                            <a:latin typeface="Cambria Math" panose="02040503050406030204" pitchFamily="18" charset="0"/>
+                          </a:rPr>
+                        </m:ctrlPr>
+                      </m:sSubPr>
+                      <m:e>
+                        <m:r>
+                          <a:rPr lang="en-US" i="1">
+                            <a:latin typeface="Cambria Math" panose="02040503050406030204" pitchFamily="18" charset="0"/>
+                          </a:rPr>
+                          <m:t>𝜏</m:t>
+                        </m:r>
+                      </m:e>
+                      <m:sub>
+                        <m:r>
+                          <a:rPr lang="en-US" i="1">
+                            <a:latin typeface="Cambria Math" panose="02040503050406030204" pitchFamily="18" charset="0"/>
+                          </a:rPr>
+                          <m:t>3</m:t>
+                        </m:r>
+                      </m:sub>
+                    </m:sSub>
                     <m:r>
-                      <m:rPr>
-                        <m:nor/>
-                      </m:rPr>
-                      <a:rPr lang="en-US" altLang="ko-KR" kern="0" dirty="0">
+                      <a:rPr lang="en-US" i="1">
                         <a:latin typeface="Cambria Math" panose="02040503050406030204" pitchFamily="18" charset="0"/>
-                        <a:ea typeface="Cambria Math" panose="02040503050406030204" pitchFamily="18" charset="0"/>
-                        <a:sym typeface="Symbol" panose="05050102010706020507" pitchFamily="18" charset="2"/>
                       </a:rPr>
-                      <m:t>∗</m:t>
-                    </m:r>
-                    <m:r>
-                      <m:rPr>
-                        <m:nor/>
-                      </m:rPr>
-                      <a:rPr lang="en-US" altLang="ko-KR" kern="0" dirty="0">
-                        <a:latin typeface="Cambria Math" panose="02040503050406030204" pitchFamily="18" charset="0"/>
-                        <a:ea typeface="Cambria Math" panose="02040503050406030204" pitchFamily="18" charset="0"/>
-                        <a:sym typeface="Symbol" panose="05050102010706020507" pitchFamily="18" charset="2"/>
-                      </a:rPr>
-                      <m:t>4 </m:t>
-                    </m:r>
-                    <m:r>
-                      <m:rPr>
-                        <m:nor/>
-                      </m:rPr>
-                      <a:rPr lang="en-US" altLang="ko-KR" kern="0" dirty="0">
-                        <a:latin typeface="Cambria Math" panose="02040503050406030204" pitchFamily="18" charset="0"/>
-                        <a:ea typeface="Cambria Math" panose="02040503050406030204" pitchFamily="18" charset="0"/>
-                        <a:sym typeface="Symbol" panose="05050102010706020507" pitchFamily="18" charset="2"/>
-                      </a:rPr>
-                      <m:t>+ </m:t>
-                    </m:r>
-                    <m:r>
-                      <m:rPr>
-                        <m:nor/>
-                      </m:rPr>
-                      <a:rPr lang="en-US" altLang="ko-KR" kern="0" dirty="0">
-                        <a:latin typeface="Cambria Math" panose="02040503050406030204" pitchFamily="18" charset="0"/>
-                        <a:ea typeface="Cambria Math" panose="02040503050406030204" pitchFamily="18" charset="0"/>
-                        <a:sym typeface="Symbol" panose="05050102010706020507" pitchFamily="18" charset="2"/>
-                      </a:rPr>
-                      <m:t>0.1</m:t>
-                    </m:r>
-                    <m:r>
-                      <m:rPr>
-                        <m:nor/>
-                      </m:rPr>
-                      <a:rPr lang="en-US" altLang="ko-KR" kern="0" dirty="0">
-                        <a:latin typeface="Cambria Math" panose="02040503050406030204" pitchFamily="18" charset="0"/>
-                        <a:ea typeface="Cambria Math" panose="02040503050406030204" pitchFamily="18" charset="0"/>
-                        <a:sym typeface="Symbol" panose="05050102010706020507" pitchFamily="18" charset="2"/>
-                      </a:rPr>
-                      <m:t>∗</m:t>
-                    </m:r>
-                    <m:r>
-                      <m:rPr>
-                        <m:nor/>
-                      </m:rPr>
-                      <a:rPr lang="en-US" altLang="ko-KR" kern="0" dirty="0">
-                        <a:latin typeface="Cambria Math" panose="02040503050406030204" pitchFamily="18" charset="0"/>
-                        <a:ea typeface="Cambria Math" panose="02040503050406030204" pitchFamily="18" charset="0"/>
-                        <a:sym typeface="Symbol" panose="05050102010706020507" pitchFamily="18" charset="2"/>
-                      </a:rPr>
-                      <m:t>5.8 </m:t>
-                    </m:r>
-                    <m:r>
-                      <m:rPr>
-                        <m:nor/>
-                      </m:rPr>
-                      <a:rPr lang="en-US" altLang="ko-KR" kern="0" dirty="0">
-                        <a:latin typeface="Cambria Math" panose="02040503050406030204" pitchFamily="18" charset="0"/>
-                        <a:ea typeface="Cambria Math" panose="02040503050406030204" pitchFamily="18" charset="0"/>
-                        <a:sym typeface="Symbol" panose="05050102010706020507" pitchFamily="18" charset="2"/>
-                      </a:rPr>
-                      <m:t>= </m:t>
-                    </m:r>
-                    <m:r>
-                      <m:rPr>
-                        <m:nor/>
-                      </m:rPr>
-                      <a:rPr lang="en-US" altLang="ko-KR" b="0" i="0" kern="0" dirty="0" smtClean="0">
-                        <a:latin typeface="Cambria Math" panose="02040503050406030204" pitchFamily="18" charset="0"/>
-                        <a:ea typeface="Cambria Math" panose="02040503050406030204" pitchFamily="18" charset="0"/>
-                        <a:sym typeface="Symbol" panose="05050102010706020507" pitchFamily="18" charset="2"/>
-                      </a:rPr>
-                      <m:t>4.2</m:t>
+                      <m:t>=0.9∗4 + 0.1∗5.8 = 4.2</m:t>
                     </m:r>
                   </m:oMath>
                 </a14:m>
@@ -17113,263 +14498,113 @@
                     <m:sSub>
                       <m:sSubPr>
                         <m:ctrlPr>
-                          <a:rPr lang="ar-AE" i="1" kern="0">
+                          <a:rPr lang="en-US" i="1">
                             <a:latin typeface="Cambria Math" panose="02040503050406030204" pitchFamily="18" charset="0"/>
-                            <a:ea typeface="Cambria Math" panose="02040503050406030204" pitchFamily="18" charset="0"/>
                           </a:rPr>
                         </m:ctrlPr>
                       </m:sSubPr>
                       <m:e>
-                        <m:sSub>
-                          <m:sSubPr>
-                            <m:ctrlPr>
-                              <a:rPr lang="ar-AE" i="1" kern="0">
-                                <a:latin typeface="Cambria Math" panose="02040503050406030204" pitchFamily="18" charset="0"/>
-                                <a:ea typeface="Cambria Math" panose="02040503050406030204" pitchFamily="18" charset="0"/>
-                              </a:rPr>
-                            </m:ctrlPr>
-                          </m:sSubPr>
-                          <m:e>
-                            <m:r>
-                              <a:rPr lang="en-US" i="1" kern="0">
-                                <a:latin typeface="Cambria Math" panose="02040503050406030204" pitchFamily="18" charset="0"/>
-                                <a:ea typeface="Cambria Math" panose="02040503050406030204" pitchFamily="18" charset="0"/>
-                              </a:rPr>
-                              <m:t>𝑡</m:t>
-                            </m:r>
-                          </m:e>
-                          <m:sub>
-                            <m:r>
-                              <a:rPr lang="en-US" i="1" kern="0" smtClean="0">
-                                <a:latin typeface="Cambria Math" panose="02040503050406030204" pitchFamily="18" charset="0"/>
-                                <a:ea typeface="Cambria Math" panose="02040503050406030204" pitchFamily="18" charset="0"/>
-                              </a:rPr>
-                              <m:t>5</m:t>
-                            </m:r>
-                          </m:sub>
-                        </m:sSub>
                         <m:r>
-                          <a:rPr lang="en-US" i="1" kern="0">
+                          <a:rPr lang="en-US" i="1">
                             <a:latin typeface="Cambria Math" panose="02040503050406030204" pitchFamily="18" charset="0"/>
-                            <a:ea typeface="Cambria Math" panose="02040503050406030204" pitchFamily="18" charset="0"/>
                           </a:rPr>
-                          <m:t>=</m:t>
+                          <m:t>𝜏</m:t>
                         </m:r>
+                      </m:e>
+                      <m:sub>
                         <m:r>
-                          <a:rPr lang="en-US" i="1" kern="0">
+                          <a:rPr lang="en-US" i="1">
                             <a:latin typeface="Cambria Math" panose="02040503050406030204" pitchFamily="18" charset="0"/>
-                            <a:ea typeface="Cambria Math" panose="02040503050406030204" pitchFamily="18" charset="0"/>
                           </a:rPr>
-                          <m:t>𝛼</m:t>
+                          <m:t>5</m:t>
                         </m:r>
-                        <m:sSub>
-                          <m:sSubPr>
-                            <m:ctrlPr>
-                              <a:rPr lang="ar-AE" i="1" kern="0">
-                                <a:latin typeface="Cambria Math" panose="02040503050406030204" pitchFamily="18" charset="0"/>
-                                <a:ea typeface="Cambria Math" panose="02040503050406030204" pitchFamily="18" charset="0"/>
-                              </a:rPr>
-                            </m:ctrlPr>
-                          </m:sSubPr>
-                          <m:e>
-                            <m:r>
-                              <a:rPr lang="ar-AE" i="1" kern="0">
-                                <a:latin typeface="Cambria Math" panose="02040503050406030204" pitchFamily="18" charset="0"/>
-                                <a:ea typeface="Cambria Math" panose="02040503050406030204" pitchFamily="18" charset="0"/>
-                              </a:rPr>
-                              <m:t>𝑥</m:t>
-                            </m:r>
-                          </m:e>
-                          <m:sub>
-                            <m:r>
-                              <a:rPr lang="en-US" i="1" kern="0" smtClean="0">
-                                <a:latin typeface="Cambria Math" panose="02040503050406030204" pitchFamily="18" charset="0"/>
-                                <a:ea typeface="Cambria Math" panose="02040503050406030204" pitchFamily="18" charset="0"/>
-                              </a:rPr>
-                              <m:t>5</m:t>
-                            </m:r>
-                          </m:sub>
-                        </m:sSub>
+                      </m:sub>
+                    </m:sSub>
+                    <m:r>
+                      <a:rPr lang="en-US" i="1">
+                        <a:latin typeface="Cambria Math" panose="02040503050406030204" pitchFamily="18" charset="0"/>
+                      </a:rPr>
+                      <m:t>=</m:t>
+                    </m:r>
+                    <m:r>
+                      <a:rPr lang="en-US" i="1">
+                        <a:latin typeface="Cambria Math" panose="02040503050406030204" pitchFamily="18" charset="0"/>
+                      </a:rPr>
+                      <m:t>𝛼</m:t>
+                    </m:r>
+                    <m:sSub>
+                      <m:sSubPr>
+                        <m:ctrlPr>
+                          <a:rPr lang="en-US" i="1">
+                            <a:latin typeface="Cambria Math" panose="02040503050406030204" pitchFamily="18" charset="0"/>
+                          </a:rPr>
+                        </m:ctrlPr>
+                      </m:sSubPr>
+                      <m:e>
                         <m:r>
-                          <a:rPr lang="en-US" i="1" kern="0">
+                          <a:rPr lang="en-US" i="1">
                             <a:latin typeface="Cambria Math" panose="02040503050406030204" pitchFamily="18" charset="0"/>
-                            <a:ea typeface="Cambria Math" panose="02040503050406030204" pitchFamily="18" charset="0"/>
-                          </a:rPr>
-                          <m:t>+(</m:t>
-                        </m:r>
-                        <m:r>
-                          <a:rPr lang="en-US" i="1" kern="0">
-                            <a:latin typeface="Cambria Math" panose="02040503050406030204" pitchFamily="18" charset="0"/>
-                            <a:ea typeface="Cambria Math" panose="02040503050406030204" pitchFamily="18" charset="0"/>
-                          </a:rPr>
-                          <m:t>1</m:t>
-                        </m:r>
-                        <m:r>
-                          <a:rPr lang="en-US" i="1" kern="0">
-                            <a:latin typeface="Cambria Math" panose="02040503050406030204" pitchFamily="18" charset="0"/>
-                            <a:ea typeface="Cambria Math" panose="02040503050406030204" pitchFamily="18" charset="0"/>
-                          </a:rPr>
-                          <m:t>−</m:t>
-                        </m:r>
-                        <m:r>
-                          <a:rPr lang="en-US" i="1" kern="0">
-                            <a:latin typeface="Cambria Math" panose="02040503050406030204" pitchFamily="18" charset="0"/>
-                            <a:ea typeface="Cambria Math" panose="02040503050406030204" pitchFamily="18" charset="0"/>
-                          </a:rPr>
-                          <m:t>𝛼</m:t>
-                        </m:r>
-                        <m:r>
-                          <a:rPr lang="en-US" i="1" kern="0">
-                            <a:latin typeface="Cambria Math" panose="02040503050406030204" pitchFamily="18" charset="0"/>
-                            <a:ea typeface="Cambria Math" panose="02040503050406030204" pitchFamily="18" charset="0"/>
-                          </a:rPr>
-                          <m:t>)</m:t>
-                        </m:r>
-                        <m:r>
-                          <a:rPr lang="en-US" i="1" kern="0">
-                            <a:latin typeface="Cambria Math" panose="02040503050406030204" pitchFamily="18" charset="0"/>
-                            <a:ea typeface="Cambria Math" panose="02040503050406030204" pitchFamily="18" charset="0"/>
                           </a:rPr>
                           <m:t>𝑡</m:t>
                         </m:r>
                       </m:e>
                       <m:sub>
                         <m:r>
-                          <a:rPr lang="en-US" i="1" kern="0" smtClean="0">
+                          <a:rPr lang="en-US" i="1">
                             <a:latin typeface="Cambria Math" panose="02040503050406030204" pitchFamily="18" charset="0"/>
-                            <a:ea typeface="Cambria Math" panose="02040503050406030204" pitchFamily="18" charset="0"/>
                           </a:rPr>
                           <m:t>4</m:t>
                         </m:r>
                       </m:sub>
                     </m:sSub>
                     <m:r>
-                      <a:rPr lang="en-US" i="1" kern="0">
+                      <a:rPr lang="en-US" i="1">
                         <a:latin typeface="Cambria Math" panose="02040503050406030204" pitchFamily="18" charset="0"/>
-                        <a:ea typeface="Cambria Math" panose="02040503050406030204" pitchFamily="18" charset="0"/>
                       </a:rPr>
-                      <m:t>=</m:t>
+                      <m:t>+(1−</m:t>
                     </m:r>
                     <m:r>
-                      <m:rPr>
-                        <m:nor/>
-                      </m:rPr>
-                      <a:rPr lang="en-US" altLang="ko-KR" kern="0" dirty="0">
+                      <a:rPr lang="en-US" i="1">
                         <a:latin typeface="Cambria Math" panose="02040503050406030204" pitchFamily="18" charset="0"/>
-                        <a:ea typeface="Cambria Math" panose="02040503050406030204" pitchFamily="18" charset="0"/>
-                        <a:sym typeface="Symbol" panose="05050102010706020507" pitchFamily="18" charset="2"/>
                       </a:rPr>
-                      <m:t>0.</m:t>
+                      <m:t>𝛼</m:t>
                     </m:r>
                     <m:r>
-                      <m:rPr>
-                        <m:nor/>
-                      </m:rPr>
-                      <a:rPr lang="en-US" altLang="ko-KR" b="0" i="0" kern="0" dirty="0" smtClean="0">
+                      <a:rPr lang="en-US" i="1">
                         <a:latin typeface="Cambria Math" panose="02040503050406030204" pitchFamily="18" charset="0"/>
-                        <a:ea typeface="Cambria Math" panose="02040503050406030204" pitchFamily="18" charset="0"/>
-                        <a:sym typeface="Symbol" panose="05050102010706020507" pitchFamily="18" charset="2"/>
                       </a:rPr>
-                      <m:t>9</m:t>
+                      <m:t>)</m:t>
                     </m:r>
+                    <m:sSub>
+                      <m:sSubPr>
+                        <m:ctrlPr>
+                          <a:rPr lang="en-US" i="1">
+                            <a:latin typeface="Cambria Math" panose="02040503050406030204" pitchFamily="18" charset="0"/>
+                          </a:rPr>
+                        </m:ctrlPr>
+                      </m:sSubPr>
+                      <m:e>
+                        <m:r>
+                          <a:rPr lang="en-US" i="1">
+                            <a:latin typeface="Cambria Math" panose="02040503050406030204" pitchFamily="18" charset="0"/>
+                          </a:rPr>
+                          <m:t>𝜏</m:t>
+                        </m:r>
+                      </m:e>
+                      <m:sub>
+                        <m:r>
+                          <a:rPr lang="en-US" i="1">
+                            <a:latin typeface="Cambria Math" panose="02040503050406030204" pitchFamily="18" charset="0"/>
+                          </a:rPr>
+                          <m:t>4</m:t>
+                        </m:r>
+                      </m:sub>
+                    </m:sSub>
                     <m:r>
-                      <m:rPr>
-                        <m:nor/>
-                      </m:rPr>
-                      <a:rPr lang="en-US" altLang="ko-KR" kern="0" dirty="0">
+                      <a:rPr lang="en-US" i="1">
                         <a:latin typeface="Cambria Math" panose="02040503050406030204" pitchFamily="18" charset="0"/>
-                        <a:ea typeface="Cambria Math" panose="02040503050406030204" pitchFamily="18" charset="0"/>
-                        <a:sym typeface="Symbol" panose="05050102010706020507" pitchFamily="18" charset="2"/>
                       </a:rPr>
-                      <m:t>∗</m:t>
-                    </m:r>
-                    <m:r>
-                      <m:rPr>
-                        <m:nor/>
-                      </m:rPr>
-                      <a:rPr lang="en-US" altLang="ko-KR" kern="0" dirty="0">
-                        <a:latin typeface="Cambria Math" panose="02040503050406030204" pitchFamily="18" charset="0"/>
-                        <a:ea typeface="Cambria Math" panose="02040503050406030204" pitchFamily="18" charset="0"/>
-                        <a:sym typeface="Symbol" panose="05050102010706020507" pitchFamily="18" charset="2"/>
-                      </a:rPr>
-                      <m:t>13 </m:t>
-                    </m:r>
-                    <m:r>
-                      <m:rPr>
-                        <m:nor/>
-                      </m:rPr>
-                      <a:rPr lang="en-US" altLang="ko-KR" kern="0" dirty="0">
-                        <a:latin typeface="Cambria Math" panose="02040503050406030204" pitchFamily="18" charset="0"/>
-                        <a:ea typeface="Cambria Math" panose="02040503050406030204" pitchFamily="18" charset="0"/>
-                        <a:sym typeface="Symbol" panose="05050102010706020507" pitchFamily="18" charset="2"/>
-                      </a:rPr>
-                      <m:t>+ </m:t>
-                    </m:r>
-                    <m:r>
-                      <m:rPr>
-                        <m:nor/>
-                      </m:rPr>
-                      <a:rPr lang="en-US" altLang="ko-KR" kern="0" dirty="0">
-                        <a:latin typeface="Cambria Math" panose="02040503050406030204" pitchFamily="18" charset="0"/>
-                        <a:ea typeface="Cambria Math" panose="02040503050406030204" pitchFamily="18" charset="0"/>
-                        <a:sym typeface="Symbol" panose="05050102010706020507" pitchFamily="18" charset="2"/>
-                      </a:rPr>
-                      <m:t>0.1</m:t>
-                    </m:r>
-                    <m:r>
-                      <m:rPr>
-                        <m:nor/>
-                      </m:rPr>
-                      <a:rPr lang="en-US" altLang="ko-KR" kern="0" dirty="0">
-                        <a:latin typeface="Cambria Math" panose="02040503050406030204" pitchFamily="18" charset="0"/>
-                        <a:ea typeface="Cambria Math" panose="02040503050406030204" pitchFamily="18" charset="0"/>
-                        <a:sym typeface="Symbol" panose="05050102010706020507" pitchFamily="18" charset="2"/>
-                      </a:rPr>
-                      <m:t>∗</m:t>
-                    </m:r>
-                    <m:r>
-                      <m:rPr>
-                        <m:nor/>
-                      </m:rPr>
-                      <a:rPr lang="en-US" altLang="ko-KR" b="0" i="0" kern="0" dirty="0" smtClean="0">
-                        <a:latin typeface="Cambria Math" panose="02040503050406030204" pitchFamily="18" charset="0"/>
-                        <a:ea typeface="Cambria Math" panose="02040503050406030204" pitchFamily="18" charset="0"/>
-                        <a:sym typeface="Symbol" panose="05050102010706020507" pitchFamily="18" charset="2"/>
-                      </a:rPr>
-                      <m:t>4.2</m:t>
-                    </m:r>
-                    <m:r>
-                      <m:rPr>
-                        <m:nor/>
-                      </m:rPr>
-                      <a:rPr lang="en-US" altLang="ko-KR" kern="0" dirty="0">
-                        <a:latin typeface="Cambria Math" panose="02040503050406030204" pitchFamily="18" charset="0"/>
-                        <a:ea typeface="Cambria Math" panose="02040503050406030204" pitchFamily="18" charset="0"/>
-                        <a:sym typeface="Symbol" panose="05050102010706020507" pitchFamily="18" charset="2"/>
-                      </a:rPr>
-                      <m:t> </m:t>
-                    </m:r>
-                    <m:r>
-                      <m:rPr>
-                        <m:nor/>
-                      </m:rPr>
-                      <a:rPr lang="en-US" altLang="ko-KR" kern="0" dirty="0">
-                        <a:latin typeface="Cambria Math" panose="02040503050406030204" pitchFamily="18" charset="0"/>
-                        <a:ea typeface="Cambria Math" panose="02040503050406030204" pitchFamily="18" charset="0"/>
-                        <a:sym typeface="Symbol" panose="05050102010706020507" pitchFamily="18" charset="2"/>
-                      </a:rPr>
-                      <m:t>= </m:t>
-                    </m:r>
-                    <m:r>
-                      <m:rPr>
-                        <m:nor/>
-                      </m:rPr>
-                      <a:rPr lang="en-US" altLang="ko-KR" b="0" i="0" kern="0" dirty="0" smtClean="0">
-                        <a:latin typeface="Cambria Math" panose="02040503050406030204" pitchFamily="18" charset="0"/>
-                        <a:ea typeface="Cambria Math" panose="02040503050406030204" pitchFamily="18" charset="0"/>
-                        <a:sym typeface="Symbol" panose="05050102010706020507" pitchFamily="18" charset="2"/>
-                      </a:rPr>
-                      <m:t>12.1</m:t>
+                      <m:t>=0.9∗13 + 0.1∗4.2 = 12.1</m:t>
                     </m:r>
                   </m:oMath>
                 </a14:m>
@@ -17385,263 +14620,113 @@
                     <m:sSub>
                       <m:sSubPr>
                         <m:ctrlPr>
-                          <a:rPr lang="ar-AE" i="1" kern="0">
+                          <a:rPr lang="en-US" i="1">
                             <a:latin typeface="Cambria Math" panose="02040503050406030204" pitchFamily="18" charset="0"/>
-                            <a:ea typeface="Cambria Math" panose="02040503050406030204" pitchFamily="18" charset="0"/>
                           </a:rPr>
                         </m:ctrlPr>
                       </m:sSubPr>
                       <m:e>
-                        <m:sSub>
-                          <m:sSubPr>
-                            <m:ctrlPr>
-                              <a:rPr lang="ar-AE" i="1" kern="0">
-                                <a:latin typeface="Cambria Math" panose="02040503050406030204" pitchFamily="18" charset="0"/>
-                                <a:ea typeface="Cambria Math" panose="02040503050406030204" pitchFamily="18" charset="0"/>
-                              </a:rPr>
-                            </m:ctrlPr>
-                          </m:sSubPr>
-                          <m:e>
-                            <m:r>
-                              <a:rPr lang="en-US" i="1" kern="0">
-                                <a:latin typeface="Cambria Math" panose="02040503050406030204" pitchFamily="18" charset="0"/>
-                                <a:ea typeface="Cambria Math" panose="02040503050406030204" pitchFamily="18" charset="0"/>
-                              </a:rPr>
-                              <m:t>𝑡</m:t>
-                            </m:r>
-                          </m:e>
-                          <m:sub>
-                            <m:r>
-                              <a:rPr lang="en-US" i="1" kern="0" smtClean="0">
-                                <a:latin typeface="Cambria Math" panose="02040503050406030204" pitchFamily="18" charset="0"/>
-                                <a:ea typeface="Cambria Math" panose="02040503050406030204" pitchFamily="18" charset="0"/>
-                              </a:rPr>
-                              <m:t>6</m:t>
-                            </m:r>
-                          </m:sub>
-                        </m:sSub>
                         <m:r>
-                          <a:rPr lang="en-US" i="1" kern="0">
+                          <a:rPr lang="en-US" i="1">
                             <a:latin typeface="Cambria Math" panose="02040503050406030204" pitchFamily="18" charset="0"/>
-                            <a:ea typeface="Cambria Math" panose="02040503050406030204" pitchFamily="18" charset="0"/>
                           </a:rPr>
-                          <m:t>=</m:t>
+                          <m:t>𝜏</m:t>
                         </m:r>
+                      </m:e>
+                      <m:sub>
                         <m:r>
-                          <a:rPr lang="en-US" i="1" kern="0">
+                          <a:rPr lang="en-US" i="1">
                             <a:latin typeface="Cambria Math" panose="02040503050406030204" pitchFamily="18" charset="0"/>
-                            <a:ea typeface="Cambria Math" panose="02040503050406030204" pitchFamily="18" charset="0"/>
                           </a:rPr>
-                          <m:t>𝛼</m:t>
+                          <m:t>6</m:t>
                         </m:r>
-                        <m:sSub>
-                          <m:sSubPr>
-                            <m:ctrlPr>
-                              <a:rPr lang="ar-AE" i="1" kern="0">
-                                <a:latin typeface="Cambria Math" panose="02040503050406030204" pitchFamily="18" charset="0"/>
-                                <a:ea typeface="Cambria Math" panose="02040503050406030204" pitchFamily="18" charset="0"/>
-                              </a:rPr>
-                            </m:ctrlPr>
-                          </m:sSubPr>
-                          <m:e>
-                            <m:r>
-                              <a:rPr lang="ar-AE" i="1" kern="0">
-                                <a:latin typeface="Cambria Math" panose="02040503050406030204" pitchFamily="18" charset="0"/>
-                                <a:ea typeface="Cambria Math" panose="02040503050406030204" pitchFamily="18" charset="0"/>
-                              </a:rPr>
-                              <m:t>𝑥</m:t>
-                            </m:r>
-                          </m:e>
-                          <m:sub>
-                            <m:r>
-                              <a:rPr lang="en-US" i="1" kern="0" smtClean="0">
-                                <a:latin typeface="Cambria Math" panose="02040503050406030204" pitchFamily="18" charset="0"/>
-                                <a:ea typeface="Cambria Math" panose="02040503050406030204" pitchFamily="18" charset="0"/>
-                              </a:rPr>
-                              <m:t>6</m:t>
-                            </m:r>
-                          </m:sub>
-                        </m:sSub>
+                      </m:sub>
+                    </m:sSub>
+                    <m:r>
+                      <a:rPr lang="en-US" i="1">
+                        <a:latin typeface="Cambria Math" panose="02040503050406030204" pitchFamily="18" charset="0"/>
+                      </a:rPr>
+                      <m:t>=</m:t>
+                    </m:r>
+                    <m:r>
+                      <a:rPr lang="en-US" i="1">
+                        <a:latin typeface="Cambria Math" panose="02040503050406030204" pitchFamily="18" charset="0"/>
+                      </a:rPr>
+                      <m:t>𝛼</m:t>
+                    </m:r>
+                    <m:sSub>
+                      <m:sSubPr>
+                        <m:ctrlPr>
+                          <a:rPr lang="en-US" i="1">
+                            <a:latin typeface="Cambria Math" panose="02040503050406030204" pitchFamily="18" charset="0"/>
+                          </a:rPr>
+                        </m:ctrlPr>
+                      </m:sSubPr>
+                      <m:e>
                         <m:r>
-                          <a:rPr lang="en-US" i="1" kern="0">
+                          <a:rPr lang="en-US" i="1">
                             <a:latin typeface="Cambria Math" panose="02040503050406030204" pitchFamily="18" charset="0"/>
-                            <a:ea typeface="Cambria Math" panose="02040503050406030204" pitchFamily="18" charset="0"/>
-                          </a:rPr>
-                          <m:t>+(</m:t>
-                        </m:r>
-                        <m:r>
-                          <a:rPr lang="en-US" i="1" kern="0">
-                            <a:latin typeface="Cambria Math" panose="02040503050406030204" pitchFamily="18" charset="0"/>
-                            <a:ea typeface="Cambria Math" panose="02040503050406030204" pitchFamily="18" charset="0"/>
-                          </a:rPr>
-                          <m:t>1</m:t>
-                        </m:r>
-                        <m:r>
-                          <a:rPr lang="en-US" i="1" kern="0">
-                            <a:latin typeface="Cambria Math" panose="02040503050406030204" pitchFamily="18" charset="0"/>
-                            <a:ea typeface="Cambria Math" panose="02040503050406030204" pitchFamily="18" charset="0"/>
-                          </a:rPr>
-                          <m:t>−</m:t>
-                        </m:r>
-                        <m:r>
-                          <a:rPr lang="en-US" i="1" kern="0">
-                            <a:latin typeface="Cambria Math" panose="02040503050406030204" pitchFamily="18" charset="0"/>
-                            <a:ea typeface="Cambria Math" panose="02040503050406030204" pitchFamily="18" charset="0"/>
-                          </a:rPr>
-                          <m:t>𝛼</m:t>
-                        </m:r>
-                        <m:r>
-                          <a:rPr lang="en-US" i="1" kern="0">
-                            <a:latin typeface="Cambria Math" panose="02040503050406030204" pitchFamily="18" charset="0"/>
-                            <a:ea typeface="Cambria Math" panose="02040503050406030204" pitchFamily="18" charset="0"/>
-                          </a:rPr>
-                          <m:t>)</m:t>
-                        </m:r>
-                        <m:r>
-                          <a:rPr lang="en-US" i="1" kern="0">
-                            <a:latin typeface="Cambria Math" panose="02040503050406030204" pitchFamily="18" charset="0"/>
-                            <a:ea typeface="Cambria Math" panose="02040503050406030204" pitchFamily="18" charset="0"/>
                           </a:rPr>
                           <m:t>𝑡</m:t>
                         </m:r>
                       </m:e>
                       <m:sub>
                         <m:r>
-                          <a:rPr lang="en-US" i="1" kern="0" smtClean="0">
+                          <a:rPr lang="en-US" i="1">
                             <a:latin typeface="Cambria Math" panose="02040503050406030204" pitchFamily="18" charset="0"/>
-                            <a:ea typeface="Cambria Math" panose="02040503050406030204" pitchFamily="18" charset="0"/>
                           </a:rPr>
                           <m:t>5</m:t>
                         </m:r>
                       </m:sub>
                     </m:sSub>
                     <m:r>
-                      <a:rPr lang="en-US" i="1" kern="0">
+                      <a:rPr lang="en-US" i="1">
                         <a:latin typeface="Cambria Math" panose="02040503050406030204" pitchFamily="18" charset="0"/>
-                        <a:ea typeface="Cambria Math" panose="02040503050406030204" pitchFamily="18" charset="0"/>
                       </a:rPr>
-                      <m:t>=</m:t>
+                      <m:t>+(1−</m:t>
                     </m:r>
                     <m:r>
-                      <m:rPr>
-                        <m:nor/>
-                      </m:rPr>
-                      <a:rPr lang="en-US" altLang="ko-KR" kern="0" dirty="0">
+                      <a:rPr lang="en-US" i="1">
                         <a:latin typeface="Cambria Math" panose="02040503050406030204" pitchFamily="18" charset="0"/>
-                        <a:ea typeface="Cambria Math" panose="02040503050406030204" pitchFamily="18" charset="0"/>
-                        <a:sym typeface="Symbol" panose="05050102010706020507" pitchFamily="18" charset="2"/>
                       </a:rPr>
-                      <m:t>0.</m:t>
+                      <m:t>𝛼</m:t>
                     </m:r>
                     <m:r>
-                      <m:rPr>
-                        <m:nor/>
-                      </m:rPr>
-                      <a:rPr lang="en-US" altLang="ko-KR" b="0" i="0" kern="0" dirty="0" smtClean="0">
+                      <a:rPr lang="en-US" i="1">
                         <a:latin typeface="Cambria Math" panose="02040503050406030204" pitchFamily="18" charset="0"/>
-                        <a:ea typeface="Cambria Math" panose="02040503050406030204" pitchFamily="18" charset="0"/>
-                        <a:sym typeface="Symbol" panose="05050102010706020507" pitchFamily="18" charset="2"/>
                       </a:rPr>
-                      <m:t>9</m:t>
+                      <m:t>)</m:t>
                     </m:r>
+                    <m:sSub>
+                      <m:sSubPr>
+                        <m:ctrlPr>
+                          <a:rPr lang="en-US" i="1">
+                            <a:latin typeface="Cambria Math" panose="02040503050406030204" pitchFamily="18" charset="0"/>
+                          </a:rPr>
+                        </m:ctrlPr>
+                      </m:sSubPr>
+                      <m:e>
+                        <m:r>
+                          <a:rPr lang="en-US" i="1">
+                            <a:latin typeface="Cambria Math" panose="02040503050406030204" pitchFamily="18" charset="0"/>
+                          </a:rPr>
+                          <m:t>𝜏</m:t>
+                        </m:r>
+                      </m:e>
+                      <m:sub>
+                        <m:r>
+                          <a:rPr lang="en-US" i="1">
+                            <a:latin typeface="Cambria Math" panose="02040503050406030204" pitchFamily="18" charset="0"/>
+                          </a:rPr>
+                          <m:t>5</m:t>
+                        </m:r>
+                      </m:sub>
+                    </m:sSub>
                     <m:r>
-                      <m:rPr>
-                        <m:nor/>
-                      </m:rPr>
-                      <a:rPr lang="en-US" altLang="ko-KR" kern="0" dirty="0">
+                      <a:rPr lang="en-US" i="1">
                         <a:latin typeface="Cambria Math" panose="02040503050406030204" pitchFamily="18" charset="0"/>
-                        <a:ea typeface="Cambria Math" panose="02040503050406030204" pitchFamily="18" charset="0"/>
-                        <a:sym typeface="Symbol" panose="05050102010706020507" pitchFamily="18" charset="2"/>
                       </a:rPr>
-                      <m:t>∗</m:t>
-                    </m:r>
-                    <m:r>
-                      <m:rPr>
-                        <m:nor/>
-                      </m:rPr>
-                      <a:rPr lang="en-US" altLang="ko-KR" kern="0" dirty="0">
-                        <a:latin typeface="Cambria Math" panose="02040503050406030204" pitchFamily="18" charset="0"/>
-                        <a:ea typeface="Cambria Math" panose="02040503050406030204" pitchFamily="18" charset="0"/>
-                        <a:sym typeface="Symbol" panose="05050102010706020507" pitchFamily="18" charset="2"/>
-                      </a:rPr>
-                      <m:t>13 </m:t>
-                    </m:r>
-                    <m:r>
-                      <m:rPr>
-                        <m:nor/>
-                      </m:rPr>
-                      <a:rPr lang="en-US" altLang="ko-KR" kern="0" dirty="0">
-                        <a:latin typeface="Cambria Math" panose="02040503050406030204" pitchFamily="18" charset="0"/>
-                        <a:ea typeface="Cambria Math" panose="02040503050406030204" pitchFamily="18" charset="0"/>
-                        <a:sym typeface="Symbol" panose="05050102010706020507" pitchFamily="18" charset="2"/>
-                      </a:rPr>
-                      <m:t>+ </m:t>
-                    </m:r>
-                    <m:r>
-                      <m:rPr>
-                        <m:nor/>
-                      </m:rPr>
-                      <a:rPr lang="en-US" altLang="ko-KR" kern="0" dirty="0">
-                        <a:latin typeface="Cambria Math" panose="02040503050406030204" pitchFamily="18" charset="0"/>
-                        <a:ea typeface="Cambria Math" panose="02040503050406030204" pitchFamily="18" charset="0"/>
-                        <a:sym typeface="Symbol" panose="05050102010706020507" pitchFamily="18" charset="2"/>
-                      </a:rPr>
-                      <m:t>0.1</m:t>
-                    </m:r>
-                    <m:r>
-                      <m:rPr>
-                        <m:nor/>
-                      </m:rPr>
-                      <a:rPr lang="en-US" altLang="ko-KR" kern="0" dirty="0">
-                        <a:latin typeface="Cambria Math" panose="02040503050406030204" pitchFamily="18" charset="0"/>
-                        <a:ea typeface="Cambria Math" panose="02040503050406030204" pitchFamily="18" charset="0"/>
-                        <a:sym typeface="Symbol" panose="05050102010706020507" pitchFamily="18" charset="2"/>
-                      </a:rPr>
-                      <m:t>∗</m:t>
-                    </m:r>
-                    <m:r>
-                      <m:rPr>
-                        <m:nor/>
-                      </m:rPr>
-                      <a:rPr lang="en-US" altLang="ko-KR" b="0" i="0" kern="0" dirty="0" smtClean="0">
-                        <a:latin typeface="Cambria Math" panose="02040503050406030204" pitchFamily="18" charset="0"/>
-                        <a:ea typeface="Cambria Math" panose="02040503050406030204" pitchFamily="18" charset="0"/>
-                        <a:sym typeface="Symbol" panose="05050102010706020507" pitchFamily="18" charset="2"/>
-                      </a:rPr>
-                      <m:t>12.1</m:t>
-                    </m:r>
-                    <m:r>
-                      <m:rPr>
-                        <m:nor/>
-                      </m:rPr>
-                      <a:rPr lang="en-US" altLang="ko-KR" kern="0" dirty="0">
-                        <a:latin typeface="Cambria Math" panose="02040503050406030204" pitchFamily="18" charset="0"/>
-                        <a:ea typeface="Cambria Math" panose="02040503050406030204" pitchFamily="18" charset="0"/>
-                        <a:sym typeface="Symbol" panose="05050102010706020507" pitchFamily="18" charset="2"/>
-                      </a:rPr>
-                      <m:t> </m:t>
-                    </m:r>
-                    <m:r>
-                      <m:rPr>
-                        <m:nor/>
-                      </m:rPr>
-                      <a:rPr lang="en-US" altLang="ko-KR" kern="0" dirty="0">
-                        <a:latin typeface="Cambria Math" panose="02040503050406030204" pitchFamily="18" charset="0"/>
-                        <a:ea typeface="Cambria Math" panose="02040503050406030204" pitchFamily="18" charset="0"/>
-                        <a:sym typeface="Symbol" panose="05050102010706020507" pitchFamily="18" charset="2"/>
-                      </a:rPr>
-                      <m:t>= </m:t>
-                    </m:r>
-                    <m:r>
-                      <m:rPr>
-                        <m:nor/>
-                      </m:rPr>
-                      <a:rPr lang="en-US" altLang="ko-KR" b="0" i="0" kern="0" dirty="0" smtClean="0">
-                        <a:latin typeface="Cambria Math" panose="02040503050406030204" pitchFamily="18" charset="0"/>
-                        <a:ea typeface="Cambria Math" panose="02040503050406030204" pitchFamily="18" charset="0"/>
-                        <a:sym typeface="Symbol" panose="05050102010706020507" pitchFamily="18" charset="2"/>
-                      </a:rPr>
-                      <m:t>12.9</m:t>
+                      <m:t>=0.9∗13 + 0.1∗12.1 = 12.9</m:t>
                     </m:r>
                   </m:oMath>
                 </a14:m>
@@ -17657,263 +14742,113 @@
                     <m:sSub>
                       <m:sSubPr>
                         <m:ctrlPr>
-                          <a:rPr lang="ar-AE" i="1" kern="0">
+                          <a:rPr lang="en-US" i="1">
                             <a:latin typeface="Cambria Math" panose="02040503050406030204" pitchFamily="18" charset="0"/>
-                            <a:ea typeface="Cambria Math" panose="02040503050406030204" pitchFamily="18" charset="0"/>
                           </a:rPr>
                         </m:ctrlPr>
                       </m:sSubPr>
                       <m:e>
-                        <m:sSub>
-                          <m:sSubPr>
-                            <m:ctrlPr>
-                              <a:rPr lang="ar-AE" i="1" kern="0">
-                                <a:latin typeface="Cambria Math" panose="02040503050406030204" pitchFamily="18" charset="0"/>
-                                <a:ea typeface="Cambria Math" panose="02040503050406030204" pitchFamily="18" charset="0"/>
-                              </a:rPr>
-                            </m:ctrlPr>
-                          </m:sSubPr>
-                          <m:e>
-                            <m:r>
-                              <a:rPr lang="en-US" i="1" kern="0">
-                                <a:latin typeface="Cambria Math" panose="02040503050406030204" pitchFamily="18" charset="0"/>
-                                <a:ea typeface="Cambria Math" panose="02040503050406030204" pitchFamily="18" charset="0"/>
-                              </a:rPr>
-                              <m:t>𝑡</m:t>
-                            </m:r>
-                          </m:e>
-                          <m:sub>
-                            <m:r>
-                              <a:rPr lang="en-US" i="1" kern="0" smtClean="0">
-                                <a:latin typeface="Cambria Math" panose="02040503050406030204" pitchFamily="18" charset="0"/>
-                                <a:ea typeface="Cambria Math" panose="02040503050406030204" pitchFamily="18" charset="0"/>
-                              </a:rPr>
-                              <m:t>7</m:t>
-                            </m:r>
-                          </m:sub>
-                        </m:sSub>
                         <m:r>
-                          <a:rPr lang="en-US" i="1" kern="0">
+                          <a:rPr lang="en-US" i="1">
                             <a:latin typeface="Cambria Math" panose="02040503050406030204" pitchFamily="18" charset="0"/>
-                            <a:ea typeface="Cambria Math" panose="02040503050406030204" pitchFamily="18" charset="0"/>
                           </a:rPr>
-                          <m:t>=</m:t>
+                          <m:t>𝜏</m:t>
                         </m:r>
+                      </m:e>
+                      <m:sub>
                         <m:r>
-                          <a:rPr lang="en-US" i="1" kern="0">
+                          <a:rPr lang="en-US" i="1">
                             <a:latin typeface="Cambria Math" panose="02040503050406030204" pitchFamily="18" charset="0"/>
-                            <a:ea typeface="Cambria Math" panose="02040503050406030204" pitchFamily="18" charset="0"/>
                           </a:rPr>
-                          <m:t>𝛼</m:t>
+                          <m:t>7</m:t>
                         </m:r>
-                        <m:sSub>
-                          <m:sSubPr>
-                            <m:ctrlPr>
-                              <a:rPr lang="ar-AE" i="1" kern="0">
-                                <a:latin typeface="Cambria Math" panose="02040503050406030204" pitchFamily="18" charset="0"/>
-                                <a:ea typeface="Cambria Math" panose="02040503050406030204" pitchFamily="18" charset="0"/>
-                              </a:rPr>
-                            </m:ctrlPr>
-                          </m:sSubPr>
-                          <m:e>
-                            <m:r>
-                              <a:rPr lang="ar-AE" i="1" kern="0">
-                                <a:latin typeface="Cambria Math" panose="02040503050406030204" pitchFamily="18" charset="0"/>
-                                <a:ea typeface="Cambria Math" panose="02040503050406030204" pitchFamily="18" charset="0"/>
-                              </a:rPr>
-                              <m:t>𝑥</m:t>
-                            </m:r>
-                          </m:e>
-                          <m:sub>
-                            <m:r>
-                              <a:rPr lang="en-US" i="1" kern="0" smtClean="0">
-                                <a:latin typeface="Cambria Math" panose="02040503050406030204" pitchFamily="18" charset="0"/>
-                                <a:ea typeface="Cambria Math" panose="02040503050406030204" pitchFamily="18" charset="0"/>
-                              </a:rPr>
-                              <m:t>7</m:t>
-                            </m:r>
-                          </m:sub>
-                        </m:sSub>
+                      </m:sub>
+                    </m:sSub>
+                    <m:r>
+                      <a:rPr lang="en-US" i="1">
+                        <a:latin typeface="Cambria Math" panose="02040503050406030204" pitchFamily="18" charset="0"/>
+                      </a:rPr>
+                      <m:t>=</m:t>
+                    </m:r>
+                    <m:r>
+                      <a:rPr lang="en-US" i="1">
+                        <a:latin typeface="Cambria Math" panose="02040503050406030204" pitchFamily="18" charset="0"/>
+                      </a:rPr>
+                      <m:t>𝛼</m:t>
+                    </m:r>
+                    <m:sSub>
+                      <m:sSubPr>
+                        <m:ctrlPr>
+                          <a:rPr lang="en-US" i="1">
+                            <a:latin typeface="Cambria Math" panose="02040503050406030204" pitchFamily="18" charset="0"/>
+                          </a:rPr>
+                        </m:ctrlPr>
+                      </m:sSubPr>
+                      <m:e>
                         <m:r>
-                          <a:rPr lang="en-US" i="1" kern="0">
+                          <a:rPr lang="en-US" i="1">
                             <a:latin typeface="Cambria Math" panose="02040503050406030204" pitchFamily="18" charset="0"/>
-                            <a:ea typeface="Cambria Math" panose="02040503050406030204" pitchFamily="18" charset="0"/>
-                          </a:rPr>
-                          <m:t>+(</m:t>
-                        </m:r>
-                        <m:r>
-                          <a:rPr lang="en-US" i="1" kern="0">
-                            <a:latin typeface="Cambria Math" panose="02040503050406030204" pitchFamily="18" charset="0"/>
-                            <a:ea typeface="Cambria Math" panose="02040503050406030204" pitchFamily="18" charset="0"/>
-                          </a:rPr>
-                          <m:t>1</m:t>
-                        </m:r>
-                        <m:r>
-                          <a:rPr lang="en-US" i="1" kern="0">
-                            <a:latin typeface="Cambria Math" panose="02040503050406030204" pitchFamily="18" charset="0"/>
-                            <a:ea typeface="Cambria Math" panose="02040503050406030204" pitchFamily="18" charset="0"/>
-                          </a:rPr>
-                          <m:t>−</m:t>
-                        </m:r>
-                        <m:r>
-                          <a:rPr lang="en-US" i="1" kern="0">
-                            <a:latin typeface="Cambria Math" panose="02040503050406030204" pitchFamily="18" charset="0"/>
-                            <a:ea typeface="Cambria Math" panose="02040503050406030204" pitchFamily="18" charset="0"/>
-                          </a:rPr>
-                          <m:t>𝛼</m:t>
-                        </m:r>
-                        <m:r>
-                          <a:rPr lang="en-US" i="1" kern="0">
-                            <a:latin typeface="Cambria Math" panose="02040503050406030204" pitchFamily="18" charset="0"/>
-                            <a:ea typeface="Cambria Math" panose="02040503050406030204" pitchFamily="18" charset="0"/>
-                          </a:rPr>
-                          <m:t>)</m:t>
-                        </m:r>
-                        <m:r>
-                          <a:rPr lang="en-US" i="1" kern="0">
-                            <a:latin typeface="Cambria Math" panose="02040503050406030204" pitchFamily="18" charset="0"/>
-                            <a:ea typeface="Cambria Math" panose="02040503050406030204" pitchFamily="18" charset="0"/>
                           </a:rPr>
                           <m:t>𝑡</m:t>
                         </m:r>
                       </m:e>
                       <m:sub>
                         <m:r>
-                          <a:rPr lang="en-US" i="1" kern="0" smtClean="0">
+                          <a:rPr lang="en-US" i="1">
                             <a:latin typeface="Cambria Math" panose="02040503050406030204" pitchFamily="18" charset="0"/>
-                            <a:ea typeface="Cambria Math" panose="02040503050406030204" pitchFamily="18" charset="0"/>
                           </a:rPr>
                           <m:t>6</m:t>
                         </m:r>
                       </m:sub>
                     </m:sSub>
                     <m:r>
-                      <a:rPr lang="en-US" i="1" kern="0">
+                      <a:rPr lang="en-US" i="1">
                         <a:latin typeface="Cambria Math" panose="02040503050406030204" pitchFamily="18" charset="0"/>
-                        <a:ea typeface="Cambria Math" panose="02040503050406030204" pitchFamily="18" charset="0"/>
                       </a:rPr>
-                      <m:t>=</m:t>
+                      <m:t>+(1−</m:t>
                     </m:r>
                     <m:r>
-                      <m:rPr>
-                        <m:nor/>
-                      </m:rPr>
-                      <a:rPr lang="en-US" altLang="ko-KR" kern="0" dirty="0">
+                      <a:rPr lang="en-US" i="1">
                         <a:latin typeface="Cambria Math" panose="02040503050406030204" pitchFamily="18" charset="0"/>
-                        <a:ea typeface="Cambria Math" panose="02040503050406030204" pitchFamily="18" charset="0"/>
-                        <a:sym typeface="Symbol" panose="05050102010706020507" pitchFamily="18" charset="2"/>
                       </a:rPr>
-                      <m:t>0.</m:t>
+                      <m:t>𝛼</m:t>
                     </m:r>
                     <m:r>
-                      <m:rPr>
-                        <m:nor/>
-                      </m:rPr>
-                      <a:rPr lang="en-US" altLang="ko-KR" b="0" i="0" kern="0" dirty="0" smtClean="0">
+                      <a:rPr lang="en-US" i="1">
                         <a:latin typeface="Cambria Math" panose="02040503050406030204" pitchFamily="18" charset="0"/>
-                        <a:ea typeface="Cambria Math" panose="02040503050406030204" pitchFamily="18" charset="0"/>
-                        <a:sym typeface="Symbol" panose="05050102010706020507" pitchFamily="18" charset="2"/>
                       </a:rPr>
-                      <m:t>9</m:t>
+                      <m:t>)</m:t>
                     </m:r>
+                    <m:sSub>
+                      <m:sSubPr>
+                        <m:ctrlPr>
+                          <a:rPr lang="en-US" i="1">
+                            <a:latin typeface="Cambria Math" panose="02040503050406030204" pitchFamily="18" charset="0"/>
+                          </a:rPr>
+                        </m:ctrlPr>
+                      </m:sSubPr>
+                      <m:e>
+                        <m:r>
+                          <a:rPr lang="en-US" i="1">
+                            <a:latin typeface="Cambria Math" panose="02040503050406030204" pitchFamily="18" charset="0"/>
+                          </a:rPr>
+                          <m:t>𝜏</m:t>
+                        </m:r>
+                      </m:e>
+                      <m:sub>
+                        <m:r>
+                          <a:rPr lang="en-US" i="1">
+                            <a:latin typeface="Cambria Math" panose="02040503050406030204" pitchFamily="18" charset="0"/>
+                          </a:rPr>
+                          <m:t>6</m:t>
+                        </m:r>
+                      </m:sub>
+                    </m:sSub>
                     <m:r>
-                      <m:rPr>
-                        <m:nor/>
-                      </m:rPr>
-                      <a:rPr lang="en-US" altLang="ko-KR" kern="0" dirty="0">
+                      <a:rPr lang="en-US" i="1">
                         <a:latin typeface="Cambria Math" panose="02040503050406030204" pitchFamily="18" charset="0"/>
-                        <a:ea typeface="Cambria Math" panose="02040503050406030204" pitchFamily="18" charset="0"/>
-                        <a:sym typeface="Symbol" panose="05050102010706020507" pitchFamily="18" charset="2"/>
                       </a:rPr>
-                      <m:t>∗</m:t>
-                    </m:r>
-                    <m:r>
-                      <m:rPr>
-                        <m:nor/>
-                      </m:rPr>
-                      <a:rPr lang="en-US" altLang="ko-KR" kern="0" dirty="0">
-                        <a:latin typeface="Cambria Math" panose="02040503050406030204" pitchFamily="18" charset="0"/>
-                        <a:ea typeface="Cambria Math" panose="02040503050406030204" pitchFamily="18" charset="0"/>
-                        <a:sym typeface="Symbol" panose="05050102010706020507" pitchFamily="18" charset="2"/>
-                      </a:rPr>
-                      <m:t>13 </m:t>
-                    </m:r>
-                    <m:r>
-                      <m:rPr>
-                        <m:nor/>
-                      </m:rPr>
-                      <a:rPr lang="en-US" altLang="ko-KR" kern="0" dirty="0">
-                        <a:latin typeface="Cambria Math" panose="02040503050406030204" pitchFamily="18" charset="0"/>
-                        <a:ea typeface="Cambria Math" panose="02040503050406030204" pitchFamily="18" charset="0"/>
-                        <a:sym typeface="Symbol" panose="05050102010706020507" pitchFamily="18" charset="2"/>
-                      </a:rPr>
-                      <m:t>+ </m:t>
-                    </m:r>
-                    <m:r>
-                      <m:rPr>
-                        <m:nor/>
-                      </m:rPr>
-                      <a:rPr lang="en-US" altLang="ko-KR" kern="0" dirty="0">
-                        <a:latin typeface="Cambria Math" panose="02040503050406030204" pitchFamily="18" charset="0"/>
-                        <a:ea typeface="Cambria Math" panose="02040503050406030204" pitchFamily="18" charset="0"/>
-                        <a:sym typeface="Symbol" panose="05050102010706020507" pitchFamily="18" charset="2"/>
-                      </a:rPr>
-                      <m:t>0.1</m:t>
-                    </m:r>
-                    <m:r>
-                      <m:rPr>
-                        <m:nor/>
-                      </m:rPr>
-                      <a:rPr lang="en-US" altLang="ko-KR" kern="0" dirty="0">
-                        <a:latin typeface="Cambria Math" panose="02040503050406030204" pitchFamily="18" charset="0"/>
-                        <a:ea typeface="Cambria Math" panose="02040503050406030204" pitchFamily="18" charset="0"/>
-                        <a:sym typeface="Symbol" panose="05050102010706020507" pitchFamily="18" charset="2"/>
-                      </a:rPr>
-                      <m:t>∗</m:t>
-                    </m:r>
-                    <m:r>
-                      <m:rPr>
-                        <m:nor/>
-                      </m:rPr>
-                      <a:rPr lang="en-US" altLang="ko-KR" b="0" i="0" kern="0" dirty="0" smtClean="0">
-                        <a:latin typeface="Cambria Math" panose="02040503050406030204" pitchFamily="18" charset="0"/>
-                        <a:ea typeface="Cambria Math" panose="02040503050406030204" pitchFamily="18" charset="0"/>
-                        <a:sym typeface="Symbol" panose="05050102010706020507" pitchFamily="18" charset="2"/>
-                      </a:rPr>
-                      <m:t>12.9</m:t>
-                    </m:r>
-                    <m:r>
-                      <m:rPr>
-                        <m:nor/>
-                      </m:rPr>
-                      <a:rPr lang="en-US" altLang="ko-KR" kern="0" dirty="0">
-                        <a:latin typeface="Cambria Math" panose="02040503050406030204" pitchFamily="18" charset="0"/>
-                        <a:ea typeface="Cambria Math" panose="02040503050406030204" pitchFamily="18" charset="0"/>
-                        <a:sym typeface="Symbol" panose="05050102010706020507" pitchFamily="18" charset="2"/>
-                      </a:rPr>
-                      <m:t> </m:t>
-                    </m:r>
-                    <m:r>
-                      <m:rPr>
-                        <m:nor/>
-                      </m:rPr>
-                      <a:rPr lang="en-US" altLang="ko-KR" kern="0" dirty="0">
-                        <a:latin typeface="Cambria Math" panose="02040503050406030204" pitchFamily="18" charset="0"/>
-                        <a:ea typeface="Cambria Math" panose="02040503050406030204" pitchFamily="18" charset="0"/>
-                        <a:sym typeface="Symbol" panose="05050102010706020507" pitchFamily="18" charset="2"/>
-                      </a:rPr>
-                      <m:t>= </m:t>
-                    </m:r>
-                    <m:r>
-                      <m:rPr>
-                        <m:nor/>
-                      </m:rPr>
-                      <a:rPr lang="en-US" altLang="ko-KR" b="0" i="0" kern="0" dirty="0" smtClean="0">
-                        <a:latin typeface="Cambria Math" panose="02040503050406030204" pitchFamily="18" charset="0"/>
-                        <a:ea typeface="Cambria Math" panose="02040503050406030204" pitchFamily="18" charset="0"/>
-                        <a:sym typeface="Symbol" panose="05050102010706020507" pitchFamily="18" charset="2"/>
-                      </a:rPr>
-                      <m:t>13.0</m:t>
+                      <m:t>=0.9∗13 + 0.1∗12.9 = 13.0</m:t>
                     </m:r>
                   </m:oMath>
                 </a14:m>
